--- a/material/5_AI/04_데이터 전처리와 EDA 기초.pptx
+++ b/material/5_AI/04_데이터 전처리와 EDA 기초.pptx
@@ -5,7 +5,7 @@
     <p:sldMasterId id="2147483660" r:id="rId1"/>
   </p:sldMasterIdLst>
   <p:notesMasterIdLst>
-    <p:notesMasterId r:id="rId17"/>
+    <p:notesMasterId r:id="rId15"/>
   </p:notesMasterIdLst>
   <p:sldIdLst>
     <p:sldId id="1020" r:id="rId2"/>
@@ -17,12 +17,10 @@
     <p:sldId id="625" r:id="rId8"/>
     <p:sldId id="798" r:id="rId9"/>
     <p:sldId id="1006" r:id="rId10"/>
-    <p:sldId id="1011" r:id="rId11"/>
-    <p:sldId id="1012" r:id="rId12"/>
-    <p:sldId id="1013" r:id="rId13"/>
-    <p:sldId id="1014" r:id="rId14"/>
-    <p:sldId id="1015" r:id="rId15"/>
-    <p:sldId id="836" r:id="rId16"/>
+    <p:sldId id="1023" r:id="rId11"/>
+    <p:sldId id="1024" r:id="rId12"/>
+    <p:sldId id="1025" r:id="rId13"/>
+    <p:sldId id="836" r:id="rId14"/>
   </p:sldIdLst>
   <p:sldSz cx="12192000" cy="6858000"/>
   <p:notesSz cx="6858000" cy="9144000"/>
@@ -232,7 +230,7 @@
             <a:fld id="{A13A867C-D490-40C2-AB8D-A60FA70A9BF5}" type="datetimeFigureOut">
               <a:rPr lang="ko-KR" altLang="en-US" smtClean="0"/>
               <a:pPr/>
-              <a:t>2026-01-13</a:t>
+              <a:t>2026-01-14</a:t>
             </a:fld>
             <a:endParaRPr lang="ko-KR" altLang="en-US" dirty="0"/>
           </a:p>
@@ -2438,6 +2436,229 @@
   <p:cSld>
     <p:spTree>
       <p:nvGrpSpPr>
+        <p:cNvPr id="1" name=""/>
+        <p:cNvGrpSpPr/>
+        <p:nvPr/>
+      </p:nvGrpSpPr>
+      <p:grpSpPr>
+        <a:xfrm>
+          <a:off x="0" y="0"/>
+          <a:ext cx="0" cy="0"/>
+          <a:chOff x="0" y="0"/>
+          <a:chExt cx="0" cy="0"/>
+        </a:xfrm>
+      </p:grpSpPr>
+      <p:sp>
+        <p:nvSpPr>
+          <p:cNvPr id="2" name="슬라이드 이미지 개체 틀 1"/>
+          <p:cNvSpPr>
+            <a:spLocks noGrp="1" noRot="1" noChangeAspect="1"/>
+          </p:cNvSpPr>
+          <p:nvPr>
+            <p:ph type="sldImg"/>
+          </p:nvPr>
+        </p:nvSpPr>
+        <p:spPr/>
+      </p:sp>
+      <p:sp>
+        <p:nvSpPr>
+          <p:cNvPr id="3" name="슬라이드 노트 개체 틀 2"/>
+          <p:cNvSpPr>
+            <a:spLocks noGrp="1"/>
+          </p:cNvSpPr>
+          <p:nvPr>
+            <p:ph type="body" idx="1"/>
+          </p:nvPr>
+        </p:nvSpPr>
+        <p:spPr/>
+        <p:txBody>
+          <a:bodyPr/>
+          <a:lstStyle/>
+          <a:p>
+            <a:r>
+              <a:rPr lang="ko-KR" altLang="en-US" b="1" dirty="0" err="1"/>
+              <a:t>산점도</a:t>
+            </a:r>
+            <a:r>
+              <a:rPr lang="ko-KR" altLang="en-US" b="1" dirty="0"/>
+              <a:t> </a:t>
+            </a:r>
+            <a:r>
+              <a:rPr lang="en-US" altLang="ko-KR" b="1" dirty="0"/>
+              <a:t>(Irradiance vs Power):</a:t>
+            </a:r>
+            <a:r>
+              <a:rPr lang="ko-KR" altLang="en-US" dirty="0"/>
+              <a:t> 일사량과 발전량은 강한 양의 상관관계를 가져야 합니다</a:t>
+            </a:r>
+            <a:r>
+              <a:rPr lang="en-US" altLang="ko-KR" dirty="0"/>
+              <a:t>. </a:t>
+            </a:r>
+            <a:r>
+              <a:rPr lang="ko-KR" altLang="en-US" dirty="0"/>
+              <a:t>하지만 </a:t>
+            </a:r>
+            <a:r>
+              <a:rPr lang="ko-KR" altLang="en-US" b="1" dirty="0"/>
+              <a:t>빨간색 점</a:t>
+            </a:r>
+            <a:r>
+              <a:rPr lang="ko-KR" altLang="en-US" dirty="0"/>
+              <a:t>처럼 일사량은 높은데 발전량이 급락한 경우</a:t>
+            </a:r>
+            <a:r>
+              <a:rPr lang="en-US" altLang="ko-KR" dirty="0"/>
+              <a:t>(</a:t>
+            </a:r>
+            <a:r>
+              <a:rPr lang="ko-KR" altLang="en-US" dirty="0"/>
+              <a:t>인버터 고장 등</a:t>
+            </a:r>
+            <a:r>
+              <a:rPr lang="en-US" altLang="ko-KR" dirty="0"/>
+              <a:t>)</a:t>
+            </a:r>
+            <a:r>
+              <a:rPr lang="ko-KR" altLang="en-US" dirty="0"/>
+              <a:t>나</a:t>
+            </a:r>
+            <a:r>
+              <a:rPr lang="en-US" altLang="ko-KR" dirty="0"/>
+              <a:t>, </a:t>
+            </a:r>
+            <a:r>
+              <a:rPr lang="ko-KR" altLang="en-US" dirty="0"/>
+              <a:t>반대로 비정상적으로 높게 측정된 경우</a:t>
+            </a:r>
+            <a:r>
+              <a:rPr lang="en-US" altLang="ko-KR" dirty="0"/>
+              <a:t>(</a:t>
+            </a:r>
+            <a:r>
+              <a:rPr lang="ko-KR" altLang="en-US" dirty="0"/>
+              <a:t>센서 오류</a:t>
+            </a:r>
+            <a:r>
+              <a:rPr lang="en-US" altLang="ko-KR" dirty="0"/>
+              <a:t>)</a:t>
+            </a:r>
+            <a:r>
+              <a:rPr lang="ko-KR" altLang="en-US" dirty="0"/>
+              <a:t>를 이상치로 판단합니다</a:t>
+            </a:r>
+            <a:r>
+              <a:rPr lang="en-US" altLang="ko-KR" dirty="0"/>
+              <a:t>.</a:t>
+            </a:r>
+          </a:p>
+          <a:p>
+            <a:r>
+              <a:rPr lang="ko-KR" altLang="en-US" b="1" dirty="0"/>
+              <a:t>시계열 프로필 </a:t>
+            </a:r>
+            <a:r>
+              <a:rPr lang="en-US" altLang="ko-KR" b="1" dirty="0"/>
+              <a:t>(Daily Power Profile):</a:t>
+            </a:r>
+            <a:r>
+              <a:rPr lang="ko-KR" altLang="en-US" dirty="0"/>
+              <a:t> 하루 발전 흐름에서 갑자기 </a:t>
+            </a:r>
+            <a:r>
+              <a:rPr lang="en-US" altLang="ko-KR" dirty="0"/>
+              <a:t>0</a:t>
+            </a:r>
+            <a:r>
+              <a:rPr lang="ko-KR" altLang="en-US" dirty="0"/>
+              <a:t>에 가깝게 떨어지거나 위로 튀는 값은 기상 변화가 아닌 장치 오류일 가능성이 높습니다</a:t>
+            </a:r>
+            <a:r>
+              <a:rPr lang="en-US" altLang="ko-KR" dirty="0"/>
+              <a:t>.</a:t>
+            </a:r>
+          </a:p>
+          <a:p>
+            <a:r>
+              <a:rPr lang="ko-KR" altLang="en-US" b="1" dirty="0"/>
+              <a:t>박스 플롯 </a:t>
+            </a:r>
+            <a:r>
+              <a:rPr lang="en-US" altLang="ko-KR" b="1" dirty="0"/>
+              <a:t>(Box Plot):</a:t>
+            </a:r>
+            <a:r>
+              <a:rPr lang="ko-KR" altLang="en-US" dirty="0"/>
+              <a:t> 통계적으로 전체 데이터의 분포</a:t>
+            </a:r>
+            <a:r>
+              <a:rPr lang="en-US" altLang="ko-KR" dirty="0"/>
+              <a:t>(</a:t>
+            </a:r>
+            <a:r>
+              <a:rPr lang="ko-KR" altLang="en-US" dirty="0"/>
+              <a:t>사분위수</a:t>
+            </a:r>
+            <a:r>
+              <a:rPr lang="en-US" altLang="ko-KR" dirty="0"/>
+              <a:t>)</a:t>
+            </a:r>
+            <a:r>
+              <a:rPr lang="ko-KR" altLang="en-US" dirty="0"/>
+              <a:t>를 벗어나는 값들을 한눈에 보여줍니다</a:t>
+            </a:r>
+            <a:r>
+              <a:rPr lang="en-US" altLang="ko-KR" dirty="0"/>
+              <a:t>.</a:t>
+            </a:r>
+          </a:p>
+          <a:p>
+            <a:endParaRPr lang="ko-KR" altLang="en-US" dirty="0"/>
+          </a:p>
+        </p:txBody>
+      </p:sp>
+      <p:sp>
+        <p:nvSpPr>
+          <p:cNvPr id="4" name="슬라이드 번호 개체 틀 3"/>
+          <p:cNvSpPr>
+            <a:spLocks noGrp="1"/>
+          </p:cNvSpPr>
+          <p:nvPr>
+            <p:ph type="sldNum" sz="quarter" idx="5"/>
+          </p:nvPr>
+        </p:nvSpPr>
+        <p:spPr/>
+        <p:txBody>
+          <a:bodyPr/>
+          <a:lstStyle/>
+          <a:p>
+            <a:fld id="{3E35EA20-6519-4513-9EDC-C89C5369BAEC}" type="slidenum">
+              <a:rPr lang="ko-KR" altLang="en-US" smtClean="0"/>
+              <a:pPr/>
+              <a:t>9</a:t>
+            </a:fld>
+            <a:endParaRPr lang="ko-KR" altLang="en-US" dirty="0"/>
+          </a:p>
+        </p:txBody>
+      </p:sp>
+    </p:spTree>
+    <p:extLst>
+      <p:ext uri="{BB962C8B-B14F-4D97-AF65-F5344CB8AC3E}">
+        <p14:creationId xmlns:p14="http://schemas.microsoft.com/office/powerpoint/2010/main" val="2193020239"/>
+      </p:ext>
+    </p:extLst>
+  </p:cSld>
+  <p:clrMapOvr>
+    <a:masterClrMapping/>
+  </p:clrMapOvr>
+</p:notes>
+</file>
+
+<file path=ppt/notesSlides/notesSlide7.xml><?xml version="1.0" encoding="utf-8"?>
+<p:notes xmlns:a="http://schemas.openxmlformats.org/drawingml/2006/main" xmlns:r="http://schemas.openxmlformats.org/officeDocument/2006/relationships" xmlns:p="http://schemas.openxmlformats.org/presentationml/2006/main">
+  <p:cSld>
+    <p:spTree>
+      <p:nvGrpSpPr>
         <p:cNvPr id="1" name="">
           <a:extLst>
             <a:ext uri="{FF2B5EF4-FFF2-40B4-BE49-F238E27FC236}">
@@ -2522,7 +2743,7 @@
           <a:p>
             <a:fld id="{A0085365-8376-4996-BDD6-F39608FADAF3}" type="slidenum">
               <a:rPr lang="ko-KR" altLang="en-US" smtClean="0"/>
-              <a:t>15</a:t>
+              <a:t>13</a:t>
             </a:fld>
             <a:endParaRPr lang="ko-KR" altLang="en-US"/>
           </a:p>
@@ -2688,7 +2909,7 @@
           <a:p>
             <a:fld id="{442BEE3F-2E9A-4FD8-8B8A-8619F3E161C0}" type="datetime1">
               <a:rPr lang="ko-KR" altLang="en-US" smtClean="0"/>
-              <a:t>2026-01-13</a:t>
+              <a:t>2026-01-14</a:t>
             </a:fld>
             <a:endParaRPr lang="ko-KR" altLang="en-US"/>
           </a:p>
@@ -2975,7 +3196,7 @@
           <a:p>
             <a:fld id="{0F78D9C4-20C1-4B15-A116-16DC77AD9A1E}" type="datetime1">
               <a:rPr lang="ko-KR" altLang="en-US" smtClean="0"/>
-              <a:t>2026-01-13</a:t>
+              <a:t>2026-01-14</a:t>
             </a:fld>
             <a:endParaRPr lang="ko-KR" altLang="en-US"/>
           </a:p>
@@ -3150,7 +3371,7 @@
           <a:p>
             <a:fld id="{7F5E23C3-0E3D-4E4E-8486-D7FB4C073DC1}" type="datetime1">
               <a:rPr lang="ko-KR" altLang="en-US" smtClean="0"/>
-              <a:t>2026-01-13</a:t>
+              <a:t>2026-01-14</a:t>
             </a:fld>
             <a:endParaRPr lang="ko-KR" altLang="en-US"/>
           </a:p>
@@ -3214,6 +3435,162 @@
     <p:extLst>
       <p:ext uri="{BB962C8B-B14F-4D97-AF65-F5344CB8AC3E}">
         <p14:creationId xmlns:p14="http://schemas.microsoft.com/office/powerpoint/2010/main" val="1406267790"/>
+      </p:ext>
+    </p:extLst>
+  </p:cSld>
+  <p:clrMapOvr>
+    <a:masterClrMapping/>
+  </p:clrMapOvr>
+</p:sldLayout>
+</file>
+
+<file path=ppt/slideLayouts/slideLayout4.xml><?xml version="1.0" encoding="utf-8"?>
+<p:sldLayout xmlns:a="http://schemas.openxmlformats.org/drawingml/2006/main" xmlns:r="http://schemas.openxmlformats.org/officeDocument/2006/relationships" xmlns:p="http://schemas.openxmlformats.org/presentationml/2006/main" preserve="1" userDrawn="1">
+  <p:cSld name="1_사용자 지정 레이아웃">
+    <p:spTree>
+      <p:nvGrpSpPr>
+        <p:cNvPr id="1" name=""/>
+        <p:cNvGrpSpPr/>
+        <p:nvPr/>
+      </p:nvGrpSpPr>
+      <p:grpSpPr>
+        <a:xfrm>
+          <a:off x="0" y="0"/>
+          <a:ext cx="0" cy="0"/>
+          <a:chOff x="0" y="0"/>
+          <a:chExt cx="0" cy="0"/>
+        </a:xfrm>
+      </p:grpSpPr>
+      <p:sp>
+        <p:nvSpPr>
+          <p:cNvPr id="2" name="제목 1">
+            <a:extLst>
+              <a:ext uri="{FF2B5EF4-FFF2-40B4-BE49-F238E27FC236}">
+                <a16:creationId xmlns:a16="http://schemas.microsoft.com/office/drawing/2014/main" id="{57736B21-4C59-5A88-37D9-B5B38376A157}"/>
+              </a:ext>
+            </a:extLst>
+          </p:cNvPr>
+          <p:cNvSpPr>
+            <a:spLocks noGrp="1"/>
+          </p:cNvSpPr>
+          <p:nvPr>
+            <p:ph type="title"/>
+          </p:nvPr>
+        </p:nvSpPr>
+        <p:spPr>
+          <a:xfrm>
+            <a:off x="838200" y="2480795"/>
+            <a:ext cx="10515600" cy="1325563"/>
+          </a:xfrm>
+        </p:spPr>
+        <p:txBody>
+          <a:bodyPr/>
+          <a:lstStyle>
+            <a:lvl1pPr algn="ctr">
+              <a:defRPr sz="6000">
+                <a:solidFill>
+                  <a:schemeClr val="accent2"/>
+                </a:solidFill>
+                <a:latin typeface="G마켓 산스 TTF Bold" panose="02000000000000000000" pitchFamily="2" charset="-127"/>
+                <a:ea typeface="G마켓 산스 TTF Bold" panose="02000000000000000000" pitchFamily="2" charset="-127"/>
+              </a:defRPr>
+            </a:lvl1pPr>
+          </a:lstStyle>
+          <a:p>
+            <a:r>
+              <a:rPr lang="ko-KR" altLang="en-US" dirty="0"/>
+              <a:t>마스터 제목 스타일 편집</a:t>
+            </a:r>
+          </a:p>
+        </p:txBody>
+      </p:sp>
+      <p:sp>
+        <p:nvSpPr>
+          <p:cNvPr id="3" name="날짜 개체 틀 2">
+            <a:extLst>
+              <a:ext uri="{FF2B5EF4-FFF2-40B4-BE49-F238E27FC236}">
+                <a16:creationId xmlns:a16="http://schemas.microsoft.com/office/drawing/2014/main" id="{0AA25496-F3F2-E088-321D-06D66F84A1AC}"/>
+              </a:ext>
+            </a:extLst>
+          </p:cNvPr>
+          <p:cNvSpPr>
+            <a:spLocks noGrp="1"/>
+          </p:cNvSpPr>
+          <p:nvPr>
+            <p:ph type="dt" sz="half" idx="10"/>
+          </p:nvPr>
+        </p:nvSpPr>
+        <p:spPr/>
+        <p:txBody>
+          <a:bodyPr/>
+          <a:lstStyle/>
+          <a:p>
+            <a:fld id="{7F5E23C3-0E3D-4E4E-8486-D7FB4C073DC1}" type="datetime1">
+              <a:rPr lang="ko-KR" altLang="en-US" smtClean="0"/>
+              <a:t>2026-01-14</a:t>
+            </a:fld>
+            <a:endParaRPr lang="ko-KR" altLang="en-US"/>
+          </a:p>
+        </p:txBody>
+      </p:sp>
+      <p:sp>
+        <p:nvSpPr>
+          <p:cNvPr id="4" name="바닥글 개체 틀 3">
+            <a:extLst>
+              <a:ext uri="{FF2B5EF4-FFF2-40B4-BE49-F238E27FC236}">
+                <a16:creationId xmlns:a16="http://schemas.microsoft.com/office/drawing/2014/main" id="{F4945542-35EE-2EA8-C80C-66A9D746AC49}"/>
+              </a:ext>
+            </a:extLst>
+          </p:cNvPr>
+          <p:cNvSpPr>
+            <a:spLocks noGrp="1"/>
+          </p:cNvSpPr>
+          <p:nvPr>
+            <p:ph type="ftr" sz="quarter" idx="11"/>
+          </p:nvPr>
+        </p:nvSpPr>
+        <p:spPr/>
+        <p:txBody>
+          <a:bodyPr/>
+          <a:lstStyle/>
+          <a:p>
+            <a:endParaRPr lang="ko-KR" altLang="en-US"/>
+          </a:p>
+        </p:txBody>
+      </p:sp>
+      <p:sp>
+        <p:nvSpPr>
+          <p:cNvPr id="5" name="슬라이드 번호 개체 틀 4">
+            <a:extLst>
+              <a:ext uri="{FF2B5EF4-FFF2-40B4-BE49-F238E27FC236}">
+                <a16:creationId xmlns:a16="http://schemas.microsoft.com/office/drawing/2014/main" id="{5579F9B5-BCEE-FABF-C276-2A16778744E0}"/>
+              </a:ext>
+            </a:extLst>
+          </p:cNvPr>
+          <p:cNvSpPr>
+            <a:spLocks noGrp="1"/>
+          </p:cNvSpPr>
+          <p:nvPr>
+            <p:ph type="sldNum" sz="quarter" idx="12"/>
+          </p:nvPr>
+        </p:nvSpPr>
+        <p:spPr/>
+        <p:txBody>
+          <a:bodyPr/>
+          <a:lstStyle/>
+          <a:p>
+            <a:fld id="{083A2CE0-18CD-4102-B738-4ACFF9E68BA4}" type="slidenum">
+              <a:rPr lang="ko-KR" altLang="en-US" smtClean="0"/>
+              <a:t>‹#›</a:t>
+            </a:fld>
+            <a:endParaRPr lang="ko-KR" altLang="en-US"/>
+          </a:p>
+        </p:txBody>
+      </p:sp>
+    </p:spTree>
+    <p:extLst>
+      <p:ext uri="{BB962C8B-B14F-4D97-AF65-F5344CB8AC3E}">
+        <p14:creationId xmlns:p14="http://schemas.microsoft.com/office/powerpoint/2010/main" val="1045411288"/>
       </p:ext>
     </p:extLst>
   </p:cSld>
@@ -3417,7 +3794,7 @@
           <p:nvPr/>
         </p:nvPicPr>
         <p:blipFill>
-          <a:blip r:embed="rId5" cstate="print">
+          <a:blip r:embed="rId6" cstate="print">
             <a:extLst>
               <a:ext uri="{28A0092B-C50C-407E-A947-70E740481C1C}">
                 <a14:useLocalDpi xmlns:a14="http://schemas.microsoft.com/office/drawing/2010/main" val="0"/>
@@ -3479,7 +3856,7 @@
           <a:p>
             <a:fld id="{7F5E23C3-0E3D-4E4E-8486-D7FB4C073DC1}" type="datetime1">
               <a:rPr lang="ko-KR" altLang="en-US" smtClean="0"/>
-              <a:t>2026-01-13</a:t>
+              <a:t>2026-01-14</a:t>
             </a:fld>
             <a:endParaRPr lang="ko-KR" altLang="en-US"/>
           </a:p>
@@ -3641,6 +4018,7 @@
     <p:sldLayoutId id="2147483661" r:id="rId1"/>
     <p:sldLayoutId id="2147483662" r:id="rId2"/>
     <p:sldLayoutId id="2147483663" r:id="rId3"/>
+    <p:sldLayoutId id="2147483664" r:id="rId4"/>
   </p:sldLayoutIdLst>
   <p:txStyles>
     <p:titleStyle>
@@ -4377,13 +4755,7 @@
   <p:cSld>
     <p:spTree>
       <p:nvGrpSpPr>
-        <p:cNvPr id="1" name="">
-          <a:extLst>
-            <a:ext uri="{FF2B5EF4-FFF2-40B4-BE49-F238E27FC236}">
-              <a16:creationId xmlns:a16="http://schemas.microsoft.com/office/drawing/2014/main" id="{CBFAB8DB-EFD3-F54B-20CE-16F34B811C8A}"/>
-            </a:ext>
-          </a:extLst>
-        </p:cNvPr>
+        <p:cNvPr id="1" name=""/>
         <p:cNvGrpSpPr/>
         <p:nvPr/>
       </p:nvGrpSpPr>
@@ -4397,10 +4769,10 @@
       </p:grpSpPr>
       <p:sp>
         <p:nvSpPr>
-          <p:cNvPr id="4" name="날짜 개체 틀 3">
+          <p:cNvPr id="4" name="제목 3">
             <a:extLst>
               <a:ext uri="{FF2B5EF4-FFF2-40B4-BE49-F238E27FC236}">
-                <a16:creationId xmlns:a16="http://schemas.microsoft.com/office/drawing/2014/main" id="{4AE089B9-44F0-5282-18A9-77B1C1EE1BC2}"/>
+                <a16:creationId xmlns:a16="http://schemas.microsoft.com/office/drawing/2014/main" id="{9C025154-427F-BB4D-34AD-041C1B38B980}"/>
               </a:ext>
             </a:extLst>
           </p:cNvPr>
@@ -4408,7 +4780,7 @@
             <a:spLocks noGrp="1"/>
           </p:cNvSpPr>
           <p:nvPr>
-            <p:ph type="dt" sz="half" idx="10"/>
+            <p:ph type="title"/>
           </p:nvPr>
         </p:nvSpPr>
         <p:spPr/>
@@ -4416,360 +4788,17 @@
           <a:bodyPr/>
           <a:lstStyle/>
           <a:p>
-            <a:fld id="{0F78D9C4-20C1-4B15-A116-16DC77AD9A1E}" type="datetime1">
-              <a:rPr lang="ko-KR" altLang="en-US" smtClean="0"/>
-              <a:t>2026-01-13</a:t>
-            </a:fld>
-            <a:endParaRPr lang="ko-KR" altLang="en-US" dirty="0"/>
+            <a:r>
+              <a:rPr lang="ko-KR" altLang="en-US" dirty="0"/>
+              <a:t>데이터 분포</a:t>
+            </a:r>
           </a:p>
         </p:txBody>
       </p:sp>
-      <p:sp>
-        <p:nvSpPr>
-          <p:cNvPr id="5" name="슬라이드 번호 개체 틀 4">
-            <a:extLst>
-              <a:ext uri="{FF2B5EF4-FFF2-40B4-BE49-F238E27FC236}">
-                <a16:creationId xmlns:a16="http://schemas.microsoft.com/office/drawing/2014/main" id="{1AD37D3A-B4D4-879F-3770-044DDABAC4DD}"/>
-              </a:ext>
-            </a:extLst>
-          </p:cNvPr>
-          <p:cNvSpPr>
-            <a:spLocks noGrp="1"/>
-          </p:cNvSpPr>
-          <p:nvPr>
-            <p:ph type="sldNum" sz="quarter" idx="12"/>
-          </p:nvPr>
-        </p:nvSpPr>
-        <p:spPr/>
-        <p:txBody>
-          <a:bodyPr/>
-          <a:lstStyle/>
-          <a:p>
-            <a:fld id="{083A2CE0-18CD-4102-B738-4ACFF9E68BA4}" type="slidenum">
-              <a:rPr lang="ko-KR" altLang="en-US" smtClean="0"/>
-              <a:t>10</a:t>
-            </a:fld>
-            <a:endParaRPr lang="ko-KR" altLang="en-US"/>
-          </a:p>
-        </p:txBody>
-      </p:sp>
-      <p:sp>
-        <p:nvSpPr>
-          <p:cNvPr id="8" name="TextBox 7">
-            <a:extLst>
-              <a:ext uri="{FF2B5EF4-FFF2-40B4-BE49-F238E27FC236}">
-                <a16:creationId xmlns:a16="http://schemas.microsoft.com/office/drawing/2014/main" id="{1C2D4560-9F83-9BA4-B74D-2BDC5F25FEF3}"/>
-              </a:ext>
-            </a:extLst>
-          </p:cNvPr>
-          <p:cNvSpPr txBox="1"/>
-          <p:nvPr/>
-        </p:nvSpPr>
-        <p:spPr>
-          <a:xfrm>
-            <a:off x="200677" y="110919"/>
-            <a:ext cx="3512500" cy="830997"/>
-          </a:xfrm>
-          <a:prstGeom prst="rect">
-            <a:avLst/>
-          </a:prstGeom>
-          <a:noFill/>
-        </p:spPr>
-        <p:txBody>
-          <a:bodyPr wrap="none" rtlCol="0">
-            <a:spAutoFit/>
-          </a:bodyPr>
-          <a:lstStyle/>
-          <a:p>
-            <a:r>
-              <a:rPr lang="ko-KR" altLang="en-US" sz="4800" b="1" dirty="0">
-                <a:latin typeface="+mj-ea"/>
-                <a:ea typeface="+mj-ea"/>
-              </a:rPr>
-              <a:t>적응형 이진화</a:t>
-            </a:r>
-            <a:endParaRPr lang="ko-KR" altLang="en-US" sz="4800" b="1" dirty="0">
-              <a:solidFill>
-                <a:srgbClr val="2A2A2A"/>
-              </a:solidFill>
-              <a:latin typeface="+mj-ea"/>
-              <a:ea typeface="+mj-ea"/>
-              <a:cs typeface="Pretendard Black" panose="02000A03000000020004" pitchFamily="2" charset="-127"/>
-            </a:endParaRPr>
-          </a:p>
-        </p:txBody>
-      </p:sp>
-      <p:sp>
-        <p:nvSpPr>
-          <p:cNvPr id="9" name="내용 개체 틀 2">
-            <a:extLst>
-              <a:ext uri="{FF2B5EF4-FFF2-40B4-BE49-F238E27FC236}">
-                <a16:creationId xmlns:a16="http://schemas.microsoft.com/office/drawing/2014/main" id="{1A0D7444-96C9-6109-3E44-7F3A9BEF5FC8}"/>
-              </a:ext>
-            </a:extLst>
-          </p:cNvPr>
-          <p:cNvSpPr>
-            <a:spLocks noGrp="1"/>
-          </p:cNvSpPr>
-          <p:nvPr>
-            <p:ph idx="1"/>
-          </p:nvPr>
-        </p:nvSpPr>
-        <p:spPr>
-          <a:xfrm>
-            <a:off x="200677" y="2272317"/>
-            <a:ext cx="6589422" cy="2313366"/>
-          </a:xfrm>
-        </p:spPr>
-        <p:txBody>
-          <a:bodyPr>
-            <a:noAutofit/>
-          </a:bodyPr>
-          <a:lstStyle/>
-          <a:p>
-            <a:pPr marL="0" indent="0">
-              <a:lnSpc>
-                <a:spcPct val="150000"/>
-              </a:lnSpc>
-              <a:buNone/>
-            </a:pPr>
-            <a:r>
-              <a:rPr lang="ko-KR" altLang="en-US" sz="2400" b="1" dirty="0">
-                <a:latin typeface="+mn-ea"/>
-              </a:rPr>
-              <a:t>💡</a:t>
-            </a:r>
-            <a:r>
-              <a:rPr lang="en-US" altLang="ko-KR" sz="2400" b="1" dirty="0">
-                <a:latin typeface="+mn-ea"/>
-              </a:rPr>
-              <a:t> Adaptive threshold : </a:t>
-            </a:r>
-            <a:r>
-              <a:rPr lang="ko-KR" altLang="en-US" sz="2400" b="1" dirty="0"/>
-              <a:t>적응형 이진화</a:t>
-            </a:r>
-            <a:endParaRPr lang="en-US" altLang="ko-KR" sz="2400" b="1" dirty="0">
-              <a:latin typeface="+mn-ea"/>
-            </a:endParaRPr>
-          </a:p>
-          <a:p>
-            <a:pPr lvl="1">
-              <a:lnSpc>
-                <a:spcPct val="150000"/>
-              </a:lnSpc>
-              <a:buFont typeface="Wingdings" panose="05000000000000000000" pitchFamily="2" charset="2"/>
-              <a:buChar char="§"/>
-            </a:pPr>
-            <a:r>
-              <a:rPr lang="ko-KR" altLang="en-US" sz="2000" dirty="0"/>
-              <a:t>이미지 전체에 대해 동일한 </a:t>
-            </a:r>
-            <a:r>
-              <a:rPr lang="ko-KR" altLang="en-US" sz="2000" dirty="0" err="1"/>
-              <a:t>임계값을</a:t>
-            </a:r>
-            <a:r>
-              <a:rPr lang="ko-KR" altLang="en-US" sz="2000" dirty="0"/>
-              <a:t> 사용하는 대신</a:t>
-            </a:r>
-            <a:r>
-              <a:rPr lang="en-US" altLang="ko-KR" sz="2000" dirty="0"/>
-              <a:t>, </a:t>
-            </a:r>
-            <a:r>
-              <a:rPr lang="ko-KR" altLang="en-US" sz="2000" dirty="0"/>
-              <a:t>작은 영역별로 서로 다른 </a:t>
-            </a:r>
-            <a:r>
-              <a:rPr lang="ko-KR" altLang="en-US" sz="2000" dirty="0" err="1"/>
-              <a:t>임계값을</a:t>
-            </a:r>
-            <a:r>
-              <a:rPr lang="ko-KR" altLang="en-US" sz="2000" dirty="0"/>
-              <a:t> 계산하여 적용함</a:t>
-            </a:r>
-            <a:r>
-              <a:rPr lang="en-US" altLang="ko-KR" sz="2000" dirty="0"/>
-              <a:t>. </a:t>
-            </a:r>
-          </a:p>
-          <a:p>
-            <a:pPr lvl="1">
-              <a:lnSpc>
-                <a:spcPct val="150000"/>
-              </a:lnSpc>
-              <a:buFont typeface="Wingdings" panose="05000000000000000000" pitchFamily="2" charset="2"/>
-              <a:buChar char="§"/>
-            </a:pPr>
-            <a:r>
-              <a:rPr lang="ko-KR" altLang="en-US" sz="2000" dirty="0"/>
-              <a:t>밝기가 고르지 않은 이미지를 처리할 때 유용함</a:t>
-            </a:r>
-            <a:r>
-              <a:rPr lang="en-US" altLang="ko-KR" sz="2000" dirty="0"/>
-              <a:t>.</a:t>
-            </a:r>
-          </a:p>
-        </p:txBody>
-      </p:sp>
-      <p:grpSp>
-        <p:nvGrpSpPr>
-          <p:cNvPr id="2" name="그룹 1">
-            <a:extLst>
-              <a:ext uri="{FF2B5EF4-FFF2-40B4-BE49-F238E27FC236}">
-                <a16:creationId xmlns:a16="http://schemas.microsoft.com/office/drawing/2014/main" id="{8CAEC17A-17DA-E1D0-6C81-676AE64C4A8F}"/>
-              </a:ext>
-            </a:extLst>
-          </p:cNvPr>
-          <p:cNvGrpSpPr/>
-          <p:nvPr/>
-        </p:nvGrpSpPr>
-        <p:grpSpPr>
-          <a:xfrm>
-            <a:off x="6988698" y="838922"/>
-            <a:ext cx="4847772" cy="5180156"/>
-            <a:chOff x="7024912" y="992467"/>
-            <a:chExt cx="4847772" cy="5180156"/>
-          </a:xfrm>
-        </p:grpSpPr>
-        <p:pic>
-          <p:nvPicPr>
-            <p:cNvPr id="7170" name="Picture 2" descr="OpenCV: Image Thresholding">
-              <a:extLst>
-                <a:ext uri="{FF2B5EF4-FFF2-40B4-BE49-F238E27FC236}">
-                  <a16:creationId xmlns:a16="http://schemas.microsoft.com/office/drawing/2014/main" id="{EC7112C9-1F35-C8A9-BA17-861BA79BAAF5}"/>
-                </a:ext>
-              </a:extLst>
-            </p:cNvPr>
-            <p:cNvPicPr>
-              <a:picLocks noChangeAspect="1" noChangeArrowheads="1"/>
-            </p:cNvPicPr>
-            <p:nvPr/>
-          </p:nvPicPr>
-          <p:blipFill>
-            <a:blip r:embed="rId2">
-              <a:extLst>
-                <a:ext uri="{28A0092B-C50C-407E-A947-70E740481C1C}">
-                  <a14:useLocalDpi xmlns:a14="http://schemas.microsoft.com/office/drawing/2010/main" val="0"/>
-                </a:ext>
-              </a:extLst>
-            </a:blip>
-            <a:srcRect/>
-            <a:stretch>
-              <a:fillRect/>
-            </a:stretch>
-          </p:blipFill>
-          <p:spPr bwMode="auto">
-            <a:xfrm>
-              <a:off x="7154992" y="992467"/>
-              <a:ext cx="4587613" cy="4873065"/>
-            </a:xfrm>
-            <a:prstGeom prst="rect">
-              <a:avLst/>
-            </a:prstGeom>
-            <a:ln>
-              <a:noFill/>
-            </a:ln>
-            <a:effectLst>
-              <a:outerShdw blurRad="292100" dist="139700" dir="2700000" algn="tl" rotWithShape="0">
-                <a:srgbClr val="333333">
-                  <a:alpha val="65000"/>
-                </a:srgbClr>
-              </a:outerShdw>
-            </a:effectLst>
-            <a:extLst>
-              <a:ext uri="{909E8E84-426E-40DD-AFC4-6F175D3DCCD1}">
-                <a14:hiddenFill xmlns:a14="http://schemas.microsoft.com/office/drawing/2010/main">
-                  <a:solidFill>
-                    <a:srgbClr val="FFFFFF"/>
-                  </a:solidFill>
-                </a14:hiddenFill>
-              </a:ext>
-            </a:extLst>
-          </p:spPr>
-        </p:pic>
-        <p:sp>
-          <p:nvSpPr>
-            <p:cNvPr id="3" name="TextBox 2">
-              <a:extLst>
-                <a:ext uri="{FF2B5EF4-FFF2-40B4-BE49-F238E27FC236}">
-                  <a16:creationId xmlns:a16="http://schemas.microsoft.com/office/drawing/2014/main" id="{DDD9626B-83FF-22A1-F68C-1B6EAAC0D8C1}"/>
-                </a:ext>
-              </a:extLst>
-            </p:cNvPr>
-            <p:cNvSpPr txBox="1"/>
-            <p:nvPr/>
-          </p:nvSpPr>
-          <p:spPr>
-            <a:xfrm>
-              <a:off x="7024912" y="5918707"/>
-              <a:ext cx="4847772" cy="253916"/>
-            </a:xfrm>
-            <a:prstGeom prst="rect">
-              <a:avLst/>
-            </a:prstGeom>
-            <a:noFill/>
-          </p:spPr>
-          <p:txBody>
-            <a:bodyPr wrap="square">
-              <a:spAutoFit/>
-            </a:bodyPr>
-            <a:lstStyle/>
-            <a:p>
-              <a:pPr algn="ctr"/>
-              <a:r>
-                <a:rPr lang="en-US" altLang="ko-KR" sz="1000" dirty="0">
-                  <a:solidFill>
-                    <a:schemeClr val="tx1">
-                      <a:lumMod val="50000"/>
-                      <a:lumOff val="50000"/>
-                    </a:schemeClr>
-                  </a:solidFill>
-                </a:rPr>
-                <a:t>[</a:t>
-              </a:r>
-              <a:r>
-                <a:rPr lang="ko-KR" altLang="en-US" sz="1000" dirty="0">
-                  <a:solidFill>
-                    <a:schemeClr val="tx1">
-                      <a:lumMod val="50000"/>
-                      <a:lumOff val="50000"/>
-                    </a:schemeClr>
-                  </a:solidFill>
-                </a:rPr>
-                <a:t>이미지 출처</a:t>
-              </a:r>
-              <a:r>
-                <a:rPr lang="en-US" altLang="ko-KR" sz="1000" dirty="0">
-                  <a:solidFill>
-                    <a:schemeClr val="tx1">
-                      <a:lumMod val="50000"/>
-                      <a:lumOff val="50000"/>
-                    </a:schemeClr>
-                  </a:solidFill>
-                </a:rPr>
-                <a:t>] </a:t>
-              </a:r>
-              <a:r>
-                <a:rPr lang="ko-KR" altLang="en-US" sz="1000" dirty="0">
-                  <a:solidFill>
-                    <a:schemeClr val="tx1">
-                      <a:lumMod val="50000"/>
-                      <a:lumOff val="50000"/>
-                    </a:schemeClr>
-                  </a:solidFill>
-                </a:rPr>
-                <a:t>https://docs.opencv.org/4.x/d7/d4d/tutorial_py_thresholding.html</a:t>
-              </a:r>
-            </a:p>
-          </p:txBody>
-        </p:sp>
-      </p:grpSp>
     </p:spTree>
     <p:extLst>
       <p:ext uri="{BB962C8B-B14F-4D97-AF65-F5344CB8AC3E}">
-        <p14:creationId xmlns:p14="http://schemas.microsoft.com/office/powerpoint/2010/main" val="3866832455"/>
+        <p14:creationId xmlns:p14="http://schemas.microsoft.com/office/powerpoint/2010/main" val="3257001421"/>
       </p:ext>
     </p:extLst>
   </p:cSld>
@@ -4784,13 +4813,7 @@
   <p:cSld>
     <p:spTree>
       <p:nvGrpSpPr>
-        <p:cNvPr id="1" name="">
-          <a:extLst>
-            <a:ext uri="{FF2B5EF4-FFF2-40B4-BE49-F238E27FC236}">
-              <a16:creationId xmlns:a16="http://schemas.microsoft.com/office/drawing/2014/main" id="{EFD533DC-9B4B-1B9B-AED2-DCF7FFAF8704}"/>
-            </a:ext>
-          </a:extLst>
-        </p:cNvPr>
+        <p:cNvPr id="1" name=""/>
         <p:cNvGrpSpPr/>
         <p:nvPr/>
       </p:nvGrpSpPr>
@@ -4804,10 +4827,10 @@
       </p:grpSpPr>
       <p:sp>
         <p:nvSpPr>
-          <p:cNvPr id="4" name="날짜 개체 틀 3">
+          <p:cNvPr id="2" name="제목 1">
             <a:extLst>
               <a:ext uri="{FF2B5EF4-FFF2-40B4-BE49-F238E27FC236}">
-                <a16:creationId xmlns:a16="http://schemas.microsoft.com/office/drawing/2014/main" id="{ED85FF0B-2312-8447-AA78-44AD87A7D8E8}"/>
+                <a16:creationId xmlns:a16="http://schemas.microsoft.com/office/drawing/2014/main" id="{CEA7F129-9BE7-ACB4-4D0D-620B37052C71}"/>
               </a:ext>
             </a:extLst>
           </p:cNvPr>
@@ -4815,7 +4838,7 @@
             <a:spLocks noGrp="1"/>
           </p:cNvSpPr>
           <p:nvPr>
-            <p:ph type="dt" sz="half" idx="10"/>
+            <p:ph type="title"/>
           </p:nvPr>
         </p:nvSpPr>
         <p:spPr/>
@@ -4823,95 +4846,19 @@
           <a:bodyPr/>
           <a:lstStyle/>
           <a:p>
-            <a:fld id="{0F78D9C4-20C1-4B15-A116-16DC77AD9A1E}" type="datetime1">
-              <a:rPr lang="ko-KR" altLang="en-US" smtClean="0"/>
-              <a:t>2026-01-13</a:t>
-            </a:fld>
-            <a:endParaRPr lang="ko-KR" altLang="en-US"/>
+            <a:r>
+              <a:rPr lang="ko-KR" altLang="en-US" dirty="0"/>
+              <a:t>데이터 분포를 본다는 것</a:t>
+            </a:r>
           </a:p>
         </p:txBody>
       </p:sp>
       <p:sp>
         <p:nvSpPr>
-          <p:cNvPr id="5" name="슬라이드 번호 개체 틀 4">
+          <p:cNvPr id="3" name="내용 개체 틀 2">
             <a:extLst>
               <a:ext uri="{FF2B5EF4-FFF2-40B4-BE49-F238E27FC236}">
-                <a16:creationId xmlns:a16="http://schemas.microsoft.com/office/drawing/2014/main" id="{AE1711D7-3DA7-8EC5-3B31-FC752620CD6F}"/>
-              </a:ext>
-            </a:extLst>
-          </p:cNvPr>
-          <p:cNvSpPr>
-            <a:spLocks noGrp="1"/>
-          </p:cNvSpPr>
-          <p:nvPr>
-            <p:ph type="sldNum" sz="quarter" idx="12"/>
-          </p:nvPr>
-        </p:nvSpPr>
-        <p:spPr/>
-        <p:txBody>
-          <a:bodyPr/>
-          <a:lstStyle/>
-          <a:p>
-            <a:fld id="{083A2CE0-18CD-4102-B738-4ACFF9E68BA4}" type="slidenum">
-              <a:rPr lang="ko-KR" altLang="en-US" smtClean="0"/>
-              <a:t>11</a:t>
-            </a:fld>
-            <a:endParaRPr lang="ko-KR" altLang="en-US"/>
-          </a:p>
-        </p:txBody>
-      </p:sp>
-      <p:sp>
-        <p:nvSpPr>
-          <p:cNvPr id="8" name="TextBox 7">
-            <a:extLst>
-              <a:ext uri="{FF2B5EF4-FFF2-40B4-BE49-F238E27FC236}">
-                <a16:creationId xmlns:a16="http://schemas.microsoft.com/office/drawing/2014/main" id="{698A5364-6301-0A34-5508-04A5780E1D74}"/>
-              </a:ext>
-            </a:extLst>
-          </p:cNvPr>
-          <p:cNvSpPr txBox="1"/>
-          <p:nvPr/>
-        </p:nvSpPr>
-        <p:spPr>
-          <a:xfrm>
-            <a:off x="200677" y="110919"/>
-            <a:ext cx="3512500" cy="830997"/>
-          </a:xfrm>
-          <a:prstGeom prst="rect">
-            <a:avLst/>
-          </a:prstGeom>
-          <a:noFill/>
-        </p:spPr>
-        <p:txBody>
-          <a:bodyPr wrap="none" rtlCol="0">
-            <a:spAutoFit/>
-          </a:bodyPr>
-          <a:lstStyle/>
-          <a:p>
-            <a:r>
-              <a:rPr lang="ko-KR" altLang="en-US" sz="4800" b="1" dirty="0">
-                <a:latin typeface="+mj-ea"/>
-                <a:ea typeface="+mj-ea"/>
-              </a:rPr>
-              <a:t>적응형 이진화</a:t>
-            </a:r>
-            <a:endParaRPr lang="ko-KR" altLang="en-US" sz="4800" b="1" dirty="0">
-              <a:solidFill>
-                <a:srgbClr val="2A2A2A"/>
-              </a:solidFill>
-              <a:latin typeface="+mj-ea"/>
-              <a:ea typeface="+mj-ea"/>
-              <a:cs typeface="Pretendard Black" panose="02000A03000000020004" pitchFamily="2" charset="-127"/>
-            </a:endParaRPr>
-          </a:p>
-        </p:txBody>
-      </p:sp>
-      <p:sp>
-        <p:nvSpPr>
-          <p:cNvPr id="9" name="내용 개체 틀 2">
-            <a:extLst>
-              <a:ext uri="{FF2B5EF4-FFF2-40B4-BE49-F238E27FC236}">
-                <a16:creationId xmlns:a16="http://schemas.microsoft.com/office/drawing/2014/main" id="{46157B23-3565-294A-18D3-2C21403DB228}"/>
+                <a16:creationId xmlns:a16="http://schemas.microsoft.com/office/drawing/2014/main" id="{BAC54B31-C47C-C4A5-5D73-4CA66EACBC4C}"/>
               </a:ext>
             </a:extLst>
           </p:cNvPr>
@@ -4922,378 +4869,81 @@
             <p:ph idx="1"/>
           </p:nvPr>
         </p:nvSpPr>
-        <p:spPr>
-          <a:xfrm>
-            <a:off x="200677" y="1034249"/>
-            <a:ext cx="11551557" cy="4413258"/>
-          </a:xfrm>
-        </p:spPr>
+        <p:spPr/>
         <p:txBody>
-          <a:bodyPr>
-            <a:noAutofit/>
-          </a:bodyPr>
+          <a:bodyPr/>
           <a:lstStyle/>
+          <a:p>
+            <a:r>
+              <a:rPr lang="ko-KR" altLang="en-US" dirty="0"/>
+              <a:t>데이터 분석에서 분포</a:t>
+            </a:r>
+            <a:r>
+              <a:rPr lang="en-US" altLang="ko-KR" dirty="0"/>
+              <a:t>(distribution)</a:t>
+            </a:r>
+            <a:r>
+              <a:rPr lang="ko-KR" altLang="en-US" dirty="0"/>
+              <a:t>는 데이터의 성격을 가장 직관적으로 보여줌</a:t>
+            </a:r>
+            <a:endParaRPr lang="en-US" altLang="ko-KR" dirty="0"/>
+          </a:p>
+          <a:p>
+            <a:r>
+              <a:rPr lang="ko-KR" altLang="en-US" dirty="0"/>
+              <a:t>평균이나 중앙값만으로는 데이터의 전체 특성 설명할 수 없음</a:t>
+            </a:r>
+            <a:endParaRPr lang="en-US" altLang="ko-KR" dirty="0"/>
+          </a:p>
+          <a:p>
+            <a:r>
+              <a:rPr lang="ko-KR" altLang="en-US" dirty="0"/>
+              <a:t>분포를 통해 값의 집중 구간</a:t>
+            </a:r>
+            <a:r>
+              <a:rPr lang="en-US" altLang="ko-KR" dirty="0"/>
+              <a:t>, </a:t>
+            </a:r>
+            <a:r>
+              <a:rPr lang="ko-KR" altLang="en-US" dirty="0"/>
+              <a:t>왜곡</a:t>
+            </a:r>
+            <a:r>
+              <a:rPr lang="en-US" altLang="ko-KR" dirty="0"/>
+              <a:t>, </a:t>
+            </a:r>
+            <a:r>
+              <a:rPr lang="ko-KR" altLang="en-US" dirty="0"/>
+              <a:t>이상치 존재 여부를 확인할 수 있다</a:t>
+            </a:r>
+            <a:endParaRPr lang="en-US" altLang="ko-KR" dirty="0"/>
+          </a:p>
+          <a:p>
+            <a:endParaRPr lang="en-US" altLang="ko-KR" dirty="0"/>
+          </a:p>
           <a:p>
             <a:pPr marL="0" indent="0">
               <a:buNone/>
             </a:pPr>
             <a:r>
-              <a:rPr lang="ko-KR" altLang="en-US" sz="2400" b="1" dirty="0">
-                <a:latin typeface="+mn-ea"/>
-              </a:rPr>
-              <a:t>💡 </a:t>
-            </a:r>
-            <a:r>
-              <a:rPr lang="en-US" altLang="ko-KR" sz="2400" b="1" dirty="0">
-                <a:latin typeface="+mn-ea"/>
-              </a:rPr>
-              <a:t>cv2.adaptiveThreshold</a:t>
-            </a:r>
-            <a:r>
-              <a:rPr lang="en-US" altLang="ko-KR" sz="2400" dirty="0">
-                <a:latin typeface="+mn-ea"/>
-              </a:rPr>
-              <a:t>(</a:t>
-            </a:r>
-            <a:r>
-              <a:rPr lang="en-US" altLang="ko-KR" sz="2400" dirty="0" err="1">
-                <a:latin typeface="+mn-ea"/>
-              </a:rPr>
-              <a:t>src</a:t>
-            </a:r>
-            <a:r>
-              <a:rPr lang="en-US" altLang="ko-KR" sz="2400" dirty="0">
-                <a:latin typeface="+mn-ea"/>
-              </a:rPr>
-              <a:t>, </a:t>
-            </a:r>
-            <a:r>
-              <a:rPr lang="en-US" altLang="ko-KR" sz="2400" dirty="0" err="1">
-                <a:latin typeface="+mn-ea"/>
-              </a:rPr>
-              <a:t>maxValue</a:t>
-            </a:r>
-            <a:r>
-              <a:rPr lang="en-US" altLang="ko-KR" sz="2400" dirty="0">
-                <a:latin typeface="+mn-ea"/>
-              </a:rPr>
-              <a:t>, </a:t>
-            </a:r>
-            <a:r>
-              <a:rPr lang="en-US" altLang="ko-KR" sz="2400" dirty="0" err="1">
-                <a:latin typeface="+mn-ea"/>
-              </a:rPr>
-              <a:t>adaptiveMethod</a:t>
-            </a:r>
-            <a:r>
-              <a:rPr lang="en-US" altLang="ko-KR" sz="2400" dirty="0">
-                <a:latin typeface="+mn-ea"/>
-              </a:rPr>
-              <a:t>, </a:t>
-            </a:r>
-          </a:p>
-          <a:p>
-            <a:pPr marL="0" indent="0">
-              <a:buNone/>
-            </a:pPr>
-            <a:r>
-              <a:rPr lang="en-US" altLang="ko-KR" sz="2400" dirty="0">
-                <a:latin typeface="+mn-ea"/>
-              </a:rPr>
-              <a:t>				  </a:t>
-            </a:r>
-            <a:r>
-              <a:rPr lang="en-US" altLang="ko-KR" sz="2400" dirty="0" err="1">
-                <a:latin typeface="+mn-ea"/>
-              </a:rPr>
-              <a:t>thresholdType</a:t>
-            </a:r>
-            <a:r>
-              <a:rPr lang="en-US" altLang="ko-KR" sz="2400" dirty="0">
-                <a:latin typeface="+mn-ea"/>
-              </a:rPr>
-              <a:t>, </a:t>
-            </a:r>
-            <a:r>
-              <a:rPr lang="en-US" altLang="ko-KR" sz="2400" dirty="0" err="1">
-                <a:latin typeface="+mn-ea"/>
-              </a:rPr>
-              <a:t>blockSize</a:t>
-            </a:r>
-            <a:r>
-              <a:rPr lang="en-US" altLang="ko-KR" sz="2400" dirty="0">
-                <a:latin typeface="+mn-ea"/>
-              </a:rPr>
-              <a:t>, C[, </a:t>
-            </a:r>
-            <a:r>
-              <a:rPr lang="en-US" altLang="ko-KR" sz="2400" dirty="0" err="1">
-                <a:latin typeface="+mn-ea"/>
-              </a:rPr>
-              <a:t>dst</a:t>
-            </a:r>
-            <a:r>
-              <a:rPr lang="en-US" altLang="ko-KR" sz="2400" dirty="0">
-                <a:latin typeface="+mn-ea"/>
-              </a:rPr>
-              <a:t>]) </a:t>
-            </a:r>
-            <a:r>
-              <a:rPr lang="ko-KR" altLang="en-US" sz="2400" dirty="0">
-                <a:latin typeface="+mn-ea"/>
-              </a:rPr>
-              <a:t>→</a:t>
-            </a:r>
-            <a:r>
-              <a:rPr lang="en-US" altLang="ko-KR" sz="2400" dirty="0">
-                <a:latin typeface="+mn-ea"/>
-              </a:rPr>
-              <a:t> </a:t>
-            </a:r>
-            <a:r>
-              <a:rPr lang="en-US" altLang="ko-KR" sz="2400" dirty="0" err="1">
-                <a:latin typeface="+mn-ea"/>
-              </a:rPr>
-              <a:t>dst</a:t>
-            </a:r>
-            <a:r>
-              <a:rPr lang="en-US" altLang="ko-KR" sz="2400" dirty="0">
-                <a:latin typeface="+mn-ea"/>
-              </a:rPr>
-              <a:t> </a:t>
-            </a:r>
-          </a:p>
-          <a:p>
-            <a:pPr lvl="1">
-              <a:lnSpc>
-                <a:spcPct val="150000"/>
-              </a:lnSpc>
-              <a:buFont typeface="Wingdings" panose="05000000000000000000" pitchFamily="2" charset="2"/>
-              <a:buChar char="§"/>
-            </a:pPr>
-            <a:r>
-              <a:rPr lang="en-US" altLang="ko-KR" sz="2000" dirty="0" err="1">
-                <a:latin typeface="+mn-ea"/>
-              </a:rPr>
-              <a:t>src</a:t>
-            </a:r>
-            <a:r>
-              <a:rPr lang="ko-KR" altLang="en-US" sz="2000" dirty="0">
-                <a:latin typeface="+mn-ea"/>
-              </a:rPr>
-              <a:t> </a:t>
-            </a:r>
-            <a:r>
-              <a:rPr lang="en-US" altLang="ko-KR" sz="2000" dirty="0">
-                <a:latin typeface="+mn-ea"/>
-              </a:rPr>
-              <a:t>:</a:t>
-            </a:r>
-            <a:r>
-              <a:rPr lang="ko-KR" altLang="en-US" sz="2000" dirty="0">
-                <a:latin typeface="+mn-ea"/>
-              </a:rPr>
-              <a:t> 입력 배열</a:t>
-            </a:r>
-            <a:endParaRPr lang="en-US" altLang="ko-KR" sz="2000" dirty="0">
-              <a:latin typeface="+mn-ea"/>
-            </a:endParaRPr>
-          </a:p>
-          <a:p>
-            <a:pPr lvl="1">
-              <a:lnSpc>
-                <a:spcPct val="150000"/>
-              </a:lnSpc>
-              <a:buFont typeface="Wingdings" panose="05000000000000000000" pitchFamily="2" charset="2"/>
-              <a:buChar char="§"/>
-            </a:pPr>
-            <a:r>
-              <a:rPr lang="en-US" altLang="ko-KR" sz="2000" dirty="0" err="1">
-                <a:latin typeface="+mn-ea"/>
-              </a:rPr>
-              <a:t>maxValue</a:t>
-            </a:r>
-            <a:r>
-              <a:rPr lang="en-US" altLang="ko-KR" sz="2000" dirty="0">
-                <a:latin typeface="+mn-ea"/>
-              </a:rPr>
-              <a:t>: </a:t>
-            </a:r>
-            <a:r>
-              <a:rPr lang="ko-KR" altLang="en-US" sz="2000" dirty="0">
-                <a:latin typeface="+mn-ea"/>
-              </a:rPr>
-              <a:t>픽셀에 할당할 최대값</a:t>
-            </a:r>
-            <a:endParaRPr lang="en-US" altLang="ko-KR" sz="2000" dirty="0">
-              <a:latin typeface="+mn-ea"/>
-            </a:endParaRPr>
-          </a:p>
-          <a:p>
-            <a:pPr lvl="1">
-              <a:lnSpc>
-                <a:spcPct val="150000"/>
-              </a:lnSpc>
-              <a:buFont typeface="Wingdings" panose="05000000000000000000" pitchFamily="2" charset="2"/>
-              <a:buChar char="§"/>
-            </a:pPr>
-            <a:r>
-              <a:rPr lang="en-US" altLang="ko-KR" sz="2000" dirty="0" err="1">
-                <a:latin typeface="+mn-ea"/>
-              </a:rPr>
-              <a:t>adaptiveMethod</a:t>
-            </a:r>
-            <a:r>
-              <a:rPr lang="en-US" altLang="ko-KR" sz="2000" dirty="0">
-                <a:latin typeface="+mn-ea"/>
-              </a:rPr>
-              <a:t>: </a:t>
-            </a:r>
-            <a:r>
-              <a:rPr lang="ko-KR" altLang="en-US" sz="2000" dirty="0">
-                <a:latin typeface="+mn-ea"/>
-              </a:rPr>
-              <a:t>적응형 </a:t>
-            </a:r>
-            <a:r>
-              <a:rPr lang="ko-KR" altLang="en-US" sz="2000" dirty="0" err="1">
-                <a:latin typeface="+mn-ea"/>
-              </a:rPr>
-              <a:t>임계값</a:t>
-            </a:r>
-            <a:r>
-              <a:rPr lang="ko-KR" altLang="en-US" sz="2000" dirty="0">
-                <a:latin typeface="+mn-ea"/>
-              </a:rPr>
-              <a:t> 알고리즘</a:t>
-            </a:r>
-            <a:endParaRPr lang="en-US" altLang="ko-KR" sz="2000" dirty="0">
-              <a:latin typeface="+mn-ea"/>
-            </a:endParaRPr>
-          </a:p>
-          <a:p>
-            <a:pPr lvl="1">
-              <a:lnSpc>
-                <a:spcPct val="150000"/>
-              </a:lnSpc>
-              <a:buFont typeface="Wingdings" panose="05000000000000000000" pitchFamily="2" charset="2"/>
-              <a:buChar char="§"/>
-            </a:pPr>
-            <a:r>
-              <a:rPr lang="en-US" altLang="ko-KR" sz="2000" dirty="0" err="1">
-                <a:latin typeface="+mn-ea"/>
-              </a:rPr>
-              <a:t>thresholdType</a:t>
-            </a:r>
-            <a:r>
-              <a:rPr lang="en-US" altLang="ko-KR" sz="2000" dirty="0">
-                <a:latin typeface="+mn-ea"/>
-              </a:rPr>
-              <a:t>: </a:t>
-            </a:r>
-            <a:r>
-              <a:rPr lang="ko-KR" altLang="en-US" sz="2000" dirty="0" err="1">
-                <a:latin typeface="+mn-ea"/>
-              </a:rPr>
-              <a:t>임계값</a:t>
-            </a:r>
-            <a:r>
-              <a:rPr lang="ko-KR" altLang="en-US" sz="2000" dirty="0">
-                <a:latin typeface="+mn-ea"/>
-              </a:rPr>
-              <a:t> 설정 유형</a:t>
-            </a:r>
-            <a:endParaRPr lang="en-US" altLang="ko-KR" sz="2000" dirty="0">
-              <a:latin typeface="+mn-ea"/>
-            </a:endParaRPr>
-          </a:p>
-          <a:p>
-            <a:pPr lvl="1">
-              <a:lnSpc>
-                <a:spcPct val="150000"/>
-              </a:lnSpc>
-              <a:buFont typeface="Wingdings" panose="05000000000000000000" pitchFamily="2" charset="2"/>
-              <a:buChar char="§"/>
-            </a:pPr>
-            <a:r>
-              <a:rPr lang="en-US" altLang="ko-KR" sz="2000" dirty="0" err="1">
-                <a:latin typeface="+mn-ea"/>
-              </a:rPr>
-              <a:t>blockSize</a:t>
-            </a:r>
-            <a:r>
-              <a:rPr lang="en-US" altLang="ko-KR" sz="2000" dirty="0">
-                <a:latin typeface="+mn-ea"/>
-              </a:rPr>
-              <a:t>: </a:t>
-            </a:r>
-            <a:r>
-              <a:rPr lang="ko-KR" altLang="en-US" sz="2000" dirty="0">
-                <a:latin typeface="+mn-ea"/>
-              </a:rPr>
-              <a:t>픽셀의 </a:t>
-            </a:r>
-            <a:r>
-              <a:rPr lang="ko-KR" altLang="en-US" sz="2000" dirty="0" err="1">
-                <a:latin typeface="+mn-ea"/>
-              </a:rPr>
-              <a:t>임계값을</a:t>
-            </a:r>
-            <a:r>
-              <a:rPr lang="ko-KR" altLang="en-US" sz="2000" dirty="0">
-                <a:latin typeface="+mn-ea"/>
-              </a:rPr>
-              <a:t> 계산하는 데 사용되는 픽셀 근처의 크기</a:t>
-            </a:r>
-            <a:r>
-              <a:rPr lang="en-US" altLang="ko-KR" sz="2000" dirty="0">
-                <a:latin typeface="+mn-ea"/>
-              </a:rPr>
-              <a:t>(1</a:t>
-            </a:r>
-            <a:r>
-              <a:rPr lang="ko-KR" altLang="en-US" sz="2000" dirty="0">
-                <a:latin typeface="+mn-ea"/>
-              </a:rPr>
-              <a:t>보다 큰 홀수</a:t>
-            </a:r>
-            <a:r>
-              <a:rPr lang="en-US" altLang="ko-KR" sz="2000" dirty="0">
-                <a:latin typeface="+mn-ea"/>
-              </a:rPr>
-              <a:t>)</a:t>
-            </a:r>
-          </a:p>
-          <a:p>
-            <a:pPr lvl="1">
-              <a:lnSpc>
-                <a:spcPct val="150000"/>
-              </a:lnSpc>
-              <a:buFont typeface="Wingdings" panose="05000000000000000000" pitchFamily="2" charset="2"/>
-              <a:buChar char="§"/>
-            </a:pPr>
-            <a:r>
-              <a:rPr lang="en-US" altLang="ko-KR" sz="2000" dirty="0">
-                <a:latin typeface="+mn-ea"/>
-              </a:rPr>
-              <a:t>C	: </a:t>
-            </a:r>
-            <a:r>
-              <a:rPr lang="ko-KR" altLang="en-US" sz="2000" dirty="0">
-                <a:latin typeface="+mn-ea"/>
-              </a:rPr>
-              <a:t>평균 또는 가중 평균에서 뺀 상수</a:t>
-            </a:r>
-            <a:endParaRPr lang="en-US" altLang="ko-KR" sz="2000" dirty="0">
-              <a:latin typeface="+mn-ea"/>
-            </a:endParaRPr>
+              <a:rPr lang="ko-KR" altLang="en-US" sz="2400" i="1" dirty="0"/>
+              <a:t>분포를 보지 않고 모델을 만드는 것 </a:t>
+            </a:r>
+            <a:r>
+              <a:rPr lang="en-US" altLang="ko-KR" sz="2400" i="1" dirty="0"/>
+              <a:t>-&gt; </a:t>
+            </a:r>
+            <a:r>
+              <a:rPr lang="ko-KR" altLang="en-US" sz="2400" i="1" dirty="0"/>
+              <a:t>지도를 보지 않고 길을 가는 것</a:t>
+            </a:r>
           </a:p>
         </p:txBody>
       </p:sp>
     </p:spTree>
     <p:extLst>
       <p:ext uri="{BB962C8B-B14F-4D97-AF65-F5344CB8AC3E}">
-        <p14:creationId xmlns:p14="http://schemas.microsoft.com/office/powerpoint/2010/main" val="3726583388"/>
+        <p14:creationId xmlns:p14="http://schemas.microsoft.com/office/powerpoint/2010/main" val="1911904606"/>
       </p:ext>
     </p:extLst>
   </p:cSld>
@@ -5308,13 +4958,7 @@
   <p:cSld>
     <p:spTree>
       <p:nvGrpSpPr>
-        <p:cNvPr id="1" name="">
-          <a:extLst>
-            <a:ext uri="{FF2B5EF4-FFF2-40B4-BE49-F238E27FC236}">
-              <a16:creationId xmlns:a16="http://schemas.microsoft.com/office/drawing/2014/main" id="{B86C9B32-AE9C-A1CC-25D1-F9DCB52B8FEA}"/>
-            </a:ext>
-          </a:extLst>
-        </p:cNvPr>
+        <p:cNvPr id="1" name=""/>
         <p:cNvGrpSpPr/>
         <p:nvPr/>
       </p:nvGrpSpPr>
@@ -5328,10 +4972,10 @@
       </p:grpSpPr>
       <p:sp>
         <p:nvSpPr>
-          <p:cNvPr id="4" name="날짜 개체 틀 3">
+          <p:cNvPr id="2" name="제목 1">
             <a:extLst>
               <a:ext uri="{FF2B5EF4-FFF2-40B4-BE49-F238E27FC236}">
-                <a16:creationId xmlns:a16="http://schemas.microsoft.com/office/drawing/2014/main" id="{1625618A-D988-8E48-8E69-1327EF7A0AC7}"/>
+                <a16:creationId xmlns:a16="http://schemas.microsoft.com/office/drawing/2014/main" id="{1C23B5B0-6B49-7113-4295-59A62162D10B}"/>
               </a:ext>
             </a:extLst>
           </p:cNvPr>
@@ -5339,7 +4983,7 @@
             <a:spLocks noGrp="1"/>
           </p:cNvSpPr>
           <p:nvPr>
-            <p:ph type="dt" sz="half" idx="10"/>
+            <p:ph type="title"/>
           </p:nvPr>
         </p:nvSpPr>
         <p:spPr/>
@@ -5347,20 +4991,19 @@
           <a:bodyPr/>
           <a:lstStyle/>
           <a:p>
-            <a:fld id="{0F78D9C4-20C1-4B15-A116-16DC77AD9A1E}" type="datetime1">
-              <a:rPr lang="ko-KR" altLang="en-US" smtClean="0"/>
-              <a:t>2026-01-13</a:t>
-            </a:fld>
-            <a:endParaRPr lang="ko-KR" altLang="en-US"/>
+            <a:r>
+              <a:rPr lang="ko-KR" altLang="en-US" dirty="0"/>
+              <a:t>재생에너지 데이터의 분포 특성</a:t>
+            </a:r>
           </a:p>
         </p:txBody>
       </p:sp>
       <p:sp>
         <p:nvSpPr>
-          <p:cNvPr id="5" name="슬라이드 번호 개체 틀 4">
+          <p:cNvPr id="3" name="내용 개체 틀 2">
             <a:extLst>
               <a:ext uri="{FF2B5EF4-FFF2-40B4-BE49-F238E27FC236}">
-                <a16:creationId xmlns:a16="http://schemas.microsoft.com/office/drawing/2014/main" id="{D595B3F3-721C-0FE7-6DFB-908B056AEFE1}"/>
+                <a16:creationId xmlns:a16="http://schemas.microsoft.com/office/drawing/2014/main" id="{90CA1EB8-A84F-184D-F383-40AADB519D85}"/>
               </a:ext>
             </a:extLst>
           </p:cNvPr>
@@ -5368,7 +5011,7 @@
             <a:spLocks noGrp="1"/>
           </p:cNvSpPr>
           <p:nvPr>
-            <p:ph type="sldNum" sz="quarter" idx="12"/>
+            <p:ph idx="1"/>
           </p:nvPr>
         </p:nvSpPr>
         <p:spPr/>
@@ -5376,152 +5019,87 @@
           <a:bodyPr/>
           <a:lstStyle/>
           <a:p>
-            <a:fld id="{083A2CE0-18CD-4102-B738-4ACFF9E68BA4}" type="slidenum">
-              <a:rPr lang="ko-KR" altLang="en-US" smtClean="0"/>
-              <a:t>12</a:t>
-            </a:fld>
-            <a:endParaRPr lang="ko-KR" altLang="en-US"/>
-          </a:p>
-        </p:txBody>
-      </p:sp>
-      <p:sp>
-        <p:nvSpPr>
-          <p:cNvPr id="8" name="TextBox 7">
-            <a:extLst>
-              <a:ext uri="{FF2B5EF4-FFF2-40B4-BE49-F238E27FC236}">
-                <a16:creationId xmlns:a16="http://schemas.microsoft.com/office/drawing/2014/main" id="{BCF39DAF-C252-784A-6344-78F49EA4548A}"/>
-              </a:ext>
-            </a:extLst>
-          </p:cNvPr>
-          <p:cNvSpPr txBox="1"/>
-          <p:nvPr/>
-        </p:nvSpPr>
-        <p:spPr>
-          <a:xfrm>
-            <a:off x="200677" y="110919"/>
-            <a:ext cx="3512500" cy="830997"/>
-          </a:xfrm>
-          <a:prstGeom prst="rect">
-            <a:avLst/>
-          </a:prstGeom>
-          <a:noFill/>
-        </p:spPr>
-        <p:txBody>
-          <a:bodyPr wrap="none" rtlCol="0">
-            <a:spAutoFit/>
-          </a:bodyPr>
-          <a:lstStyle/>
-          <a:p>
-            <a:r>
-              <a:rPr lang="ko-KR" altLang="en-US" sz="4800" b="1" dirty="0">
-                <a:latin typeface="+mj-ea"/>
-                <a:ea typeface="+mj-ea"/>
-              </a:rPr>
-              <a:t>적응형 이진화</a:t>
-            </a:r>
-            <a:endParaRPr lang="ko-KR" altLang="en-US" sz="4800" b="1" dirty="0">
-              <a:solidFill>
-                <a:srgbClr val="2A2A2A"/>
-              </a:solidFill>
-              <a:latin typeface="+mj-ea"/>
-              <a:ea typeface="+mj-ea"/>
-              <a:cs typeface="Pretendard Black" panose="02000A03000000020004" pitchFamily="2" charset="-127"/>
-            </a:endParaRPr>
-          </a:p>
-        </p:txBody>
-      </p:sp>
-      <p:pic>
-        <p:nvPicPr>
-          <p:cNvPr id="7" name="그림 6" descr="텍스트, 스크린샷, 소프트웨어, 디스플레이이(가) 표시된 사진&#10;&#10;자동 생성된 설명">
-            <a:extLst>
-              <a:ext uri="{FF2B5EF4-FFF2-40B4-BE49-F238E27FC236}">
-                <a16:creationId xmlns:a16="http://schemas.microsoft.com/office/drawing/2014/main" id="{7AE718CB-EF35-D0F4-52F2-10E161DF4C97}"/>
-              </a:ext>
-            </a:extLst>
-          </p:cNvPr>
-          <p:cNvPicPr>
-            <a:picLocks noChangeAspect="1"/>
-          </p:cNvPicPr>
-          <p:nvPr/>
-        </p:nvPicPr>
-        <p:blipFill>
-          <a:blip r:embed="rId2">
-            <a:extLst>
-              <a:ext uri="{28A0092B-C50C-407E-A947-70E740481C1C}">
-                <a14:useLocalDpi xmlns:a14="http://schemas.microsoft.com/office/drawing/2010/main" val="0"/>
-              </a:ext>
-            </a:extLst>
-          </a:blip>
-          <a:stretch>
-            <a:fillRect/>
-          </a:stretch>
-        </p:blipFill>
-        <p:spPr>
-          <a:xfrm>
-            <a:off x="1373109" y="660472"/>
-            <a:ext cx="9445782" cy="5955552"/>
-          </a:xfrm>
-          <a:prstGeom prst="rect">
-            <a:avLst/>
-          </a:prstGeom>
-        </p:spPr>
-      </p:pic>
-      <p:sp>
-        <p:nvSpPr>
-          <p:cNvPr id="2" name="직사각형 1">
-            <a:extLst>
-              <a:ext uri="{FF2B5EF4-FFF2-40B4-BE49-F238E27FC236}">
-                <a16:creationId xmlns:a16="http://schemas.microsoft.com/office/drawing/2014/main" id="{7616101C-61A5-44F5-016C-297CCD81AFF8}"/>
-              </a:ext>
-            </a:extLst>
-          </p:cNvPr>
-          <p:cNvSpPr/>
-          <p:nvPr/>
-        </p:nvSpPr>
-        <p:spPr>
-          <a:xfrm>
-            <a:off x="2327505" y="4520688"/>
-            <a:ext cx="7404969" cy="286702"/>
-          </a:xfrm>
-          <a:prstGeom prst="rect">
-            <a:avLst/>
-          </a:prstGeom>
-          <a:noFill/>
-          <a:ln w="25400">
-            <a:solidFill>
-              <a:srgbClr val="FF0066"/>
-            </a:solidFill>
-          </a:ln>
-        </p:spPr>
-        <p:style>
-          <a:lnRef idx="2">
-            <a:schemeClr val="accent1">
-              <a:shade val="15000"/>
-            </a:schemeClr>
-          </a:lnRef>
-          <a:fillRef idx="1">
-            <a:schemeClr val="accent1"/>
-          </a:fillRef>
-          <a:effectRef idx="0">
-            <a:schemeClr val="accent1"/>
-          </a:effectRef>
-          <a:fontRef idx="minor">
-            <a:schemeClr val="lt1"/>
-          </a:fontRef>
-        </p:style>
-        <p:txBody>
-          <a:bodyPr rtlCol="0" anchor="ctr"/>
-          <a:lstStyle/>
-          <a:p>
-            <a:pPr algn="ctr"/>
-            <a:endParaRPr lang="ko-KR" altLang="en-US"/>
+            <a:r>
+              <a:rPr lang="ko-KR" altLang="en-US" dirty="0"/>
+              <a:t>발전량 데이터는 특정 구간</a:t>
+            </a:r>
+            <a:r>
+              <a:rPr lang="en-US" altLang="ko-KR" dirty="0"/>
+              <a:t>(</a:t>
+            </a:r>
+            <a:r>
+              <a:rPr lang="ko-KR" altLang="en-US" dirty="0"/>
+              <a:t>예</a:t>
+            </a:r>
+            <a:r>
+              <a:rPr lang="en-US" altLang="ko-KR" dirty="0"/>
+              <a:t>: 0 </a:t>
+            </a:r>
+            <a:r>
+              <a:rPr lang="ko-KR" altLang="en-US" dirty="0"/>
+              <a:t>또는 낮은 값</a:t>
+            </a:r>
+            <a:r>
+              <a:rPr lang="en-US" altLang="ko-KR" dirty="0"/>
+              <a:t>)</a:t>
+            </a:r>
+            <a:r>
+              <a:rPr lang="ko-KR" altLang="en-US" dirty="0"/>
+              <a:t>에 값이 집중되는 경향이 있다</a:t>
+            </a:r>
+            <a:endParaRPr lang="en-US" altLang="ko-KR" dirty="0"/>
+          </a:p>
+          <a:p>
+            <a:r>
+              <a:rPr lang="ko-KR" altLang="en-US" dirty="0"/>
+              <a:t>야간</a:t>
+            </a:r>
+            <a:r>
+              <a:rPr lang="en-US" altLang="ko-KR" dirty="0"/>
+              <a:t>, </a:t>
+            </a:r>
+            <a:r>
+              <a:rPr lang="ko-KR" altLang="en-US" dirty="0" err="1"/>
+              <a:t>비가동</a:t>
+            </a:r>
+            <a:r>
+              <a:rPr lang="ko-KR" altLang="en-US" dirty="0"/>
+              <a:t> 시간</a:t>
+            </a:r>
+            <a:r>
+              <a:rPr lang="en-US" altLang="ko-KR" dirty="0"/>
+              <a:t>, </a:t>
+            </a:r>
+            <a:r>
+              <a:rPr lang="ko-KR" altLang="en-US" dirty="0"/>
+              <a:t>환경 조건과 밀접한 관련이 있다</a:t>
+            </a:r>
+            <a:endParaRPr lang="en-US" altLang="ko-KR" dirty="0"/>
+          </a:p>
+          <a:p>
+            <a:r>
+              <a:rPr lang="ko-KR" altLang="en-US" dirty="0"/>
+              <a:t>분포의 형태 </a:t>
+            </a:r>
+            <a:r>
+              <a:rPr lang="en-US" altLang="ko-KR" dirty="0"/>
+              <a:t>-&gt; </a:t>
+            </a:r>
+            <a:r>
+              <a:rPr lang="ko-KR" altLang="en-US" dirty="0"/>
+              <a:t>모델 선택과 성능 해석에 직접적인 영향을 줌</a:t>
+            </a:r>
+            <a:endParaRPr lang="en-US" altLang="ko-KR" dirty="0"/>
+          </a:p>
+          <a:p>
+            <a:endParaRPr lang="ko-KR" altLang="en-US" dirty="0"/>
           </a:p>
         </p:txBody>
       </p:sp>
     </p:spTree>
     <p:extLst>
       <p:ext uri="{BB962C8B-B14F-4D97-AF65-F5344CB8AC3E}">
-        <p14:creationId xmlns:p14="http://schemas.microsoft.com/office/powerpoint/2010/main" val="1325453590"/>
+        <p14:creationId xmlns:p14="http://schemas.microsoft.com/office/powerpoint/2010/main" val="3085182321"/>
       </p:ext>
     </p:extLst>
   </p:cSld>
@@ -5532,676 +5110,6 @@
 </file>
 
 <file path=ppt/slides/slide13.xml><?xml version="1.0" encoding="utf-8"?>
-<p:sld xmlns:a="http://schemas.openxmlformats.org/drawingml/2006/main" xmlns:r="http://schemas.openxmlformats.org/officeDocument/2006/relationships" xmlns:p="http://schemas.openxmlformats.org/presentationml/2006/main">
-  <p:cSld>
-    <p:spTree>
-      <p:nvGrpSpPr>
-        <p:cNvPr id="1" name="">
-          <a:extLst>
-            <a:ext uri="{FF2B5EF4-FFF2-40B4-BE49-F238E27FC236}">
-              <a16:creationId xmlns:a16="http://schemas.microsoft.com/office/drawing/2014/main" id="{31E88084-40A5-DA45-9503-9FAE41AB83E3}"/>
-            </a:ext>
-          </a:extLst>
-        </p:cNvPr>
-        <p:cNvGrpSpPr/>
-        <p:nvPr/>
-      </p:nvGrpSpPr>
-      <p:grpSpPr>
-        <a:xfrm>
-          <a:off x="0" y="0"/>
-          <a:ext cx="0" cy="0"/>
-          <a:chOff x="0" y="0"/>
-          <a:chExt cx="0" cy="0"/>
-        </a:xfrm>
-      </p:grpSpPr>
-      <p:sp>
-        <p:nvSpPr>
-          <p:cNvPr id="4" name="날짜 개체 틀 3">
-            <a:extLst>
-              <a:ext uri="{FF2B5EF4-FFF2-40B4-BE49-F238E27FC236}">
-                <a16:creationId xmlns:a16="http://schemas.microsoft.com/office/drawing/2014/main" id="{0F5C0B81-09C3-DD64-8205-3B82870201BF}"/>
-              </a:ext>
-            </a:extLst>
-          </p:cNvPr>
-          <p:cNvSpPr>
-            <a:spLocks noGrp="1"/>
-          </p:cNvSpPr>
-          <p:nvPr>
-            <p:ph type="dt" sz="half" idx="10"/>
-          </p:nvPr>
-        </p:nvSpPr>
-        <p:spPr/>
-        <p:txBody>
-          <a:bodyPr/>
-          <a:lstStyle/>
-          <a:p>
-            <a:fld id="{0F78D9C4-20C1-4B15-A116-16DC77AD9A1E}" type="datetime1">
-              <a:rPr lang="ko-KR" altLang="en-US" smtClean="0"/>
-              <a:t>2026-01-13</a:t>
-            </a:fld>
-            <a:endParaRPr lang="ko-KR" altLang="en-US" dirty="0"/>
-          </a:p>
-        </p:txBody>
-      </p:sp>
-      <p:sp>
-        <p:nvSpPr>
-          <p:cNvPr id="5" name="슬라이드 번호 개체 틀 4">
-            <a:extLst>
-              <a:ext uri="{FF2B5EF4-FFF2-40B4-BE49-F238E27FC236}">
-                <a16:creationId xmlns:a16="http://schemas.microsoft.com/office/drawing/2014/main" id="{48209AF4-17B4-6405-8C7D-37101B98E42C}"/>
-              </a:ext>
-            </a:extLst>
-          </p:cNvPr>
-          <p:cNvSpPr>
-            <a:spLocks noGrp="1"/>
-          </p:cNvSpPr>
-          <p:nvPr>
-            <p:ph type="sldNum" sz="quarter" idx="12"/>
-          </p:nvPr>
-        </p:nvSpPr>
-        <p:spPr/>
-        <p:txBody>
-          <a:bodyPr/>
-          <a:lstStyle/>
-          <a:p>
-            <a:fld id="{083A2CE0-18CD-4102-B738-4ACFF9E68BA4}" type="slidenum">
-              <a:rPr lang="ko-KR" altLang="en-US" smtClean="0"/>
-              <a:t>13</a:t>
-            </a:fld>
-            <a:endParaRPr lang="ko-KR" altLang="en-US"/>
-          </a:p>
-        </p:txBody>
-      </p:sp>
-      <p:sp>
-        <p:nvSpPr>
-          <p:cNvPr id="8" name="TextBox 7">
-            <a:extLst>
-              <a:ext uri="{FF2B5EF4-FFF2-40B4-BE49-F238E27FC236}">
-                <a16:creationId xmlns:a16="http://schemas.microsoft.com/office/drawing/2014/main" id="{D6AF9582-BF10-7F4F-D363-CB49356705F0}"/>
-              </a:ext>
-            </a:extLst>
-          </p:cNvPr>
-          <p:cNvSpPr txBox="1"/>
-          <p:nvPr/>
-        </p:nvSpPr>
-        <p:spPr>
-          <a:xfrm>
-            <a:off x="200677" y="110919"/>
-            <a:ext cx="3512500" cy="830997"/>
-          </a:xfrm>
-          <a:prstGeom prst="rect">
-            <a:avLst/>
-          </a:prstGeom>
-          <a:noFill/>
-        </p:spPr>
-        <p:txBody>
-          <a:bodyPr wrap="none" rtlCol="0">
-            <a:spAutoFit/>
-          </a:bodyPr>
-          <a:lstStyle/>
-          <a:p>
-            <a:r>
-              <a:rPr lang="ko-KR" altLang="en-US" sz="4800" b="1" dirty="0" err="1">
-                <a:solidFill>
-                  <a:srgbClr val="2A2A2A"/>
-                </a:solidFill>
-                <a:latin typeface="+mj-ea"/>
-                <a:ea typeface="+mj-ea"/>
-                <a:cs typeface="Pretendard Black" panose="02000A03000000020004" pitchFamily="2" charset="-127"/>
-              </a:rPr>
-              <a:t>오츠</a:t>
-            </a:r>
-            <a:r>
-              <a:rPr lang="ko-KR" altLang="en-US" sz="4800" b="1" dirty="0">
-                <a:solidFill>
-                  <a:srgbClr val="2A2A2A"/>
-                </a:solidFill>
-                <a:latin typeface="+mj-ea"/>
-                <a:ea typeface="+mj-ea"/>
-                <a:cs typeface="Pretendard Black" panose="02000A03000000020004" pitchFamily="2" charset="-127"/>
-              </a:rPr>
-              <a:t> 알고리즘</a:t>
-            </a:r>
-          </a:p>
-        </p:txBody>
-      </p:sp>
-      <p:sp>
-        <p:nvSpPr>
-          <p:cNvPr id="9" name="내용 개체 틀 2">
-            <a:extLst>
-              <a:ext uri="{FF2B5EF4-FFF2-40B4-BE49-F238E27FC236}">
-                <a16:creationId xmlns:a16="http://schemas.microsoft.com/office/drawing/2014/main" id="{231C0691-2C92-FCF0-62CD-2ECE6DDC0B1A}"/>
-              </a:ext>
-            </a:extLst>
-          </p:cNvPr>
-          <p:cNvSpPr>
-            <a:spLocks noGrp="1"/>
-          </p:cNvSpPr>
-          <p:nvPr>
-            <p:ph idx="1"/>
-          </p:nvPr>
-        </p:nvSpPr>
-        <p:spPr>
-          <a:xfrm>
-            <a:off x="2340838" y="1060159"/>
-            <a:ext cx="7510321" cy="2669072"/>
-          </a:xfrm>
-        </p:spPr>
-        <p:txBody>
-          <a:bodyPr>
-            <a:noAutofit/>
-          </a:bodyPr>
-          <a:lstStyle/>
-          <a:p>
-            <a:pPr marL="0" indent="0">
-              <a:lnSpc>
-                <a:spcPct val="150000"/>
-              </a:lnSpc>
-              <a:buNone/>
-            </a:pPr>
-            <a:r>
-              <a:rPr lang="ko-KR" altLang="en-US" sz="2400" b="1" dirty="0"/>
-              <a:t>💡 최적의 </a:t>
-            </a:r>
-            <a:r>
-              <a:rPr lang="en-US" altLang="ko-KR" sz="2400" b="1" dirty="0"/>
-              <a:t>Threshold</a:t>
-            </a:r>
-            <a:r>
-              <a:rPr lang="ko-KR" altLang="en-US" sz="2400" b="1" dirty="0"/>
-              <a:t>를 찾는 알고리즘</a:t>
-            </a:r>
-            <a:endParaRPr lang="en-US" altLang="ko-KR" sz="2400" b="1" dirty="0"/>
-          </a:p>
-          <a:p>
-            <a:pPr lvl="1">
-              <a:lnSpc>
-                <a:spcPct val="150000"/>
-              </a:lnSpc>
-              <a:buFont typeface="Wingdings" pitchFamily="2" charset="2"/>
-              <a:buChar char="§"/>
-            </a:pPr>
-            <a:r>
-              <a:rPr lang="ko-KR" altLang="en-US" sz="2000" dirty="0"/>
-              <a:t>히스토그램 분석을 통해 </a:t>
-            </a:r>
-            <a:r>
-              <a:rPr lang="ko-KR" altLang="en-US" sz="2000" b="1" dirty="0"/>
-              <a:t>자동으로 최적의 </a:t>
-            </a:r>
-            <a:r>
-              <a:rPr lang="ko-KR" altLang="en-US" sz="2000" b="1" dirty="0" err="1"/>
-              <a:t>임계값을</a:t>
-            </a:r>
-            <a:r>
-              <a:rPr lang="ko-KR" altLang="en-US" sz="2000" b="1" dirty="0"/>
-              <a:t> 계산</a:t>
-            </a:r>
-            <a:r>
-              <a:rPr lang="ko-KR" altLang="en-US" sz="2000" dirty="0"/>
-              <a:t>함</a:t>
-            </a:r>
-            <a:endParaRPr lang="en-US" altLang="ko-KR" sz="2000" dirty="0"/>
-          </a:p>
-          <a:p>
-            <a:pPr marL="1257300" lvl="2" indent="-342900">
-              <a:lnSpc>
-                <a:spcPct val="150000"/>
-              </a:lnSpc>
-              <a:buFont typeface="+mj-lt"/>
-              <a:buAutoNum type="arabicPeriod"/>
-            </a:pPr>
-            <a:r>
-              <a:rPr lang="ko-KR" altLang="en-US" sz="1600" dirty="0"/>
-              <a:t>두 그룹</a:t>
-            </a:r>
-            <a:r>
-              <a:rPr lang="en-US" altLang="ko-KR" sz="1600" dirty="0"/>
-              <a:t>(</a:t>
-            </a:r>
-            <a:r>
-              <a:rPr lang="ko-KR" altLang="en-US" sz="1600" dirty="0"/>
-              <a:t>검은색과 흰색</a:t>
-            </a:r>
-            <a:r>
-              <a:rPr lang="en-US" altLang="ko-KR" sz="1600" dirty="0"/>
-              <a:t>) </a:t>
-            </a:r>
-            <a:r>
-              <a:rPr lang="ko-KR" altLang="en-US" sz="1600" dirty="0"/>
-              <a:t>간의 평균값 차이를 최대화하면서</a:t>
-            </a:r>
-            <a:r>
-              <a:rPr lang="en-US" altLang="ko-KR" sz="1600" dirty="0"/>
-              <a:t>,</a:t>
-            </a:r>
-          </a:p>
-          <a:p>
-            <a:pPr marL="1257300" lvl="2" indent="-342900">
-              <a:lnSpc>
-                <a:spcPct val="150000"/>
-              </a:lnSpc>
-              <a:buFont typeface="+mj-lt"/>
-              <a:buAutoNum type="arabicPeriod"/>
-            </a:pPr>
-            <a:r>
-              <a:rPr lang="ko-KR" altLang="en-US" sz="1600" dirty="0"/>
-              <a:t>각 그룹 내부의 분산</a:t>
-            </a:r>
-            <a:r>
-              <a:rPr lang="en-US" altLang="ko-KR" sz="1600" dirty="0"/>
-              <a:t>(</a:t>
-            </a:r>
-            <a:r>
-              <a:rPr lang="ko-KR" altLang="en-US" sz="1600" dirty="0"/>
-              <a:t>값의 퍼짐</a:t>
-            </a:r>
-            <a:r>
-              <a:rPr lang="en-US" altLang="ko-KR" sz="1600" dirty="0"/>
-              <a:t>)</a:t>
-            </a:r>
-            <a:r>
-              <a:rPr lang="ko-KR" altLang="en-US" sz="1600" dirty="0"/>
-              <a:t>을 최소화하는 </a:t>
-            </a:r>
-            <a:r>
-              <a:rPr lang="ko-KR" altLang="en-US" sz="1600" dirty="0" err="1"/>
-              <a:t>임계값을</a:t>
-            </a:r>
-            <a:r>
-              <a:rPr lang="ko-KR" altLang="en-US" sz="1600" dirty="0"/>
-              <a:t> 찾는 것을 목표로 함</a:t>
-            </a:r>
-            <a:r>
-              <a:rPr lang="en-US" altLang="ko-KR" sz="1600" dirty="0"/>
-              <a:t>.</a:t>
-            </a:r>
-          </a:p>
-          <a:p>
-            <a:pPr lvl="1">
-              <a:lnSpc>
-                <a:spcPct val="150000"/>
-              </a:lnSpc>
-              <a:buFont typeface="Wingdings" pitchFamily="2" charset="2"/>
-              <a:buChar char="§"/>
-            </a:pPr>
-            <a:r>
-              <a:rPr lang="ko-KR" altLang="en-US" sz="2000" dirty="0"/>
-              <a:t>이미지의 명암이 뚜렷할 때</a:t>
-            </a:r>
-            <a:r>
-              <a:rPr lang="en-US" altLang="ko-KR" sz="2000" dirty="0"/>
-              <a:t>(Bimodal Image) </a:t>
-            </a:r>
-            <a:r>
-              <a:rPr lang="ko-KR" altLang="en-US" sz="2000" dirty="0"/>
-              <a:t>효과적</a:t>
-            </a:r>
-            <a:endParaRPr lang="en-US" altLang="ko-KR" sz="2000" dirty="0"/>
-          </a:p>
-        </p:txBody>
-      </p:sp>
-      <p:grpSp>
-        <p:nvGrpSpPr>
-          <p:cNvPr id="3" name="그룹 2"/>
-          <p:cNvGrpSpPr/>
-          <p:nvPr/>
-        </p:nvGrpSpPr>
-        <p:grpSpPr>
-          <a:xfrm>
-            <a:off x="2305770" y="3605236"/>
-            <a:ext cx="7580459" cy="2796535"/>
-            <a:chOff x="2598057" y="3781817"/>
-            <a:chExt cx="6995886" cy="2580878"/>
-          </a:xfrm>
-        </p:grpSpPr>
-        <p:pic>
-          <p:nvPicPr>
-            <p:cNvPr id="8194" name="Picture 2" descr="Histograms | Theory">
-              <a:extLst>
-                <a:ext uri="{FF2B5EF4-FFF2-40B4-BE49-F238E27FC236}">
-                  <a16:creationId xmlns:a16="http://schemas.microsoft.com/office/drawing/2014/main" id="{93DAB1CE-3C3C-91FC-AD58-5B6A58D528DF}"/>
-                </a:ext>
-              </a:extLst>
-            </p:cNvPr>
-            <p:cNvPicPr>
-              <a:picLocks noChangeAspect="1" noChangeArrowheads="1"/>
-            </p:cNvPicPr>
-            <p:nvPr/>
-          </p:nvPicPr>
-          <p:blipFill rotWithShape="1">
-            <a:blip r:embed="rId2">
-              <a:extLst>
-                <a:ext uri="{28A0092B-C50C-407E-A947-70E740481C1C}">
-                  <a14:useLocalDpi xmlns:a14="http://schemas.microsoft.com/office/drawing/2010/main" val="0"/>
-                </a:ext>
-              </a:extLst>
-            </a:blip>
-            <a:srcRect l="6133" b="13429"/>
-            <a:stretch/>
-          </p:blipFill>
-          <p:spPr bwMode="auto">
-            <a:xfrm>
-              <a:off x="2598057" y="3781817"/>
-              <a:ext cx="6995886" cy="2580878"/>
-            </a:xfrm>
-            <a:prstGeom prst="rect">
-              <a:avLst/>
-            </a:prstGeom>
-            <a:noFill/>
-            <a:extLst>
-              <a:ext uri="{909E8E84-426E-40DD-AFC4-6F175D3DCCD1}">
-                <a14:hiddenFill xmlns:a14="http://schemas.microsoft.com/office/drawing/2010/main">
-                  <a:solidFill>
-                    <a:srgbClr val="FFFFFF"/>
-                  </a:solidFill>
-                </a14:hiddenFill>
-              </a:ext>
-            </a:extLst>
-          </p:spPr>
-        </p:pic>
-        <p:sp>
-          <p:nvSpPr>
-            <p:cNvPr id="2" name="직사각형 1">
-              <a:extLst>
-                <a:ext uri="{FF2B5EF4-FFF2-40B4-BE49-F238E27FC236}">
-                  <a16:creationId xmlns:a16="http://schemas.microsoft.com/office/drawing/2014/main" id="{054E98B5-F226-797E-9258-1B9EEBCA15A0}"/>
-                </a:ext>
-              </a:extLst>
-            </p:cNvPr>
-            <p:cNvSpPr/>
-            <p:nvPr/>
-          </p:nvSpPr>
-          <p:spPr>
-            <a:xfrm>
-              <a:off x="4949371" y="3877004"/>
-              <a:ext cx="2236289" cy="2390503"/>
-            </a:xfrm>
-            <a:prstGeom prst="rect">
-              <a:avLst/>
-            </a:prstGeom>
-            <a:noFill/>
-            <a:ln w="38100">
-              <a:solidFill>
-                <a:srgbClr val="FF0000"/>
-              </a:solidFill>
-            </a:ln>
-          </p:spPr>
-          <p:style>
-            <a:lnRef idx="2">
-              <a:schemeClr val="accent1">
-                <a:shade val="15000"/>
-              </a:schemeClr>
-            </a:lnRef>
-            <a:fillRef idx="1">
-              <a:schemeClr val="accent1"/>
-            </a:fillRef>
-            <a:effectRef idx="0">
-              <a:schemeClr val="accent1"/>
-            </a:effectRef>
-            <a:fontRef idx="minor">
-              <a:schemeClr val="lt1"/>
-            </a:fontRef>
-          </p:style>
-          <p:txBody>
-            <a:bodyPr rtlCol="0" anchor="ctr"/>
-            <a:lstStyle/>
-            <a:p>
-              <a:pPr algn="ctr"/>
-              <a:endParaRPr lang="ko-KR" altLang="en-US"/>
-            </a:p>
-          </p:txBody>
-        </p:sp>
-      </p:grpSp>
-    </p:spTree>
-    <p:extLst>
-      <p:ext uri="{BB962C8B-B14F-4D97-AF65-F5344CB8AC3E}">
-        <p14:creationId xmlns:p14="http://schemas.microsoft.com/office/powerpoint/2010/main" val="2102653101"/>
-      </p:ext>
-    </p:extLst>
-  </p:cSld>
-  <p:clrMapOvr>
-    <a:masterClrMapping/>
-  </p:clrMapOvr>
-</p:sld>
-</file>
-
-<file path=ppt/slides/slide14.xml><?xml version="1.0" encoding="utf-8"?>
-<p:sld xmlns:a="http://schemas.openxmlformats.org/drawingml/2006/main" xmlns:r="http://schemas.openxmlformats.org/officeDocument/2006/relationships" xmlns:p="http://schemas.openxmlformats.org/presentationml/2006/main">
-  <p:cSld>
-    <p:spTree>
-      <p:nvGrpSpPr>
-        <p:cNvPr id="1" name="">
-          <a:extLst>
-            <a:ext uri="{FF2B5EF4-FFF2-40B4-BE49-F238E27FC236}">
-              <a16:creationId xmlns:a16="http://schemas.microsoft.com/office/drawing/2014/main" id="{15466832-3411-B665-FCA8-74A172CB180F}"/>
-            </a:ext>
-          </a:extLst>
-        </p:cNvPr>
-        <p:cNvGrpSpPr/>
-        <p:nvPr/>
-      </p:nvGrpSpPr>
-      <p:grpSpPr>
-        <a:xfrm>
-          <a:off x="0" y="0"/>
-          <a:ext cx="0" cy="0"/>
-          <a:chOff x="0" y="0"/>
-          <a:chExt cx="0" cy="0"/>
-        </a:xfrm>
-      </p:grpSpPr>
-      <p:sp>
-        <p:nvSpPr>
-          <p:cNvPr id="4" name="날짜 개체 틀 3">
-            <a:extLst>
-              <a:ext uri="{FF2B5EF4-FFF2-40B4-BE49-F238E27FC236}">
-                <a16:creationId xmlns:a16="http://schemas.microsoft.com/office/drawing/2014/main" id="{B35D1596-75C4-ECE1-B0C3-761B6996B449}"/>
-              </a:ext>
-            </a:extLst>
-          </p:cNvPr>
-          <p:cNvSpPr>
-            <a:spLocks noGrp="1"/>
-          </p:cNvSpPr>
-          <p:nvPr>
-            <p:ph type="dt" sz="half" idx="10"/>
-          </p:nvPr>
-        </p:nvSpPr>
-        <p:spPr/>
-        <p:txBody>
-          <a:bodyPr/>
-          <a:lstStyle/>
-          <a:p>
-            <a:fld id="{0F78D9C4-20C1-4B15-A116-16DC77AD9A1E}" type="datetime1">
-              <a:rPr lang="ko-KR" altLang="en-US" smtClean="0"/>
-              <a:t>2026-01-13</a:t>
-            </a:fld>
-            <a:endParaRPr lang="ko-KR" altLang="en-US" dirty="0"/>
-          </a:p>
-        </p:txBody>
-      </p:sp>
-      <p:sp>
-        <p:nvSpPr>
-          <p:cNvPr id="5" name="슬라이드 번호 개체 틀 4">
-            <a:extLst>
-              <a:ext uri="{FF2B5EF4-FFF2-40B4-BE49-F238E27FC236}">
-                <a16:creationId xmlns:a16="http://schemas.microsoft.com/office/drawing/2014/main" id="{FD1ABF02-10DC-810A-6DC9-DE6DE145D838}"/>
-              </a:ext>
-            </a:extLst>
-          </p:cNvPr>
-          <p:cNvSpPr>
-            <a:spLocks noGrp="1"/>
-          </p:cNvSpPr>
-          <p:nvPr>
-            <p:ph type="sldNum" sz="quarter" idx="12"/>
-          </p:nvPr>
-        </p:nvSpPr>
-        <p:spPr/>
-        <p:txBody>
-          <a:bodyPr/>
-          <a:lstStyle/>
-          <a:p>
-            <a:fld id="{083A2CE0-18CD-4102-B738-4ACFF9E68BA4}" type="slidenum">
-              <a:rPr lang="ko-KR" altLang="en-US" smtClean="0"/>
-              <a:t>14</a:t>
-            </a:fld>
-            <a:endParaRPr lang="ko-KR" altLang="en-US"/>
-          </a:p>
-        </p:txBody>
-      </p:sp>
-      <p:sp>
-        <p:nvSpPr>
-          <p:cNvPr id="8" name="TextBox 7">
-            <a:extLst>
-              <a:ext uri="{FF2B5EF4-FFF2-40B4-BE49-F238E27FC236}">
-                <a16:creationId xmlns:a16="http://schemas.microsoft.com/office/drawing/2014/main" id="{8D45496C-2E04-CF59-0E59-8694238EC382}"/>
-              </a:ext>
-            </a:extLst>
-          </p:cNvPr>
-          <p:cNvSpPr txBox="1"/>
-          <p:nvPr/>
-        </p:nvSpPr>
-        <p:spPr>
-          <a:xfrm>
-            <a:off x="200677" y="110919"/>
-            <a:ext cx="3512500" cy="830997"/>
-          </a:xfrm>
-          <a:prstGeom prst="rect">
-            <a:avLst/>
-          </a:prstGeom>
-          <a:noFill/>
-        </p:spPr>
-        <p:txBody>
-          <a:bodyPr wrap="none" rtlCol="0">
-            <a:spAutoFit/>
-          </a:bodyPr>
-          <a:lstStyle/>
-          <a:p>
-            <a:r>
-              <a:rPr lang="ko-KR" altLang="en-US" sz="4800" b="1" dirty="0" err="1">
-                <a:solidFill>
-                  <a:srgbClr val="2A2A2A"/>
-                </a:solidFill>
-                <a:latin typeface="+mj-ea"/>
-                <a:ea typeface="+mj-ea"/>
-                <a:cs typeface="Pretendard Black" panose="02000A03000000020004" pitchFamily="2" charset="-127"/>
-              </a:rPr>
-              <a:t>오츠</a:t>
-            </a:r>
-            <a:r>
-              <a:rPr lang="ko-KR" altLang="en-US" sz="4800" b="1" dirty="0">
-                <a:solidFill>
-                  <a:srgbClr val="2A2A2A"/>
-                </a:solidFill>
-                <a:latin typeface="+mj-ea"/>
-                <a:ea typeface="+mj-ea"/>
-                <a:cs typeface="Pretendard Black" panose="02000A03000000020004" pitchFamily="2" charset="-127"/>
-              </a:rPr>
-              <a:t> 알고리즘</a:t>
-            </a:r>
-          </a:p>
-        </p:txBody>
-      </p:sp>
-      <p:pic>
-        <p:nvPicPr>
-          <p:cNvPr id="7" name="그림 6" descr="텍스트, 스크린샷, 소프트웨어, 디스플레이이(가) 표시된 사진&#10;&#10;자동 생성된 설명">
-            <a:extLst>
-              <a:ext uri="{FF2B5EF4-FFF2-40B4-BE49-F238E27FC236}">
-                <a16:creationId xmlns:a16="http://schemas.microsoft.com/office/drawing/2014/main" id="{F1991D7F-3041-42B8-8A42-C922B366A73E}"/>
-              </a:ext>
-            </a:extLst>
-          </p:cNvPr>
-          <p:cNvPicPr>
-            <a:picLocks noChangeAspect="1"/>
-          </p:cNvPicPr>
-          <p:nvPr/>
-        </p:nvPicPr>
-        <p:blipFill>
-          <a:blip r:embed="rId2">
-            <a:extLst>
-              <a:ext uri="{28A0092B-C50C-407E-A947-70E740481C1C}">
-                <a14:useLocalDpi xmlns:a14="http://schemas.microsoft.com/office/drawing/2010/main" val="0"/>
-              </a:ext>
-            </a:extLst>
-          </a:blip>
-          <a:stretch>
-            <a:fillRect/>
-          </a:stretch>
-        </p:blipFill>
-        <p:spPr>
-          <a:xfrm>
-            <a:off x="0" y="1192512"/>
-            <a:ext cx="12192000" cy="4879375"/>
-          </a:xfrm>
-          <a:prstGeom prst="rect">
-            <a:avLst/>
-          </a:prstGeom>
-        </p:spPr>
-      </p:pic>
-      <p:sp>
-        <p:nvSpPr>
-          <p:cNvPr id="2" name="직사각형 1">
-            <a:extLst>
-              <a:ext uri="{FF2B5EF4-FFF2-40B4-BE49-F238E27FC236}">
-                <a16:creationId xmlns:a16="http://schemas.microsoft.com/office/drawing/2014/main" id="{F5C87B47-40AF-F11D-CF3D-70814518C51E}"/>
-              </a:ext>
-            </a:extLst>
-          </p:cNvPr>
-          <p:cNvSpPr/>
-          <p:nvPr/>
-        </p:nvSpPr>
-        <p:spPr>
-          <a:xfrm>
-            <a:off x="7148286" y="3207145"/>
-            <a:ext cx="1604475" cy="283541"/>
-          </a:xfrm>
-          <a:prstGeom prst="rect">
-            <a:avLst/>
-          </a:prstGeom>
-          <a:noFill/>
-          <a:ln w="25400">
-            <a:solidFill>
-              <a:srgbClr val="FF0066"/>
-            </a:solidFill>
-          </a:ln>
-        </p:spPr>
-        <p:style>
-          <a:lnRef idx="2">
-            <a:schemeClr val="accent1">
-              <a:shade val="15000"/>
-            </a:schemeClr>
-          </a:lnRef>
-          <a:fillRef idx="1">
-            <a:schemeClr val="accent1"/>
-          </a:fillRef>
-          <a:effectRef idx="0">
-            <a:schemeClr val="accent1"/>
-          </a:effectRef>
-          <a:fontRef idx="minor">
-            <a:schemeClr val="lt1"/>
-          </a:fontRef>
-        </p:style>
-        <p:txBody>
-          <a:bodyPr rtlCol="0" anchor="ctr"/>
-          <a:lstStyle/>
-          <a:p>
-            <a:pPr algn="ctr"/>
-            <a:endParaRPr lang="ko-KR" altLang="en-US"/>
-          </a:p>
-        </p:txBody>
-      </p:sp>
-    </p:spTree>
-    <p:extLst>
-      <p:ext uri="{BB962C8B-B14F-4D97-AF65-F5344CB8AC3E}">
-        <p14:creationId xmlns:p14="http://schemas.microsoft.com/office/powerpoint/2010/main" val="1360079078"/>
-      </p:ext>
-    </p:extLst>
-  </p:cSld>
-  <p:clrMapOvr>
-    <a:masterClrMapping/>
-  </p:clrMapOvr>
-</p:sld>
-</file>
-
-<file path=ppt/slides/slide15.xml><?xml version="1.0" encoding="utf-8"?>
 <p:sld xmlns:a="http://schemas.openxmlformats.org/drawingml/2006/main" xmlns:r="http://schemas.openxmlformats.org/officeDocument/2006/relationships" xmlns:p="http://schemas.openxmlformats.org/presentationml/2006/main">
   <p:cSld>
     <p:spTree>
@@ -6697,7 +5605,7 @@
           <a:p>
             <a:fld id="{0F78D9C4-20C1-4B15-A116-16DC77AD9A1E}" type="datetime1">
               <a:rPr lang="ko-KR" altLang="en-US" smtClean="0"/>
-              <a:t>2026-01-13</a:t>
+              <a:t>2026-01-14</a:t>
             </a:fld>
             <a:endParaRPr lang="ko-KR" altLang="en-US"/>
           </a:p>
@@ -9881,7 +8789,7 @@
           <a:p>
             <a:fld id="{0F78D9C4-20C1-4B15-A116-16DC77AD9A1E}" type="datetime1">
               <a:rPr lang="ko-KR" altLang="en-US" smtClean="0"/>
-              <a:t>2026-01-13</a:t>
+              <a:t>2026-01-14</a:t>
             </a:fld>
             <a:endParaRPr lang="ko-KR" altLang="en-US"/>
           </a:p>
@@ -10017,7 +8925,7 @@
           <a:p>
             <a:fld id="{0F78D9C4-20C1-4B15-A116-16DC77AD9A1E}" type="datetime1">
               <a:rPr lang="ko-KR" altLang="en-US" smtClean="0"/>
-              <a:t>2026-01-13</a:t>
+              <a:t>2026-01-14</a:t>
             </a:fld>
             <a:endParaRPr lang="ko-KR" altLang="en-US"/>
           </a:p>
@@ -10406,7 +9314,7 @@
           <p:nvPr/>
         </p:nvPicPr>
         <p:blipFill>
-          <a:blip r:embed="rId2">
+          <a:blip r:embed="rId3">
             <a:extLst>
               <a:ext uri="{28A0092B-C50C-407E-A947-70E740481C1C}">
                 <a14:useLocalDpi xmlns:a14="http://schemas.microsoft.com/office/drawing/2010/main" val="0"/>
@@ -10461,7 +9369,7 @@
                   <a:spcPts val="600"/>
                 </a:spcAft>
               </a:pPr>
-              <a:t>2026-01-13</a:t>
+              <a:t>2026-01-14</a:t>
             </a:fld>
             <a:endParaRPr lang="ko-KR" altLang="en-US"/>
           </a:p>

--- a/material/5_AI/04_데이터 전처리와 EDA 기초.pptx
+++ b/material/5_AI/04_데이터 전처리와 EDA 기초.pptx
@@ -5,7 +5,7 @@
     <p:sldMasterId id="2147483660" r:id="rId1"/>
   </p:sldMasterIdLst>
   <p:notesMasterIdLst>
-    <p:notesMasterId r:id="rId15"/>
+    <p:notesMasterId r:id="rId21"/>
   </p:notesMasterIdLst>
   <p:sldIdLst>
     <p:sldId id="1020" r:id="rId2"/>
@@ -20,7 +20,13 @@
     <p:sldId id="1023" r:id="rId11"/>
     <p:sldId id="1024" r:id="rId12"/>
     <p:sldId id="1025" r:id="rId13"/>
-    <p:sldId id="836" r:id="rId14"/>
+    <p:sldId id="1026" r:id="rId14"/>
+    <p:sldId id="1028" r:id="rId15"/>
+    <p:sldId id="1030" r:id="rId16"/>
+    <p:sldId id="1029" r:id="rId17"/>
+    <p:sldId id="1031" r:id="rId18"/>
+    <p:sldId id="1032" r:id="rId19"/>
+    <p:sldId id="836" r:id="rId20"/>
   </p:sldIdLst>
   <p:sldSz cx="12192000" cy="6858000"/>
   <p:notesSz cx="6858000" cy="9144000"/>
@@ -230,7 +236,7 @@
             <a:fld id="{A13A867C-D490-40C2-AB8D-A60FA70A9BF5}" type="datetimeFigureOut">
               <a:rPr lang="ko-KR" altLang="en-US" smtClean="0"/>
               <a:pPr/>
-              <a:t>2026-01-14</a:t>
+              <a:t>2026-01-15</a:t>
             </a:fld>
             <a:endParaRPr lang="ko-KR" altLang="en-US" dirty="0"/>
           </a:p>
@@ -605,6 +611,433 @@
 </p:notes>
 </file>
 
+<file path=ppt/notesSlides/notesSlide10.xml><?xml version="1.0" encoding="utf-8"?>
+<p:notes xmlns:a="http://schemas.openxmlformats.org/drawingml/2006/main" xmlns:r="http://schemas.openxmlformats.org/officeDocument/2006/relationships" xmlns:p="http://schemas.openxmlformats.org/presentationml/2006/main">
+  <p:cSld>
+    <p:spTree>
+      <p:nvGrpSpPr>
+        <p:cNvPr id="1" name=""/>
+        <p:cNvGrpSpPr/>
+        <p:nvPr/>
+      </p:nvGrpSpPr>
+      <p:grpSpPr>
+        <a:xfrm>
+          <a:off x="0" y="0"/>
+          <a:ext cx="0" cy="0"/>
+          <a:chOff x="0" y="0"/>
+          <a:chExt cx="0" cy="0"/>
+        </a:xfrm>
+      </p:grpSpPr>
+      <p:sp>
+        <p:nvSpPr>
+          <p:cNvPr id="2" name="슬라이드 이미지 개체 틀 1"/>
+          <p:cNvSpPr>
+            <a:spLocks noGrp="1" noRot="1" noChangeAspect="1"/>
+          </p:cNvSpPr>
+          <p:nvPr>
+            <p:ph type="sldImg"/>
+          </p:nvPr>
+        </p:nvSpPr>
+        <p:spPr/>
+      </p:sp>
+      <p:sp>
+        <p:nvSpPr>
+          <p:cNvPr id="3" name="슬라이드 노트 개체 틀 2"/>
+          <p:cNvSpPr>
+            <a:spLocks noGrp="1"/>
+          </p:cNvSpPr>
+          <p:nvPr>
+            <p:ph type="body" idx="1"/>
+          </p:nvPr>
+        </p:nvSpPr>
+        <p:spPr/>
+        <p:txBody>
+          <a:bodyPr/>
+          <a:lstStyle/>
+          <a:p>
+            <a:r>
+              <a:rPr lang="ko-KR" altLang="en-US" b="1" dirty="0"/>
+              <a:t>추가 자료 </a:t>
+            </a:r>
+            <a:r>
+              <a:rPr lang="en-US" altLang="ko-KR" b="1" dirty="0"/>
+              <a:t>2: </a:t>
+            </a:r>
+            <a:r>
+              <a:rPr lang="ko-KR" altLang="en-US" b="1" dirty="0"/>
+              <a:t>발전량 </a:t>
+            </a:r>
+            <a:r>
+              <a:rPr lang="en-US" altLang="ko-KR" b="1" dirty="0"/>
+              <a:t>vs </a:t>
+            </a:r>
+            <a:r>
+              <a:rPr lang="ko-KR" altLang="en-US" b="1" dirty="0"/>
+              <a:t>환경 변수 </a:t>
+            </a:r>
+            <a:r>
+              <a:rPr lang="ko-KR" altLang="en-US" b="1" dirty="0" err="1"/>
+              <a:t>산점도</a:t>
+            </a:r>
+            <a:endParaRPr lang="ko-KR" altLang="en-US" b="1" dirty="0"/>
+          </a:p>
+          <a:p>
+            <a:r>
+              <a:rPr lang="ko-KR" altLang="en-US" b="1" dirty="0"/>
+              <a:t>추천 조합</a:t>
+            </a:r>
+          </a:p>
+          <a:p>
+            <a:r>
+              <a:rPr lang="ko-KR" altLang="en-US" dirty="0"/>
+              <a:t>발전량 </a:t>
+            </a:r>
+            <a:r>
+              <a:rPr lang="en-US" altLang="ko-KR" dirty="0"/>
+              <a:t>vs </a:t>
+            </a:r>
+            <a:r>
+              <a:rPr lang="ko-KR" altLang="en-US" dirty="0"/>
+              <a:t>일사량</a:t>
+            </a:r>
+          </a:p>
+          <a:p>
+            <a:r>
+              <a:rPr lang="ko-KR" altLang="en-US" dirty="0"/>
+              <a:t>발전량 </a:t>
+            </a:r>
+            <a:r>
+              <a:rPr lang="en-US" altLang="ko-KR" dirty="0"/>
+              <a:t>vs </a:t>
+            </a:r>
+            <a:r>
+              <a:rPr lang="ko-KR" altLang="en-US" dirty="0"/>
+              <a:t>풍속</a:t>
+            </a:r>
+          </a:p>
+          <a:p>
+            <a:r>
+              <a:rPr lang="ko-KR" altLang="en-US" dirty="0"/>
+              <a:t>발전량 </a:t>
+            </a:r>
+            <a:r>
+              <a:rPr lang="en-US" altLang="ko-KR" dirty="0"/>
+              <a:t>vs </a:t>
+            </a:r>
+            <a:r>
+              <a:rPr lang="ko-KR" altLang="en-US" dirty="0"/>
+              <a:t>기온</a:t>
+            </a:r>
+          </a:p>
+          <a:p>
+            <a:r>
+              <a:rPr lang="en-US" altLang="ko-KR" dirty="0"/>
+              <a:t>(</a:t>
+            </a:r>
+            <a:r>
+              <a:rPr lang="ko-KR" altLang="en-US" dirty="0"/>
+              <a:t>실제 데이터가 없어도 </a:t>
+            </a:r>
+            <a:r>
+              <a:rPr lang="ko-KR" altLang="en-US" b="1" dirty="0"/>
+              <a:t>형태 설명용 이미지면 충분</a:t>
+            </a:r>
+            <a:r>
+              <a:rPr lang="en-US" altLang="ko-KR" dirty="0"/>
+              <a:t>)</a:t>
+            </a:r>
+          </a:p>
+          <a:p>
+            <a:endParaRPr lang="en-US" altLang="ko-KR" dirty="0"/>
+          </a:p>
+          <a:p>
+            <a:r>
+              <a:rPr lang="ko-KR" altLang="en-US" dirty="0"/>
+              <a:t>관계는 </a:t>
+            </a:r>
+            <a:r>
+              <a:rPr lang="ko-KR" altLang="en-US" b="1" dirty="0"/>
+              <a:t>구간별로 다르게 나타날 수 있다</a:t>
+            </a:r>
+            <a:endParaRPr lang="ko-KR" altLang="en-US" dirty="0"/>
+          </a:p>
+          <a:p>
+            <a:r>
+              <a:rPr lang="ko-KR" altLang="en-US" dirty="0"/>
+              <a:t>일정 수준 이후에는 증가 효과가 둔화될 수 있다</a:t>
+            </a:r>
+          </a:p>
+          <a:p>
+            <a:r>
+              <a:rPr lang="ko-KR" altLang="en-US" dirty="0"/>
+              <a:t>일부 변수는 특정 조건에서만 의미를 가진다</a:t>
+            </a:r>
+          </a:p>
+          <a:p>
+            <a:endParaRPr lang="en-US" altLang="ko-KR" dirty="0"/>
+          </a:p>
+          <a:p>
+            <a:endParaRPr lang="ko-KR" altLang="en-US" dirty="0"/>
+          </a:p>
+        </p:txBody>
+      </p:sp>
+      <p:sp>
+        <p:nvSpPr>
+          <p:cNvPr id="4" name="슬라이드 번호 개체 틀 3"/>
+          <p:cNvSpPr>
+            <a:spLocks noGrp="1"/>
+          </p:cNvSpPr>
+          <p:nvPr>
+            <p:ph type="sldNum" sz="quarter" idx="5"/>
+          </p:nvPr>
+        </p:nvSpPr>
+        <p:spPr/>
+        <p:txBody>
+          <a:bodyPr/>
+          <a:lstStyle/>
+          <a:p>
+            <a:fld id="{3E35EA20-6519-4513-9EDC-C89C5369BAEC}" type="slidenum">
+              <a:rPr lang="ko-KR" altLang="en-US" smtClean="0"/>
+              <a:pPr/>
+              <a:t>17</a:t>
+            </a:fld>
+            <a:endParaRPr lang="ko-KR" altLang="en-US" dirty="0"/>
+          </a:p>
+        </p:txBody>
+      </p:sp>
+    </p:spTree>
+    <p:extLst>
+      <p:ext uri="{BB962C8B-B14F-4D97-AF65-F5344CB8AC3E}">
+        <p14:creationId xmlns:p14="http://schemas.microsoft.com/office/powerpoint/2010/main" val="48835251"/>
+      </p:ext>
+    </p:extLst>
+  </p:cSld>
+  <p:clrMapOvr>
+    <a:masterClrMapping/>
+  </p:clrMapOvr>
+</p:notes>
+</file>
+
+<file path=ppt/notesSlides/notesSlide11.xml><?xml version="1.0" encoding="utf-8"?>
+<p:notes xmlns:a="http://schemas.openxmlformats.org/drawingml/2006/main" xmlns:r="http://schemas.openxmlformats.org/officeDocument/2006/relationships" xmlns:p="http://schemas.openxmlformats.org/presentationml/2006/main">
+  <p:cSld>
+    <p:spTree>
+      <p:nvGrpSpPr>
+        <p:cNvPr id="1" name=""/>
+        <p:cNvGrpSpPr/>
+        <p:nvPr/>
+      </p:nvGrpSpPr>
+      <p:grpSpPr>
+        <a:xfrm>
+          <a:off x="0" y="0"/>
+          <a:ext cx="0" cy="0"/>
+          <a:chOff x="0" y="0"/>
+          <a:chExt cx="0" cy="0"/>
+        </a:xfrm>
+      </p:grpSpPr>
+      <p:sp>
+        <p:nvSpPr>
+          <p:cNvPr id="2" name="슬라이드 이미지 개체 틀 1"/>
+          <p:cNvSpPr>
+            <a:spLocks noGrp="1" noRot="1" noChangeAspect="1"/>
+          </p:cNvSpPr>
+          <p:nvPr>
+            <p:ph type="sldImg"/>
+          </p:nvPr>
+        </p:nvSpPr>
+        <p:spPr/>
+      </p:sp>
+      <p:sp>
+        <p:nvSpPr>
+          <p:cNvPr id="3" name="슬라이드 노트 개체 틀 2"/>
+          <p:cNvSpPr>
+            <a:spLocks noGrp="1"/>
+          </p:cNvSpPr>
+          <p:nvPr>
+            <p:ph type="body" idx="1"/>
+          </p:nvPr>
+        </p:nvSpPr>
+        <p:spPr/>
+        <p:txBody>
+          <a:bodyPr/>
+          <a:lstStyle/>
+          <a:p>
+            <a:r>
+              <a:rPr lang="ko-KR" altLang="en-US" b="1" dirty="0"/>
+              <a:t>상관관계와 인과관계는 다르다</a:t>
+            </a:r>
+            <a:endParaRPr lang="ko-KR" altLang="en-US" dirty="0"/>
+          </a:p>
+          <a:p>
+            <a:r>
+              <a:rPr lang="ko-KR" altLang="en-US" b="1" dirty="0"/>
+              <a:t>활용 포인트</a:t>
+            </a:r>
+          </a:p>
+          <a:p>
+            <a:r>
+              <a:rPr lang="ko-KR" altLang="en-US" dirty="0"/>
+              <a:t>아이스크림 판매량 </a:t>
+            </a:r>
+            <a:r>
+              <a:rPr lang="en-US" altLang="ko-KR" dirty="0"/>
+              <a:t>vs </a:t>
+            </a:r>
+            <a:r>
+              <a:rPr lang="ko-KR" altLang="en-US"/>
+              <a:t>익사 사고 예시</a:t>
+            </a:r>
+          </a:p>
+          <a:p>
+            <a:endParaRPr lang="ko-KR" altLang="en-US"/>
+          </a:p>
+        </p:txBody>
+      </p:sp>
+      <p:sp>
+        <p:nvSpPr>
+          <p:cNvPr id="4" name="슬라이드 번호 개체 틀 3"/>
+          <p:cNvSpPr>
+            <a:spLocks noGrp="1"/>
+          </p:cNvSpPr>
+          <p:nvPr>
+            <p:ph type="sldNum" sz="quarter" idx="5"/>
+          </p:nvPr>
+        </p:nvSpPr>
+        <p:spPr/>
+        <p:txBody>
+          <a:bodyPr/>
+          <a:lstStyle/>
+          <a:p>
+            <a:fld id="{3E35EA20-6519-4513-9EDC-C89C5369BAEC}" type="slidenum">
+              <a:rPr lang="ko-KR" altLang="en-US" smtClean="0"/>
+              <a:pPr/>
+              <a:t>18</a:t>
+            </a:fld>
+            <a:endParaRPr lang="ko-KR" altLang="en-US" dirty="0"/>
+          </a:p>
+        </p:txBody>
+      </p:sp>
+    </p:spTree>
+    <p:extLst>
+      <p:ext uri="{BB962C8B-B14F-4D97-AF65-F5344CB8AC3E}">
+        <p14:creationId xmlns:p14="http://schemas.microsoft.com/office/powerpoint/2010/main" val="3810910262"/>
+      </p:ext>
+    </p:extLst>
+  </p:cSld>
+  <p:clrMapOvr>
+    <a:masterClrMapping/>
+  </p:clrMapOvr>
+</p:notes>
+</file>
+
+<file path=ppt/notesSlides/notesSlide12.xml><?xml version="1.0" encoding="utf-8"?>
+<p:notes xmlns:a="http://schemas.openxmlformats.org/drawingml/2006/main" xmlns:r="http://schemas.openxmlformats.org/officeDocument/2006/relationships" xmlns:p="http://schemas.openxmlformats.org/presentationml/2006/main">
+  <p:cSld>
+    <p:spTree>
+      <p:nvGrpSpPr>
+        <p:cNvPr id="1" name="">
+          <a:extLst>
+            <a:ext uri="{FF2B5EF4-FFF2-40B4-BE49-F238E27FC236}">
+              <a16:creationId xmlns:a16="http://schemas.microsoft.com/office/drawing/2014/main" id="{A9D2EE83-52CB-E118-49CB-3EBDD6EF25B9}"/>
+            </a:ext>
+          </a:extLst>
+        </p:cNvPr>
+        <p:cNvGrpSpPr/>
+        <p:nvPr/>
+      </p:nvGrpSpPr>
+      <p:grpSpPr>
+        <a:xfrm>
+          <a:off x="0" y="0"/>
+          <a:ext cx="0" cy="0"/>
+          <a:chOff x="0" y="0"/>
+          <a:chExt cx="0" cy="0"/>
+        </a:xfrm>
+      </p:grpSpPr>
+      <p:sp>
+        <p:nvSpPr>
+          <p:cNvPr id="2" name="슬라이드 이미지 개체 틀 1">
+            <a:extLst>
+              <a:ext uri="{FF2B5EF4-FFF2-40B4-BE49-F238E27FC236}">
+                <a16:creationId xmlns:a16="http://schemas.microsoft.com/office/drawing/2014/main" id="{30F83B01-3943-C359-9322-8EB719FB824B}"/>
+              </a:ext>
+            </a:extLst>
+          </p:cNvPr>
+          <p:cNvSpPr>
+            <a:spLocks noGrp="1" noRot="1" noChangeAspect="1"/>
+          </p:cNvSpPr>
+          <p:nvPr>
+            <p:ph type="sldImg"/>
+          </p:nvPr>
+        </p:nvSpPr>
+        <p:spPr/>
+      </p:sp>
+      <p:sp>
+        <p:nvSpPr>
+          <p:cNvPr id="3" name="슬라이드 노트 개체 틀 2">
+            <a:extLst>
+              <a:ext uri="{FF2B5EF4-FFF2-40B4-BE49-F238E27FC236}">
+                <a16:creationId xmlns:a16="http://schemas.microsoft.com/office/drawing/2014/main" id="{F2F259CF-8156-0FB2-87BB-C2421F329EA1}"/>
+              </a:ext>
+            </a:extLst>
+          </p:cNvPr>
+          <p:cNvSpPr>
+            <a:spLocks noGrp="1"/>
+          </p:cNvSpPr>
+          <p:nvPr>
+            <p:ph type="body" idx="1"/>
+          </p:nvPr>
+        </p:nvSpPr>
+        <p:spPr/>
+        <p:txBody>
+          <a:bodyPr/>
+          <a:lstStyle/>
+          <a:p>
+            <a:endParaRPr lang="ko-KR" altLang="en-US" dirty="0"/>
+          </a:p>
+        </p:txBody>
+      </p:sp>
+      <p:sp>
+        <p:nvSpPr>
+          <p:cNvPr id="4" name="슬라이드 번호 개체 틀 3">
+            <a:extLst>
+              <a:ext uri="{FF2B5EF4-FFF2-40B4-BE49-F238E27FC236}">
+                <a16:creationId xmlns:a16="http://schemas.microsoft.com/office/drawing/2014/main" id="{5301DD34-5BFE-877A-E657-9B3A6B1B5CDD}"/>
+              </a:ext>
+            </a:extLst>
+          </p:cNvPr>
+          <p:cNvSpPr>
+            <a:spLocks noGrp="1"/>
+          </p:cNvSpPr>
+          <p:nvPr>
+            <p:ph type="sldNum" sz="quarter" idx="10"/>
+          </p:nvPr>
+        </p:nvSpPr>
+        <p:spPr/>
+        <p:txBody>
+          <a:bodyPr/>
+          <a:lstStyle/>
+          <a:p>
+            <a:fld id="{A0085365-8376-4996-BDD6-F39608FADAF3}" type="slidenum">
+              <a:rPr lang="ko-KR" altLang="en-US" smtClean="0"/>
+              <a:t>19</a:t>
+            </a:fld>
+            <a:endParaRPr lang="ko-KR" altLang="en-US"/>
+          </a:p>
+        </p:txBody>
+      </p:sp>
+    </p:spTree>
+    <p:extLst>
+      <p:ext uri="{BB962C8B-B14F-4D97-AF65-F5344CB8AC3E}">
+        <p14:creationId xmlns:p14="http://schemas.microsoft.com/office/powerpoint/2010/main" val="2391645545"/>
+      </p:ext>
+    </p:extLst>
+  </p:cSld>
+  <p:clrMapOvr>
+    <a:masterClrMapping/>
+  </p:clrMapOvr>
+</p:notes>
+</file>
+
 <file path=ppt/notesSlides/notesSlide2.xml><?xml version="1.0" encoding="utf-8"?>
 <p:notes xmlns:a="http://schemas.openxmlformats.org/drawingml/2006/main" xmlns:r="http://schemas.openxmlformats.org/officeDocument/2006/relationships" xmlns:p="http://schemas.openxmlformats.org/presentationml/2006/main">
   <p:cSld>
@@ -2659,13 +3092,7 @@
   <p:cSld>
     <p:spTree>
       <p:nvGrpSpPr>
-        <p:cNvPr id="1" name="">
-          <a:extLst>
-            <a:ext uri="{FF2B5EF4-FFF2-40B4-BE49-F238E27FC236}">
-              <a16:creationId xmlns:a16="http://schemas.microsoft.com/office/drawing/2014/main" id="{A9D2EE83-52CB-E118-49CB-3EBDD6EF25B9}"/>
-            </a:ext>
-          </a:extLst>
-        </p:cNvPr>
+        <p:cNvPr id="1" name=""/>
         <p:cNvGrpSpPr/>
         <p:nvPr/>
       </p:nvGrpSpPr>
@@ -2679,13 +3106,7 @@
       </p:grpSpPr>
       <p:sp>
         <p:nvSpPr>
-          <p:cNvPr id="2" name="슬라이드 이미지 개체 틀 1">
-            <a:extLst>
-              <a:ext uri="{FF2B5EF4-FFF2-40B4-BE49-F238E27FC236}">
-                <a16:creationId xmlns:a16="http://schemas.microsoft.com/office/drawing/2014/main" id="{30F83B01-3943-C359-9322-8EB719FB824B}"/>
-              </a:ext>
-            </a:extLst>
-          </p:cNvPr>
+          <p:cNvPr id="2" name="슬라이드 이미지 개체 틀 1"/>
           <p:cNvSpPr>
             <a:spLocks noGrp="1" noRot="1" noChangeAspect="1"/>
           </p:cNvSpPr>
@@ -2697,13 +3118,7 @@
       </p:sp>
       <p:sp>
         <p:nvSpPr>
-          <p:cNvPr id="3" name="슬라이드 노트 개체 틀 2">
-            <a:extLst>
-              <a:ext uri="{FF2B5EF4-FFF2-40B4-BE49-F238E27FC236}">
-                <a16:creationId xmlns:a16="http://schemas.microsoft.com/office/drawing/2014/main" id="{F2F259CF-8156-0FB2-87BB-C2421F329EA1}"/>
-              </a:ext>
-            </a:extLst>
-          </p:cNvPr>
+          <p:cNvPr id="3" name="슬라이드 노트 개체 틀 2"/>
           <p:cNvSpPr>
             <a:spLocks noGrp="1"/>
           </p:cNvSpPr>
@@ -2716,24 +3131,60 @@
           <a:bodyPr/>
           <a:lstStyle/>
           <a:p>
+            <a:r>
+              <a:rPr lang="ko-KR" altLang="en-US" dirty="0"/>
+              <a:t>데이터가 대칭적인 분포를 가질 때는</a:t>
+            </a:r>
+            <a:br>
+              <a:rPr lang="ko-KR" altLang="en-US" dirty="0"/>
+            </a:br>
+            <a:r>
+              <a:rPr lang="ko-KR" altLang="en-US" dirty="0"/>
+              <a:t>평균이 </a:t>
+            </a:r>
+            <a:r>
+              <a:rPr lang="ko-KR" altLang="en-US" dirty="0" err="1"/>
+              <a:t>대표값</a:t>
+            </a:r>
+            <a:r>
+              <a:rPr lang="ko-KR" altLang="en-US" dirty="0"/>
+              <a:t> 역할을 할 수 있다</a:t>
+            </a:r>
+            <a:r>
+              <a:rPr lang="en-US" altLang="ko-KR" dirty="0"/>
+              <a:t>.</a:t>
+            </a:r>
+          </a:p>
+          <a:p>
+            <a:r>
+              <a:rPr lang="ko-KR" altLang="en-US" dirty="0"/>
+              <a:t>하지만 분포가 한쪽으로 치우치면</a:t>
+            </a:r>
+            <a:br>
+              <a:rPr lang="ko-KR" altLang="en-US" dirty="0"/>
+            </a:br>
+            <a:r>
+              <a:rPr lang="ko-KR" altLang="en-US" dirty="0"/>
+              <a:t>평균은 실제 데이터의 중심을 왜곡해서 보여줄 수 있다</a:t>
+            </a:r>
+            <a:r>
+              <a:rPr lang="en-US" altLang="ko-KR" dirty="0"/>
+              <a:t>.</a:t>
+            </a:r>
+          </a:p>
+          <a:p>
             <a:endParaRPr lang="ko-KR" altLang="en-US" dirty="0"/>
           </a:p>
         </p:txBody>
       </p:sp>
       <p:sp>
         <p:nvSpPr>
-          <p:cNvPr id="4" name="슬라이드 번호 개체 틀 3">
-            <a:extLst>
-              <a:ext uri="{FF2B5EF4-FFF2-40B4-BE49-F238E27FC236}">
-                <a16:creationId xmlns:a16="http://schemas.microsoft.com/office/drawing/2014/main" id="{5301DD34-5BFE-877A-E657-9B3A6B1B5CDD}"/>
-              </a:ext>
-            </a:extLst>
-          </p:cNvPr>
+          <p:cNvPr id="4" name="슬라이드 번호 개체 틀 3"/>
           <p:cNvSpPr>
             <a:spLocks noGrp="1"/>
           </p:cNvSpPr>
           <p:nvPr>
-            <p:ph type="sldNum" sz="quarter" idx="10"/>
+            <p:ph type="sldNum" sz="quarter" idx="5"/>
           </p:nvPr>
         </p:nvSpPr>
         <p:spPr/>
@@ -2741,18 +3192,410 @@
           <a:bodyPr/>
           <a:lstStyle/>
           <a:p>
-            <a:fld id="{A0085365-8376-4996-BDD6-F39608FADAF3}" type="slidenum">
+            <a:fld id="{3E35EA20-6519-4513-9EDC-C89C5369BAEC}" type="slidenum">
               <a:rPr lang="ko-KR" altLang="en-US" smtClean="0"/>
-              <a:t>13</a:t>
+              <a:pPr/>
+              <a:t>11</a:t>
             </a:fld>
-            <a:endParaRPr lang="ko-KR" altLang="en-US"/>
+            <a:endParaRPr lang="ko-KR" altLang="en-US" dirty="0"/>
           </a:p>
         </p:txBody>
       </p:sp>
     </p:spTree>
     <p:extLst>
       <p:ext uri="{BB962C8B-B14F-4D97-AF65-F5344CB8AC3E}">
-        <p14:creationId xmlns:p14="http://schemas.microsoft.com/office/powerpoint/2010/main" val="2391645545"/>
+        <p14:creationId xmlns:p14="http://schemas.microsoft.com/office/powerpoint/2010/main" val="2984038642"/>
+      </p:ext>
+    </p:extLst>
+  </p:cSld>
+  <p:clrMapOvr>
+    <a:masterClrMapping/>
+  </p:clrMapOvr>
+</p:notes>
+</file>
+
+<file path=ppt/notesSlides/notesSlide8.xml><?xml version="1.0" encoding="utf-8"?>
+<p:notes xmlns:a="http://schemas.openxmlformats.org/drawingml/2006/main" xmlns:r="http://schemas.openxmlformats.org/officeDocument/2006/relationships" xmlns:p="http://schemas.openxmlformats.org/presentationml/2006/main">
+  <p:cSld>
+    <p:spTree>
+      <p:nvGrpSpPr>
+        <p:cNvPr id="1" name=""/>
+        <p:cNvGrpSpPr/>
+        <p:nvPr/>
+      </p:nvGrpSpPr>
+      <p:grpSpPr>
+        <a:xfrm>
+          <a:off x="0" y="0"/>
+          <a:ext cx="0" cy="0"/>
+          <a:chOff x="0" y="0"/>
+          <a:chExt cx="0" cy="0"/>
+        </a:xfrm>
+      </p:grpSpPr>
+      <p:sp>
+        <p:nvSpPr>
+          <p:cNvPr id="2" name="슬라이드 이미지 개체 틀 1"/>
+          <p:cNvSpPr>
+            <a:spLocks noGrp="1" noRot="1" noChangeAspect="1"/>
+          </p:cNvSpPr>
+          <p:nvPr>
+            <p:ph type="sldImg"/>
+          </p:nvPr>
+        </p:nvSpPr>
+        <p:spPr/>
+      </p:sp>
+      <p:sp>
+        <p:nvSpPr>
+          <p:cNvPr id="3" name="슬라이드 노트 개체 틀 2"/>
+          <p:cNvSpPr>
+            <a:spLocks noGrp="1"/>
+          </p:cNvSpPr>
+          <p:nvPr>
+            <p:ph type="body" idx="1"/>
+          </p:nvPr>
+        </p:nvSpPr>
+        <p:spPr/>
+        <p:txBody>
+          <a:bodyPr/>
+          <a:lstStyle/>
+          <a:p>
+            <a:pPr marL="0" marR="0" lvl="0" indent="0" algn="l" defTabSz="914400" rtl="0" eaLnBrk="1" fontAlgn="auto" latinLnBrk="1" hangingPunct="1">
+              <a:lnSpc>
+                <a:spcPct val="100000"/>
+              </a:lnSpc>
+              <a:spcBef>
+                <a:spcPts val="0"/>
+              </a:spcBef>
+              <a:spcAft>
+                <a:spcPts val="0"/>
+              </a:spcAft>
+              <a:buClrTx/>
+              <a:buSzTx/>
+              <a:buFontTx/>
+              <a:buNone/>
+              <a:tabLst/>
+              <a:defRPr/>
+            </a:pPr>
+            <a:r>
+              <a:rPr lang="en-US" altLang="ko-KR" sz="1200" b="1" i="0" kern="1200" dirty="0">
+                <a:solidFill>
+                  <a:schemeClr val="tx1"/>
+                </a:solidFill>
+                <a:effectLst/>
+                <a:latin typeface="Kim jung chul Gothic Regular" panose="020B0503000000000000" pitchFamily="50" charset="-127"/>
+                <a:ea typeface="Kim jung chul Gothic Regular" panose="020B0503000000000000" pitchFamily="50" charset="-127"/>
+                <a:cs typeface="+mn-cs"/>
+              </a:rPr>
+              <a:t>The Zero Inflated Poisson Regression Model</a:t>
+            </a:r>
+          </a:p>
+          <a:p>
+            <a:r>
+              <a:rPr lang="ko-KR" altLang="en-US" dirty="0"/>
+              <a:t> </a:t>
+            </a:r>
+            <a:r>
+              <a:rPr lang="en-US" altLang="ko-KR" dirty="0"/>
+              <a:t>- </a:t>
+            </a:r>
+            <a:r>
+              <a:rPr lang="ko-KR" altLang="en-US" sz="1200" b="0" i="0" kern="1200" dirty="0">
+                <a:solidFill>
+                  <a:schemeClr val="tx1"/>
+                </a:solidFill>
+                <a:effectLst/>
+                <a:latin typeface="Kim jung chul Gothic Regular" panose="020B0503000000000000" pitchFamily="50" charset="-127"/>
+                <a:ea typeface="Kim jung chul Gothic Regular" panose="020B0503000000000000" pitchFamily="50" charset="-127"/>
+                <a:cs typeface="+mn-cs"/>
+              </a:rPr>
+              <a:t>대부분의 관측치가 </a:t>
+            </a:r>
+            <a:r>
+              <a:rPr lang="en-US" altLang="ko-KR" sz="1200" b="0" i="0" kern="1200" dirty="0">
+                <a:solidFill>
+                  <a:schemeClr val="tx1"/>
+                </a:solidFill>
+                <a:effectLst/>
+                <a:latin typeface="Kim jung chul Gothic Regular" panose="020B0503000000000000" pitchFamily="50" charset="-127"/>
+                <a:ea typeface="Kim jung chul Gothic Regular" panose="020B0503000000000000" pitchFamily="50" charset="-127"/>
+                <a:cs typeface="+mn-cs"/>
+              </a:rPr>
+              <a:t>0</a:t>
+            </a:r>
+            <a:r>
+              <a:rPr lang="ko-KR" altLang="en-US" sz="1200" b="0" i="0" kern="1200" dirty="0">
+                <a:solidFill>
+                  <a:schemeClr val="tx1"/>
+                </a:solidFill>
+                <a:effectLst/>
+                <a:latin typeface="Kim jung chul Gothic Regular" panose="020B0503000000000000" pitchFamily="50" charset="-127"/>
+                <a:ea typeface="Kim jung chul Gothic Regular" panose="020B0503000000000000" pitchFamily="50" charset="-127"/>
+                <a:cs typeface="+mn-cs"/>
+              </a:rPr>
+              <a:t>에 </a:t>
+            </a:r>
+            <a:r>
+              <a:rPr lang="ko-KR" altLang="en-US" sz="1200" b="0" i="0" kern="1200" dirty="0" err="1">
+                <a:solidFill>
+                  <a:schemeClr val="tx1"/>
+                </a:solidFill>
+                <a:effectLst/>
+                <a:latin typeface="Kim jung chul Gothic Regular" panose="020B0503000000000000" pitchFamily="50" charset="-127"/>
+                <a:ea typeface="Kim jung chul Gothic Regular" panose="020B0503000000000000" pitchFamily="50" charset="-127"/>
+                <a:cs typeface="+mn-cs"/>
+              </a:rPr>
+              <a:t>몰려있으면서</a:t>
+            </a:r>
+            <a:r>
+              <a:rPr lang="en-US" altLang="ko-KR" sz="1200" b="0" i="0" kern="1200" dirty="0">
+                <a:solidFill>
+                  <a:schemeClr val="tx1"/>
+                </a:solidFill>
+                <a:effectLst/>
+                <a:latin typeface="Kim jung chul Gothic Regular" panose="020B0503000000000000" pitchFamily="50" charset="-127"/>
+                <a:ea typeface="Kim jung chul Gothic Regular" panose="020B0503000000000000" pitchFamily="50" charset="-127"/>
+                <a:cs typeface="+mn-cs"/>
+              </a:rPr>
+              <a:t>, 0</a:t>
+            </a:r>
+            <a:r>
+              <a:rPr lang="ko-KR" altLang="en-US" sz="1200" b="0" i="0" kern="1200" dirty="0">
+                <a:solidFill>
+                  <a:schemeClr val="tx1"/>
+                </a:solidFill>
+                <a:effectLst/>
+                <a:latin typeface="Kim jung chul Gothic Regular" panose="020B0503000000000000" pitchFamily="50" charset="-127"/>
+                <a:ea typeface="Kim jung chul Gothic Regular" panose="020B0503000000000000" pitchFamily="50" charset="-127"/>
+                <a:cs typeface="+mn-cs"/>
+              </a:rPr>
+              <a:t>이 아닌 관측치들이 </a:t>
+            </a:r>
+            <a:r>
+              <a:rPr lang="ko-KR" altLang="en-US" sz="1200" b="0" i="0" kern="1200" dirty="0" err="1">
+                <a:solidFill>
+                  <a:schemeClr val="tx1"/>
+                </a:solidFill>
+                <a:effectLst/>
+                <a:latin typeface="Kim jung chul Gothic Regular" panose="020B0503000000000000" pitchFamily="50" charset="-127"/>
+                <a:ea typeface="Kim jung chul Gothic Regular" panose="020B0503000000000000" pitchFamily="50" charset="-127"/>
+                <a:cs typeface="+mn-cs"/>
+              </a:rPr>
+              <a:t>포아송</a:t>
+            </a:r>
+            <a:r>
+              <a:rPr lang="ko-KR" altLang="en-US" sz="1200" b="0" i="0" kern="1200" dirty="0">
+                <a:solidFill>
+                  <a:schemeClr val="tx1"/>
+                </a:solidFill>
+                <a:effectLst/>
+                <a:latin typeface="Kim jung chul Gothic Regular" panose="020B0503000000000000" pitchFamily="50" charset="-127"/>
+                <a:ea typeface="Kim jung chul Gothic Regular" panose="020B0503000000000000" pitchFamily="50" charset="-127"/>
+                <a:cs typeface="+mn-cs"/>
+              </a:rPr>
+              <a:t> 분포를 따르는 케이스</a:t>
+            </a:r>
+            <a:endParaRPr lang="ko-KR" altLang="en-US" dirty="0"/>
+          </a:p>
+        </p:txBody>
+      </p:sp>
+      <p:sp>
+        <p:nvSpPr>
+          <p:cNvPr id="4" name="슬라이드 번호 개체 틀 3"/>
+          <p:cNvSpPr>
+            <a:spLocks noGrp="1"/>
+          </p:cNvSpPr>
+          <p:nvPr>
+            <p:ph type="sldNum" sz="quarter" idx="5"/>
+          </p:nvPr>
+        </p:nvSpPr>
+        <p:spPr/>
+        <p:txBody>
+          <a:bodyPr/>
+          <a:lstStyle/>
+          <a:p>
+            <a:fld id="{3E35EA20-6519-4513-9EDC-C89C5369BAEC}" type="slidenum">
+              <a:rPr lang="ko-KR" altLang="en-US" smtClean="0"/>
+              <a:pPr/>
+              <a:t>13</a:t>
+            </a:fld>
+            <a:endParaRPr lang="ko-KR" altLang="en-US" dirty="0"/>
+          </a:p>
+        </p:txBody>
+      </p:sp>
+    </p:spTree>
+    <p:extLst>
+      <p:ext uri="{BB962C8B-B14F-4D97-AF65-F5344CB8AC3E}">
+        <p14:creationId xmlns:p14="http://schemas.microsoft.com/office/powerpoint/2010/main" val="4068343339"/>
+      </p:ext>
+    </p:extLst>
+  </p:cSld>
+  <p:clrMapOvr>
+    <a:masterClrMapping/>
+  </p:clrMapOvr>
+</p:notes>
+</file>
+
+<file path=ppt/notesSlides/notesSlide9.xml><?xml version="1.0" encoding="utf-8"?>
+<p:notes xmlns:a="http://schemas.openxmlformats.org/drawingml/2006/main" xmlns:r="http://schemas.openxmlformats.org/officeDocument/2006/relationships" xmlns:p="http://schemas.openxmlformats.org/presentationml/2006/main">
+  <p:cSld>
+    <p:spTree>
+      <p:nvGrpSpPr>
+        <p:cNvPr id="1" name=""/>
+        <p:cNvGrpSpPr/>
+        <p:nvPr/>
+      </p:nvGrpSpPr>
+      <p:grpSpPr>
+        <a:xfrm>
+          <a:off x="0" y="0"/>
+          <a:ext cx="0" cy="0"/>
+          <a:chOff x="0" y="0"/>
+          <a:chExt cx="0" cy="0"/>
+        </a:xfrm>
+      </p:grpSpPr>
+      <p:sp>
+        <p:nvSpPr>
+          <p:cNvPr id="2" name="슬라이드 이미지 개체 틀 1"/>
+          <p:cNvSpPr>
+            <a:spLocks noGrp="1" noRot="1" noChangeAspect="1"/>
+          </p:cNvSpPr>
+          <p:nvPr>
+            <p:ph type="sldImg"/>
+          </p:nvPr>
+        </p:nvSpPr>
+        <p:spPr/>
+      </p:sp>
+      <p:sp>
+        <p:nvSpPr>
+          <p:cNvPr id="3" name="슬라이드 노트 개체 틀 2"/>
+          <p:cNvSpPr>
+            <a:spLocks noGrp="1"/>
+          </p:cNvSpPr>
+          <p:nvPr>
+            <p:ph type="body" idx="1"/>
+          </p:nvPr>
+        </p:nvSpPr>
+        <p:spPr/>
+        <p:txBody>
+          <a:bodyPr/>
+          <a:lstStyle/>
+          <a:p>
+            <a:r>
+              <a:rPr lang="en-US" altLang="ko-KR" b="1" dirty="0"/>
+              <a:t>(1) </a:t>
+            </a:r>
+            <a:r>
+              <a:rPr lang="ko-KR" altLang="en-US" b="1" dirty="0"/>
+              <a:t>선형 관계</a:t>
+            </a:r>
+          </a:p>
+          <a:p>
+            <a:r>
+              <a:rPr lang="ko-KR" altLang="en-US" dirty="0"/>
+              <a:t>점들이 대각선 방향으로 분포</a:t>
+            </a:r>
+          </a:p>
+          <a:p>
+            <a:r>
+              <a:rPr lang="ko-KR" altLang="en-US" dirty="0"/>
+              <a:t>“관계가 </a:t>
+            </a:r>
+            <a:r>
+              <a:rPr lang="ko-KR" altLang="en-US" dirty="0" err="1"/>
+              <a:t>있다”를</a:t>
+            </a:r>
+            <a:r>
+              <a:rPr lang="ko-KR" altLang="en-US" dirty="0"/>
+              <a:t> 가장 직관적으로 보여줌</a:t>
+            </a:r>
+          </a:p>
+          <a:p>
+            <a:r>
+              <a:rPr lang="en-US" altLang="ko-KR" b="1" dirty="0"/>
+              <a:t>(2) </a:t>
+            </a:r>
+            <a:r>
+              <a:rPr lang="ko-KR" altLang="en-US" b="1" dirty="0"/>
+              <a:t>비선형 관계</a:t>
+            </a:r>
+          </a:p>
+          <a:p>
+            <a:r>
+              <a:rPr lang="ko-KR" altLang="en-US" dirty="0"/>
+              <a:t>곡선 형태</a:t>
+            </a:r>
+            <a:r>
+              <a:rPr lang="en-US" altLang="ko-KR" dirty="0"/>
+              <a:t>, U</a:t>
+            </a:r>
+            <a:r>
+              <a:rPr lang="ko-KR" altLang="en-US" dirty="0"/>
+              <a:t>자 형태</a:t>
+            </a:r>
+          </a:p>
+          <a:p>
+            <a:r>
+              <a:rPr lang="ko-KR" altLang="en-US" b="1" dirty="0"/>
+              <a:t>상관계수 하나로 설명 안 되는 관계</a:t>
+            </a:r>
+            <a:r>
+              <a:rPr lang="ko-KR" altLang="en-US" dirty="0"/>
+              <a:t> 강조</a:t>
+            </a:r>
+          </a:p>
+          <a:p>
+            <a:r>
+              <a:rPr lang="en-US" altLang="ko-KR" b="1" dirty="0"/>
+              <a:t>(3) </a:t>
+            </a:r>
+            <a:r>
+              <a:rPr lang="ko-KR" altLang="en-US" b="1" dirty="0"/>
+              <a:t>관계 없음</a:t>
+            </a:r>
+          </a:p>
+          <a:p>
+            <a:r>
+              <a:rPr lang="ko-KR" altLang="en-US" dirty="0"/>
+              <a:t>점이 무작위로 퍼짐</a:t>
+            </a:r>
+          </a:p>
+          <a:p>
+            <a:r>
+              <a:rPr lang="ko-KR" altLang="en-US" dirty="0"/>
+              <a:t>“변수가 있다고 다 쓸모 있지는 않다” 메시지</a:t>
+            </a:r>
+          </a:p>
+          <a:p>
+            <a:endParaRPr lang="ko-KR" altLang="en-US" dirty="0"/>
+          </a:p>
+        </p:txBody>
+      </p:sp>
+      <p:sp>
+        <p:nvSpPr>
+          <p:cNvPr id="4" name="슬라이드 번호 개체 틀 3"/>
+          <p:cNvSpPr>
+            <a:spLocks noGrp="1"/>
+          </p:cNvSpPr>
+          <p:nvPr>
+            <p:ph type="sldNum" sz="quarter" idx="5"/>
+          </p:nvPr>
+        </p:nvSpPr>
+        <p:spPr/>
+        <p:txBody>
+          <a:bodyPr/>
+          <a:lstStyle/>
+          <a:p>
+            <a:fld id="{3E35EA20-6519-4513-9EDC-C89C5369BAEC}" type="slidenum">
+              <a:rPr lang="ko-KR" altLang="en-US" smtClean="0"/>
+              <a:pPr/>
+              <a:t>16</a:t>
+            </a:fld>
+            <a:endParaRPr lang="ko-KR" altLang="en-US" dirty="0"/>
+          </a:p>
+        </p:txBody>
+      </p:sp>
+    </p:spTree>
+    <p:extLst>
+      <p:ext uri="{BB962C8B-B14F-4D97-AF65-F5344CB8AC3E}">
+        <p14:creationId xmlns:p14="http://schemas.microsoft.com/office/powerpoint/2010/main" val="3163250832"/>
       </p:ext>
     </p:extLst>
   </p:cSld>
@@ -2909,7 +3752,7 @@
           <a:p>
             <a:fld id="{442BEE3F-2E9A-4FD8-8B8A-8619F3E161C0}" type="datetime1">
               <a:rPr lang="ko-KR" altLang="en-US" smtClean="0"/>
-              <a:t>2026-01-14</a:t>
+              <a:t>2026-01-15</a:t>
             </a:fld>
             <a:endParaRPr lang="ko-KR" altLang="en-US"/>
           </a:p>
@@ -3196,7 +4039,7 @@
           <a:p>
             <a:fld id="{0F78D9C4-20C1-4B15-A116-16DC77AD9A1E}" type="datetime1">
               <a:rPr lang="ko-KR" altLang="en-US" smtClean="0"/>
-              <a:t>2026-01-14</a:t>
+              <a:t>2026-01-15</a:t>
             </a:fld>
             <a:endParaRPr lang="ko-KR" altLang="en-US"/>
           </a:p>
@@ -3371,7 +4214,7 @@
           <a:p>
             <a:fld id="{7F5E23C3-0E3D-4E4E-8486-D7FB4C073DC1}" type="datetime1">
               <a:rPr lang="ko-KR" altLang="en-US" smtClean="0"/>
-              <a:t>2026-01-14</a:t>
+              <a:t>2026-01-15</a:t>
             </a:fld>
             <a:endParaRPr lang="ko-KR" altLang="en-US"/>
           </a:p>
@@ -3527,7 +4370,7 @@
           <a:p>
             <a:fld id="{7F5E23C3-0E3D-4E4E-8486-D7FB4C073DC1}" type="datetime1">
               <a:rPr lang="ko-KR" altLang="en-US" smtClean="0"/>
-              <a:t>2026-01-14</a:t>
+              <a:t>2026-01-15</a:t>
             </a:fld>
             <a:endParaRPr lang="ko-KR" altLang="en-US"/>
           </a:p>
@@ -3856,7 +4699,7 @@
           <a:p>
             <a:fld id="{7F5E23C3-0E3D-4E4E-8486-D7FB4C073DC1}" type="datetime1">
               <a:rPr lang="ko-KR" altLang="en-US" smtClean="0"/>
-              <a:t>2026-01-14</a:t>
+              <a:t>2026-01-15</a:t>
             </a:fld>
             <a:endParaRPr lang="ko-KR" altLang="en-US"/>
           </a:p>
@@ -4919,16 +5762,25 @@
             <a:endParaRPr lang="en-US" altLang="ko-KR" dirty="0"/>
           </a:p>
           <a:p>
-            <a:endParaRPr lang="en-US" altLang="ko-KR" dirty="0"/>
-          </a:p>
-          <a:p>
             <a:pPr marL="0" indent="0">
               <a:buNone/>
             </a:pPr>
+            <a:endParaRPr lang="en-US" altLang="ko-KR" sz="2400" i="1" dirty="0"/>
+          </a:p>
+          <a:p>
+            <a:pPr marL="0" indent="0">
+              <a:buNone/>
+            </a:pPr>
             <a:r>
               <a:rPr lang="ko-KR" altLang="en-US" sz="2400" i="1" dirty="0"/>
               <a:t>분포를 보지 않고 모델을 만드는 것 </a:t>
             </a:r>
+            <a:endParaRPr lang="en-US" altLang="ko-KR" sz="2400" i="1" dirty="0"/>
+          </a:p>
+          <a:p>
+            <a:pPr marL="0" indent="0">
+              <a:buNone/>
+            </a:pPr>
             <a:r>
               <a:rPr lang="en-US" altLang="ko-KR" sz="2400" i="1" dirty="0"/>
               <a:t>-&gt; </a:t>
@@ -4940,6 +5792,36 @@
           </a:p>
         </p:txBody>
       </p:sp>
+      <p:pic>
+        <p:nvPicPr>
+          <p:cNvPr id="5" name="그림 4" descr="텍스트, 라인, 도표, 그래프이(가) 표시된 사진&#10;&#10;AI 생성 콘텐츠는 정확하지 않을 수 있습니다.">
+            <a:extLst>
+              <a:ext uri="{FF2B5EF4-FFF2-40B4-BE49-F238E27FC236}">
+                <a16:creationId xmlns:a16="http://schemas.microsoft.com/office/drawing/2014/main" id="{684937C9-DBF8-2DBC-E80C-F77184408E37}"/>
+              </a:ext>
+            </a:extLst>
+          </p:cNvPr>
+          <p:cNvPicPr>
+            <a:picLocks noChangeAspect="1"/>
+          </p:cNvPicPr>
+          <p:nvPr/>
+        </p:nvPicPr>
+        <p:blipFill>
+          <a:blip r:embed="rId3"/>
+          <a:stretch>
+            <a:fillRect/>
+          </a:stretch>
+        </p:blipFill>
+        <p:spPr>
+          <a:xfrm>
+            <a:off x="6281530" y="3548059"/>
+            <a:ext cx="5658683" cy="2452096"/>
+          </a:xfrm>
+          <a:prstGeom prst="rect">
+            <a:avLst/>
+          </a:prstGeom>
+        </p:spPr>
+      </p:pic>
     </p:spTree>
     <p:extLst>
       <p:ext uri="{BB962C8B-B14F-4D97-AF65-F5344CB8AC3E}">
@@ -5021,31 +5903,7 @@
           <a:p>
             <a:r>
               <a:rPr lang="ko-KR" altLang="en-US" dirty="0"/>
-              <a:t>발전량 데이터는 특정 구간</a:t>
-            </a:r>
-            <a:r>
-              <a:rPr lang="en-US" altLang="ko-KR" dirty="0"/>
-              <a:t>(</a:t>
-            </a:r>
-            <a:r>
-              <a:rPr lang="ko-KR" altLang="en-US" dirty="0"/>
-              <a:t>예</a:t>
-            </a:r>
-            <a:r>
-              <a:rPr lang="en-US" altLang="ko-KR" dirty="0"/>
-              <a:t>: 0 </a:t>
-            </a:r>
-            <a:r>
-              <a:rPr lang="ko-KR" altLang="en-US" dirty="0"/>
-              <a:t>또는 낮은 값</a:t>
-            </a:r>
-            <a:r>
-              <a:rPr lang="en-US" altLang="ko-KR" dirty="0"/>
-              <a:t>)</a:t>
-            </a:r>
-            <a:r>
-              <a:rPr lang="ko-KR" altLang="en-US" dirty="0"/>
-              <a:t>에 값이 집중되는 경향이 있다</a:t>
+              <a:t>발전량 데이터는 대칭적이지 않은 분포를 가지는 경우가 많다</a:t>
             </a:r>
             <a:endParaRPr lang="en-US" altLang="ko-KR" dirty="0"/>
           </a:p>
@@ -5110,6 +5968,801 @@
 </file>
 
 <file path=ppt/slides/slide13.xml><?xml version="1.0" encoding="utf-8"?>
+<p:sld xmlns:a="http://schemas.openxmlformats.org/drawingml/2006/main" xmlns:r="http://schemas.openxmlformats.org/officeDocument/2006/relationships" xmlns:p="http://schemas.openxmlformats.org/presentationml/2006/main">
+  <p:cSld>
+    <p:spTree>
+      <p:nvGrpSpPr>
+        <p:cNvPr id="1" name=""/>
+        <p:cNvGrpSpPr/>
+        <p:nvPr/>
+      </p:nvGrpSpPr>
+      <p:grpSpPr>
+        <a:xfrm>
+          <a:off x="0" y="0"/>
+          <a:ext cx="0" cy="0"/>
+          <a:chOff x="0" y="0"/>
+          <a:chExt cx="0" cy="0"/>
+        </a:xfrm>
+      </p:grpSpPr>
+      <p:sp>
+        <p:nvSpPr>
+          <p:cNvPr id="2" name="제목 1">
+            <a:extLst>
+              <a:ext uri="{FF2B5EF4-FFF2-40B4-BE49-F238E27FC236}">
+                <a16:creationId xmlns:a16="http://schemas.microsoft.com/office/drawing/2014/main" id="{39730C5A-8D6C-E474-87FC-EE09CDFE4C6A}"/>
+              </a:ext>
+            </a:extLst>
+          </p:cNvPr>
+          <p:cNvSpPr>
+            <a:spLocks noGrp="1"/>
+          </p:cNvSpPr>
+          <p:nvPr>
+            <p:ph type="title"/>
+          </p:nvPr>
+        </p:nvSpPr>
+        <p:spPr/>
+        <p:txBody>
+          <a:bodyPr/>
+          <a:lstStyle/>
+          <a:p>
+            <a:r>
+              <a:rPr lang="en-US" altLang="ko-KR" dirty="0"/>
+              <a:t>0 </a:t>
+            </a:r>
+            <a:r>
+              <a:rPr lang="ko-KR" altLang="en-US" dirty="0"/>
+              <a:t>값이 많은 데이터의 해석</a:t>
+            </a:r>
+          </a:p>
+        </p:txBody>
+      </p:sp>
+      <p:sp>
+        <p:nvSpPr>
+          <p:cNvPr id="3" name="내용 개체 틀 2">
+            <a:extLst>
+              <a:ext uri="{FF2B5EF4-FFF2-40B4-BE49-F238E27FC236}">
+                <a16:creationId xmlns:a16="http://schemas.microsoft.com/office/drawing/2014/main" id="{3082697B-B415-BC26-D72A-5D33883450B7}"/>
+              </a:ext>
+            </a:extLst>
+          </p:cNvPr>
+          <p:cNvSpPr>
+            <a:spLocks noGrp="1"/>
+          </p:cNvSpPr>
+          <p:nvPr>
+            <p:ph idx="1"/>
+          </p:nvPr>
+        </p:nvSpPr>
+        <p:spPr/>
+        <p:txBody>
+          <a:bodyPr/>
+          <a:lstStyle/>
+          <a:p>
+            <a:r>
+              <a:rPr lang="ko-KR" altLang="en-US" dirty="0"/>
+              <a:t>발전량이 </a:t>
+            </a:r>
+            <a:r>
+              <a:rPr lang="en-US" altLang="ko-KR" dirty="0"/>
+              <a:t>0</a:t>
+            </a:r>
+            <a:r>
+              <a:rPr lang="ko-KR" altLang="en-US" dirty="0"/>
+              <a:t>인 값은 단순한 </a:t>
+            </a:r>
+            <a:r>
+              <a:rPr lang="ko-KR" altLang="en-US" dirty="0" err="1"/>
+              <a:t>결측이</a:t>
+            </a:r>
+            <a:r>
+              <a:rPr lang="ko-KR" altLang="en-US" dirty="0"/>
+              <a:t> 아니라 의미 있는 정보일 수 있음</a:t>
+            </a:r>
+            <a:endParaRPr lang="en-US" altLang="ko-KR" dirty="0"/>
+          </a:p>
+          <a:p>
+            <a:r>
+              <a:rPr lang="ko-KR" altLang="en-US" dirty="0"/>
+              <a:t>다양한 원인 해석 필요</a:t>
+            </a:r>
+          </a:p>
+        </p:txBody>
+      </p:sp>
+      <p:pic>
+        <p:nvPicPr>
+          <p:cNvPr id="1026" name="Picture 2" descr="Time series graph - Expressions causing spurious zeros - Bug ...">
+            <a:extLst>
+              <a:ext uri="{FF2B5EF4-FFF2-40B4-BE49-F238E27FC236}">
+                <a16:creationId xmlns:a16="http://schemas.microsoft.com/office/drawing/2014/main" id="{31E5F286-A566-E99E-44D6-470A03846DEF}"/>
+              </a:ext>
+            </a:extLst>
+          </p:cNvPr>
+          <p:cNvPicPr>
+            <a:picLocks noChangeAspect="1" noChangeArrowheads="1"/>
+          </p:cNvPicPr>
+          <p:nvPr/>
+        </p:nvPicPr>
+        <p:blipFill>
+          <a:blip r:embed="rId3">
+            <a:extLst>
+              <a:ext uri="{28A0092B-C50C-407E-A947-70E740481C1C}">
+                <a14:useLocalDpi xmlns:a14="http://schemas.microsoft.com/office/drawing/2010/main" val="0"/>
+              </a:ext>
+            </a:extLst>
+          </a:blip>
+          <a:srcRect/>
+          <a:stretch>
+            <a:fillRect/>
+          </a:stretch>
+        </p:blipFill>
+        <p:spPr bwMode="auto">
+          <a:xfrm>
+            <a:off x="596348" y="3101287"/>
+            <a:ext cx="6877883" cy="2778826"/>
+          </a:xfrm>
+          <a:prstGeom prst="rect">
+            <a:avLst/>
+          </a:prstGeom>
+          <a:noFill/>
+          <a:extLst>
+            <a:ext uri="{909E8E84-426E-40DD-AFC4-6F175D3DCCD1}">
+              <a14:hiddenFill xmlns:a14="http://schemas.microsoft.com/office/drawing/2010/main">
+                <a:solidFill>
+                  <a:srgbClr val="FFFFFF"/>
+                </a:solidFill>
+              </a14:hiddenFill>
+            </a:ext>
+          </a:extLst>
+        </p:spPr>
+      </p:pic>
+    </p:spTree>
+    <p:extLst>
+      <p:ext uri="{BB962C8B-B14F-4D97-AF65-F5344CB8AC3E}">
+        <p14:creationId xmlns:p14="http://schemas.microsoft.com/office/powerpoint/2010/main" val="2042675294"/>
+      </p:ext>
+    </p:extLst>
+  </p:cSld>
+  <p:clrMapOvr>
+    <a:masterClrMapping/>
+  </p:clrMapOvr>
+</p:sld>
+</file>
+
+<file path=ppt/slides/slide14.xml><?xml version="1.0" encoding="utf-8"?>
+<p:sld xmlns:a="http://schemas.openxmlformats.org/drawingml/2006/main" xmlns:r="http://schemas.openxmlformats.org/officeDocument/2006/relationships" xmlns:p="http://schemas.openxmlformats.org/presentationml/2006/main">
+  <p:cSld>
+    <p:spTree>
+      <p:nvGrpSpPr>
+        <p:cNvPr id="1" name=""/>
+        <p:cNvGrpSpPr/>
+        <p:nvPr/>
+      </p:nvGrpSpPr>
+      <p:grpSpPr>
+        <a:xfrm>
+          <a:off x="0" y="0"/>
+          <a:ext cx="0" cy="0"/>
+          <a:chOff x="0" y="0"/>
+          <a:chExt cx="0" cy="0"/>
+        </a:xfrm>
+      </p:grpSpPr>
+      <p:sp>
+        <p:nvSpPr>
+          <p:cNvPr id="2" name="제목 1">
+            <a:extLst>
+              <a:ext uri="{FF2B5EF4-FFF2-40B4-BE49-F238E27FC236}">
+                <a16:creationId xmlns:a16="http://schemas.microsoft.com/office/drawing/2014/main" id="{B77923BB-87FF-EE3F-D5CE-70B446F3992B}"/>
+              </a:ext>
+            </a:extLst>
+          </p:cNvPr>
+          <p:cNvSpPr>
+            <a:spLocks noGrp="1"/>
+          </p:cNvSpPr>
+          <p:nvPr>
+            <p:ph type="title"/>
+          </p:nvPr>
+        </p:nvSpPr>
+        <p:spPr/>
+        <p:txBody>
+          <a:bodyPr/>
+          <a:lstStyle/>
+          <a:p>
+            <a:r>
+              <a:rPr lang="ko-KR" altLang="en-US" dirty="0"/>
+              <a:t>조건에 따라 달라지는 데이터 분포</a:t>
+            </a:r>
+          </a:p>
+        </p:txBody>
+      </p:sp>
+      <p:sp>
+        <p:nvSpPr>
+          <p:cNvPr id="3" name="내용 개체 틀 2">
+            <a:extLst>
+              <a:ext uri="{FF2B5EF4-FFF2-40B4-BE49-F238E27FC236}">
+                <a16:creationId xmlns:a16="http://schemas.microsoft.com/office/drawing/2014/main" id="{5A5783D2-1AA1-1A9D-13EF-85449B7FDF8E}"/>
+              </a:ext>
+            </a:extLst>
+          </p:cNvPr>
+          <p:cNvSpPr>
+            <a:spLocks noGrp="1"/>
+          </p:cNvSpPr>
+          <p:nvPr>
+            <p:ph idx="1"/>
+          </p:nvPr>
+        </p:nvSpPr>
+        <p:spPr/>
+        <p:txBody>
+          <a:bodyPr/>
+          <a:lstStyle/>
+          <a:p>
+            <a:r>
+              <a:rPr lang="ko-KR" altLang="en-US" dirty="0"/>
+              <a:t>동일한 데이터라도 조건에 따라 전혀 다른 분포를 가질 수 있다</a:t>
+            </a:r>
+            <a:endParaRPr lang="en-US" altLang="ko-KR" dirty="0"/>
+          </a:p>
+          <a:p>
+            <a:r>
+              <a:rPr lang="ko-KR" altLang="en-US" dirty="0"/>
+              <a:t>재생에너지 데이터에서는 시간대</a:t>
+            </a:r>
+            <a:r>
+              <a:rPr lang="en-US" altLang="ko-KR" dirty="0"/>
+              <a:t>, </a:t>
+            </a:r>
+            <a:r>
+              <a:rPr lang="ko-KR" altLang="en-US" dirty="0"/>
+              <a:t>계절</a:t>
+            </a:r>
+            <a:r>
+              <a:rPr lang="en-US" altLang="ko-KR" dirty="0"/>
+              <a:t>, </a:t>
+            </a:r>
+            <a:r>
+              <a:rPr lang="ko-KR" altLang="en-US" dirty="0"/>
+              <a:t>기상 조건이 대표적 분리 기준</a:t>
+            </a:r>
+            <a:endParaRPr lang="en-US" altLang="ko-KR" dirty="0"/>
+          </a:p>
+          <a:p>
+            <a:r>
+              <a:rPr lang="ko-KR" altLang="en-US" dirty="0"/>
+              <a:t>시간대별 분포 비교 </a:t>
+            </a:r>
+            <a:endParaRPr lang="en-US" altLang="ko-KR" dirty="0"/>
+          </a:p>
+          <a:p>
+            <a:pPr lvl="1"/>
+            <a:r>
+              <a:rPr lang="en-US" altLang="ko-KR" dirty="0"/>
+              <a:t>ex) </a:t>
+            </a:r>
+            <a:r>
+              <a:rPr lang="ko-KR" altLang="en-US" dirty="0"/>
+              <a:t>주간</a:t>
+            </a:r>
+            <a:r>
+              <a:rPr lang="en-US" altLang="ko-KR" dirty="0"/>
+              <a:t>/</a:t>
+            </a:r>
+            <a:r>
+              <a:rPr lang="ko-KR" altLang="en-US" dirty="0"/>
+              <a:t>야간</a:t>
+            </a:r>
+            <a:endParaRPr lang="en-US" altLang="ko-KR" dirty="0"/>
+          </a:p>
+          <a:p>
+            <a:pPr lvl="1"/>
+            <a:r>
+              <a:rPr lang="ko-KR" altLang="en-US" dirty="0"/>
+              <a:t>시계열 분석이 필요한 근거 제공</a:t>
+            </a:r>
+          </a:p>
+        </p:txBody>
+      </p:sp>
+    </p:spTree>
+    <p:extLst>
+      <p:ext uri="{BB962C8B-B14F-4D97-AF65-F5344CB8AC3E}">
+        <p14:creationId xmlns:p14="http://schemas.microsoft.com/office/powerpoint/2010/main" val="2232302784"/>
+      </p:ext>
+    </p:extLst>
+  </p:cSld>
+  <p:clrMapOvr>
+    <a:masterClrMapping/>
+  </p:clrMapOvr>
+</p:sld>
+</file>
+
+<file path=ppt/slides/slide15.xml><?xml version="1.0" encoding="utf-8"?>
+<p:sld xmlns:a="http://schemas.openxmlformats.org/drawingml/2006/main" xmlns:r="http://schemas.openxmlformats.org/officeDocument/2006/relationships" xmlns:p="http://schemas.openxmlformats.org/presentationml/2006/main">
+  <p:cSld>
+    <p:spTree>
+      <p:nvGrpSpPr>
+        <p:cNvPr id="1" name=""/>
+        <p:cNvGrpSpPr/>
+        <p:nvPr/>
+      </p:nvGrpSpPr>
+      <p:grpSpPr>
+        <a:xfrm>
+          <a:off x="0" y="0"/>
+          <a:ext cx="0" cy="0"/>
+          <a:chOff x="0" y="0"/>
+          <a:chExt cx="0" cy="0"/>
+        </a:xfrm>
+      </p:grpSpPr>
+      <p:sp>
+        <p:nvSpPr>
+          <p:cNvPr id="2" name="제목 1">
+            <a:extLst>
+              <a:ext uri="{FF2B5EF4-FFF2-40B4-BE49-F238E27FC236}">
+                <a16:creationId xmlns:a16="http://schemas.microsoft.com/office/drawing/2014/main" id="{274FC727-3DC9-D46B-2EBD-2B233ED88C51}"/>
+              </a:ext>
+            </a:extLst>
+          </p:cNvPr>
+          <p:cNvSpPr>
+            <a:spLocks noGrp="1"/>
+          </p:cNvSpPr>
+          <p:nvPr>
+            <p:ph type="title"/>
+          </p:nvPr>
+        </p:nvSpPr>
+        <p:spPr/>
+        <p:txBody>
+          <a:bodyPr/>
+          <a:lstStyle/>
+          <a:p>
+            <a:r>
+              <a:rPr lang="ko-KR" altLang="en-US" dirty="0"/>
+              <a:t>변수 간 관계 분석</a:t>
+            </a:r>
+          </a:p>
+        </p:txBody>
+      </p:sp>
+    </p:spTree>
+    <p:extLst>
+      <p:ext uri="{BB962C8B-B14F-4D97-AF65-F5344CB8AC3E}">
+        <p14:creationId xmlns:p14="http://schemas.microsoft.com/office/powerpoint/2010/main" val="1301390575"/>
+      </p:ext>
+    </p:extLst>
+  </p:cSld>
+  <p:clrMapOvr>
+    <a:masterClrMapping/>
+  </p:clrMapOvr>
+</p:sld>
+</file>
+
+<file path=ppt/slides/slide16.xml><?xml version="1.0" encoding="utf-8"?>
+<p:sld xmlns:a="http://schemas.openxmlformats.org/drawingml/2006/main" xmlns:r="http://schemas.openxmlformats.org/officeDocument/2006/relationships" xmlns:p="http://schemas.openxmlformats.org/presentationml/2006/main">
+  <p:cSld>
+    <p:spTree>
+      <p:nvGrpSpPr>
+        <p:cNvPr id="1" name=""/>
+        <p:cNvGrpSpPr/>
+        <p:nvPr/>
+      </p:nvGrpSpPr>
+      <p:grpSpPr>
+        <a:xfrm>
+          <a:off x="0" y="0"/>
+          <a:ext cx="0" cy="0"/>
+          <a:chOff x="0" y="0"/>
+          <a:chExt cx="0" cy="0"/>
+        </a:xfrm>
+      </p:grpSpPr>
+      <p:sp>
+        <p:nvSpPr>
+          <p:cNvPr id="2" name="제목 1">
+            <a:extLst>
+              <a:ext uri="{FF2B5EF4-FFF2-40B4-BE49-F238E27FC236}">
+                <a16:creationId xmlns:a16="http://schemas.microsoft.com/office/drawing/2014/main" id="{BD7E162D-2ECB-AA83-6992-11F3D8547AA3}"/>
+              </a:ext>
+            </a:extLst>
+          </p:cNvPr>
+          <p:cNvSpPr>
+            <a:spLocks noGrp="1"/>
+          </p:cNvSpPr>
+          <p:nvPr>
+            <p:ph type="title"/>
+          </p:nvPr>
+        </p:nvSpPr>
+        <p:spPr/>
+        <p:txBody>
+          <a:bodyPr/>
+          <a:lstStyle/>
+          <a:p>
+            <a:r>
+              <a:rPr lang="ko-KR" altLang="en-US" dirty="0"/>
+              <a:t>변수 간 관계</a:t>
+            </a:r>
+          </a:p>
+        </p:txBody>
+      </p:sp>
+      <p:sp>
+        <p:nvSpPr>
+          <p:cNvPr id="3" name="내용 개체 틀 2">
+            <a:extLst>
+              <a:ext uri="{FF2B5EF4-FFF2-40B4-BE49-F238E27FC236}">
+                <a16:creationId xmlns:a16="http://schemas.microsoft.com/office/drawing/2014/main" id="{8F51BCA7-EAA2-9F9B-7FDA-39551C6ACB17}"/>
+              </a:ext>
+            </a:extLst>
+          </p:cNvPr>
+          <p:cNvSpPr>
+            <a:spLocks noGrp="1"/>
+          </p:cNvSpPr>
+          <p:nvPr>
+            <p:ph idx="1"/>
+          </p:nvPr>
+        </p:nvSpPr>
+        <p:spPr/>
+        <p:txBody>
+          <a:bodyPr/>
+          <a:lstStyle/>
+          <a:p>
+            <a:r>
+              <a:rPr lang="en-US" altLang="ko-KR" dirty="0"/>
+              <a:t>EDA</a:t>
+            </a:r>
+            <a:r>
+              <a:rPr lang="ko-KR" altLang="en-US" dirty="0"/>
+              <a:t>의 핵심 </a:t>
+            </a:r>
+            <a:r>
+              <a:rPr lang="en-US" altLang="ko-KR" dirty="0"/>
+              <a:t>: </a:t>
+            </a:r>
+            <a:r>
+              <a:rPr lang="ko-KR" altLang="en-US" dirty="0"/>
+              <a:t>변수들이 서로 어떤 관계를 가지는지 파악하는 것</a:t>
+            </a:r>
+            <a:endParaRPr lang="en-US" altLang="ko-KR" dirty="0"/>
+          </a:p>
+          <a:p>
+            <a:r>
+              <a:rPr lang="ko-KR" altLang="en-US" dirty="0"/>
+              <a:t>관계를 이해하지 못하면 모델의 결과를 해석할 수 없다</a:t>
+            </a:r>
+            <a:endParaRPr lang="en-US" altLang="ko-KR" dirty="0"/>
+          </a:p>
+          <a:p>
+            <a:endParaRPr lang="ko-KR" altLang="en-US" dirty="0"/>
+          </a:p>
+        </p:txBody>
+      </p:sp>
+      <p:pic>
+        <p:nvPicPr>
+          <p:cNvPr id="2050" name="Picture 2" descr="How to Make a Scatter Plot: A Comprehensive Guide">
+            <a:extLst>
+              <a:ext uri="{FF2B5EF4-FFF2-40B4-BE49-F238E27FC236}">
+                <a16:creationId xmlns:a16="http://schemas.microsoft.com/office/drawing/2014/main" id="{87555DD4-F3EA-C05D-848A-8C1196B3CA34}"/>
+              </a:ext>
+            </a:extLst>
+          </p:cNvPr>
+          <p:cNvPicPr>
+            <a:picLocks noChangeAspect="1" noChangeArrowheads="1"/>
+          </p:cNvPicPr>
+          <p:nvPr/>
+        </p:nvPicPr>
+        <p:blipFill>
+          <a:blip r:embed="rId3" cstate="print">
+            <a:extLst>
+              <a:ext uri="{28A0092B-C50C-407E-A947-70E740481C1C}">
+                <a14:useLocalDpi xmlns:a14="http://schemas.microsoft.com/office/drawing/2010/main" val="0"/>
+              </a:ext>
+            </a:extLst>
+          </a:blip>
+          <a:srcRect/>
+          <a:stretch>
+            <a:fillRect/>
+          </a:stretch>
+        </p:blipFill>
+        <p:spPr bwMode="auto">
+          <a:xfrm>
+            <a:off x="549657" y="2964207"/>
+            <a:ext cx="5231885" cy="3212756"/>
+          </a:xfrm>
+          <a:prstGeom prst="rect">
+            <a:avLst/>
+          </a:prstGeom>
+          <a:noFill/>
+          <a:extLst>
+            <a:ext uri="{909E8E84-426E-40DD-AFC4-6F175D3DCCD1}">
+              <a14:hiddenFill xmlns:a14="http://schemas.microsoft.com/office/drawing/2010/main">
+                <a:solidFill>
+                  <a:srgbClr val="FFFFFF"/>
+                </a:solidFill>
+              </a14:hiddenFill>
+            </a:ext>
+          </a:extLst>
+        </p:spPr>
+      </p:pic>
+    </p:spTree>
+    <p:extLst>
+      <p:ext uri="{BB962C8B-B14F-4D97-AF65-F5344CB8AC3E}">
+        <p14:creationId xmlns:p14="http://schemas.microsoft.com/office/powerpoint/2010/main" val="2890912881"/>
+      </p:ext>
+    </p:extLst>
+  </p:cSld>
+  <p:clrMapOvr>
+    <a:masterClrMapping/>
+  </p:clrMapOvr>
+</p:sld>
+</file>
+
+<file path=ppt/slides/slide17.xml><?xml version="1.0" encoding="utf-8"?>
+<p:sld xmlns:a="http://schemas.openxmlformats.org/drawingml/2006/main" xmlns:r="http://schemas.openxmlformats.org/officeDocument/2006/relationships" xmlns:p="http://schemas.openxmlformats.org/presentationml/2006/main">
+  <p:cSld>
+    <p:spTree>
+      <p:nvGrpSpPr>
+        <p:cNvPr id="1" name=""/>
+        <p:cNvGrpSpPr/>
+        <p:nvPr/>
+      </p:nvGrpSpPr>
+      <p:grpSpPr>
+        <a:xfrm>
+          <a:off x="0" y="0"/>
+          <a:ext cx="0" cy="0"/>
+          <a:chOff x="0" y="0"/>
+          <a:chExt cx="0" cy="0"/>
+        </a:xfrm>
+      </p:grpSpPr>
+      <p:sp>
+        <p:nvSpPr>
+          <p:cNvPr id="2" name="제목 1">
+            <a:extLst>
+              <a:ext uri="{FF2B5EF4-FFF2-40B4-BE49-F238E27FC236}">
+                <a16:creationId xmlns:a16="http://schemas.microsoft.com/office/drawing/2014/main" id="{6D036424-155C-4C6E-9DAE-87AB9C3076FC}"/>
+              </a:ext>
+            </a:extLst>
+          </p:cNvPr>
+          <p:cNvSpPr>
+            <a:spLocks noGrp="1"/>
+          </p:cNvSpPr>
+          <p:nvPr>
+            <p:ph type="title"/>
+          </p:nvPr>
+        </p:nvSpPr>
+        <p:spPr/>
+        <p:txBody>
+          <a:bodyPr/>
+          <a:lstStyle/>
+          <a:p>
+            <a:r>
+              <a:rPr lang="ko-KR" altLang="en-US" dirty="0"/>
+              <a:t>발전량과 환경 변수의 관계</a:t>
+            </a:r>
+          </a:p>
+        </p:txBody>
+      </p:sp>
+      <p:sp>
+        <p:nvSpPr>
+          <p:cNvPr id="3" name="내용 개체 틀 2">
+            <a:extLst>
+              <a:ext uri="{FF2B5EF4-FFF2-40B4-BE49-F238E27FC236}">
+                <a16:creationId xmlns:a16="http://schemas.microsoft.com/office/drawing/2014/main" id="{DA2E1322-445A-6595-02C1-F514D567C391}"/>
+              </a:ext>
+            </a:extLst>
+          </p:cNvPr>
+          <p:cNvSpPr>
+            <a:spLocks noGrp="1"/>
+          </p:cNvSpPr>
+          <p:nvPr>
+            <p:ph idx="1"/>
+          </p:nvPr>
+        </p:nvSpPr>
+        <p:spPr/>
+        <p:txBody>
+          <a:bodyPr>
+            <a:normAutofit/>
+          </a:bodyPr>
+          <a:lstStyle/>
+          <a:p>
+            <a:r>
+              <a:rPr lang="ko-KR" altLang="en-US" dirty="0"/>
+              <a:t>발전량은 기온</a:t>
+            </a:r>
+            <a:r>
+              <a:rPr lang="en-US" altLang="ko-KR" dirty="0"/>
+              <a:t>, </a:t>
+            </a:r>
+            <a:r>
+              <a:rPr lang="ko-KR" altLang="en-US" dirty="0"/>
+              <a:t>일사량</a:t>
+            </a:r>
+            <a:r>
+              <a:rPr lang="en-US" altLang="ko-KR" dirty="0"/>
+              <a:t>, </a:t>
+            </a:r>
+            <a:r>
+              <a:rPr lang="ko-KR" altLang="en-US" dirty="0"/>
+              <a:t>풍속 등 외부 변수의 영향을 받는다</a:t>
+            </a:r>
+            <a:endParaRPr lang="en-US" altLang="ko-KR" dirty="0"/>
+          </a:p>
+          <a:p>
+            <a:r>
+              <a:rPr lang="ko-KR" altLang="en-US" dirty="0"/>
+              <a:t>하지만 모든 변수의 영향이 항상 동일하게 나타나지는 않음</a:t>
+            </a:r>
+            <a:endParaRPr lang="en-US" altLang="ko-KR" dirty="0"/>
+          </a:p>
+          <a:p>
+            <a:r>
+              <a:rPr lang="ko-KR" altLang="en-US" dirty="0"/>
+              <a:t>상관관계는 인과관계가 아님</a:t>
+            </a:r>
+            <a:endParaRPr lang="en-US" altLang="ko-KR" dirty="0"/>
+          </a:p>
+          <a:p>
+            <a:endParaRPr lang="ko-KR" altLang="en-US" dirty="0"/>
+          </a:p>
+        </p:txBody>
+      </p:sp>
+      <p:pic>
+        <p:nvPicPr>
+          <p:cNvPr id="3076" name="Picture 4" descr="Scatter plot of PV power with solar irradiance, ambient ...">
+            <a:extLst>
+              <a:ext uri="{FF2B5EF4-FFF2-40B4-BE49-F238E27FC236}">
+                <a16:creationId xmlns:a16="http://schemas.microsoft.com/office/drawing/2014/main" id="{B683EC24-1873-C0E1-D7A2-EF14B876CD4B}"/>
+              </a:ext>
+            </a:extLst>
+          </p:cNvPr>
+          <p:cNvPicPr>
+            <a:picLocks noChangeAspect="1" noChangeArrowheads="1"/>
+          </p:cNvPicPr>
+          <p:nvPr/>
+        </p:nvPicPr>
+        <p:blipFill>
+          <a:blip r:embed="rId3">
+            <a:extLst>
+              <a:ext uri="{28A0092B-C50C-407E-A947-70E740481C1C}">
+                <a14:useLocalDpi xmlns:a14="http://schemas.microsoft.com/office/drawing/2010/main" val="0"/>
+              </a:ext>
+            </a:extLst>
+          </a:blip>
+          <a:srcRect/>
+          <a:stretch>
+            <a:fillRect/>
+          </a:stretch>
+        </p:blipFill>
+        <p:spPr bwMode="auto">
+          <a:xfrm>
+            <a:off x="5934634" y="2783414"/>
+            <a:ext cx="3968657" cy="3590491"/>
+          </a:xfrm>
+          <a:prstGeom prst="rect">
+            <a:avLst/>
+          </a:prstGeom>
+          <a:noFill/>
+          <a:extLst>
+            <a:ext uri="{909E8E84-426E-40DD-AFC4-6F175D3DCCD1}">
+              <a14:hiddenFill xmlns:a14="http://schemas.microsoft.com/office/drawing/2010/main">
+                <a:solidFill>
+                  <a:srgbClr val="FFFFFF"/>
+                </a:solidFill>
+              </a14:hiddenFill>
+            </a:ext>
+          </a:extLst>
+        </p:spPr>
+      </p:pic>
+    </p:spTree>
+    <p:extLst>
+      <p:ext uri="{BB962C8B-B14F-4D97-AF65-F5344CB8AC3E}">
+        <p14:creationId xmlns:p14="http://schemas.microsoft.com/office/powerpoint/2010/main" val="1388293159"/>
+      </p:ext>
+    </p:extLst>
+  </p:cSld>
+  <p:clrMapOvr>
+    <a:masterClrMapping/>
+  </p:clrMapOvr>
+</p:sld>
+</file>
+
+<file path=ppt/slides/slide18.xml><?xml version="1.0" encoding="utf-8"?>
+<p:sld xmlns:a="http://schemas.openxmlformats.org/drawingml/2006/main" xmlns:r="http://schemas.openxmlformats.org/officeDocument/2006/relationships" xmlns:p="http://schemas.openxmlformats.org/presentationml/2006/main">
+  <p:cSld>
+    <p:spTree>
+      <p:nvGrpSpPr>
+        <p:cNvPr id="1" name=""/>
+        <p:cNvGrpSpPr/>
+        <p:nvPr/>
+      </p:nvGrpSpPr>
+      <p:grpSpPr>
+        <a:xfrm>
+          <a:off x="0" y="0"/>
+          <a:ext cx="0" cy="0"/>
+          <a:chOff x="0" y="0"/>
+          <a:chExt cx="0" cy="0"/>
+        </a:xfrm>
+      </p:grpSpPr>
+      <p:sp>
+        <p:nvSpPr>
+          <p:cNvPr id="4103" name="Title 1">
+            <a:extLst>
+              <a:ext uri="{FF2B5EF4-FFF2-40B4-BE49-F238E27FC236}">
+                <a16:creationId xmlns:a16="http://schemas.microsoft.com/office/drawing/2014/main" id="{FF48ABC1-F41E-467A-1CE8-D52591650B38}"/>
+              </a:ext>
+            </a:extLst>
+          </p:cNvPr>
+          <p:cNvSpPr>
+            <a:spLocks noGrp="1"/>
+          </p:cNvSpPr>
+          <p:nvPr>
+            <p:ph type="title"/>
+          </p:nvPr>
+        </p:nvSpPr>
+        <p:spPr>
+          <a:xfrm>
+            <a:off x="251788" y="1"/>
+            <a:ext cx="10515600" cy="1145406"/>
+          </a:xfrm>
+        </p:spPr>
+        <p:txBody>
+          <a:bodyPr/>
+          <a:lstStyle/>
+          <a:p>
+            <a:endParaRPr lang="en-US"/>
+          </a:p>
+        </p:txBody>
+      </p:sp>
+      <p:pic>
+        <p:nvPicPr>
+          <p:cNvPr id="4098" name="Picture 2" descr="Correlation vs. Causation: What are the Differences? - NBD ...">
+            <a:extLst>
+              <a:ext uri="{FF2B5EF4-FFF2-40B4-BE49-F238E27FC236}">
+                <a16:creationId xmlns:a16="http://schemas.microsoft.com/office/drawing/2014/main" id="{DE0E0AF1-56EC-9129-900B-72EC6BA7786C}"/>
+              </a:ext>
+            </a:extLst>
+          </p:cNvPr>
+          <p:cNvPicPr>
+            <a:picLocks noChangeAspect="1" noChangeArrowheads="1"/>
+          </p:cNvPicPr>
+          <p:nvPr/>
+        </p:nvPicPr>
+        <p:blipFill>
+          <a:blip r:embed="rId3">
+            <a:extLst>
+              <a:ext uri="{28A0092B-C50C-407E-A947-70E740481C1C}">
+                <a14:useLocalDpi xmlns:a14="http://schemas.microsoft.com/office/drawing/2010/main" val="0"/>
+              </a:ext>
+            </a:extLst>
+          </a:blip>
+          <a:stretch>
+            <a:fillRect/>
+          </a:stretch>
+        </p:blipFill>
+        <p:spPr bwMode="auto">
+          <a:xfrm>
+            <a:off x="1435794" y="1096101"/>
+            <a:ext cx="9331594" cy="4665797"/>
+          </a:xfrm>
+          <a:prstGeom prst="rect">
+            <a:avLst/>
+          </a:prstGeom>
+          <a:solidFill>
+            <a:srgbClr val="FFFFFF"/>
+          </a:solidFill>
+          <a:extLst>
+            <a:ext uri="{909E8E84-426E-40DD-AFC4-6F175D3DCCD1}">
+              <a14:hiddenFill xmlns:a14="http://schemas.microsoft.com/office/drawing/2010/main">
+                <a:solidFill>
+                  <a:srgbClr val="FFFFFF"/>
+                </a:solidFill>
+              </a14:hiddenFill>
+            </a:ext>
+          </a:extLst>
+        </p:spPr>
+      </p:pic>
+    </p:spTree>
+    <p:extLst>
+      <p:ext uri="{BB962C8B-B14F-4D97-AF65-F5344CB8AC3E}">
+        <p14:creationId xmlns:p14="http://schemas.microsoft.com/office/powerpoint/2010/main" val="847595422"/>
+      </p:ext>
+    </p:extLst>
+  </p:cSld>
+  <p:clrMapOvr>
+    <a:masterClrMapping/>
+  </p:clrMapOvr>
+</p:sld>
+</file>
+
+<file path=ppt/slides/slide19.xml><?xml version="1.0" encoding="utf-8"?>
 <p:sld xmlns:a="http://schemas.openxmlformats.org/drawingml/2006/main" xmlns:r="http://schemas.openxmlformats.org/officeDocument/2006/relationships" xmlns:p="http://schemas.openxmlformats.org/presentationml/2006/main">
   <p:cSld>
     <p:spTree>
@@ -5605,7 +7258,7 @@
           <a:p>
             <a:fld id="{0F78D9C4-20C1-4B15-A116-16DC77AD9A1E}" type="datetime1">
               <a:rPr lang="ko-KR" altLang="en-US" smtClean="0"/>
-              <a:t>2026-01-14</a:t>
+              <a:t>2026-01-15</a:t>
             </a:fld>
             <a:endParaRPr lang="ko-KR" altLang="en-US"/>
           </a:p>
@@ -8789,7 +10442,7 @@
           <a:p>
             <a:fld id="{0F78D9C4-20C1-4B15-A116-16DC77AD9A1E}" type="datetime1">
               <a:rPr lang="ko-KR" altLang="en-US" smtClean="0"/>
-              <a:t>2026-01-14</a:t>
+              <a:t>2026-01-15</a:t>
             </a:fld>
             <a:endParaRPr lang="ko-KR" altLang="en-US"/>
           </a:p>
@@ -8925,7 +10578,7 @@
           <a:p>
             <a:fld id="{0F78D9C4-20C1-4B15-A116-16DC77AD9A1E}" type="datetime1">
               <a:rPr lang="ko-KR" altLang="en-US" smtClean="0"/>
-              <a:t>2026-01-14</a:t>
+              <a:t>2026-01-15</a:t>
             </a:fld>
             <a:endParaRPr lang="ko-KR" altLang="en-US"/>
           </a:p>
@@ -9369,7 +11022,7 @@
                   <a:spcPts val="600"/>
                 </a:spcAft>
               </a:pPr>
-              <a:t>2026-01-14</a:t>
+              <a:t>2026-01-15</a:t>
             </a:fld>
             <a:endParaRPr lang="ko-KR" altLang="en-US"/>
           </a:p>

--- a/material/5_AI/04_데이터 전처리와 EDA 기초.pptx
+++ b/material/5_AI/04_데이터 전처리와 EDA 기초.pptx
@@ -5,28 +5,36 @@
     <p:sldMasterId id="2147483660" r:id="rId1"/>
   </p:sldMasterIdLst>
   <p:notesMasterIdLst>
-    <p:notesMasterId r:id="rId21"/>
+    <p:notesMasterId r:id="rId29"/>
   </p:notesMasterIdLst>
   <p:sldIdLst>
     <p:sldId id="1020" r:id="rId2"/>
-    <p:sldId id="1016" r:id="rId3"/>
-    <p:sldId id="1021" r:id="rId4"/>
-    <p:sldId id="829" r:id="rId5"/>
-    <p:sldId id="1022" r:id="rId6"/>
-    <p:sldId id="797" r:id="rId7"/>
-    <p:sldId id="625" r:id="rId8"/>
-    <p:sldId id="798" r:id="rId9"/>
-    <p:sldId id="1006" r:id="rId10"/>
-    <p:sldId id="1023" r:id="rId11"/>
-    <p:sldId id="1024" r:id="rId12"/>
-    <p:sldId id="1025" r:id="rId13"/>
-    <p:sldId id="1026" r:id="rId14"/>
-    <p:sldId id="1028" r:id="rId15"/>
-    <p:sldId id="1030" r:id="rId16"/>
-    <p:sldId id="1029" r:id="rId17"/>
-    <p:sldId id="1031" r:id="rId18"/>
-    <p:sldId id="1032" r:id="rId19"/>
-    <p:sldId id="836" r:id="rId20"/>
+    <p:sldId id="1035" r:id="rId3"/>
+    <p:sldId id="1036" r:id="rId4"/>
+    <p:sldId id="1016" r:id="rId5"/>
+    <p:sldId id="1021" r:id="rId6"/>
+    <p:sldId id="829" r:id="rId7"/>
+    <p:sldId id="1022" r:id="rId8"/>
+    <p:sldId id="797" r:id="rId9"/>
+    <p:sldId id="625" r:id="rId10"/>
+    <p:sldId id="798" r:id="rId11"/>
+    <p:sldId id="1006" r:id="rId12"/>
+    <p:sldId id="1023" r:id="rId13"/>
+    <p:sldId id="1024" r:id="rId14"/>
+    <p:sldId id="1025" r:id="rId15"/>
+    <p:sldId id="1026" r:id="rId16"/>
+    <p:sldId id="1028" r:id="rId17"/>
+    <p:sldId id="1030" r:id="rId18"/>
+    <p:sldId id="1029" r:id="rId19"/>
+    <p:sldId id="1031" r:id="rId20"/>
+    <p:sldId id="1032" r:id="rId21"/>
+    <p:sldId id="1033" r:id="rId22"/>
+    <p:sldId id="1034" r:id="rId23"/>
+    <p:sldId id="1037" r:id="rId24"/>
+    <p:sldId id="1038" r:id="rId25"/>
+    <p:sldId id="1039" r:id="rId26"/>
+    <p:sldId id="1040" r:id="rId27"/>
+    <p:sldId id="836" r:id="rId28"/>
   </p:sldIdLst>
   <p:sldSz cx="12192000" cy="6858000"/>
   <p:notesSz cx="6858000" cy="9144000"/>
@@ -236,7 +244,7 @@
             <a:fld id="{A13A867C-D490-40C2-AB8D-A60FA70A9BF5}" type="datetimeFigureOut">
               <a:rPr lang="ko-KR" altLang="en-US" smtClean="0"/>
               <a:pPr/>
-              <a:t>2026-01-15</a:t>
+              <a:t>2026-01-16</a:t>
             </a:fld>
             <a:endParaRPr lang="ko-KR" altLang="en-US" dirty="0"/>
           </a:p>
@@ -656,125 +664,89 @@
           <a:lstStyle/>
           <a:p>
             <a:r>
+              <a:rPr lang="en-US" altLang="ko-KR" b="1" dirty="0"/>
+              <a:t>(1) </a:t>
+            </a:r>
+            <a:r>
               <a:rPr lang="ko-KR" altLang="en-US" b="1" dirty="0"/>
-              <a:t>추가 자료 </a:t>
-            </a:r>
+              <a:t>선형 관계</a:t>
+            </a:r>
+          </a:p>
+          <a:p>
+            <a:r>
+              <a:rPr lang="ko-KR" altLang="en-US" dirty="0"/>
+              <a:t>점들이 대각선 방향으로 분포</a:t>
+            </a:r>
+          </a:p>
+          <a:p>
+            <a:r>
+              <a:rPr lang="ko-KR" altLang="en-US" dirty="0"/>
+              <a:t>“관계가 </a:t>
+            </a:r>
+            <a:r>
+              <a:rPr lang="ko-KR" altLang="en-US" dirty="0" err="1"/>
+              <a:t>있다”를</a:t>
+            </a:r>
+            <a:r>
+              <a:rPr lang="ko-KR" altLang="en-US" dirty="0"/>
+              <a:t> 가장 직관적으로 보여줌</a:t>
+            </a:r>
+          </a:p>
+          <a:p>
             <a:r>
               <a:rPr lang="en-US" altLang="ko-KR" b="1" dirty="0"/>
-              <a:t>2: </a:t>
+              <a:t>(2) </a:t>
             </a:r>
             <a:r>
               <a:rPr lang="ko-KR" altLang="en-US" b="1" dirty="0"/>
-              <a:t>발전량 </a:t>
-            </a:r>
+              <a:t>비선형 관계</a:t>
+            </a:r>
+          </a:p>
+          <a:p>
+            <a:r>
+              <a:rPr lang="ko-KR" altLang="en-US" dirty="0"/>
+              <a:t>곡선 형태</a:t>
+            </a:r>
+            <a:r>
+              <a:rPr lang="en-US" altLang="ko-KR" dirty="0"/>
+              <a:t>, U</a:t>
+            </a:r>
+            <a:r>
+              <a:rPr lang="ko-KR" altLang="en-US" dirty="0"/>
+              <a:t>자 형태</a:t>
+            </a:r>
+          </a:p>
+          <a:p>
+            <a:r>
+              <a:rPr lang="ko-KR" altLang="en-US" b="1" dirty="0"/>
+              <a:t>상관계수 하나로 설명 안 되는 관계</a:t>
+            </a:r>
+            <a:r>
+              <a:rPr lang="ko-KR" altLang="en-US" dirty="0"/>
+              <a:t> 강조</a:t>
+            </a:r>
+          </a:p>
+          <a:p>
             <a:r>
               <a:rPr lang="en-US" altLang="ko-KR" b="1" dirty="0"/>
-              <a:t>vs </a:t>
+              <a:t>(3) </a:t>
             </a:r>
             <a:r>
               <a:rPr lang="ko-KR" altLang="en-US" b="1" dirty="0"/>
-              <a:t>환경 변수 </a:t>
-            </a:r>
-            <a:r>
-              <a:rPr lang="ko-KR" altLang="en-US" b="1" dirty="0" err="1"/>
-              <a:t>산점도</a:t>
-            </a:r>
-            <a:endParaRPr lang="ko-KR" altLang="en-US" b="1" dirty="0"/>
-          </a:p>
-          <a:p>
-            <a:r>
-              <a:rPr lang="ko-KR" altLang="en-US" b="1" dirty="0"/>
-              <a:t>추천 조합</a:t>
-            </a:r>
-          </a:p>
-          <a:p>
-            <a:r>
-              <a:rPr lang="ko-KR" altLang="en-US" dirty="0"/>
-              <a:t>발전량 </a:t>
-            </a:r>
-            <a:r>
-              <a:rPr lang="en-US" altLang="ko-KR" dirty="0"/>
-              <a:t>vs </a:t>
-            </a:r>
-            <a:r>
-              <a:rPr lang="ko-KR" altLang="en-US" dirty="0"/>
-              <a:t>일사량</a:t>
-            </a:r>
-          </a:p>
-          <a:p>
-            <a:r>
-              <a:rPr lang="ko-KR" altLang="en-US" dirty="0"/>
-              <a:t>발전량 </a:t>
-            </a:r>
-            <a:r>
-              <a:rPr lang="en-US" altLang="ko-KR" dirty="0"/>
-              <a:t>vs </a:t>
-            </a:r>
-            <a:r>
-              <a:rPr lang="ko-KR" altLang="en-US" dirty="0"/>
-              <a:t>풍속</a:t>
-            </a:r>
-          </a:p>
-          <a:p>
-            <a:r>
-              <a:rPr lang="ko-KR" altLang="en-US" dirty="0"/>
-              <a:t>발전량 </a:t>
-            </a:r>
-            <a:r>
-              <a:rPr lang="en-US" altLang="ko-KR" dirty="0"/>
-              <a:t>vs </a:t>
-            </a:r>
-            <a:r>
-              <a:rPr lang="ko-KR" altLang="en-US" dirty="0"/>
-              <a:t>기온</a:t>
-            </a:r>
-          </a:p>
-          <a:p>
-            <a:r>
-              <a:rPr lang="en-US" altLang="ko-KR" dirty="0"/>
-              <a:t>(</a:t>
-            </a:r>
-            <a:r>
-              <a:rPr lang="ko-KR" altLang="en-US" dirty="0"/>
-              <a:t>실제 데이터가 없어도 </a:t>
-            </a:r>
-            <a:r>
-              <a:rPr lang="ko-KR" altLang="en-US" b="1" dirty="0"/>
-              <a:t>형태 설명용 이미지면 충분</a:t>
-            </a:r>
-            <a:r>
-              <a:rPr lang="en-US" altLang="ko-KR" dirty="0"/>
-              <a:t>)</a:t>
-            </a:r>
-          </a:p>
-          <a:p>
-            <a:endParaRPr lang="en-US" altLang="ko-KR" dirty="0"/>
-          </a:p>
-          <a:p>
-            <a:r>
-              <a:rPr lang="ko-KR" altLang="en-US" dirty="0"/>
-              <a:t>관계는 </a:t>
-            </a:r>
-            <a:r>
-              <a:rPr lang="ko-KR" altLang="en-US" b="1" dirty="0"/>
-              <a:t>구간별로 다르게 나타날 수 있다</a:t>
-            </a:r>
-            <a:endParaRPr lang="ko-KR" altLang="en-US" dirty="0"/>
-          </a:p>
-          <a:p>
-            <a:r>
-              <a:rPr lang="ko-KR" altLang="en-US" dirty="0"/>
-              <a:t>일정 수준 이후에는 증가 효과가 둔화될 수 있다</a:t>
-            </a:r>
-          </a:p>
-          <a:p>
-            <a:r>
-              <a:rPr lang="ko-KR" altLang="en-US" dirty="0"/>
-              <a:t>일부 변수는 특정 조건에서만 의미를 가진다</a:t>
-            </a:r>
-          </a:p>
-          <a:p>
-            <a:endParaRPr lang="en-US" altLang="ko-KR" dirty="0"/>
+              <a:t>관계 없음</a:t>
+            </a:r>
+          </a:p>
+          <a:p>
+            <a:r>
+              <a:rPr lang="ko-KR" altLang="en-US" dirty="0"/>
+              <a:t>점이 무작위로 퍼짐</a:t>
+            </a:r>
+          </a:p>
+          <a:p>
+            <a:r>
+              <a:rPr lang="ko-KR" altLang="en-US" dirty="0"/>
+              <a:t>“변수가 있다고 다 쓸모 있지는 않다” 메시지</a:t>
+            </a:r>
           </a:p>
           <a:p>
             <a:endParaRPr lang="ko-KR" altLang="en-US" dirty="0"/>
@@ -799,7 +771,7 @@
             <a:fld id="{3E35EA20-6519-4513-9EDC-C89C5369BAEC}" type="slidenum">
               <a:rPr lang="ko-KR" altLang="en-US" smtClean="0"/>
               <a:pPr/>
-              <a:t>17</a:t>
+              <a:t>18</a:t>
             </a:fld>
             <a:endParaRPr lang="ko-KR" altLang="en-US" dirty="0"/>
           </a:p>
@@ -808,7 +780,7 @@
     </p:spTree>
     <p:extLst>
       <p:ext uri="{BB962C8B-B14F-4D97-AF65-F5344CB8AC3E}">
-        <p14:creationId xmlns:p14="http://schemas.microsoft.com/office/powerpoint/2010/main" val="48835251"/>
+        <p14:creationId xmlns:p14="http://schemas.microsoft.com/office/powerpoint/2010/main" val="3163250832"/>
       </p:ext>
     </p:extLst>
   </p:cSld>
@@ -864,32 +836,127 @@
           <a:p>
             <a:r>
               <a:rPr lang="ko-KR" altLang="en-US" b="1" dirty="0"/>
-              <a:t>상관관계와 인과관계는 다르다</a:t>
-            </a:r>
-            <a:endParaRPr lang="ko-KR" altLang="en-US" dirty="0"/>
-          </a:p>
-          <a:p>
+              <a:t>추가 자료 </a:t>
+            </a:r>
+            <a:r>
+              <a:rPr lang="en-US" altLang="ko-KR" b="1" dirty="0"/>
+              <a:t>2: </a:t>
+            </a:r>
             <a:r>
               <a:rPr lang="ko-KR" altLang="en-US" b="1" dirty="0"/>
-              <a:t>활용 포인트</a:t>
-            </a:r>
-          </a:p>
-          <a:p>
-            <a:r>
-              <a:rPr lang="ko-KR" altLang="en-US" dirty="0"/>
-              <a:t>아이스크림 판매량 </a:t>
+              <a:t>발전량 </a:t>
+            </a:r>
+            <a:r>
+              <a:rPr lang="en-US" altLang="ko-KR" b="1" dirty="0"/>
+              <a:t>vs </a:t>
+            </a:r>
+            <a:r>
+              <a:rPr lang="ko-KR" altLang="en-US" b="1" dirty="0"/>
+              <a:t>환경 변수 </a:t>
+            </a:r>
+            <a:r>
+              <a:rPr lang="ko-KR" altLang="en-US" b="1" dirty="0" err="1"/>
+              <a:t>산점도</a:t>
+            </a:r>
+            <a:endParaRPr lang="ko-KR" altLang="en-US" b="1" dirty="0"/>
+          </a:p>
+          <a:p>
+            <a:r>
+              <a:rPr lang="ko-KR" altLang="en-US" b="1" dirty="0"/>
+              <a:t>추천 조합</a:t>
+            </a:r>
+          </a:p>
+          <a:p>
+            <a:r>
+              <a:rPr lang="ko-KR" altLang="en-US" dirty="0"/>
+              <a:t>발전량 </a:t>
             </a:r>
             <a:r>
               <a:rPr lang="en-US" altLang="ko-KR" dirty="0"/>
               <a:t>vs </a:t>
             </a:r>
             <a:r>
-              <a:rPr lang="ko-KR" altLang="en-US"/>
-              <a:t>익사 사고 예시</a:t>
-            </a:r>
-          </a:p>
-          <a:p>
-            <a:endParaRPr lang="ko-KR" altLang="en-US"/>
+              <a:rPr lang="ko-KR" altLang="en-US" dirty="0"/>
+              <a:t>일사량</a:t>
+            </a:r>
+          </a:p>
+          <a:p>
+            <a:r>
+              <a:rPr lang="ko-KR" altLang="en-US" dirty="0"/>
+              <a:t>발전량 </a:t>
+            </a:r>
+            <a:r>
+              <a:rPr lang="en-US" altLang="ko-KR" dirty="0"/>
+              <a:t>vs </a:t>
+            </a:r>
+            <a:r>
+              <a:rPr lang="ko-KR" altLang="en-US" dirty="0"/>
+              <a:t>풍속</a:t>
+            </a:r>
+          </a:p>
+          <a:p>
+            <a:r>
+              <a:rPr lang="ko-KR" altLang="en-US" dirty="0"/>
+              <a:t>발전량 </a:t>
+            </a:r>
+            <a:r>
+              <a:rPr lang="en-US" altLang="ko-KR" dirty="0"/>
+              <a:t>vs </a:t>
+            </a:r>
+            <a:r>
+              <a:rPr lang="ko-KR" altLang="en-US" dirty="0"/>
+              <a:t>기온</a:t>
+            </a:r>
+          </a:p>
+          <a:p>
+            <a:r>
+              <a:rPr lang="en-US" altLang="ko-KR" dirty="0"/>
+              <a:t>(</a:t>
+            </a:r>
+            <a:r>
+              <a:rPr lang="ko-KR" altLang="en-US" dirty="0"/>
+              <a:t>실제 데이터가 없어도 </a:t>
+            </a:r>
+            <a:r>
+              <a:rPr lang="ko-KR" altLang="en-US" b="1" dirty="0"/>
+              <a:t>형태 설명용 이미지면 충분</a:t>
+            </a:r>
+            <a:r>
+              <a:rPr lang="en-US" altLang="ko-KR" dirty="0"/>
+              <a:t>)</a:t>
+            </a:r>
+          </a:p>
+          <a:p>
+            <a:endParaRPr lang="en-US" altLang="ko-KR" dirty="0"/>
+          </a:p>
+          <a:p>
+            <a:r>
+              <a:rPr lang="ko-KR" altLang="en-US" dirty="0"/>
+              <a:t>관계는 </a:t>
+            </a:r>
+            <a:r>
+              <a:rPr lang="ko-KR" altLang="en-US" b="1" dirty="0"/>
+              <a:t>구간별로 다르게 나타날 수 있다</a:t>
+            </a:r>
+            <a:endParaRPr lang="ko-KR" altLang="en-US" dirty="0"/>
+          </a:p>
+          <a:p>
+            <a:r>
+              <a:rPr lang="ko-KR" altLang="en-US" dirty="0"/>
+              <a:t>일정 수준 이후에는 증가 효과가 둔화될 수 있다</a:t>
+            </a:r>
+          </a:p>
+          <a:p>
+            <a:r>
+              <a:rPr lang="ko-KR" altLang="en-US" dirty="0"/>
+              <a:t>일부 변수는 특정 조건에서만 의미를 가진다</a:t>
+            </a:r>
+          </a:p>
+          <a:p>
+            <a:endParaRPr lang="en-US" altLang="ko-KR" dirty="0"/>
+          </a:p>
+          <a:p>
+            <a:endParaRPr lang="ko-KR" altLang="en-US" dirty="0"/>
           </a:p>
         </p:txBody>
       </p:sp>
@@ -911,7 +978,119 @@
             <a:fld id="{3E35EA20-6519-4513-9EDC-C89C5369BAEC}" type="slidenum">
               <a:rPr lang="ko-KR" altLang="en-US" smtClean="0"/>
               <a:pPr/>
-              <a:t>18</a:t>
+              <a:t>19</a:t>
+            </a:fld>
+            <a:endParaRPr lang="ko-KR" altLang="en-US" dirty="0"/>
+          </a:p>
+        </p:txBody>
+      </p:sp>
+    </p:spTree>
+    <p:extLst>
+      <p:ext uri="{BB962C8B-B14F-4D97-AF65-F5344CB8AC3E}">
+        <p14:creationId xmlns:p14="http://schemas.microsoft.com/office/powerpoint/2010/main" val="48835251"/>
+      </p:ext>
+    </p:extLst>
+  </p:cSld>
+  <p:clrMapOvr>
+    <a:masterClrMapping/>
+  </p:clrMapOvr>
+</p:notes>
+</file>
+
+<file path=ppt/notesSlides/notesSlide12.xml><?xml version="1.0" encoding="utf-8"?>
+<p:notes xmlns:a="http://schemas.openxmlformats.org/drawingml/2006/main" xmlns:r="http://schemas.openxmlformats.org/officeDocument/2006/relationships" xmlns:p="http://schemas.openxmlformats.org/presentationml/2006/main">
+  <p:cSld>
+    <p:spTree>
+      <p:nvGrpSpPr>
+        <p:cNvPr id="1" name=""/>
+        <p:cNvGrpSpPr/>
+        <p:nvPr/>
+      </p:nvGrpSpPr>
+      <p:grpSpPr>
+        <a:xfrm>
+          <a:off x="0" y="0"/>
+          <a:ext cx="0" cy="0"/>
+          <a:chOff x="0" y="0"/>
+          <a:chExt cx="0" cy="0"/>
+        </a:xfrm>
+      </p:grpSpPr>
+      <p:sp>
+        <p:nvSpPr>
+          <p:cNvPr id="2" name="슬라이드 이미지 개체 틀 1"/>
+          <p:cNvSpPr>
+            <a:spLocks noGrp="1" noRot="1" noChangeAspect="1"/>
+          </p:cNvSpPr>
+          <p:nvPr>
+            <p:ph type="sldImg"/>
+          </p:nvPr>
+        </p:nvSpPr>
+        <p:spPr/>
+      </p:sp>
+      <p:sp>
+        <p:nvSpPr>
+          <p:cNvPr id="3" name="슬라이드 노트 개체 틀 2"/>
+          <p:cNvSpPr>
+            <a:spLocks noGrp="1"/>
+          </p:cNvSpPr>
+          <p:nvPr>
+            <p:ph type="body" idx="1"/>
+          </p:nvPr>
+        </p:nvSpPr>
+        <p:spPr/>
+        <p:txBody>
+          <a:bodyPr/>
+          <a:lstStyle/>
+          <a:p>
+            <a:r>
+              <a:rPr lang="ko-KR" altLang="en-US" b="1" dirty="0"/>
+              <a:t>상관관계와 인과관계는 다르다</a:t>
+            </a:r>
+            <a:endParaRPr lang="ko-KR" altLang="en-US" dirty="0"/>
+          </a:p>
+          <a:p>
+            <a:r>
+              <a:rPr lang="ko-KR" altLang="en-US" b="1" dirty="0"/>
+              <a:t>활용 포인트</a:t>
+            </a:r>
+          </a:p>
+          <a:p>
+            <a:r>
+              <a:rPr lang="ko-KR" altLang="en-US" dirty="0"/>
+              <a:t>아이스크림 판매량 </a:t>
+            </a:r>
+            <a:r>
+              <a:rPr lang="en-US" altLang="ko-KR" dirty="0"/>
+              <a:t>vs </a:t>
+            </a:r>
+            <a:r>
+              <a:rPr lang="ko-KR" altLang="en-US"/>
+              <a:t>익사 사고 예시</a:t>
+            </a:r>
+          </a:p>
+          <a:p>
+            <a:endParaRPr lang="ko-KR" altLang="en-US"/>
+          </a:p>
+        </p:txBody>
+      </p:sp>
+      <p:sp>
+        <p:nvSpPr>
+          <p:cNvPr id="4" name="슬라이드 번호 개체 틀 3"/>
+          <p:cNvSpPr>
+            <a:spLocks noGrp="1"/>
+          </p:cNvSpPr>
+          <p:nvPr>
+            <p:ph type="sldNum" sz="quarter" idx="5"/>
+          </p:nvPr>
+        </p:nvSpPr>
+        <p:spPr/>
+        <p:txBody>
+          <a:bodyPr/>
+          <a:lstStyle/>
+          <a:p>
+            <a:fld id="{3E35EA20-6519-4513-9EDC-C89C5369BAEC}" type="slidenum">
+              <a:rPr lang="ko-KR" altLang="en-US" smtClean="0"/>
+              <a:pPr/>
+              <a:t>20</a:t>
             </a:fld>
             <a:endParaRPr lang="ko-KR" altLang="en-US" dirty="0"/>
           </a:p>
@@ -930,7 +1109,95 @@
 </p:notes>
 </file>
 
-<file path=ppt/notesSlides/notesSlide12.xml><?xml version="1.0" encoding="utf-8"?>
+<file path=ppt/notesSlides/notesSlide13.xml><?xml version="1.0" encoding="utf-8"?>
+<p:notes xmlns:a="http://schemas.openxmlformats.org/drawingml/2006/main" xmlns:r="http://schemas.openxmlformats.org/officeDocument/2006/relationships" xmlns:p="http://schemas.openxmlformats.org/presentationml/2006/main">
+  <p:cSld>
+    <p:spTree>
+      <p:nvGrpSpPr>
+        <p:cNvPr id="1" name=""/>
+        <p:cNvGrpSpPr/>
+        <p:nvPr/>
+      </p:nvGrpSpPr>
+      <p:grpSpPr>
+        <a:xfrm>
+          <a:off x="0" y="0"/>
+          <a:ext cx="0" cy="0"/>
+          <a:chOff x="0" y="0"/>
+          <a:chExt cx="0" cy="0"/>
+        </a:xfrm>
+      </p:grpSpPr>
+      <p:sp>
+        <p:nvSpPr>
+          <p:cNvPr id="2" name="슬라이드 이미지 개체 틀 1"/>
+          <p:cNvSpPr>
+            <a:spLocks noGrp="1" noRot="1" noChangeAspect="1"/>
+          </p:cNvSpPr>
+          <p:nvPr>
+            <p:ph type="sldImg"/>
+          </p:nvPr>
+        </p:nvSpPr>
+        <p:spPr/>
+      </p:sp>
+      <p:sp>
+        <p:nvSpPr>
+          <p:cNvPr id="3" name="슬라이드 노트 개체 틀 2"/>
+          <p:cNvSpPr>
+            <a:spLocks noGrp="1"/>
+          </p:cNvSpPr>
+          <p:nvPr>
+            <p:ph type="body" idx="1"/>
+          </p:nvPr>
+        </p:nvSpPr>
+        <p:spPr/>
+        <p:txBody>
+          <a:bodyPr/>
+          <a:lstStyle/>
+          <a:p>
+            <a:r>
+              <a:rPr lang="ko-KR" altLang="en-US" dirty="0"/>
+              <a:t>재생에너지</a:t>
+            </a:r>
+          </a:p>
+        </p:txBody>
+      </p:sp>
+      <p:sp>
+        <p:nvSpPr>
+          <p:cNvPr id="4" name="슬라이드 번호 개체 틀 3"/>
+          <p:cNvSpPr>
+            <a:spLocks noGrp="1"/>
+          </p:cNvSpPr>
+          <p:nvPr>
+            <p:ph type="sldNum" sz="quarter" idx="5"/>
+          </p:nvPr>
+        </p:nvSpPr>
+        <p:spPr/>
+        <p:txBody>
+          <a:bodyPr/>
+          <a:lstStyle/>
+          <a:p>
+            <a:fld id="{3E35EA20-6519-4513-9EDC-C89C5369BAEC}" type="slidenum">
+              <a:rPr lang="ko-KR" altLang="en-US" smtClean="0"/>
+              <a:pPr/>
+              <a:t>24</a:t>
+            </a:fld>
+            <a:endParaRPr lang="ko-KR" altLang="en-US" dirty="0"/>
+          </a:p>
+        </p:txBody>
+      </p:sp>
+    </p:spTree>
+    <p:extLst>
+      <p:ext uri="{BB962C8B-B14F-4D97-AF65-F5344CB8AC3E}">
+        <p14:creationId xmlns:p14="http://schemas.microsoft.com/office/powerpoint/2010/main" val="1682442057"/>
+      </p:ext>
+    </p:extLst>
+  </p:cSld>
+  <p:clrMapOvr>
+    <a:masterClrMapping/>
+  </p:clrMapOvr>
+</p:notes>
+</file>
+
+<file path=ppt/notesSlides/notesSlide14.xml><?xml version="1.0" encoding="utf-8"?>
 <p:notes xmlns:a="http://schemas.openxmlformats.org/drawingml/2006/main" xmlns:r="http://schemas.openxmlformats.org/officeDocument/2006/relationships" xmlns:p="http://schemas.openxmlformats.org/presentationml/2006/main">
   <p:cSld>
     <p:spTree>
@@ -1019,7 +1286,7 @@
           <a:p>
             <a:fld id="{A0085365-8376-4996-BDD6-F39608FADAF3}" type="slidenum">
               <a:rPr lang="ko-KR" altLang="en-US" smtClean="0"/>
-              <a:t>19</a:t>
+              <a:t>27</a:t>
             </a:fld>
             <a:endParaRPr lang="ko-KR" altLang="en-US"/>
           </a:p>
@@ -1039,6 +1306,94 @@
 </file>
 
 <file path=ppt/notesSlides/notesSlide2.xml><?xml version="1.0" encoding="utf-8"?>
+<p:notes xmlns:a="http://schemas.openxmlformats.org/drawingml/2006/main" xmlns:r="http://schemas.openxmlformats.org/officeDocument/2006/relationships" xmlns:p="http://schemas.openxmlformats.org/presentationml/2006/main">
+  <p:cSld>
+    <p:spTree>
+      <p:nvGrpSpPr>
+        <p:cNvPr id="1" name=""/>
+        <p:cNvGrpSpPr/>
+        <p:nvPr/>
+      </p:nvGrpSpPr>
+      <p:grpSpPr>
+        <a:xfrm>
+          <a:off x="0" y="0"/>
+          <a:ext cx="0" cy="0"/>
+          <a:chOff x="0" y="0"/>
+          <a:chExt cx="0" cy="0"/>
+        </a:xfrm>
+      </p:grpSpPr>
+      <p:sp>
+        <p:nvSpPr>
+          <p:cNvPr id="2" name="슬라이드 이미지 개체 틀 1"/>
+          <p:cNvSpPr>
+            <a:spLocks noGrp="1" noRot="1" noChangeAspect="1"/>
+          </p:cNvSpPr>
+          <p:nvPr>
+            <p:ph type="sldImg"/>
+          </p:nvPr>
+        </p:nvSpPr>
+        <p:spPr/>
+      </p:sp>
+      <p:sp>
+        <p:nvSpPr>
+          <p:cNvPr id="3" name="슬라이드 노트 개체 틀 2"/>
+          <p:cNvSpPr>
+            <a:spLocks noGrp="1"/>
+          </p:cNvSpPr>
+          <p:nvPr>
+            <p:ph type="body" idx="1"/>
+          </p:nvPr>
+        </p:nvSpPr>
+        <p:spPr/>
+        <p:txBody>
+          <a:bodyPr/>
+          <a:lstStyle/>
+          <a:p>
+            <a:r>
+              <a:rPr lang="ko-KR" altLang="en-US" dirty="0"/>
+              <a:t>앞으로 탐색적 데이터 분석을 해볼 예정</a:t>
+            </a:r>
+          </a:p>
+        </p:txBody>
+      </p:sp>
+      <p:sp>
+        <p:nvSpPr>
+          <p:cNvPr id="4" name="슬라이드 번호 개체 틀 3"/>
+          <p:cNvSpPr>
+            <a:spLocks noGrp="1"/>
+          </p:cNvSpPr>
+          <p:nvPr>
+            <p:ph type="sldNum" sz="quarter" idx="5"/>
+          </p:nvPr>
+        </p:nvSpPr>
+        <p:spPr/>
+        <p:txBody>
+          <a:bodyPr/>
+          <a:lstStyle/>
+          <a:p>
+            <a:fld id="{3E35EA20-6519-4513-9EDC-C89C5369BAEC}" type="slidenum">
+              <a:rPr lang="ko-KR" altLang="en-US" smtClean="0"/>
+              <a:pPr/>
+              <a:t>3</a:t>
+            </a:fld>
+            <a:endParaRPr lang="ko-KR" altLang="en-US" dirty="0"/>
+          </a:p>
+        </p:txBody>
+      </p:sp>
+    </p:spTree>
+    <p:extLst>
+      <p:ext uri="{BB962C8B-B14F-4D97-AF65-F5344CB8AC3E}">
+        <p14:creationId xmlns:p14="http://schemas.microsoft.com/office/powerpoint/2010/main" val="239242424"/>
+      </p:ext>
+    </p:extLst>
+  </p:cSld>
+  <p:clrMapOvr>
+    <a:masterClrMapping/>
+  </p:clrMapOvr>
+</p:notes>
+</file>
+
+<file path=ppt/notesSlides/notesSlide3.xml><?xml version="1.0" encoding="utf-8"?>
 <p:notes xmlns:a="http://schemas.openxmlformats.org/drawingml/2006/main" xmlns:r="http://schemas.openxmlformats.org/officeDocument/2006/relationships" xmlns:p="http://schemas.openxmlformats.org/presentationml/2006/main">
   <p:cSld>
     <p:spTree>
@@ -1127,7 +1482,7 @@
           <a:p>
             <a:fld id="{A0085365-8376-4996-BDD6-F39608FADAF3}" type="slidenum">
               <a:rPr lang="ko-KR" altLang="en-US" smtClean="0"/>
-              <a:t>2</a:t>
+              <a:t>4</a:t>
             </a:fld>
             <a:endParaRPr lang="ko-KR" altLang="en-US"/>
           </a:p>
@@ -1137,1409 +1492,6 @@
     <p:extLst>
       <p:ext uri="{BB962C8B-B14F-4D97-AF65-F5344CB8AC3E}">
         <p14:creationId xmlns:p14="http://schemas.microsoft.com/office/powerpoint/2010/main" val="3500114727"/>
-      </p:ext>
-    </p:extLst>
-  </p:cSld>
-  <p:clrMapOvr>
-    <a:masterClrMapping/>
-  </p:clrMapOvr>
-</p:notes>
-</file>
-
-<file path=ppt/notesSlides/notesSlide3.xml><?xml version="1.0" encoding="utf-8"?>
-<p:notes xmlns:a="http://schemas.openxmlformats.org/drawingml/2006/main" xmlns:r="http://schemas.openxmlformats.org/officeDocument/2006/relationships" xmlns:p="http://schemas.openxmlformats.org/presentationml/2006/main">
-  <p:cSld>
-    <p:spTree>
-      <p:nvGrpSpPr>
-        <p:cNvPr id="1" name=""/>
-        <p:cNvGrpSpPr/>
-        <p:nvPr/>
-      </p:nvGrpSpPr>
-      <p:grpSpPr>
-        <a:xfrm>
-          <a:off x="0" y="0"/>
-          <a:ext cx="0" cy="0"/>
-          <a:chOff x="0" y="0"/>
-          <a:chExt cx="0" cy="0"/>
-        </a:xfrm>
-      </p:grpSpPr>
-      <p:sp>
-        <p:nvSpPr>
-          <p:cNvPr id="2" name="슬라이드 이미지 개체 틀 1"/>
-          <p:cNvSpPr>
-            <a:spLocks noGrp="1" noRot="1" noChangeAspect="1"/>
-          </p:cNvSpPr>
-          <p:nvPr>
-            <p:ph type="sldImg"/>
-          </p:nvPr>
-        </p:nvSpPr>
-        <p:spPr/>
-      </p:sp>
-      <p:sp>
-        <p:nvSpPr>
-          <p:cNvPr id="3" name="슬라이드 노트 개체 틀 2"/>
-          <p:cNvSpPr>
-            <a:spLocks noGrp="1"/>
-          </p:cNvSpPr>
-          <p:nvPr>
-            <p:ph type="body" idx="1"/>
-          </p:nvPr>
-        </p:nvSpPr>
-        <p:spPr/>
-        <p:txBody>
-          <a:bodyPr/>
-          <a:lstStyle/>
-          <a:p>
-            <a:r>
-              <a:rPr lang="en-US" altLang="ko-KR" sz="1200" b="1" kern="1200" dirty="0">
-                <a:solidFill>
-                  <a:schemeClr val="tx1"/>
-                </a:solidFill>
-                <a:effectLst/>
-                <a:latin typeface="Kim jung chul Gothic Regular" panose="020B0503000000000000" pitchFamily="50" charset="-127"/>
-                <a:ea typeface="Kim jung chul Gothic Regular" panose="020B0503000000000000" pitchFamily="50" charset="-127"/>
-                <a:cs typeface="+mn-cs"/>
-              </a:rPr>
-              <a:t>1. </a:t>
-            </a:r>
-            <a:r>
-              <a:rPr lang="ko-KR" altLang="en-US" sz="1200" b="1" kern="1200" dirty="0">
-                <a:solidFill>
-                  <a:schemeClr val="tx1"/>
-                </a:solidFill>
-                <a:effectLst/>
-                <a:latin typeface="Kim jung chul Gothic Regular" panose="020B0503000000000000" pitchFamily="50" charset="-127"/>
-                <a:ea typeface="Kim jung chul Gothic Regular" panose="020B0503000000000000" pitchFamily="50" charset="-127"/>
-                <a:cs typeface="+mn-cs"/>
-              </a:rPr>
-              <a:t>원 영상 </a:t>
-            </a:r>
-            <a:r>
-              <a:rPr lang="en-US" altLang="ko-KR" sz="1200" b="1" kern="1200" dirty="0">
-                <a:solidFill>
-                  <a:schemeClr val="tx1"/>
-                </a:solidFill>
-                <a:effectLst/>
-                <a:latin typeface="Kim jung chul Gothic Regular" panose="020B0503000000000000" pitchFamily="50" charset="-127"/>
-                <a:ea typeface="Kim jung chul Gothic Regular" panose="020B0503000000000000" pitchFamily="50" charset="-127"/>
-                <a:cs typeface="+mn-cs"/>
-              </a:rPr>
-              <a:t>(Original Image)</a:t>
-            </a:r>
-          </a:p>
-          <a:p>
-            <a:r>
-              <a:rPr lang="ko-KR" altLang="en-US" sz="1200" b="1" kern="1200" dirty="0">
-                <a:solidFill>
-                  <a:schemeClr val="tx1"/>
-                </a:solidFill>
-                <a:effectLst/>
-                <a:latin typeface="Kim jung chul Gothic Regular" panose="020B0503000000000000" pitchFamily="50" charset="-127"/>
-                <a:ea typeface="Kim jung chul Gothic Regular" panose="020B0503000000000000" pitchFamily="50" charset="-127"/>
-                <a:cs typeface="+mn-cs"/>
-              </a:rPr>
-              <a:t>특징</a:t>
-            </a:r>
-            <a:r>
-              <a:rPr lang="en-US" altLang="ko-KR" sz="1200" b="1" kern="1200" dirty="0">
-                <a:solidFill>
-                  <a:schemeClr val="tx1"/>
-                </a:solidFill>
-                <a:effectLst/>
-                <a:latin typeface="Kim jung chul Gothic Regular" panose="020B0503000000000000" pitchFamily="50" charset="-127"/>
-                <a:ea typeface="Kim jung chul Gothic Regular" panose="020B0503000000000000" pitchFamily="50" charset="-127"/>
-                <a:cs typeface="+mn-cs"/>
-              </a:rPr>
-              <a:t>:</a:t>
-            </a:r>
-            <a:r>
-              <a:rPr lang="ko-KR" altLang="en-US" sz="1200" kern="1200" dirty="0">
-                <a:solidFill>
-                  <a:schemeClr val="tx1"/>
-                </a:solidFill>
-                <a:effectLst/>
-                <a:latin typeface="Kim jung chul Gothic Regular" panose="020B0503000000000000" pitchFamily="50" charset="-127"/>
-                <a:ea typeface="Kim jung chul Gothic Regular" panose="020B0503000000000000" pitchFamily="50" charset="-127"/>
-                <a:cs typeface="+mn-cs"/>
-              </a:rPr>
-              <a:t> 표준 테스트 이미지인 </a:t>
-            </a:r>
-            <a:r>
-              <a:rPr lang="en-US" altLang="ko-KR" sz="1200" kern="1200" dirty="0">
-                <a:solidFill>
-                  <a:schemeClr val="tx1"/>
-                </a:solidFill>
-                <a:effectLst/>
-                <a:latin typeface="Kim jung chul Gothic Regular" panose="020B0503000000000000" pitchFamily="50" charset="-127"/>
-                <a:ea typeface="Kim jung chul Gothic Regular" panose="020B0503000000000000" pitchFamily="50" charset="-127"/>
-                <a:cs typeface="+mn-cs"/>
-              </a:rPr>
-              <a:t>'</a:t>
-            </a:r>
-            <a:r>
-              <a:rPr lang="ko-KR" altLang="en-US" sz="1200" kern="1200" dirty="0">
-                <a:solidFill>
-                  <a:schemeClr val="tx1"/>
-                </a:solidFill>
-                <a:effectLst/>
-                <a:latin typeface="Kim jung chul Gothic Regular" panose="020B0503000000000000" pitchFamily="50" charset="-127"/>
-                <a:ea typeface="Kim jung chul Gothic Regular" panose="020B0503000000000000" pitchFamily="50" charset="-127"/>
-                <a:cs typeface="+mn-cs"/>
-              </a:rPr>
-              <a:t>레나</a:t>
-            </a:r>
-            <a:r>
-              <a:rPr lang="en-US" altLang="ko-KR" sz="1200" kern="1200" dirty="0">
-                <a:solidFill>
-                  <a:schemeClr val="tx1"/>
-                </a:solidFill>
-                <a:effectLst/>
-                <a:latin typeface="Kim jung chul Gothic Regular" panose="020B0503000000000000" pitchFamily="50" charset="-127"/>
-                <a:ea typeface="Kim jung chul Gothic Regular" panose="020B0503000000000000" pitchFamily="50" charset="-127"/>
-                <a:cs typeface="+mn-cs"/>
-              </a:rPr>
-              <a:t>(Lenna)'</a:t>
-            </a:r>
-            <a:r>
-              <a:rPr lang="ko-KR" altLang="en-US" sz="1200" kern="1200" dirty="0">
-                <a:solidFill>
-                  <a:schemeClr val="tx1"/>
-                </a:solidFill>
-                <a:effectLst/>
-                <a:latin typeface="Kim jung chul Gothic Regular" panose="020B0503000000000000" pitchFamily="50" charset="-127"/>
-                <a:ea typeface="Kim jung chul Gothic Regular" panose="020B0503000000000000" pitchFamily="50" charset="-127"/>
-                <a:cs typeface="+mn-cs"/>
-              </a:rPr>
-              <a:t>입니다</a:t>
-            </a:r>
-            <a:r>
-              <a:rPr lang="en-US" altLang="ko-KR" sz="1200" kern="1200" dirty="0">
-                <a:solidFill>
-                  <a:schemeClr val="tx1"/>
-                </a:solidFill>
-                <a:effectLst/>
-                <a:latin typeface="Kim jung chul Gothic Regular" panose="020B0503000000000000" pitchFamily="50" charset="-127"/>
-                <a:ea typeface="Kim jung chul Gothic Regular" panose="020B0503000000000000" pitchFamily="50" charset="-127"/>
-                <a:cs typeface="+mn-cs"/>
-              </a:rPr>
-              <a:t>.</a:t>
-            </a:r>
-          </a:p>
-          <a:p>
-            <a:r>
-              <a:rPr lang="ko-KR" altLang="en-US" sz="1200" b="1" kern="1200" dirty="0">
-                <a:solidFill>
-                  <a:schemeClr val="tx1"/>
-                </a:solidFill>
-                <a:effectLst/>
-                <a:latin typeface="Kim jung chul Gothic Regular" panose="020B0503000000000000" pitchFamily="50" charset="-127"/>
-                <a:ea typeface="Kim jung chul Gothic Regular" panose="020B0503000000000000" pitchFamily="50" charset="-127"/>
-                <a:cs typeface="+mn-cs"/>
-              </a:rPr>
-              <a:t>커널</a:t>
-            </a:r>
-            <a:r>
-              <a:rPr lang="en-US" altLang="ko-KR" sz="1200" b="1" kern="1200" dirty="0">
-                <a:solidFill>
-                  <a:schemeClr val="tx1"/>
-                </a:solidFill>
-                <a:effectLst/>
-                <a:latin typeface="Kim jung chul Gothic Regular" panose="020B0503000000000000" pitchFamily="50" charset="-127"/>
-                <a:ea typeface="Kim jung chul Gothic Regular" panose="020B0503000000000000" pitchFamily="50" charset="-127"/>
-                <a:cs typeface="+mn-cs"/>
-              </a:rPr>
-              <a:t>:</a:t>
-            </a:r>
-            <a:r>
-              <a:rPr lang="ko-KR" altLang="en-US" sz="1200" kern="1200" dirty="0">
-                <a:solidFill>
-                  <a:schemeClr val="tx1"/>
-                </a:solidFill>
-                <a:effectLst/>
-                <a:latin typeface="Kim jung chul Gothic Regular" panose="020B0503000000000000" pitchFamily="50" charset="-127"/>
-                <a:ea typeface="Kim jung chul Gothic Regular" panose="020B0503000000000000" pitchFamily="50" charset="-127"/>
-                <a:cs typeface="+mn-cs"/>
-              </a:rPr>
-              <a:t> 중앙에만 </a:t>
-            </a:r>
-            <a:r>
-              <a:rPr lang="en-US" altLang="ko-KR" sz="1200" kern="1200" dirty="0">
-                <a:solidFill>
-                  <a:schemeClr val="tx1"/>
-                </a:solidFill>
-                <a:effectLst/>
-                <a:latin typeface="Kim jung chul Gothic Regular" panose="020B0503000000000000" pitchFamily="50" charset="-127"/>
-                <a:ea typeface="Kim jung chul Gothic Regular" panose="020B0503000000000000" pitchFamily="50" charset="-127"/>
-                <a:cs typeface="+mn-cs"/>
-              </a:rPr>
-              <a:t>1</a:t>
-            </a:r>
-            <a:r>
-              <a:rPr lang="ko-KR" altLang="en-US" sz="1200" kern="1200" dirty="0">
-                <a:solidFill>
-                  <a:schemeClr val="tx1"/>
-                </a:solidFill>
-                <a:effectLst/>
-                <a:latin typeface="Kim jung chul Gothic Regular" panose="020B0503000000000000" pitchFamily="50" charset="-127"/>
-                <a:ea typeface="Kim jung chul Gothic Regular" panose="020B0503000000000000" pitchFamily="50" charset="-127"/>
-                <a:cs typeface="+mn-cs"/>
-              </a:rPr>
-              <a:t>이 있고 나머지는 </a:t>
-            </a:r>
-            <a:r>
-              <a:rPr lang="en-US" altLang="ko-KR" sz="1200" kern="1200" dirty="0">
-                <a:solidFill>
-                  <a:schemeClr val="tx1"/>
-                </a:solidFill>
-                <a:effectLst/>
-                <a:latin typeface="Kim jung chul Gothic Regular" panose="020B0503000000000000" pitchFamily="50" charset="-127"/>
-                <a:ea typeface="Kim jung chul Gothic Regular" panose="020B0503000000000000" pitchFamily="50" charset="-127"/>
-                <a:cs typeface="+mn-cs"/>
-              </a:rPr>
-              <a:t>0</a:t>
-            </a:r>
-            <a:r>
-              <a:rPr lang="ko-KR" altLang="en-US" sz="1200" kern="1200" dirty="0">
-                <a:solidFill>
-                  <a:schemeClr val="tx1"/>
-                </a:solidFill>
-                <a:effectLst/>
-                <a:latin typeface="Kim jung chul Gothic Regular" panose="020B0503000000000000" pitchFamily="50" charset="-127"/>
-                <a:ea typeface="Kim jung chul Gothic Regular" panose="020B0503000000000000" pitchFamily="50" charset="-127"/>
-                <a:cs typeface="+mn-cs"/>
-              </a:rPr>
-              <a:t>인 행렬입니다</a:t>
-            </a:r>
-            <a:r>
-              <a:rPr lang="en-US" altLang="ko-KR" sz="1200" kern="1200" dirty="0">
-                <a:solidFill>
-                  <a:schemeClr val="tx1"/>
-                </a:solidFill>
-                <a:effectLst/>
-                <a:latin typeface="Kim jung chul Gothic Regular" panose="020B0503000000000000" pitchFamily="50" charset="-127"/>
-                <a:ea typeface="Kim jung chul Gothic Regular" panose="020B0503000000000000" pitchFamily="50" charset="-127"/>
-                <a:cs typeface="+mn-cs"/>
-              </a:rPr>
-              <a:t>.</a:t>
-            </a:r>
-          </a:p>
-          <a:p>
-            <a:pPr lvl="1"/>
-            <a:r>
-              <a:rPr lang="ko-KR" altLang="en-US" sz="1200" kern="1200" dirty="0">
-                <a:solidFill>
-                  <a:schemeClr val="tx1"/>
-                </a:solidFill>
-                <a:effectLst/>
-                <a:latin typeface="Kim jung chul Gothic Regular" panose="020B0503000000000000" pitchFamily="50" charset="-127"/>
-                <a:ea typeface="Kim jung chul Gothic Regular" panose="020B0503000000000000" pitchFamily="50" charset="-127"/>
-                <a:cs typeface="+mn-cs"/>
-              </a:rPr>
-              <a:t>이는 자기 자신의 픽셀 값만 그대로 가져오고 주변 값은 무시한다는 뜻이므로</a:t>
-            </a:r>
-            <a:r>
-              <a:rPr lang="en-US" altLang="ko-KR" sz="1200" kern="1200" dirty="0">
-                <a:solidFill>
-                  <a:schemeClr val="tx1"/>
-                </a:solidFill>
-                <a:effectLst/>
-                <a:latin typeface="Kim jung chul Gothic Regular" panose="020B0503000000000000" pitchFamily="50" charset="-127"/>
-                <a:ea typeface="Kim jung chul Gothic Regular" panose="020B0503000000000000" pitchFamily="50" charset="-127"/>
-                <a:cs typeface="+mn-cs"/>
-              </a:rPr>
-              <a:t>, </a:t>
-            </a:r>
-            <a:r>
-              <a:rPr lang="ko-KR" altLang="en-US" sz="1200" kern="1200" dirty="0">
-                <a:solidFill>
-                  <a:schemeClr val="tx1"/>
-                </a:solidFill>
-                <a:effectLst/>
-                <a:latin typeface="Kim jung chul Gothic Regular" panose="020B0503000000000000" pitchFamily="50" charset="-127"/>
-                <a:ea typeface="Kim jung chul Gothic Regular" panose="020B0503000000000000" pitchFamily="50" charset="-127"/>
-                <a:cs typeface="+mn-cs"/>
-              </a:rPr>
-              <a:t>영상에 아무런 변화를 주지 않는 </a:t>
-            </a:r>
-            <a:r>
-              <a:rPr lang="ko-KR" altLang="en-US" sz="1200" b="1" kern="1200" dirty="0" err="1">
-                <a:solidFill>
-                  <a:schemeClr val="tx1"/>
-                </a:solidFill>
-                <a:effectLst/>
-                <a:latin typeface="Kim jung chul Gothic Regular" panose="020B0503000000000000" pitchFamily="50" charset="-127"/>
-                <a:ea typeface="Kim jung chul Gothic Regular" panose="020B0503000000000000" pitchFamily="50" charset="-127"/>
-                <a:cs typeface="+mn-cs"/>
-              </a:rPr>
-              <a:t>항등</a:t>
-            </a:r>
-            <a:r>
-              <a:rPr lang="ko-KR" altLang="en-US" sz="1200" b="1" kern="1200" dirty="0">
-                <a:solidFill>
-                  <a:schemeClr val="tx1"/>
-                </a:solidFill>
-                <a:effectLst/>
-                <a:latin typeface="Kim jung chul Gothic Regular" panose="020B0503000000000000" pitchFamily="50" charset="-127"/>
-                <a:ea typeface="Kim jung chul Gothic Regular" panose="020B0503000000000000" pitchFamily="50" charset="-127"/>
-                <a:cs typeface="+mn-cs"/>
-              </a:rPr>
-              <a:t> 함수</a:t>
-            </a:r>
-            <a:r>
-              <a:rPr lang="en-US" altLang="ko-KR" sz="1200" b="1" kern="1200" dirty="0">
-                <a:solidFill>
-                  <a:schemeClr val="tx1"/>
-                </a:solidFill>
-                <a:effectLst/>
-                <a:latin typeface="Kim jung chul Gothic Regular" panose="020B0503000000000000" pitchFamily="50" charset="-127"/>
-                <a:ea typeface="Kim jung chul Gothic Regular" panose="020B0503000000000000" pitchFamily="50" charset="-127"/>
-                <a:cs typeface="+mn-cs"/>
-              </a:rPr>
-              <a:t>(Identity)</a:t>
-            </a:r>
-            <a:r>
-              <a:rPr lang="ko-KR" altLang="en-US" sz="1200" kern="1200" dirty="0">
-                <a:solidFill>
-                  <a:schemeClr val="tx1"/>
-                </a:solidFill>
-                <a:effectLst/>
-                <a:latin typeface="Kim jung chul Gothic Regular" panose="020B0503000000000000" pitchFamily="50" charset="-127"/>
-                <a:ea typeface="Kim jung chul Gothic Regular" panose="020B0503000000000000" pitchFamily="50" charset="-127"/>
-                <a:cs typeface="+mn-cs"/>
-              </a:rPr>
-              <a:t> 역할을 합니다</a:t>
-            </a:r>
-            <a:r>
-              <a:rPr lang="en-US" altLang="ko-KR" sz="1200" kern="1200" dirty="0">
-                <a:solidFill>
-                  <a:schemeClr val="tx1"/>
-                </a:solidFill>
-                <a:effectLst/>
-                <a:latin typeface="Kim jung chul Gothic Regular" panose="020B0503000000000000" pitchFamily="50" charset="-127"/>
-                <a:ea typeface="Kim jung chul Gothic Regular" panose="020B0503000000000000" pitchFamily="50" charset="-127"/>
-                <a:cs typeface="+mn-cs"/>
-              </a:rPr>
-              <a:t>.</a:t>
-            </a:r>
-          </a:p>
-          <a:p>
-            <a:r>
-              <a:rPr lang="en-US" altLang="ko-KR" sz="1200" b="1" kern="1200" dirty="0">
-                <a:solidFill>
-                  <a:schemeClr val="tx1"/>
-                </a:solidFill>
-                <a:effectLst/>
-                <a:latin typeface="Kim jung chul Gothic Regular" panose="020B0503000000000000" pitchFamily="50" charset="-127"/>
-                <a:ea typeface="Kim jung chul Gothic Regular" panose="020B0503000000000000" pitchFamily="50" charset="-127"/>
-                <a:cs typeface="+mn-cs"/>
-              </a:rPr>
-              <a:t>2. </a:t>
-            </a:r>
-            <a:r>
-              <a:rPr lang="ko-KR" altLang="en-US" sz="1200" b="1" kern="1200" dirty="0">
-                <a:solidFill>
-                  <a:schemeClr val="tx1"/>
-                </a:solidFill>
-                <a:effectLst/>
-                <a:latin typeface="Kim jung chul Gothic Regular" panose="020B0503000000000000" pitchFamily="50" charset="-127"/>
-                <a:ea typeface="Kim jung chul Gothic Regular" panose="020B0503000000000000" pitchFamily="50" charset="-127"/>
-                <a:cs typeface="+mn-cs"/>
-              </a:rPr>
-              <a:t>박스 </a:t>
-            </a:r>
-            <a:r>
-              <a:rPr lang="ko-KR" altLang="en-US" sz="1200" b="1" kern="1200" dirty="0" err="1">
-                <a:solidFill>
-                  <a:schemeClr val="tx1"/>
-                </a:solidFill>
-                <a:effectLst/>
-                <a:latin typeface="Kim jung chul Gothic Regular" panose="020B0503000000000000" pitchFamily="50" charset="-127"/>
-                <a:ea typeface="Kim jung chul Gothic Regular" panose="020B0503000000000000" pitchFamily="50" charset="-127"/>
-                <a:cs typeface="+mn-cs"/>
-              </a:rPr>
-              <a:t>블러</a:t>
-            </a:r>
-            <a:r>
-              <a:rPr lang="ko-KR" altLang="en-US" sz="1200" b="1" kern="1200" dirty="0">
-                <a:solidFill>
-                  <a:schemeClr val="tx1"/>
-                </a:solidFill>
-                <a:effectLst/>
-                <a:latin typeface="Kim jung chul Gothic Regular" panose="020B0503000000000000" pitchFamily="50" charset="-127"/>
-                <a:ea typeface="Kim jung chul Gothic Regular" panose="020B0503000000000000" pitchFamily="50" charset="-127"/>
-                <a:cs typeface="+mn-cs"/>
-              </a:rPr>
-              <a:t> </a:t>
-            </a:r>
-            <a:r>
-              <a:rPr lang="en-US" altLang="ko-KR" sz="1200" b="1" kern="1200" dirty="0">
-                <a:solidFill>
-                  <a:schemeClr val="tx1"/>
-                </a:solidFill>
-                <a:effectLst/>
-                <a:latin typeface="Kim jung chul Gothic Regular" panose="020B0503000000000000" pitchFamily="50" charset="-127"/>
-                <a:ea typeface="Kim jung chul Gothic Regular" panose="020B0503000000000000" pitchFamily="50" charset="-127"/>
-                <a:cs typeface="+mn-cs"/>
-              </a:rPr>
-              <a:t>(Box Blur)</a:t>
-            </a:r>
-          </a:p>
-          <a:p>
-            <a:r>
-              <a:rPr lang="ko-KR" altLang="en-US" sz="1200" b="1" kern="1200" dirty="0">
-                <a:solidFill>
-                  <a:schemeClr val="tx1"/>
-                </a:solidFill>
-                <a:effectLst/>
-                <a:latin typeface="Kim jung chul Gothic Regular" panose="020B0503000000000000" pitchFamily="50" charset="-127"/>
-                <a:ea typeface="Kim jung chul Gothic Regular" panose="020B0503000000000000" pitchFamily="50" charset="-127"/>
-                <a:cs typeface="+mn-cs"/>
-              </a:rPr>
-              <a:t>원리</a:t>
-            </a:r>
-            <a:r>
-              <a:rPr lang="en-US" altLang="ko-KR" sz="1200" b="1" kern="1200" dirty="0">
-                <a:solidFill>
-                  <a:schemeClr val="tx1"/>
-                </a:solidFill>
-                <a:effectLst/>
-                <a:latin typeface="Kim jung chul Gothic Regular" panose="020B0503000000000000" pitchFamily="50" charset="-127"/>
-                <a:ea typeface="Kim jung chul Gothic Regular" panose="020B0503000000000000" pitchFamily="50" charset="-127"/>
-                <a:cs typeface="+mn-cs"/>
-              </a:rPr>
-              <a:t>:</a:t>
-            </a:r>
-            <a:r>
-              <a:rPr lang="ko-KR" altLang="en-US" sz="1200" kern="1200" dirty="0">
-                <a:solidFill>
-                  <a:schemeClr val="tx1"/>
-                </a:solidFill>
-                <a:effectLst/>
-                <a:latin typeface="Kim jung chul Gothic Regular" panose="020B0503000000000000" pitchFamily="50" charset="-127"/>
-                <a:ea typeface="Kim jung chul Gothic Regular" panose="020B0503000000000000" pitchFamily="50" charset="-127"/>
-                <a:cs typeface="+mn-cs"/>
-              </a:rPr>
-              <a:t> 주변 픽셀들의 평균값을 구해서 현재 픽셀을 바꿉니다</a:t>
-            </a:r>
-            <a:r>
-              <a:rPr lang="en-US" altLang="ko-KR" sz="1200" kern="1200" dirty="0">
-                <a:solidFill>
-                  <a:schemeClr val="tx1"/>
-                </a:solidFill>
-                <a:effectLst/>
-                <a:latin typeface="Kim jung chul Gothic Regular" panose="020B0503000000000000" pitchFamily="50" charset="-127"/>
-                <a:ea typeface="Kim jung chul Gothic Regular" panose="020B0503000000000000" pitchFamily="50" charset="-127"/>
-                <a:cs typeface="+mn-cs"/>
-              </a:rPr>
-              <a:t>.</a:t>
-            </a:r>
-          </a:p>
-          <a:p>
-            <a:r>
-              <a:rPr lang="ko-KR" altLang="en-US" sz="1200" b="1" kern="1200" dirty="0">
-                <a:solidFill>
-                  <a:schemeClr val="tx1"/>
-                </a:solidFill>
-                <a:effectLst/>
-                <a:latin typeface="Kim jung chul Gothic Regular" panose="020B0503000000000000" pitchFamily="50" charset="-127"/>
-                <a:ea typeface="Kim jung chul Gothic Regular" panose="020B0503000000000000" pitchFamily="50" charset="-127"/>
-                <a:cs typeface="+mn-cs"/>
-              </a:rPr>
-              <a:t>커널 특징</a:t>
-            </a:r>
-            <a:r>
-              <a:rPr lang="en-US" altLang="ko-KR" sz="1200" b="1" kern="1200" dirty="0">
-                <a:solidFill>
-                  <a:schemeClr val="tx1"/>
-                </a:solidFill>
-                <a:effectLst/>
-                <a:latin typeface="Kim jung chul Gothic Regular" panose="020B0503000000000000" pitchFamily="50" charset="-127"/>
-                <a:ea typeface="Kim jung chul Gothic Regular" panose="020B0503000000000000" pitchFamily="50" charset="-127"/>
-                <a:cs typeface="+mn-cs"/>
-              </a:rPr>
-              <a:t>:</a:t>
-            </a:r>
-            <a:r>
-              <a:rPr lang="ko-KR" altLang="en-US" sz="1200" kern="1200" dirty="0">
-                <a:solidFill>
-                  <a:schemeClr val="tx1"/>
-                </a:solidFill>
-                <a:effectLst/>
-                <a:latin typeface="Kim jung chul Gothic Regular" panose="020B0503000000000000" pitchFamily="50" charset="-127"/>
-                <a:ea typeface="Kim jung chul Gothic Regular" panose="020B0503000000000000" pitchFamily="50" charset="-127"/>
-                <a:cs typeface="+mn-cs"/>
-              </a:rPr>
-              <a:t> 모든 칸이 </a:t>
-            </a:r>
-            <a:r>
-              <a:rPr lang="en-US" altLang="ko-KR" sz="1200" kern="1200" dirty="0">
-                <a:solidFill>
-                  <a:schemeClr val="tx1"/>
-                </a:solidFill>
-                <a:effectLst/>
-                <a:latin typeface="Kim jung chul Gothic Regular" panose="020B0503000000000000" pitchFamily="50" charset="-127"/>
-                <a:ea typeface="Kim jung chul Gothic Regular" panose="020B0503000000000000" pitchFamily="50" charset="-127"/>
-                <a:cs typeface="+mn-cs"/>
-              </a:rPr>
-              <a:t>1</a:t>
-            </a:r>
-            <a:r>
-              <a:rPr lang="ko-KR" altLang="en-US" sz="1200" kern="1200" dirty="0">
-                <a:solidFill>
-                  <a:schemeClr val="tx1"/>
-                </a:solidFill>
-                <a:effectLst/>
-                <a:latin typeface="Kim jung chul Gothic Regular" panose="020B0503000000000000" pitchFamily="50" charset="-127"/>
-                <a:ea typeface="Kim jung chul Gothic Regular" panose="020B0503000000000000" pitchFamily="50" charset="-127"/>
-                <a:cs typeface="+mn-cs"/>
-              </a:rPr>
-              <a:t>로 채워져 있고</a:t>
-            </a:r>
-            <a:r>
-              <a:rPr lang="en-US" altLang="ko-KR" sz="1200" kern="1200" dirty="0">
-                <a:solidFill>
-                  <a:schemeClr val="tx1"/>
-                </a:solidFill>
-                <a:effectLst/>
-                <a:latin typeface="Kim jung chul Gothic Regular" panose="020B0503000000000000" pitchFamily="50" charset="-127"/>
-                <a:ea typeface="Kim jung chul Gothic Regular" panose="020B0503000000000000" pitchFamily="50" charset="-127"/>
-                <a:cs typeface="+mn-cs"/>
-              </a:rPr>
-              <a:t>, </a:t>
-            </a:r>
-            <a:r>
-              <a:rPr lang="ko-KR" altLang="en-US" sz="1200" kern="1200" dirty="0">
-                <a:solidFill>
-                  <a:schemeClr val="tx1"/>
-                </a:solidFill>
-                <a:effectLst/>
-                <a:latin typeface="Kim jung chul Gothic Regular" panose="020B0503000000000000" pitchFamily="50" charset="-127"/>
-                <a:ea typeface="Kim jung chul Gothic Regular" panose="020B0503000000000000" pitchFamily="50" charset="-127"/>
-                <a:cs typeface="+mn-cs"/>
-              </a:rPr>
-              <a:t>전체 합인 </a:t>
-            </a:r>
-            <a:r>
-              <a:rPr lang="en-US" altLang="ko-KR" sz="1200" kern="1200" dirty="0">
-                <a:solidFill>
-                  <a:schemeClr val="tx1"/>
-                </a:solidFill>
-                <a:effectLst/>
-                <a:latin typeface="Kim jung chul Gothic Regular" panose="020B0503000000000000" pitchFamily="50" charset="-127"/>
-                <a:ea typeface="Kim jung chul Gothic Regular" panose="020B0503000000000000" pitchFamily="50" charset="-127"/>
-                <a:cs typeface="+mn-cs"/>
-              </a:rPr>
-              <a:t>9</a:t>
-            </a:r>
-            <a:r>
-              <a:rPr lang="ko-KR" altLang="en-US" sz="1200" kern="1200" dirty="0">
-                <a:solidFill>
-                  <a:schemeClr val="tx1"/>
-                </a:solidFill>
-                <a:effectLst/>
-                <a:latin typeface="Kim jung chul Gothic Regular" panose="020B0503000000000000" pitchFamily="50" charset="-127"/>
-                <a:ea typeface="Kim jung chul Gothic Regular" panose="020B0503000000000000" pitchFamily="50" charset="-127"/>
-                <a:cs typeface="+mn-cs"/>
-              </a:rPr>
-              <a:t>로 나누어</a:t>
-            </a:r>
-            <a:r>
-              <a:rPr lang="en-US" altLang="ko-KR" sz="1200" kern="1200" dirty="0">
-                <a:solidFill>
-                  <a:schemeClr val="tx1"/>
-                </a:solidFill>
-                <a:effectLst/>
-                <a:latin typeface="Kim jung chul Gothic Regular" panose="020B0503000000000000" pitchFamily="50" charset="-127"/>
-                <a:ea typeface="Kim jung chul Gothic Regular" panose="020B0503000000000000" pitchFamily="50" charset="-127"/>
-                <a:cs typeface="+mn-cs"/>
-              </a:rPr>
-              <a:t>($1/9$) </a:t>
-            </a:r>
-            <a:r>
-              <a:rPr lang="ko-KR" altLang="en-US" sz="1200" kern="1200" dirty="0">
-                <a:solidFill>
-                  <a:schemeClr val="tx1"/>
-                </a:solidFill>
-                <a:effectLst/>
-                <a:latin typeface="Kim jung chul Gothic Regular" panose="020B0503000000000000" pitchFamily="50" charset="-127"/>
-                <a:ea typeface="Kim jung chul Gothic Regular" panose="020B0503000000000000" pitchFamily="50" charset="-127"/>
-                <a:cs typeface="+mn-cs"/>
-              </a:rPr>
-              <a:t>평균을 냅니다</a:t>
-            </a:r>
-            <a:r>
-              <a:rPr lang="en-US" altLang="ko-KR" sz="1200" kern="1200" dirty="0">
-                <a:solidFill>
-                  <a:schemeClr val="tx1"/>
-                </a:solidFill>
-                <a:effectLst/>
-                <a:latin typeface="Kim jung chul Gothic Regular" panose="020B0503000000000000" pitchFamily="50" charset="-127"/>
-                <a:ea typeface="Kim jung chul Gothic Regular" panose="020B0503000000000000" pitchFamily="50" charset="-127"/>
-                <a:cs typeface="+mn-cs"/>
-              </a:rPr>
-              <a:t>.</a:t>
-            </a:r>
-          </a:p>
-          <a:p>
-            <a:r>
-              <a:rPr lang="ko-KR" altLang="en-US" sz="1200" b="1" kern="1200" dirty="0">
-                <a:solidFill>
-                  <a:schemeClr val="tx1"/>
-                </a:solidFill>
-                <a:effectLst/>
-                <a:latin typeface="Kim jung chul Gothic Regular" panose="020B0503000000000000" pitchFamily="50" charset="-127"/>
-                <a:ea typeface="Kim jung chul Gothic Regular" panose="020B0503000000000000" pitchFamily="50" charset="-127"/>
-                <a:cs typeface="+mn-cs"/>
-              </a:rPr>
-              <a:t>결과</a:t>
-            </a:r>
-            <a:r>
-              <a:rPr lang="en-US" altLang="ko-KR" sz="1200" b="1" kern="1200" dirty="0">
-                <a:solidFill>
-                  <a:schemeClr val="tx1"/>
-                </a:solidFill>
-                <a:effectLst/>
-                <a:latin typeface="Kim jung chul Gothic Regular" panose="020B0503000000000000" pitchFamily="50" charset="-127"/>
-                <a:ea typeface="Kim jung chul Gothic Regular" panose="020B0503000000000000" pitchFamily="50" charset="-127"/>
-                <a:cs typeface="+mn-cs"/>
-              </a:rPr>
-              <a:t>:</a:t>
-            </a:r>
-            <a:r>
-              <a:rPr lang="ko-KR" altLang="en-US" sz="1200" kern="1200" dirty="0">
-                <a:solidFill>
-                  <a:schemeClr val="tx1"/>
-                </a:solidFill>
-                <a:effectLst/>
-                <a:latin typeface="Kim jung chul Gothic Regular" panose="020B0503000000000000" pitchFamily="50" charset="-127"/>
-                <a:ea typeface="Kim jung chul Gothic Regular" panose="020B0503000000000000" pitchFamily="50" charset="-127"/>
-                <a:cs typeface="+mn-cs"/>
-              </a:rPr>
-              <a:t> 모든 방향으로 동일한 힘으로 뭉개기 때문에 이미지가 전체적으로 뿌옇게 변합니다</a:t>
-            </a:r>
-            <a:r>
-              <a:rPr lang="en-US" altLang="ko-KR" sz="1200" kern="1200" dirty="0">
-                <a:solidFill>
-                  <a:schemeClr val="tx1"/>
-                </a:solidFill>
-                <a:effectLst/>
-                <a:latin typeface="Kim jung chul Gothic Regular" panose="020B0503000000000000" pitchFamily="50" charset="-127"/>
-                <a:ea typeface="Kim jung chul Gothic Regular" panose="020B0503000000000000" pitchFamily="50" charset="-127"/>
-                <a:cs typeface="+mn-cs"/>
-              </a:rPr>
-              <a:t>. </a:t>
-            </a:r>
-            <a:r>
-              <a:rPr lang="ko-KR" altLang="en-US" sz="1200" kern="1200" dirty="0">
-                <a:solidFill>
-                  <a:schemeClr val="tx1"/>
-                </a:solidFill>
-                <a:effectLst/>
-                <a:latin typeface="Kim jung chul Gothic Regular" panose="020B0503000000000000" pitchFamily="50" charset="-127"/>
-                <a:ea typeface="Kim jung chul Gothic Regular" panose="020B0503000000000000" pitchFamily="50" charset="-127"/>
-                <a:cs typeface="+mn-cs"/>
-              </a:rPr>
-              <a:t>시계열 데이터에서 다뤘던 **이동 평균</a:t>
-            </a:r>
-            <a:r>
-              <a:rPr lang="en-US" altLang="ko-KR" sz="1200" kern="1200" dirty="0">
-                <a:solidFill>
-                  <a:schemeClr val="tx1"/>
-                </a:solidFill>
-                <a:effectLst/>
-                <a:latin typeface="Kim jung chul Gothic Regular" panose="020B0503000000000000" pitchFamily="50" charset="-127"/>
-                <a:ea typeface="Kim jung chul Gothic Regular" panose="020B0503000000000000" pitchFamily="50" charset="-127"/>
-                <a:cs typeface="+mn-cs"/>
-              </a:rPr>
-              <a:t>(Moving Average)**</a:t>
-            </a:r>
-            <a:r>
-              <a:rPr lang="ko-KR" altLang="en-US" sz="1200" kern="1200" dirty="0">
-                <a:solidFill>
-                  <a:schemeClr val="tx1"/>
-                </a:solidFill>
-                <a:effectLst/>
-                <a:latin typeface="Kim jung chul Gothic Regular" panose="020B0503000000000000" pitchFamily="50" charset="-127"/>
-                <a:ea typeface="Kim jung chul Gothic Regular" panose="020B0503000000000000" pitchFamily="50" charset="-127"/>
-                <a:cs typeface="+mn-cs"/>
-              </a:rPr>
-              <a:t>의 </a:t>
-            </a:r>
-            <a:r>
-              <a:rPr lang="en-US" altLang="ko-KR" sz="1200" kern="1200" dirty="0">
-                <a:solidFill>
-                  <a:schemeClr val="tx1"/>
-                </a:solidFill>
-                <a:effectLst/>
-                <a:latin typeface="Kim jung chul Gothic Regular" panose="020B0503000000000000" pitchFamily="50" charset="-127"/>
-                <a:ea typeface="Kim jung chul Gothic Regular" panose="020B0503000000000000" pitchFamily="50" charset="-127"/>
-                <a:cs typeface="+mn-cs"/>
-              </a:rPr>
-              <a:t>2</a:t>
-            </a:r>
-            <a:r>
-              <a:rPr lang="ko-KR" altLang="en-US" sz="1200" kern="1200" dirty="0">
-                <a:solidFill>
-                  <a:schemeClr val="tx1"/>
-                </a:solidFill>
-                <a:effectLst/>
-                <a:latin typeface="Kim jung chul Gothic Regular" panose="020B0503000000000000" pitchFamily="50" charset="-127"/>
-                <a:ea typeface="Kim jung chul Gothic Regular" panose="020B0503000000000000" pitchFamily="50" charset="-127"/>
-                <a:cs typeface="+mn-cs"/>
-              </a:rPr>
-              <a:t>차원</a:t>
-            </a:r>
-            <a:r>
-              <a:rPr lang="en-US" altLang="ko-KR" sz="1200" kern="1200" dirty="0">
-                <a:solidFill>
-                  <a:schemeClr val="tx1"/>
-                </a:solidFill>
-                <a:effectLst/>
-                <a:latin typeface="Kim jung chul Gothic Regular" panose="020B0503000000000000" pitchFamily="50" charset="-127"/>
-                <a:ea typeface="Kim jung chul Gothic Regular" panose="020B0503000000000000" pitchFamily="50" charset="-127"/>
-                <a:cs typeface="+mn-cs"/>
-              </a:rPr>
-              <a:t>(</a:t>
-            </a:r>
-            <a:r>
-              <a:rPr lang="ko-KR" altLang="en-US" sz="1200" kern="1200" dirty="0">
-                <a:solidFill>
-                  <a:schemeClr val="tx1"/>
-                </a:solidFill>
-                <a:effectLst/>
-                <a:latin typeface="Kim jung chul Gothic Regular" panose="020B0503000000000000" pitchFamily="50" charset="-127"/>
-                <a:ea typeface="Kim jung chul Gothic Regular" panose="020B0503000000000000" pitchFamily="50" charset="-127"/>
-                <a:cs typeface="+mn-cs"/>
-              </a:rPr>
-              <a:t>공간</a:t>
-            </a:r>
-            <a:r>
-              <a:rPr lang="en-US" altLang="ko-KR" sz="1200" kern="1200" dirty="0">
-                <a:solidFill>
-                  <a:schemeClr val="tx1"/>
-                </a:solidFill>
-                <a:effectLst/>
-                <a:latin typeface="Kim jung chul Gothic Regular" panose="020B0503000000000000" pitchFamily="50" charset="-127"/>
-                <a:ea typeface="Kim jung chul Gothic Regular" panose="020B0503000000000000" pitchFamily="50" charset="-127"/>
-                <a:cs typeface="+mn-cs"/>
-              </a:rPr>
-              <a:t>) </a:t>
-            </a:r>
-            <a:r>
-              <a:rPr lang="ko-KR" altLang="en-US" sz="1200" kern="1200" dirty="0">
-                <a:solidFill>
-                  <a:schemeClr val="tx1"/>
-                </a:solidFill>
-                <a:effectLst/>
-                <a:latin typeface="Kim jung chul Gothic Regular" panose="020B0503000000000000" pitchFamily="50" charset="-127"/>
-                <a:ea typeface="Kim jung chul Gothic Regular" panose="020B0503000000000000" pitchFamily="50" charset="-127"/>
-                <a:cs typeface="+mn-cs"/>
-              </a:rPr>
-              <a:t>버전이라고 보시면 됩니다</a:t>
-            </a:r>
-            <a:r>
-              <a:rPr lang="en-US" altLang="ko-KR" sz="1200" kern="1200" dirty="0">
-                <a:solidFill>
-                  <a:schemeClr val="tx1"/>
-                </a:solidFill>
-                <a:effectLst/>
-                <a:latin typeface="Kim jung chul Gothic Regular" panose="020B0503000000000000" pitchFamily="50" charset="-127"/>
-                <a:ea typeface="Kim jung chul Gothic Regular" panose="020B0503000000000000" pitchFamily="50" charset="-127"/>
-                <a:cs typeface="+mn-cs"/>
-              </a:rPr>
-              <a:t>.</a:t>
-            </a:r>
-          </a:p>
-          <a:p>
-            <a:r>
-              <a:rPr lang="en-US" altLang="ko-KR" sz="1200" b="1" kern="1200" dirty="0">
-                <a:solidFill>
-                  <a:schemeClr val="tx1"/>
-                </a:solidFill>
-                <a:effectLst/>
-                <a:latin typeface="Kim jung chul Gothic Regular" panose="020B0503000000000000" pitchFamily="50" charset="-127"/>
-                <a:ea typeface="Kim jung chul Gothic Regular" panose="020B0503000000000000" pitchFamily="50" charset="-127"/>
-                <a:cs typeface="+mn-cs"/>
-              </a:rPr>
-              <a:t>3. </a:t>
-            </a:r>
-            <a:r>
-              <a:rPr lang="ko-KR" altLang="en-US" sz="1200" b="1" kern="1200" dirty="0" err="1">
-                <a:solidFill>
-                  <a:schemeClr val="tx1"/>
-                </a:solidFill>
-                <a:effectLst/>
-                <a:latin typeface="Kim jung chul Gothic Regular" panose="020B0503000000000000" pitchFamily="50" charset="-127"/>
-                <a:ea typeface="Kim jung chul Gothic Regular" panose="020B0503000000000000" pitchFamily="50" charset="-127"/>
-                <a:cs typeface="+mn-cs"/>
-              </a:rPr>
-              <a:t>가우시안</a:t>
-            </a:r>
-            <a:r>
-              <a:rPr lang="ko-KR" altLang="en-US" sz="1200" b="1" kern="1200" dirty="0">
-                <a:solidFill>
-                  <a:schemeClr val="tx1"/>
-                </a:solidFill>
-                <a:effectLst/>
-                <a:latin typeface="Kim jung chul Gothic Regular" panose="020B0503000000000000" pitchFamily="50" charset="-127"/>
-                <a:ea typeface="Kim jung chul Gothic Regular" panose="020B0503000000000000" pitchFamily="50" charset="-127"/>
-                <a:cs typeface="+mn-cs"/>
-              </a:rPr>
-              <a:t> </a:t>
-            </a:r>
-            <a:r>
-              <a:rPr lang="ko-KR" altLang="en-US" sz="1200" b="1" kern="1200" dirty="0" err="1">
-                <a:solidFill>
-                  <a:schemeClr val="tx1"/>
-                </a:solidFill>
-                <a:effectLst/>
-                <a:latin typeface="Kim jung chul Gothic Regular" panose="020B0503000000000000" pitchFamily="50" charset="-127"/>
-                <a:ea typeface="Kim jung chul Gothic Regular" panose="020B0503000000000000" pitchFamily="50" charset="-127"/>
-                <a:cs typeface="+mn-cs"/>
-              </a:rPr>
-              <a:t>블러</a:t>
-            </a:r>
-            <a:r>
-              <a:rPr lang="ko-KR" altLang="en-US" sz="1200" b="1" kern="1200" dirty="0">
-                <a:solidFill>
-                  <a:schemeClr val="tx1"/>
-                </a:solidFill>
-                <a:effectLst/>
-                <a:latin typeface="Kim jung chul Gothic Regular" panose="020B0503000000000000" pitchFamily="50" charset="-127"/>
-                <a:ea typeface="Kim jung chul Gothic Regular" panose="020B0503000000000000" pitchFamily="50" charset="-127"/>
-                <a:cs typeface="+mn-cs"/>
-              </a:rPr>
-              <a:t> </a:t>
-            </a:r>
-            <a:r>
-              <a:rPr lang="en-US" altLang="ko-KR" sz="1200" b="1" kern="1200" dirty="0">
-                <a:solidFill>
-                  <a:schemeClr val="tx1"/>
-                </a:solidFill>
-                <a:effectLst/>
-                <a:latin typeface="Kim jung chul Gothic Regular" panose="020B0503000000000000" pitchFamily="50" charset="-127"/>
-                <a:ea typeface="Kim jung chul Gothic Regular" panose="020B0503000000000000" pitchFamily="50" charset="-127"/>
-                <a:cs typeface="+mn-cs"/>
-              </a:rPr>
-              <a:t>(Gaussian Blur)</a:t>
-            </a:r>
-          </a:p>
-          <a:p>
-            <a:r>
-              <a:rPr lang="ko-KR" altLang="en-US" sz="1200" b="1" kern="1200" dirty="0">
-                <a:solidFill>
-                  <a:schemeClr val="tx1"/>
-                </a:solidFill>
-                <a:effectLst/>
-                <a:latin typeface="Kim jung chul Gothic Regular" panose="020B0503000000000000" pitchFamily="50" charset="-127"/>
-                <a:ea typeface="Kim jung chul Gothic Regular" panose="020B0503000000000000" pitchFamily="50" charset="-127"/>
-                <a:cs typeface="+mn-cs"/>
-              </a:rPr>
-              <a:t>원리</a:t>
-            </a:r>
-            <a:r>
-              <a:rPr lang="en-US" altLang="ko-KR" sz="1200" b="1" kern="1200" dirty="0">
-                <a:solidFill>
-                  <a:schemeClr val="tx1"/>
-                </a:solidFill>
-                <a:effectLst/>
-                <a:latin typeface="Kim jung chul Gothic Regular" panose="020B0503000000000000" pitchFamily="50" charset="-127"/>
-                <a:ea typeface="Kim jung chul Gothic Regular" panose="020B0503000000000000" pitchFamily="50" charset="-127"/>
-                <a:cs typeface="+mn-cs"/>
-              </a:rPr>
-              <a:t>:</a:t>
-            </a:r>
-            <a:r>
-              <a:rPr lang="ko-KR" altLang="en-US" sz="1200" kern="1200" dirty="0">
-                <a:solidFill>
-                  <a:schemeClr val="tx1"/>
-                </a:solidFill>
-                <a:effectLst/>
-                <a:latin typeface="Kim jung chul Gothic Regular" panose="020B0503000000000000" pitchFamily="50" charset="-127"/>
-                <a:ea typeface="Kim jung chul Gothic Regular" panose="020B0503000000000000" pitchFamily="50" charset="-127"/>
-                <a:cs typeface="+mn-cs"/>
-              </a:rPr>
-              <a:t> 중앙 픽셀에 더 높은 가중치를 주고</a:t>
-            </a:r>
-            <a:r>
-              <a:rPr lang="en-US" altLang="ko-KR" sz="1200" kern="1200" dirty="0">
-                <a:solidFill>
-                  <a:schemeClr val="tx1"/>
-                </a:solidFill>
-                <a:effectLst/>
-                <a:latin typeface="Kim jung chul Gothic Regular" panose="020B0503000000000000" pitchFamily="50" charset="-127"/>
-                <a:ea typeface="Kim jung chul Gothic Regular" panose="020B0503000000000000" pitchFamily="50" charset="-127"/>
-                <a:cs typeface="+mn-cs"/>
-              </a:rPr>
-              <a:t>, </a:t>
-            </a:r>
-            <a:r>
-              <a:rPr lang="ko-KR" altLang="en-US" sz="1200" kern="1200" dirty="0">
-                <a:solidFill>
-                  <a:schemeClr val="tx1"/>
-                </a:solidFill>
-                <a:effectLst/>
-                <a:latin typeface="Kim jung chul Gothic Regular" panose="020B0503000000000000" pitchFamily="50" charset="-127"/>
-                <a:ea typeface="Kim jung chul Gothic Regular" panose="020B0503000000000000" pitchFamily="50" charset="-127"/>
-                <a:cs typeface="+mn-cs"/>
-              </a:rPr>
-              <a:t>멀어질수록 가중치를 적게 주어 평균을 냅니다</a:t>
-            </a:r>
-            <a:r>
-              <a:rPr lang="en-US" altLang="ko-KR" sz="1200" kern="1200" dirty="0">
-                <a:solidFill>
-                  <a:schemeClr val="tx1"/>
-                </a:solidFill>
-                <a:effectLst/>
-                <a:latin typeface="Kim jung chul Gothic Regular" panose="020B0503000000000000" pitchFamily="50" charset="-127"/>
-                <a:ea typeface="Kim jung chul Gothic Regular" panose="020B0503000000000000" pitchFamily="50" charset="-127"/>
-                <a:cs typeface="+mn-cs"/>
-              </a:rPr>
-              <a:t>.</a:t>
-            </a:r>
-          </a:p>
-          <a:p>
-            <a:r>
-              <a:rPr lang="ko-KR" altLang="en-US" sz="1200" b="1" kern="1200" dirty="0">
-                <a:solidFill>
-                  <a:schemeClr val="tx1"/>
-                </a:solidFill>
-                <a:effectLst/>
-                <a:latin typeface="Kim jung chul Gothic Regular" panose="020B0503000000000000" pitchFamily="50" charset="-127"/>
-                <a:ea typeface="Kim jung chul Gothic Regular" panose="020B0503000000000000" pitchFamily="50" charset="-127"/>
-                <a:cs typeface="+mn-cs"/>
-              </a:rPr>
-              <a:t>커널 특징</a:t>
-            </a:r>
-            <a:r>
-              <a:rPr lang="en-US" altLang="ko-KR" sz="1200" b="1" kern="1200" dirty="0">
-                <a:solidFill>
-                  <a:schemeClr val="tx1"/>
-                </a:solidFill>
-                <a:effectLst/>
-                <a:latin typeface="Kim jung chul Gothic Regular" panose="020B0503000000000000" pitchFamily="50" charset="-127"/>
-                <a:ea typeface="Kim jung chul Gothic Regular" panose="020B0503000000000000" pitchFamily="50" charset="-127"/>
-                <a:cs typeface="+mn-cs"/>
-              </a:rPr>
-              <a:t>:</a:t>
-            </a:r>
-            <a:r>
-              <a:rPr lang="ko-KR" altLang="en-US" sz="1200" kern="1200" dirty="0">
-                <a:solidFill>
-                  <a:schemeClr val="tx1"/>
-                </a:solidFill>
-                <a:effectLst/>
-                <a:latin typeface="Kim jung chul Gothic Regular" panose="020B0503000000000000" pitchFamily="50" charset="-127"/>
-                <a:ea typeface="Kim jung chul Gothic Regular" panose="020B0503000000000000" pitchFamily="50" charset="-127"/>
-                <a:cs typeface="+mn-cs"/>
-              </a:rPr>
-              <a:t> 중앙값이 </a:t>
-            </a:r>
-            <a:r>
-              <a:rPr lang="en-US" altLang="ko-KR" sz="1200" kern="1200" dirty="0">
-                <a:solidFill>
-                  <a:schemeClr val="tx1"/>
-                </a:solidFill>
-                <a:effectLst/>
-                <a:latin typeface="Kim jung chul Gothic Regular" panose="020B0503000000000000" pitchFamily="50" charset="-127"/>
-                <a:ea typeface="Kim jung chul Gothic Regular" panose="020B0503000000000000" pitchFamily="50" charset="-127"/>
-                <a:cs typeface="+mn-cs"/>
-              </a:rPr>
-              <a:t>4</a:t>
-            </a:r>
-            <a:r>
-              <a:rPr lang="ko-KR" altLang="en-US" sz="1200" kern="1200" dirty="0">
-                <a:solidFill>
-                  <a:schemeClr val="tx1"/>
-                </a:solidFill>
-                <a:effectLst/>
-                <a:latin typeface="Kim jung chul Gothic Regular" panose="020B0503000000000000" pitchFamily="50" charset="-127"/>
-                <a:ea typeface="Kim jung chul Gothic Regular" panose="020B0503000000000000" pitchFamily="50" charset="-127"/>
-                <a:cs typeface="+mn-cs"/>
-              </a:rPr>
-              <a:t>로 가장 크고</a:t>
-            </a:r>
-            <a:r>
-              <a:rPr lang="en-US" altLang="ko-KR" sz="1200" kern="1200" dirty="0">
-                <a:solidFill>
-                  <a:schemeClr val="tx1"/>
-                </a:solidFill>
-                <a:effectLst/>
-                <a:latin typeface="Kim jung chul Gothic Regular" panose="020B0503000000000000" pitchFamily="50" charset="-127"/>
-                <a:ea typeface="Kim jung chul Gothic Regular" panose="020B0503000000000000" pitchFamily="50" charset="-127"/>
-                <a:cs typeface="+mn-cs"/>
-              </a:rPr>
-              <a:t>, </a:t>
-            </a:r>
-            <a:r>
-              <a:rPr lang="ko-KR" altLang="en-US" sz="1200" kern="1200" dirty="0">
-                <a:solidFill>
-                  <a:schemeClr val="tx1"/>
-                </a:solidFill>
-                <a:effectLst/>
-                <a:latin typeface="Kim jung chul Gothic Regular" panose="020B0503000000000000" pitchFamily="50" charset="-127"/>
-                <a:ea typeface="Kim jung chul Gothic Regular" panose="020B0503000000000000" pitchFamily="50" charset="-127"/>
-                <a:cs typeface="+mn-cs"/>
-              </a:rPr>
-              <a:t>주변으로 갈수록 </a:t>
-            </a:r>
-            <a:r>
-              <a:rPr lang="en-US" altLang="ko-KR" sz="1200" kern="1200" dirty="0">
-                <a:solidFill>
-                  <a:schemeClr val="tx1"/>
-                </a:solidFill>
-                <a:effectLst/>
-                <a:latin typeface="Kim jung chul Gothic Regular" panose="020B0503000000000000" pitchFamily="50" charset="-127"/>
-                <a:ea typeface="Kim jung chul Gothic Regular" panose="020B0503000000000000" pitchFamily="50" charset="-127"/>
-                <a:cs typeface="+mn-cs"/>
-              </a:rPr>
-              <a:t>2, 1</a:t>
-            </a:r>
-            <a:r>
-              <a:rPr lang="ko-KR" altLang="en-US" sz="1200" kern="1200" dirty="0">
-                <a:solidFill>
-                  <a:schemeClr val="tx1"/>
-                </a:solidFill>
-                <a:effectLst/>
-                <a:latin typeface="Kim jung chul Gothic Regular" panose="020B0503000000000000" pitchFamily="50" charset="-127"/>
-                <a:ea typeface="Kim jung chul Gothic Regular" panose="020B0503000000000000" pitchFamily="50" charset="-127"/>
-                <a:cs typeface="+mn-cs"/>
-              </a:rPr>
-              <a:t>로 작아집니다</a:t>
-            </a:r>
-            <a:r>
-              <a:rPr lang="en-US" altLang="ko-KR" sz="1200" kern="1200" dirty="0">
-                <a:solidFill>
-                  <a:schemeClr val="tx1"/>
-                </a:solidFill>
-                <a:effectLst/>
-                <a:latin typeface="Kim jung chul Gothic Regular" panose="020B0503000000000000" pitchFamily="50" charset="-127"/>
-                <a:ea typeface="Kim jung chul Gothic Regular" panose="020B0503000000000000" pitchFamily="50" charset="-127"/>
-                <a:cs typeface="+mn-cs"/>
-              </a:rPr>
-              <a:t>. (</a:t>
-            </a:r>
-            <a:r>
-              <a:rPr lang="ko-KR" altLang="en-US" sz="1200" kern="1200" dirty="0">
-                <a:solidFill>
-                  <a:schemeClr val="tx1"/>
-                </a:solidFill>
-                <a:effectLst/>
-                <a:latin typeface="Kim jung chul Gothic Regular" panose="020B0503000000000000" pitchFamily="50" charset="-127"/>
-                <a:ea typeface="Kim jung chul Gothic Regular" panose="020B0503000000000000" pitchFamily="50" charset="-127"/>
-                <a:cs typeface="+mn-cs"/>
-              </a:rPr>
-              <a:t>전체 합인 </a:t>
-            </a:r>
-            <a:r>
-              <a:rPr lang="en-US" altLang="ko-KR" sz="1200" kern="1200" dirty="0">
-                <a:solidFill>
-                  <a:schemeClr val="tx1"/>
-                </a:solidFill>
-                <a:effectLst/>
-                <a:latin typeface="Kim jung chul Gothic Regular" panose="020B0503000000000000" pitchFamily="50" charset="-127"/>
-                <a:ea typeface="Kim jung chul Gothic Regular" panose="020B0503000000000000" pitchFamily="50" charset="-127"/>
-                <a:cs typeface="+mn-cs"/>
-              </a:rPr>
-              <a:t>16</a:t>
-            </a:r>
-            <a:r>
-              <a:rPr lang="ko-KR" altLang="en-US" sz="1200" kern="1200" dirty="0">
-                <a:solidFill>
-                  <a:schemeClr val="tx1"/>
-                </a:solidFill>
-                <a:effectLst/>
-                <a:latin typeface="Kim jung chul Gothic Regular" panose="020B0503000000000000" pitchFamily="50" charset="-127"/>
-                <a:ea typeface="Kim jung chul Gothic Regular" panose="020B0503000000000000" pitchFamily="50" charset="-127"/>
-                <a:cs typeface="+mn-cs"/>
-              </a:rPr>
-              <a:t>으로 나누어 평균화</a:t>
-            </a:r>
-            <a:r>
-              <a:rPr lang="en-US" altLang="ko-KR" sz="1200" kern="1200" dirty="0">
-                <a:solidFill>
-                  <a:schemeClr val="tx1"/>
-                </a:solidFill>
-                <a:effectLst/>
-                <a:latin typeface="Kim jung chul Gothic Regular" panose="020B0503000000000000" pitchFamily="50" charset="-127"/>
-                <a:ea typeface="Kim jung chul Gothic Regular" panose="020B0503000000000000" pitchFamily="50" charset="-127"/>
-                <a:cs typeface="+mn-cs"/>
-              </a:rPr>
-              <a:t>)</a:t>
-            </a:r>
-          </a:p>
-          <a:p>
-            <a:r>
-              <a:rPr lang="ko-KR" altLang="en-US" sz="1200" b="1" kern="1200" dirty="0">
-                <a:solidFill>
-                  <a:schemeClr val="tx1"/>
-                </a:solidFill>
-                <a:effectLst/>
-                <a:latin typeface="Kim jung chul Gothic Regular" panose="020B0503000000000000" pitchFamily="50" charset="-127"/>
-                <a:ea typeface="Kim jung chul Gothic Regular" panose="020B0503000000000000" pitchFamily="50" charset="-127"/>
-                <a:cs typeface="+mn-cs"/>
-              </a:rPr>
-              <a:t>결과</a:t>
-            </a:r>
-            <a:r>
-              <a:rPr lang="en-US" altLang="ko-KR" sz="1200" b="1" kern="1200" dirty="0">
-                <a:solidFill>
-                  <a:schemeClr val="tx1"/>
-                </a:solidFill>
-                <a:effectLst/>
-                <a:latin typeface="Kim jung chul Gothic Regular" panose="020B0503000000000000" pitchFamily="50" charset="-127"/>
-                <a:ea typeface="Kim jung chul Gothic Regular" panose="020B0503000000000000" pitchFamily="50" charset="-127"/>
-                <a:cs typeface="+mn-cs"/>
-              </a:rPr>
-              <a:t>:</a:t>
-            </a:r>
-            <a:r>
-              <a:rPr lang="ko-KR" altLang="en-US" sz="1200" kern="1200" dirty="0">
-                <a:solidFill>
-                  <a:schemeClr val="tx1"/>
-                </a:solidFill>
-                <a:effectLst/>
-                <a:latin typeface="Kim jung chul Gothic Regular" panose="020B0503000000000000" pitchFamily="50" charset="-127"/>
-                <a:ea typeface="Kim jung chul Gothic Regular" panose="020B0503000000000000" pitchFamily="50" charset="-127"/>
-                <a:cs typeface="+mn-cs"/>
-              </a:rPr>
-              <a:t> 박스 </a:t>
-            </a:r>
-            <a:r>
-              <a:rPr lang="ko-KR" altLang="en-US" sz="1200" kern="1200" dirty="0" err="1">
-                <a:solidFill>
-                  <a:schemeClr val="tx1"/>
-                </a:solidFill>
-                <a:effectLst/>
-                <a:latin typeface="Kim jung chul Gothic Regular" panose="020B0503000000000000" pitchFamily="50" charset="-127"/>
-                <a:ea typeface="Kim jung chul Gothic Regular" panose="020B0503000000000000" pitchFamily="50" charset="-127"/>
-                <a:cs typeface="+mn-cs"/>
-              </a:rPr>
-              <a:t>블러보다</a:t>
-            </a:r>
-            <a:r>
-              <a:rPr lang="ko-KR" altLang="en-US" sz="1200" kern="1200" dirty="0">
-                <a:solidFill>
-                  <a:schemeClr val="tx1"/>
-                </a:solidFill>
-                <a:effectLst/>
-                <a:latin typeface="Kim jung chul Gothic Regular" panose="020B0503000000000000" pitchFamily="50" charset="-127"/>
-                <a:ea typeface="Kim jung chul Gothic Regular" panose="020B0503000000000000" pitchFamily="50" charset="-127"/>
-                <a:cs typeface="+mn-cs"/>
-              </a:rPr>
-              <a:t> 훨씬 </a:t>
-            </a:r>
-            <a:r>
-              <a:rPr lang="ko-KR" altLang="en-US" sz="1200" b="1" kern="1200" dirty="0">
-                <a:solidFill>
-                  <a:schemeClr val="tx1"/>
-                </a:solidFill>
-                <a:effectLst/>
-                <a:latin typeface="Kim jung chul Gothic Regular" panose="020B0503000000000000" pitchFamily="50" charset="-127"/>
-                <a:ea typeface="Kim jung chul Gothic Regular" panose="020B0503000000000000" pitchFamily="50" charset="-127"/>
-                <a:cs typeface="+mn-cs"/>
-              </a:rPr>
-              <a:t>자연스럽고 부드럽게</a:t>
-            </a:r>
-            <a:r>
-              <a:rPr lang="ko-KR" altLang="en-US" sz="1200" kern="1200" dirty="0">
-                <a:solidFill>
-                  <a:schemeClr val="tx1"/>
-                </a:solidFill>
-                <a:effectLst/>
-                <a:latin typeface="Kim jung chul Gothic Regular" panose="020B0503000000000000" pitchFamily="50" charset="-127"/>
-                <a:ea typeface="Kim jung chul Gothic Regular" panose="020B0503000000000000" pitchFamily="50" charset="-127"/>
-                <a:cs typeface="+mn-cs"/>
-              </a:rPr>
-              <a:t> 흐려집니다</a:t>
-            </a:r>
-            <a:r>
-              <a:rPr lang="en-US" altLang="ko-KR" sz="1200" kern="1200" dirty="0">
-                <a:solidFill>
-                  <a:schemeClr val="tx1"/>
-                </a:solidFill>
-                <a:effectLst/>
-                <a:latin typeface="Kim jung chul Gothic Regular" panose="020B0503000000000000" pitchFamily="50" charset="-127"/>
-                <a:ea typeface="Kim jung chul Gothic Regular" panose="020B0503000000000000" pitchFamily="50" charset="-127"/>
-                <a:cs typeface="+mn-cs"/>
-              </a:rPr>
-              <a:t>. </a:t>
-            </a:r>
-            <a:r>
-              <a:rPr lang="ko-KR" altLang="en-US" sz="1200" kern="1200" dirty="0">
-                <a:solidFill>
-                  <a:schemeClr val="tx1"/>
-                </a:solidFill>
-                <a:effectLst/>
-                <a:latin typeface="Kim jung chul Gothic Regular" panose="020B0503000000000000" pitchFamily="50" charset="-127"/>
-                <a:ea typeface="Kim jung chul Gothic Regular" panose="020B0503000000000000" pitchFamily="50" charset="-127"/>
-                <a:cs typeface="+mn-cs"/>
-              </a:rPr>
-              <a:t>실제 렌즈의 초점이 맞지 않았을 때 발생하는 흐림 현상과 가장 유사하여 이미지 노이즈 제거에 가장 많이 쓰입니다</a:t>
-            </a:r>
-            <a:r>
-              <a:rPr lang="en-US" altLang="ko-KR" sz="1200" kern="1200" dirty="0">
-                <a:solidFill>
-                  <a:schemeClr val="tx1"/>
-                </a:solidFill>
-                <a:effectLst/>
-                <a:latin typeface="Kim jung chul Gothic Regular" panose="020B0503000000000000" pitchFamily="50" charset="-127"/>
-                <a:ea typeface="Kim jung chul Gothic Regular" panose="020B0503000000000000" pitchFamily="50" charset="-127"/>
-                <a:cs typeface="+mn-cs"/>
-              </a:rPr>
-              <a:t>.</a:t>
-            </a:r>
-          </a:p>
-          <a:p>
-            <a:br>
-              <a:rPr lang="ko-KR" altLang="en-US" dirty="0"/>
-            </a:br>
-            <a:endParaRPr lang="ko-KR" altLang="en-US" dirty="0"/>
-          </a:p>
-          <a:p>
-            <a:r>
-              <a:rPr lang="ko-KR" altLang="en-US" sz="1200" b="1" kern="1200" dirty="0">
-                <a:solidFill>
-                  <a:schemeClr val="tx1"/>
-                </a:solidFill>
-                <a:effectLst/>
-                <a:latin typeface="Kim jung chul Gothic Regular" panose="020B0503000000000000" pitchFamily="50" charset="-127"/>
-                <a:ea typeface="Kim jung chul Gothic Regular" panose="020B0503000000000000" pitchFamily="50" charset="-127"/>
-                <a:cs typeface="+mn-cs"/>
-              </a:rPr>
-              <a:t>💡 요약하자면</a:t>
-            </a:r>
-          </a:p>
-          <a:p>
-            <a:r>
-              <a:rPr lang="ko-KR" altLang="en-US" sz="1200" kern="1200" dirty="0">
-                <a:solidFill>
-                  <a:schemeClr val="tx1"/>
-                </a:solidFill>
-                <a:effectLst/>
-                <a:latin typeface="Kim jung chul Gothic Regular" panose="020B0503000000000000" pitchFamily="50" charset="-127"/>
-                <a:ea typeface="Kim jung chul Gothic Regular" panose="020B0503000000000000" pitchFamily="50" charset="-127"/>
-                <a:cs typeface="+mn-cs"/>
-              </a:rPr>
-              <a:t>이 슬라이드는 **</a:t>
-            </a:r>
-            <a:r>
-              <a:rPr lang="en-US" altLang="ko-KR" sz="1200" kern="1200" dirty="0">
-                <a:solidFill>
-                  <a:schemeClr val="tx1"/>
-                </a:solidFill>
-                <a:effectLst/>
-                <a:latin typeface="Kim jung chul Gothic Regular" panose="020B0503000000000000" pitchFamily="50" charset="-127"/>
-                <a:ea typeface="Kim jung chul Gothic Regular" panose="020B0503000000000000" pitchFamily="50" charset="-127"/>
-                <a:cs typeface="+mn-cs"/>
-              </a:rPr>
-              <a:t>"</a:t>
-            </a:r>
-            <a:r>
-              <a:rPr lang="ko-KR" altLang="en-US" sz="1200" kern="1200" dirty="0">
-                <a:solidFill>
-                  <a:schemeClr val="tx1"/>
-                </a:solidFill>
-                <a:effectLst/>
-                <a:latin typeface="Kim jung chul Gothic Regular" panose="020B0503000000000000" pitchFamily="50" charset="-127"/>
-                <a:ea typeface="Kim jung chul Gothic Regular" panose="020B0503000000000000" pitchFamily="50" charset="-127"/>
-                <a:cs typeface="+mn-cs"/>
-              </a:rPr>
-              <a:t>이미지를 흐리게 만드는 것은 결국 주변 </a:t>
-            </a:r>
-            <a:r>
-              <a:rPr lang="ko-KR" altLang="en-US" sz="1200" kern="1200" dirty="0" err="1">
-                <a:solidFill>
-                  <a:schemeClr val="tx1"/>
-                </a:solidFill>
-                <a:effectLst/>
-                <a:latin typeface="Kim jung chul Gothic Regular" panose="020B0503000000000000" pitchFamily="50" charset="-127"/>
-                <a:ea typeface="Kim jung chul Gothic Regular" panose="020B0503000000000000" pitchFamily="50" charset="-127"/>
-                <a:cs typeface="+mn-cs"/>
-              </a:rPr>
-              <a:t>픽셀값들을</a:t>
-            </a:r>
-            <a:r>
-              <a:rPr lang="ko-KR" altLang="en-US" sz="1200" kern="1200" dirty="0">
-                <a:solidFill>
-                  <a:schemeClr val="tx1"/>
-                </a:solidFill>
-                <a:effectLst/>
-                <a:latin typeface="Kim jung chul Gothic Regular" panose="020B0503000000000000" pitchFamily="50" charset="-127"/>
-                <a:ea typeface="Kim jung chul Gothic Regular" panose="020B0503000000000000" pitchFamily="50" charset="-127"/>
-                <a:cs typeface="+mn-cs"/>
-              </a:rPr>
-              <a:t> 섞어서 평균을 내는 과정</a:t>
-            </a:r>
-            <a:r>
-              <a:rPr lang="en-US" altLang="ko-KR" sz="1200" kern="1200" dirty="0">
-                <a:solidFill>
-                  <a:schemeClr val="tx1"/>
-                </a:solidFill>
-                <a:effectLst/>
-                <a:latin typeface="Kim jung chul Gothic Regular" panose="020B0503000000000000" pitchFamily="50" charset="-127"/>
-                <a:ea typeface="Kim jung chul Gothic Regular" panose="020B0503000000000000" pitchFamily="50" charset="-127"/>
-                <a:cs typeface="+mn-cs"/>
-              </a:rPr>
-              <a:t>"**</a:t>
-            </a:r>
-            <a:r>
-              <a:rPr lang="ko-KR" altLang="en-US" sz="1200" kern="1200" dirty="0">
-                <a:solidFill>
-                  <a:schemeClr val="tx1"/>
-                </a:solidFill>
-                <a:effectLst/>
-                <a:latin typeface="Kim jung chul Gothic Regular" panose="020B0503000000000000" pitchFamily="50" charset="-127"/>
-                <a:ea typeface="Kim jung chul Gothic Regular" panose="020B0503000000000000" pitchFamily="50" charset="-127"/>
-                <a:cs typeface="+mn-cs"/>
-              </a:rPr>
-              <a:t>임을 보여줍니다</a:t>
-            </a:r>
-            <a:r>
-              <a:rPr lang="en-US" altLang="ko-KR" sz="1200" kern="1200" dirty="0">
-                <a:solidFill>
-                  <a:schemeClr val="tx1"/>
-                </a:solidFill>
-                <a:effectLst/>
-                <a:latin typeface="Kim jung chul Gothic Regular" panose="020B0503000000000000" pitchFamily="50" charset="-127"/>
-                <a:ea typeface="Kim jung chul Gothic Regular" panose="020B0503000000000000" pitchFamily="50" charset="-127"/>
-                <a:cs typeface="+mn-cs"/>
-              </a:rPr>
-              <a:t>.</a:t>
-            </a:r>
-          </a:p>
-          <a:p>
-            <a:endParaRPr lang="ko-KR" altLang="en-US" dirty="0"/>
-          </a:p>
-        </p:txBody>
-      </p:sp>
-      <p:sp>
-        <p:nvSpPr>
-          <p:cNvPr id="4" name="슬라이드 번호 개체 틀 3"/>
-          <p:cNvSpPr>
-            <a:spLocks noGrp="1"/>
-          </p:cNvSpPr>
-          <p:nvPr>
-            <p:ph type="sldNum" sz="quarter" idx="10"/>
-          </p:nvPr>
-        </p:nvSpPr>
-        <p:spPr/>
-        <p:txBody>
-          <a:bodyPr/>
-          <a:lstStyle/>
-          <a:p>
-            <a:fld id="{C09E5BFC-1559-42F1-8940-AB342D56BF02}" type="slidenum">
-              <a:rPr lang="ko-KR" altLang="en-US" smtClean="0"/>
-              <a:t>4</a:t>
-            </a:fld>
-            <a:endParaRPr lang="ko-KR" altLang="en-US"/>
-          </a:p>
-        </p:txBody>
-      </p:sp>
-    </p:spTree>
-    <p:extLst>
-      <p:ext uri="{BB962C8B-B14F-4D97-AF65-F5344CB8AC3E}">
-        <p14:creationId xmlns:p14="http://schemas.microsoft.com/office/powerpoint/2010/main" val="141265422"/>
       </p:ext>
     </p:extLst>
   </p:cSld>
@@ -2594,6 +1546,1409 @@
           <a:lstStyle/>
           <a:p>
             <a:r>
+              <a:rPr lang="en-US" altLang="ko-KR" sz="1200" b="1" kern="1200" dirty="0">
+                <a:solidFill>
+                  <a:schemeClr val="tx1"/>
+                </a:solidFill>
+                <a:effectLst/>
+                <a:latin typeface="Kim jung chul Gothic Regular" panose="020B0503000000000000" pitchFamily="50" charset="-127"/>
+                <a:ea typeface="Kim jung chul Gothic Regular" panose="020B0503000000000000" pitchFamily="50" charset="-127"/>
+                <a:cs typeface="+mn-cs"/>
+              </a:rPr>
+              <a:t>1. </a:t>
+            </a:r>
+            <a:r>
+              <a:rPr lang="ko-KR" altLang="en-US" sz="1200" b="1" kern="1200" dirty="0">
+                <a:solidFill>
+                  <a:schemeClr val="tx1"/>
+                </a:solidFill>
+                <a:effectLst/>
+                <a:latin typeface="Kim jung chul Gothic Regular" panose="020B0503000000000000" pitchFamily="50" charset="-127"/>
+                <a:ea typeface="Kim jung chul Gothic Regular" panose="020B0503000000000000" pitchFamily="50" charset="-127"/>
+                <a:cs typeface="+mn-cs"/>
+              </a:rPr>
+              <a:t>원 영상 </a:t>
+            </a:r>
+            <a:r>
+              <a:rPr lang="en-US" altLang="ko-KR" sz="1200" b="1" kern="1200" dirty="0">
+                <a:solidFill>
+                  <a:schemeClr val="tx1"/>
+                </a:solidFill>
+                <a:effectLst/>
+                <a:latin typeface="Kim jung chul Gothic Regular" panose="020B0503000000000000" pitchFamily="50" charset="-127"/>
+                <a:ea typeface="Kim jung chul Gothic Regular" panose="020B0503000000000000" pitchFamily="50" charset="-127"/>
+                <a:cs typeface="+mn-cs"/>
+              </a:rPr>
+              <a:t>(Original Image)</a:t>
+            </a:r>
+          </a:p>
+          <a:p>
+            <a:r>
+              <a:rPr lang="ko-KR" altLang="en-US" sz="1200" b="1" kern="1200" dirty="0">
+                <a:solidFill>
+                  <a:schemeClr val="tx1"/>
+                </a:solidFill>
+                <a:effectLst/>
+                <a:latin typeface="Kim jung chul Gothic Regular" panose="020B0503000000000000" pitchFamily="50" charset="-127"/>
+                <a:ea typeface="Kim jung chul Gothic Regular" panose="020B0503000000000000" pitchFamily="50" charset="-127"/>
+                <a:cs typeface="+mn-cs"/>
+              </a:rPr>
+              <a:t>특징</a:t>
+            </a:r>
+            <a:r>
+              <a:rPr lang="en-US" altLang="ko-KR" sz="1200" b="1" kern="1200" dirty="0">
+                <a:solidFill>
+                  <a:schemeClr val="tx1"/>
+                </a:solidFill>
+                <a:effectLst/>
+                <a:latin typeface="Kim jung chul Gothic Regular" panose="020B0503000000000000" pitchFamily="50" charset="-127"/>
+                <a:ea typeface="Kim jung chul Gothic Regular" panose="020B0503000000000000" pitchFamily="50" charset="-127"/>
+                <a:cs typeface="+mn-cs"/>
+              </a:rPr>
+              <a:t>:</a:t>
+            </a:r>
+            <a:r>
+              <a:rPr lang="ko-KR" altLang="en-US" sz="1200" kern="1200" dirty="0">
+                <a:solidFill>
+                  <a:schemeClr val="tx1"/>
+                </a:solidFill>
+                <a:effectLst/>
+                <a:latin typeface="Kim jung chul Gothic Regular" panose="020B0503000000000000" pitchFamily="50" charset="-127"/>
+                <a:ea typeface="Kim jung chul Gothic Regular" panose="020B0503000000000000" pitchFamily="50" charset="-127"/>
+                <a:cs typeface="+mn-cs"/>
+              </a:rPr>
+              <a:t> 표준 테스트 이미지인 </a:t>
+            </a:r>
+            <a:r>
+              <a:rPr lang="en-US" altLang="ko-KR" sz="1200" kern="1200" dirty="0">
+                <a:solidFill>
+                  <a:schemeClr val="tx1"/>
+                </a:solidFill>
+                <a:effectLst/>
+                <a:latin typeface="Kim jung chul Gothic Regular" panose="020B0503000000000000" pitchFamily="50" charset="-127"/>
+                <a:ea typeface="Kim jung chul Gothic Regular" panose="020B0503000000000000" pitchFamily="50" charset="-127"/>
+                <a:cs typeface="+mn-cs"/>
+              </a:rPr>
+              <a:t>'</a:t>
+            </a:r>
+            <a:r>
+              <a:rPr lang="ko-KR" altLang="en-US" sz="1200" kern="1200" dirty="0">
+                <a:solidFill>
+                  <a:schemeClr val="tx1"/>
+                </a:solidFill>
+                <a:effectLst/>
+                <a:latin typeface="Kim jung chul Gothic Regular" panose="020B0503000000000000" pitchFamily="50" charset="-127"/>
+                <a:ea typeface="Kim jung chul Gothic Regular" panose="020B0503000000000000" pitchFamily="50" charset="-127"/>
+                <a:cs typeface="+mn-cs"/>
+              </a:rPr>
+              <a:t>레나</a:t>
+            </a:r>
+            <a:r>
+              <a:rPr lang="en-US" altLang="ko-KR" sz="1200" kern="1200" dirty="0">
+                <a:solidFill>
+                  <a:schemeClr val="tx1"/>
+                </a:solidFill>
+                <a:effectLst/>
+                <a:latin typeface="Kim jung chul Gothic Regular" panose="020B0503000000000000" pitchFamily="50" charset="-127"/>
+                <a:ea typeface="Kim jung chul Gothic Regular" panose="020B0503000000000000" pitchFamily="50" charset="-127"/>
+                <a:cs typeface="+mn-cs"/>
+              </a:rPr>
+              <a:t>(Lenna)'</a:t>
+            </a:r>
+            <a:r>
+              <a:rPr lang="ko-KR" altLang="en-US" sz="1200" kern="1200" dirty="0">
+                <a:solidFill>
+                  <a:schemeClr val="tx1"/>
+                </a:solidFill>
+                <a:effectLst/>
+                <a:latin typeface="Kim jung chul Gothic Regular" panose="020B0503000000000000" pitchFamily="50" charset="-127"/>
+                <a:ea typeface="Kim jung chul Gothic Regular" panose="020B0503000000000000" pitchFamily="50" charset="-127"/>
+                <a:cs typeface="+mn-cs"/>
+              </a:rPr>
+              <a:t>입니다</a:t>
+            </a:r>
+            <a:r>
+              <a:rPr lang="en-US" altLang="ko-KR" sz="1200" kern="1200" dirty="0">
+                <a:solidFill>
+                  <a:schemeClr val="tx1"/>
+                </a:solidFill>
+                <a:effectLst/>
+                <a:latin typeface="Kim jung chul Gothic Regular" panose="020B0503000000000000" pitchFamily="50" charset="-127"/>
+                <a:ea typeface="Kim jung chul Gothic Regular" panose="020B0503000000000000" pitchFamily="50" charset="-127"/>
+                <a:cs typeface="+mn-cs"/>
+              </a:rPr>
+              <a:t>.</a:t>
+            </a:r>
+          </a:p>
+          <a:p>
+            <a:r>
+              <a:rPr lang="ko-KR" altLang="en-US" sz="1200" b="1" kern="1200" dirty="0">
+                <a:solidFill>
+                  <a:schemeClr val="tx1"/>
+                </a:solidFill>
+                <a:effectLst/>
+                <a:latin typeface="Kim jung chul Gothic Regular" panose="020B0503000000000000" pitchFamily="50" charset="-127"/>
+                <a:ea typeface="Kim jung chul Gothic Regular" panose="020B0503000000000000" pitchFamily="50" charset="-127"/>
+                <a:cs typeface="+mn-cs"/>
+              </a:rPr>
+              <a:t>커널</a:t>
+            </a:r>
+            <a:r>
+              <a:rPr lang="en-US" altLang="ko-KR" sz="1200" b="1" kern="1200" dirty="0">
+                <a:solidFill>
+                  <a:schemeClr val="tx1"/>
+                </a:solidFill>
+                <a:effectLst/>
+                <a:latin typeface="Kim jung chul Gothic Regular" panose="020B0503000000000000" pitchFamily="50" charset="-127"/>
+                <a:ea typeface="Kim jung chul Gothic Regular" panose="020B0503000000000000" pitchFamily="50" charset="-127"/>
+                <a:cs typeface="+mn-cs"/>
+              </a:rPr>
+              <a:t>:</a:t>
+            </a:r>
+            <a:r>
+              <a:rPr lang="ko-KR" altLang="en-US" sz="1200" kern="1200" dirty="0">
+                <a:solidFill>
+                  <a:schemeClr val="tx1"/>
+                </a:solidFill>
+                <a:effectLst/>
+                <a:latin typeface="Kim jung chul Gothic Regular" panose="020B0503000000000000" pitchFamily="50" charset="-127"/>
+                <a:ea typeface="Kim jung chul Gothic Regular" panose="020B0503000000000000" pitchFamily="50" charset="-127"/>
+                <a:cs typeface="+mn-cs"/>
+              </a:rPr>
+              <a:t> 중앙에만 </a:t>
+            </a:r>
+            <a:r>
+              <a:rPr lang="en-US" altLang="ko-KR" sz="1200" kern="1200" dirty="0">
+                <a:solidFill>
+                  <a:schemeClr val="tx1"/>
+                </a:solidFill>
+                <a:effectLst/>
+                <a:latin typeface="Kim jung chul Gothic Regular" panose="020B0503000000000000" pitchFamily="50" charset="-127"/>
+                <a:ea typeface="Kim jung chul Gothic Regular" panose="020B0503000000000000" pitchFamily="50" charset="-127"/>
+                <a:cs typeface="+mn-cs"/>
+              </a:rPr>
+              <a:t>1</a:t>
+            </a:r>
+            <a:r>
+              <a:rPr lang="ko-KR" altLang="en-US" sz="1200" kern="1200" dirty="0">
+                <a:solidFill>
+                  <a:schemeClr val="tx1"/>
+                </a:solidFill>
+                <a:effectLst/>
+                <a:latin typeface="Kim jung chul Gothic Regular" panose="020B0503000000000000" pitchFamily="50" charset="-127"/>
+                <a:ea typeface="Kim jung chul Gothic Regular" panose="020B0503000000000000" pitchFamily="50" charset="-127"/>
+                <a:cs typeface="+mn-cs"/>
+              </a:rPr>
+              <a:t>이 있고 나머지는 </a:t>
+            </a:r>
+            <a:r>
+              <a:rPr lang="en-US" altLang="ko-KR" sz="1200" kern="1200" dirty="0">
+                <a:solidFill>
+                  <a:schemeClr val="tx1"/>
+                </a:solidFill>
+                <a:effectLst/>
+                <a:latin typeface="Kim jung chul Gothic Regular" panose="020B0503000000000000" pitchFamily="50" charset="-127"/>
+                <a:ea typeface="Kim jung chul Gothic Regular" panose="020B0503000000000000" pitchFamily="50" charset="-127"/>
+                <a:cs typeface="+mn-cs"/>
+              </a:rPr>
+              <a:t>0</a:t>
+            </a:r>
+            <a:r>
+              <a:rPr lang="ko-KR" altLang="en-US" sz="1200" kern="1200" dirty="0">
+                <a:solidFill>
+                  <a:schemeClr val="tx1"/>
+                </a:solidFill>
+                <a:effectLst/>
+                <a:latin typeface="Kim jung chul Gothic Regular" panose="020B0503000000000000" pitchFamily="50" charset="-127"/>
+                <a:ea typeface="Kim jung chul Gothic Regular" panose="020B0503000000000000" pitchFamily="50" charset="-127"/>
+                <a:cs typeface="+mn-cs"/>
+              </a:rPr>
+              <a:t>인 행렬입니다</a:t>
+            </a:r>
+            <a:r>
+              <a:rPr lang="en-US" altLang="ko-KR" sz="1200" kern="1200" dirty="0">
+                <a:solidFill>
+                  <a:schemeClr val="tx1"/>
+                </a:solidFill>
+                <a:effectLst/>
+                <a:latin typeface="Kim jung chul Gothic Regular" panose="020B0503000000000000" pitchFamily="50" charset="-127"/>
+                <a:ea typeface="Kim jung chul Gothic Regular" panose="020B0503000000000000" pitchFamily="50" charset="-127"/>
+                <a:cs typeface="+mn-cs"/>
+              </a:rPr>
+              <a:t>.</a:t>
+            </a:r>
+          </a:p>
+          <a:p>
+            <a:pPr lvl="1"/>
+            <a:r>
+              <a:rPr lang="ko-KR" altLang="en-US" sz="1200" kern="1200" dirty="0">
+                <a:solidFill>
+                  <a:schemeClr val="tx1"/>
+                </a:solidFill>
+                <a:effectLst/>
+                <a:latin typeface="Kim jung chul Gothic Regular" panose="020B0503000000000000" pitchFamily="50" charset="-127"/>
+                <a:ea typeface="Kim jung chul Gothic Regular" panose="020B0503000000000000" pitchFamily="50" charset="-127"/>
+                <a:cs typeface="+mn-cs"/>
+              </a:rPr>
+              <a:t>이는 자기 자신의 픽셀 값만 그대로 가져오고 주변 값은 무시한다는 뜻이므로</a:t>
+            </a:r>
+            <a:r>
+              <a:rPr lang="en-US" altLang="ko-KR" sz="1200" kern="1200" dirty="0">
+                <a:solidFill>
+                  <a:schemeClr val="tx1"/>
+                </a:solidFill>
+                <a:effectLst/>
+                <a:latin typeface="Kim jung chul Gothic Regular" panose="020B0503000000000000" pitchFamily="50" charset="-127"/>
+                <a:ea typeface="Kim jung chul Gothic Regular" panose="020B0503000000000000" pitchFamily="50" charset="-127"/>
+                <a:cs typeface="+mn-cs"/>
+              </a:rPr>
+              <a:t>, </a:t>
+            </a:r>
+            <a:r>
+              <a:rPr lang="ko-KR" altLang="en-US" sz="1200" kern="1200" dirty="0">
+                <a:solidFill>
+                  <a:schemeClr val="tx1"/>
+                </a:solidFill>
+                <a:effectLst/>
+                <a:latin typeface="Kim jung chul Gothic Regular" panose="020B0503000000000000" pitchFamily="50" charset="-127"/>
+                <a:ea typeface="Kim jung chul Gothic Regular" panose="020B0503000000000000" pitchFamily="50" charset="-127"/>
+                <a:cs typeface="+mn-cs"/>
+              </a:rPr>
+              <a:t>영상에 아무런 변화를 주지 않는 </a:t>
+            </a:r>
+            <a:r>
+              <a:rPr lang="ko-KR" altLang="en-US" sz="1200" b="1" kern="1200" dirty="0" err="1">
+                <a:solidFill>
+                  <a:schemeClr val="tx1"/>
+                </a:solidFill>
+                <a:effectLst/>
+                <a:latin typeface="Kim jung chul Gothic Regular" panose="020B0503000000000000" pitchFamily="50" charset="-127"/>
+                <a:ea typeface="Kim jung chul Gothic Regular" panose="020B0503000000000000" pitchFamily="50" charset="-127"/>
+                <a:cs typeface="+mn-cs"/>
+              </a:rPr>
+              <a:t>항등</a:t>
+            </a:r>
+            <a:r>
+              <a:rPr lang="ko-KR" altLang="en-US" sz="1200" b="1" kern="1200" dirty="0">
+                <a:solidFill>
+                  <a:schemeClr val="tx1"/>
+                </a:solidFill>
+                <a:effectLst/>
+                <a:latin typeface="Kim jung chul Gothic Regular" panose="020B0503000000000000" pitchFamily="50" charset="-127"/>
+                <a:ea typeface="Kim jung chul Gothic Regular" panose="020B0503000000000000" pitchFamily="50" charset="-127"/>
+                <a:cs typeface="+mn-cs"/>
+              </a:rPr>
+              <a:t> 함수</a:t>
+            </a:r>
+            <a:r>
+              <a:rPr lang="en-US" altLang="ko-KR" sz="1200" b="1" kern="1200" dirty="0">
+                <a:solidFill>
+                  <a:schemeClr val="tx1"/>
+                </a:solidFill>
+                <a:effectLst/>
+                <a:latin typeface="Kim jung chul Gothic Regular" panose="020B0503000000000000" pitchFamily="50" charset="-127"/>
+                <a:ea typeface="Kim jung chul Gothic Regular" panose="020B0503000000000000" pitchFamily="50" charset="-127"/>
+                <a:cs typeface="+mn-cs"/>
+              </a:rPr>
+              <a:t>(Identity)</a:t>
+            </a:r>
+            <a:r>
+              <a:rPr lang="ko-KR" altLang="en-US" sz="1200" kern="1200" dirty="0">
+                <a:solidFill>
+                  <a:schemeClr val="tx1"/>
+                </a:solidFill>
+                <a:effectLst/>
+                <a:latin typeface="Kim jung chul Gothic Regular" panose="020B0503000000000000" pitchFamily="50" charset="-127"/>
+                <a:ea typeface="Kim jung chul Gothic Regular" panose="020B0503000000000000" pitchFamily="50" charset="-127"/>
+                <a:cs typeface="+mn-cs"/>
+              </a:rPr>
+              <a:t> 역할을 합니다</a:t>
+            </a:r>
+            <a:r>
+              <a:rPr lang="en-US" altLang="ko-KR" sz="1200" kern="1200" dirty="0">
+                <a:solidFill>
+                  <a:schemeClr val="tx1"/>
+                </a:solidFill>
+                <a:effectLst/>
+                <a:latin typeface="Kim jung chul Gothic Regular" panose="020B0503000000000000" pitchFamily="50" charset="-127"/>
+                <a:ea typeface="Kim jung chul Gothic Regular" panose="020B0503000000000000" pitchFamily="50" charset="-127"/>
+                <a:cs typeface="+mn-cs"/>
+              </a:rPr>
+              <a:t>.</a:t>
+            </a:r>
+          </a:p>
+          <a:p>
+            <a:r>
+              <a:rPr lang="en-US" altLang="ko-KR" sz="1200" b="1" kern="1200" dirty="0">
+                <a:solidFill>
+                  <a:schemeClr val="tx1"/>
+                </a:solidFill>
+                <a:effectLst/>
+                <a:latin typeface="Kim jung chul Gothic Regular" panose="020B0503000000000000" pitchFamily="50" charset="-127"/>
+                <a:ea typeface="Kim jung chul Gothic Regular" panose="020B0503000000000000" pitchFamily="50" charset="-127"/>
+                <a:cs typeface="+mn-cs"/>
+              </a:rPr>
+              <a:t>2. </a:t>
+            </a:r>
+            <a:r>
+              <a:rPr lang="ko-KR" altLang="en-US" sz="1200" b="1" kern="1200" dirty="0">
+                <a:solidFill>
+                  <a:schemeClr val="tx1"/>
+                </a:solidFill>
+                <a:effectLst/>
+                <a:latin typeface="Kim jung chul Gothic Regular" panose="020B0503000000000000" pitchFamily="50" charset="-127"/>
+                <a:ea typeface="Kim jung chul Gothic Regular" panose="020B0503000000000000" pitchFamily="50" charset="-127"/>
+                <a:cs typeface="+mn-cs"/>
+              </a:rPr>
+              <a:t>박스 </a:t>
+            </a:r>
+            <a:r>
+              <a:rPr lang="ko-KR" altLang="en-US" sz="1200" b="1" kern="1200" dirty="0" err="1">
+                <a:solidFill>
+                  <a:schemeClr val="tx1"/>
+                </a:solidFill>
+                <a:effectLst/>
+                <a:latin typeface="Kim jung chul Gothic Regular" panose="020B0503000000000000" pitchFamily="50" charset="-127"/>
+                <a:ea typeface="Kim jung chul Gothic Regular" panose="020B0503000000000000" pitchFamily="50" charset="-127"/>
+                <a:cs typeface="+mn-cs"/>
+              </a:rPr>
+              <a:t>블러</a:t>
+            </a:r>
+            <a:r>
+              <a:rPr lang="ko-KR" altLang="en-US" sz="1200" b="1" kern="1200" dirty="0">
+                <a:solidFill>
+                  <a:schemeClr val="tx1"/>
+                </a:solidFill>
+                <a:effectLst/>
+                <a:latin typeface="Kim jung chul Gothic Regular" panose="020B0503000000000000" pitchFamily="50" charset="-127"/>
+                <a:ea typeface="Kim jung chul Gothic Regular" panose="020B0503000000000000" pitchFamily="50" charset="-127"/>
+                <a:cs typeface="+mn-cs"/>
+              </a:rPr>
+              <a:t> </a:t>
+            </a:r>
+            <a:r>
+              <a:rPr lang="en-US" altLang="ko-KR" sz="1200" b="1" kern="1200" dirty="0">
+                <a:solidFill>
+                  <a:schemeClr val="tx1"/>
+                </a:solidFill>
+                <a:effectLst/>
+                <a:latin typeface="Kim jung chul Gothic Regular" panose="020B0503000000000000" pitchFamily="50" charset="-127"/>
+                <a:ea typeface="Kim jung chul Gothic Regular" panose="020B0503000000000000" pitchFamily="50" charset="-127"/>
+                <a:cs typeface="+mn-cs"/>
+              </a:rPr>
+              <a:t>(Box Blur)</a:t>
+            </a:r>
+          </a:p>
+          <a:p>
+            <a:r>
+              <a:rPr lang="ko-KR" altLang="en-US" sz="1200" b="1" kern="1200" dirty="0">
+                <a:solidFill>
+                  <a:schemeClr val="tx1"/>
+                </a:solidFill>
+                <a:effectLst/>
+                <a:latin typeface="Kim jung chul Gothic Regular" panose="020B0503000000000000" pitchFamily="50" charset="-127"/>
+                <a:ea typeface="Kim jung chul Gothic Regular" panose="020B0503000000000000" pitchFamily="50" charset="-127"/>
+                <a:cs typeface="+mn-cs"/>
+              </a:rPr>
+              <a:t>원리</a:t>
+            </a:r>
+            <a:r>
+              <a:rPr lang="en-US" altLang="ko-KR" sz="1200" b="1" kern="1200" dirty="0">
+                <a:solidFill>
+                  <a:schemeClr val="tx1"/>
+                </a:solidFill>
+                <a:effectLst/>
+                <a:latin typeface="Kim jung chul Gothic Regular" panose="020B0503000000000000" pitchFamily="50" charset="-127"/>
+                <a:ea typeface="Kim jung chul Gothic Regular" panose="020B0503000000000000" pitchFamily="50" charset="-127"/>
+                <a:cs typeface="+mn-cs"/>
+              </a:rPr>
+              <a:t>:</a:t>
+            </a:r>
+            <a:r>
+              <a:rPr lang="ko-KR" altLang="en-US" sz="1200" kern="1200" dirty="0">
+                <a:solidFill>
+                  <a:schemeClr val="tx1"/>
+                </a:solidFill>
+                <a:effectLst/>
+                <a:latin typeface="Kim jung chul Gothic Regular" panose="020B0503000000000000" pitchFamily="50" charset="-127"/>
+                <a:ea typeface="Kim jung chul Gothic Regular" panose="020B0503000000000000" pitchFamily="50" charset="-127"/>
+                <a:cs typeface="+mn-cs"/>
+              </a:rPr>
+              <a:t> 주변 픽셀들의 평균값을 구해서 현재 픽셀을 바꿉니다</a:t>
+            </a:r>
+            <a:r>
+              <a:rPr lang="en-US" altLang="ko-KR" sz="1200" kern="1200" dirty="0">
+                <a:solidFill>
+                  <a:schemeClr val="tx1"/>
+                </a:solidFill>
+                <a:effectLst/>
+                <a:latin typeface="Kim jung chul Gothic Regular" panose="020B0503000000000000" pitchFamily="50" charset="-127"/>
+                <a:ea typeface="Kim jung chul Gothic Regular" panose="020B0503000000000000" pitchFamily="50" charset="-127"/>
+                <a:cs typeface="+mn-cs"/>
+              </a:rPr>
+              <a:t>.</a:t>
+            </a:r>
+          </a:p>
+          <a:p>
+            <a:r>
+              <a:rPr lang="ko-KR" altLang="en-US" sz="1200" b="1" kern="1200" dirty="0">
+                <a:solidFill>
+                  <a:schemeClr val="tx1"/>
+                </a:solidFill>
+                <a:effectLst/>
+                <a:latin typeface="Kim jung chul Gothic Regular" panose="020B0503000000000000" pitchFamily="50" charset="-127"/>
+                <a:ea typeface="Kim jung chul Gothic Regular" panose="020B0503000000000000" pitchFamily="50" charset="-127"/>
+                <a:cs typeface="+mn-cs"/>
+              </a:rPr>
+              <a:t>커널 특징</a:t>
+            </a:r>
+            <a:r>
+              <a:rPr lang="en-US" altLang="ko-KR" sz="1200" b="1" kern="1200" dirty="0">
+                <a:solidFill>
+                  <a:schemeClr val="tx1"/>
+                </a:solidFill>
+                <a:effectLst/>
+                <a:latin typeface="Kim jung chul Gothic Regular" panose="020B0503000000000000" pitchFamily="50" charset="-127"/>
+                <a:ea typeface="Kim jung chul Gothic Regular" panose="020B0503000000000000" pitchFamily="50" charset="-127"/>
+                <a:cs typeface="+mn-cs"/>
+              </a:rPr>
+              <a:t>:</a:t>
+            </a:r>
+            <a:r>
+              <a:rPr lang="ko-KR" altLang="en-US" sz="1200" kern="1200" dirty="0">
+                <a:solidFill>
+                  <a:schemeClr val="tx1"/>
+                </a:solidFill>
+                <a:effectLst/>
+                <a:latin typeface="Kim jung chul Gothic Regular" panose="020B0503000000000000" pitchFamily="50" charset="-127"/>
+                <a:ea typeface="Kim jung chul Gothic Regular" panose="020B0503000000000000" pitchFamily="50" charset="-127"/>
+                <a:cs typeface="+mn-cs"/>
+              </a:rPr>
+              <a:t> 모든 칸이 </a:t>
+            </a:r>
+            <a:r>
+              <a:rPr lang="en-US" altLang="ko-KR" sz="1200" kern="1200" dirty="0">
+                <a:solidFill>
+                  <a:schemeClr val="tx1"/>
+                </a:solidFill>
+                <a:effectLst/>
+                <a:latin typeface="Kim jung chul Gothic Regular" panose="020B0503000000000000" pitchFamily="50" charset="-127"/>
+                <a:ea typeface="Kim jung chul Gothic Regular" panose="020B0503000000000000" pitchFamily="50" charset="-127"/>
+                <a:cs typeface="+mn-cs"/>
+              </a:rPr>
+              <a:t>1</a:t>
+            </a:r>
+            <a:r>
+              <a:rPr lang="ko-KR" altLang="en-US" sz="1200" kern="1200" dirty="0">
+                <a:solidFill>
+                  <a:schemeClr val="tx1"/>
+                </a:solidFill>
+                <a:effectLst/>
+                <a:latin typeface="Kim jung chul Gothic Regular" panose="020B0503000000000000" pitchFamily="50" charset="-127"/>
+                <a:ea typeface="Kim jung chul Gothic Regular" panose="020B0503000000000000" pitchFamily="50" charset="-127"/>
+                <a:cs typeface="+mn-cs"/>
+              </a:rPr>
+              <a:t>로 채워져 있고</a:t>
+            </a:r>
+            <a:r>
+              <a:rPr lang="en-US" altLang="ko-KR" sz="1200" kern="1200" dirty="0">
+                <a:solidFill>
+                  <a:schemeClr val="tx1"/>
+                </a:solidFill>
+                <a:effectLst/>
+                <a:latin typeface="Kim jung chul Gothic Regular" panose="020B0503000000000000" pitchFamily="50" charset="-127"/>
+                <a:ea typeface="Kim jung chul Gothic Regular" panose="020B0503000000000000" pitchFamily="50" charset="-127"/>
+                <a:cs typeface="+mn-cs"/>
+              </a:rPr>
+              <a:t>, </a:t>
+            </a:r>
+            <a:r>
+              <a:rPr lang="ko-KR" altLang="en-US" sz="1200" kern="1200" dirty="0">
+                <a:solidFill>
+                  <a:schemeClr val="tx1"/>
+                </a:solidFill>
+                <a:effectLst/>
+                <a:latin typeface="Kim jung chul Gothic Regular" panose="020B0503000000000000" pitchFamily="50" charset="-127"/>
+                <a:ea typeface="Kim jung chul Gothic Regular" panose="020B0503000000000000" pitchFamily="50" charset="-127"/>
+                <a:cs typeface="+mn-cs"/>
+              </a:rPr>
+              <a:t>전체 합인 </a:t>
+            </a:r>
+            <a:r>
+              <a:rPr lang="en-US" altLang="ko-KR" sz="1200" kern="1200" dirty="0">
+                <a:solidFill>
+                  <a:schemeClr val="tx1"/>
+                </a:solidFill>
+                <a:effectLst/>
+                <a:latin typeface="Kim jung chul Gothic Regular" panose="020B0503000000000000" pitchFamily="50" charset="-127"/>
+                <a:ea typeface="Kim jung chul Gothic Regular" panose="020B0503000000000000" pitchFamily="50" charset="-127"/>
+                <a:cs typeface="+mn-cs"/>
+              </a:rPr>
+              <a:t>9</a:t>
+            </a:r>
+            <a:r>
+              <a:rPr lang="ko-KR" altLang="en-US" sz="1200" kern="1200" dirty="0">
+                <a:solidFill>
+                  <a:schemeClr val="tx1"/>
+                </a:solidFill>
+                <a:effectLst/>
+                <a:latin typeface="Kim jung chul Gothic Regular" panose="020B0503000000000000" pitchFamily="50" charset="-127"/>
+                <a:ea typeface="Kim jung chul Gothic Regular" panose="020B0503000000000000" pitchFamily="50" charset="-127"/>
+                <a:cs typeface="+mn-cs"/>
+              </a:rPr>
+              <a:t>로 나누어</a:t>
+            </a:r>
+            <a:r>
+              <a:rPr lang="en-US" altLang="ko-KR" sz="1200" kern="1200" dirty="0">
+                <a:solidFill>
+                  <a:schemeClr val="tx1"/>
+                </a:solidFill>
+                <a:effectLst/>
+                <a:latin typeface="Kim jung chul Gothic Regular" panose="020B0503000000000000" pitchFamily="50" charset="-127"/>
+                <a:ea typeface="Kim jung chul Gothic Regular" panose="020B0503000000000000" pitchFamily="50" charset="-127"/>
+                <a:cs typeface="+mn-cs"/>
+              </a:rPr>
+              <a:t>($1/9$) </a:t>
+            </a:r>
+            <a:r>
+              <a:rPr lang="ko-KR" altLang="en-US" sz="1200" kern="1200" dirty="0">
+                <a:solidFill>
+                  <a:schemeClr val="tx1"/>
+                </a:solidFill>
+                <a:effectLst/>
+                <a:latin typeface="Kim jung chul Gothic Regular" panose="020B0503000000000000" pitchFamily="50" charset="-127"/>
+                <a:ea typeface="Kim jung chul Gothic Regular" panose="020B0503000000000000" pitchFamily="50" charset="-127"/>
+                <a:cs typeface="+mn-cs"/>
+              </a:rPr>
+              <a:t>평균을 냅니다</a:t>
+            </a:r>
+            <a:r>
+              <a:rPr lang="en-US" altLang="ko-KR" sz="1200" kern="1200" dirty="0">
+                <a:solidFill>
+                  <a:schemeClr val="tx1"/>
+                </a:solidFill>
+                <a:effectLst/>
+                <a:latin typeface="Kim jung chul Gothic Regular" panose="020B0503000000000000" pitchFamily="50" charset="-127"/>
+                <a:ea typeface="Kim jung chul Gothic Regular" panose="020B0503000000000000" pitchFamily="50" charset="-127"/>
+                <a:cs typeface="+mn-cs"/>
+              </a:rPr>
+              <a:t>.</a:t>
+            </a:r>
+          </a:p>
+          <a:p>
+            <a:r>
+              <a:rPr lang="ko-KR" altLang="en-US" sz="1200" b="1" kern="1200" dirty="0">
+                <a:solidFill>
+                  <a:schemeClr val="tx1"/>
+                </a:solidFill>
+                <a:effectLst/>
+                <a:latin typeface="Kim jung chul Gothic Regular" panose="020B0503000000000000" pitchFamily="50" charset="-127"/>
+                <a:ea typeface="Kim jung chul Gothic Regular" panose="020B0503000000000000" pitchFamily="50" charset="-127"/>
+                <a:cs typeface="+mn-cs"/>
+              </a:rPr>
+              <a:t>결과</a:t>
+            </a:r>
+            <a:r>
+              <a:rPr lang="en-US" altLang="ko-KR" sz="1200" b="1" kern="1200" dirty="0">
+                <a:solidFill>
+                  <a:schemeClr val="tx1"/>
+                </a:solidFill>
+                <a:effectLst/>
+                <a:latin typeface="Kim jung chul Gothic Regular" panose="020B0503000000000000" pitchFamily="50" charset="-127"/>
+                <a:ea typeface="Kim jung chul Gothic Regular" panose="020B0503000000000000" pitchFamily="50" charset="-127"/>
+                <a:cs typeface="+mn-cs"/>
+              </a:rPr>
+              <a:t>:</a:t>
+            </a:r>
+            <a:r>
+              <a:rPr lang="ko-KR" altLang="en-US" sz="1200" kern="1200" dirty="0">
+                <a:solidFill>
+                  <a:schemeClr val="tx1"/>
+                </a:solidFill>
+                <a:effectLst/>
+                <a:latin typeface="Kim jung chul Gothic Regular" panose="020B0503000000000000" pitchFamily="50" charset="-127"/>
+                <a:ea typeface="Kim jung chul Gothic Regular" panose="020B0503000000000000" pitchFamily="50" charset="-127"/>
+                <a:cs typeface="+mn-cs"/>
+              </a:rPr>
+              <a:t> 모든 방향으로 동일한 힘으로 뭉개기 때문에 이미지가 전체적으로 뿌옇게 변합니다</a:t>
+            </a:r>
+            <a:r>
+              <a:rPr lang="en-US" altLang="ko-KR" sz="1200" kern="1200" dirty="0">
+                <a:solidFill>
+                  <a:schemeClr val="tx1"/>
+                </a:solidFill>
+                <a:effectLst/>
+                <a:latin typeface="Kim jung chul Gothic Regular" panose="020B0503000000000000" pitchFamily="50" charset="-127"/>
+                <a:ea typeface="Kim jung chul Gothic Regular" panose="020B0503000000000000" pitchFamily="50" charset="-127"/>
+                <a:cs typeface="+mn-cs"/>
+              </a:rPr>
+              <a:t>. </a:t>
+            </a:r>
+            <a:r>
+              <a:rPr lang="ko-KR" altLang="en-US" sz="1200" kern="1200" dirty="0">
+                <a:solidFill>
+                  <a:schemeClr val="tx1"/>
+                </a:solidFill>
+                <a:effectLst/>
+                <a:latin typeface="Kim jung chul Gothic Regular" panose="020B0503000000000000" pitchFamily="50" charset="-127"/>
+                <a:ea typeface="Kim jung chul Gothic Regular" panose="020B0503000000000000" pitchFamily="50" charset="-127"/>
+                <a:cs typeface="+mn-cs"/>
+              </a:rPr>
+              <a:t>시계열 데이터에서 다뤘던 **이동 평균</a:t>
+            </a:r>
+            <a:r>
+              <a:rPr lang="en-US" altLang="ko-KR" sz="1200" kern="1200" dirty="0">
+                <a:solidFill>
+                  <a:schemeClr val="tx1"/>
+                </a:solidFill>
+                <a:effectLst/>
+                <a:latin typeface="Kim jung chul Gothic Regular" panose="020B0503000000000000" pitchFamily="50" charset="-127"/>
+                <a:ea typeface="Kim jung chul Gothic Regular" panose="020B0503000000000000" pitchFamily="50" charset="-127"/>
+                <a:cs typeface="+mn-cs"/>
+              </a:rPr>
+              <a:t>(Moving Average)**</a:t>
+            </a:r>
+            <a:r>
+              <a:rPr lang="ko-KR" altLang="en-US" sz="1200" kern="1200" dirty="0">
+                <a:solidFill>
+                  <a:schemeClr val="tx1"/>
+                </a:solidFill>
+                <a:effectLst/>
+                <a:latin typeface="Kim jung chul Gothic Regular" panose="020B0503000000000000" pitchFamily="50" charset="-127"/>
+                <a:ea typeface="Kim jung chul Gothic Regular" panose="020B0503000000000000" pitchFamily="50" charset="-127"/>
+                <a:cs typeface="+mn-cs"/>
+              </a:rPr>
+              <a:t>의 </a:t>
+            </a:r>
+            <a:r>
+              <a:rPr lang="en-US" altLang="ko-KR" sz="1200" kern="1200" dirty="0">
+                <a:solidFill>
+                  <a:schemeClr val="tx1"/>
+                </a:solidFill>
+                <a:effectLst/>
+                <a:latin typeface="Kim jung chul Gothic Regular" panose="020B0503000000000000" pitchFamily="50" charset="-127"/>
+                <a:ea typeface="Kim jung chul Gothic Regular" panose="020B0503000000000000" pitchFamily="50" charset="-127"/>
+                <a:cs typeface="+mn-cs"/>
+              </a:rPr>
+              <a:t>2</a:t>
+            </a:r>
+            <a:r>
+              <a:rPr lang="ko-KR" altLang="en-US" sz="1200" kern="1200" dirty="0">
+                <a:solidFill>
+                  <a:schemeClr val="tx1"/>
+                </a:solidFill>
+                <a:effectLst/>
+                <a:latin typeface="Kim jung chul Gothic Regular" panose="020B0503000000000000" pitchFamily="50" charset="-127"/>
+                <a:ea typeface="Kim jung chul Gothic Regular" panose="020B0503000000000000" pitchFamily="50" charset="-127"/>
+                <a:cs typeface="+mn-cs"/>
+              </a:rPr>
+              <a:t>차원</a:t>
+            </a:r>
+            <a:r>
+              <a:rPr lang="en-US" altLang="ko-KR" sz="1200" kern="1200" dirty="0">
+                <a:solidFill>
+                  <a:schemeClr val="tx1"/>
+                </a:solidFill>
+                <a:effectLst/>
+                <a:latin typeface="Kim jung chul Gothic Regular" panose="020B0503000000000000" pitchFamily="50" charset="-127"/>
+                <a:ea typeface="Kim jung chul Gothic Regular" panose="020B0503000000000000" pitchFamily="50" charset="-127"/>
+                <a:cs typeface="+mn-cs"/>
+              </a:rPr>
+              <a:t>(</a:t>
+            </a:r>
+            <a:r>
+              <a:rPr lang="ko-KR" altLang="en-US" sz="1200" kern="1200" dirty="0">
+                <a:solidFill>
+                  <a:schemeClr val="tx1"/>
+                </a:solidFill>
+                <a:effectLst/>
+                <a:latin typeface="Kim jung chul Gothic Regular" panose="020B0503000000000000" pitchFamily="50" charset="-127"/>
+                <a:ea typeface="Kim jung chul Gothic Regular" panose="020B0503000000000000" pitchFamily="50" charset="-127"/>
+                <a:cs typeface="+mn-cs"/>
+              </a:rPr>
+              <a:t>공간</a:t>
+            </a:r>
+            <a:r>
+              <a:rPr lang="en-US" altLang="ko-KR" sz="1200" kern="1200" dirty="0">
+                <a:solidFill>
+                  <a:schemeClr val="tx1"/>
+                </a:solidFill>
+                <a:effectLst/>
+                <a:latin typeface="Kim jung chul Gothic Regular" panose="020B0503000000000000" pitchFamily="50" charset="-127"/>
+                <a:ea typeface="Kim jung chul Gothic Regular" panose="020B0503000000000000" pitchFamily="50" charset="-127"/>
+                <a:cs typeface="+mn-cs"/>
+              </a:rPr>
+              <a:t>) </a:t>
+            </a:r>
+            <a:r>
+              <a:rPr lang="ko-KR" altLang="en-US" sz="1200" kern="1200" dirty="0">
+                <a:solidFill>
+                  <a:schemeClr val="tx1"/>
+                </a:solidFill>
+                <a:effectLst/>
+                <a:latin typeface="Kim jung chul Gothic Regular" panose="020B0503000000000000" pitchFamily="50" charset="-127"/>
+                <a:ea typeface="Kim jung chul Gothic Regular" panose="020B0503000000000000" pitchFamily="50" charset="-127"/>
+                <a:cs typeface="+mn-cs"/>
+              </a:rPr>
+              <a:t>버전이라고 보시면 됩니다</a:t>
+            </a:r>
+            <a:r>
+              <a:rPr lang="en-US" altLang="ko-KR" sz="1200" kern="1200" dirty="0">
+                <a:solidFill>
+                  <a:schemeClr val="tx1"/>
+                </a:solidFill>
+                <a:effectLst/>
+                <a:latin typeface="Kim jung chul Gothic Regular" panose="020B0503000000000000" pitchFamily="50" charset="-127"/>
+                <a:ea typeface="Kim jung chul Gothic Regular" panose="020B0503000000000000" pitchFamily="50" charset="-127"/>
+                <a:cs typeface="+mn-cs"/>
+              </a:rPr>
+              <a:t>.</a:t>
+            </a:r>
+          </a:p>
+          <a:p>
+            <a:r>
+              <a:rPr lang="en-US" altLang="ko-KR" sz="1200" b="1" kern="1200" dirty="0">
+                <a:solidFill>
+                  <a:schemeClr val="tx1"/>
+                </a:solidFill>
+                <a:effectLst/>
+                <a:latin typeface="Kim jung chul Gothic Regular" panose="020B0503000000000000" pitchFamily="50" charset="-127"/>
+                <a:ea typeface="Kim jung chul Gothic Regular" panose="020B0503000000000000" pitchFamily="50" charset="-127"/>
+                <a:cs typeface="+mn-cs"/>
+              </a:rPr>
+              <a:t>3. </a:t>
+            </a:r>
+            <a:r>
+              <a:rPr lang="ko-KR" altLang="en-US" sz="1200" b="1" kern="1200" dirty="0" err="1">
+                <a:solidFill>
+                  <a:schemeClr val="tx1"/>
+                </a:solidFill>
+                <a:effectLst/>
+                <a:latin typeface="Kim jung chul Gothic Regular" panose="020B0503000000000000" pitchFamily="50" charset="-127"/>
+                <a:ea typeface="Kim jung chul Gothic Regular" panose="020B0503000000000000" pitchFamily="50" charset="-127"/>
+                <a:cs typeface="+mn-cs"/>
+              </a:rPr>
+              <a:t>가우시안</a:t>
+            </a:r>
+            <a:r>
+              <a:rPr lang="ko-KR" altLang="en-US" sz="1200" b="1" kern="1200" dirty="0">
+                <a:solidFill>
+                  <a:schemeClr val="tx1"/>
+                </a:solidFill>
+                <a:effectLst/>
+                <a:latin typeface="Kim jung chul Gothic Regular" panose="020B0503000000000000" pitchFamily="50" charset="-127"/>
+                <a:ea typeface="Kim jung chul Gothic Regular" panose="020B0503000000000000" pitchFamily="50" charset="-127"/>
+                <a:cs typeface="+mn-cs"/>
+              </a:rPr>
+              <a:t> </a:t>
+            </a:r>
+            <a:r>
+              <a:rPr lang="ko-KR" altLang="en-US" sz="1200" b="1" kern="1200" dirty="0" err="1">
+                <a:solidFill>
+                  <a:schemeClr val="tx1"/>
+                </a:solidFill>
+                <a:effectLst/>
+                <a:latin typeface="Kim jung chul Gothic Regular" panose="020B0503000000000000" pitchFamily="50" charset="-127"/>
+                <a:ea typeface="Kim jung chul Gothic Regular" panose="020B0503000000000000" pitchFamily="50" charset="-127"/>
+                <a:cs typeface="+mn-cs"/>
+              </a:rPr>
+              <a:t>블러</a:t>
+            </a:r>
+            <a:r>
+              <a:rPr lang="ko-KR" altLang="en-US" sz="1200" b="1" kern="1200" dirty="0">
+                <a:solidFill>
+                  <a:schemeClr val="tx1"/>
+                </a:solidFill>
+                <a:effectLst/>
+                <a:latin typeface="Kim jung chul Gothic Regular" panose="020B0503000000000000" pitchFamily="50" charset="-127"/>
+                <a:ea typeface="Kim jung chul Gothic Regular" panose="020B0503000000000000" pitchFamily="50" charset="-127"/>
+                <a:cs typeface="+mn-cs"/>
+              </a:rPr>
+              <a:t> </a:t>
+            </a:r>
+            <a:r>
+              <a:rPr lang="en-US" altLang="ko-KR" sz="1200" b="1" kern="1200" dirty="0">
+                <a:solidFill>
+                  <a:schemeClr val="tx1"/>
+                </a:solidFill>
+                <a:effectLst/>
+                <a:latin typeface="Kim jung chul Gothic Regular" panose="020B0503000000000000" pitchFamily="50" charset="-127"/>
+                <a:ea typeface="Kim jung chul Gothic Regular" panose="020B0503000000000000" pitchFamily="50" charset="-127"/>
+                <a:cs typeface="+mn-cs"/>
+              </a:rPr>
+              <a:t>(Gaussian Blur)</a:t>
+            </a:r>
+          </a:p>
+          <a:p>
+            <a:r>
+              <a:rPr lang="ko-KR" altLang="en-US" sz="1200" b="1" kern="1200" dirty="0">
+                <a:solidFill>
+                  <a:schemeClr val="tx1"/>
+                </a:solidFill>
+                <a:effectLst/>
+                <a:latin typeface="Kim jung chul Gothic Regular" panose="020B0503000000000000" pitchFamily="50" charset="-127"/>
+                <a:ea typeface="Kim jung chul Gothic Regular" panose="020B0503000000000000" pitchFamily="50" charset="-127"/>
+                <a:cs typeface="+mn-cs"/>
+              </a:rPr>
+              <a:t>원리</a:t>
+            </a:r>
+            <a:r>
+              <a:rPr lang="en-US" altLang="ko-KR" sz="1200" b="1" kern="1200" dirty="0">
+                <a:solidFill>
+                  <a:schemeClr val="tx1"/>
+                </a:solidFill>
+                <a:effectLst/>
+                <a:latin typeface="Kim jung chul Gothic Regular" panose="020B0503000000000000" pitchFamily="50" charset="-127"/>
+                <a:ea typeface="Kim jung chul Gothic Regular" panose="020B0503000000000000" pitchFamily="50" charset="-127"/>
+                <a:cs typeface="+mn-cs"/>
+              </a:rPr>
+              <a:t>:</a:t>
+            </a:r>
+            <a:r>
+              <a:rPr lang="ko-KR" altLang="en-US" sz="1200" kern="1200" dirty="0">
+                <a:solidFill>
+                  <a:schemeClr val="tx1"/>
+                </a:solidFill>
+                <a:effectLst/>
+                <a:latin typeface="Kim jung chul Gothic Regular" panose="020B0503000000000000" pitchFamily="50" charset="-127"/>
+                <a:ea typeface="Kim jung chul Gothic Regular" panose="020B0503000000000000" pitchFamily="50" charset="-127"/>
+                <a:cs typeface="+mn-cs"/>
+              </a:rPr>
+              <a:t> 중앙 픽셀에 더 높은 가중치를 주고</a:t>
+            </a:r>
+            <a:r>
+              <a:rPr lang="en-US" altLang="ko-KR" sz="1200" kern="1200" dirty="0">
+                <a:solidFill>
+                  <a:schemeClr val="tx1"/>
+                </a:solidFill>
+                <a:effectLst/>
+                <a:latin typeface="Kim jung chul Gothic Regular" panose="020B0503000000000000" pitchFamily="50" charset="-127"/>
+                <a:ea typeface="Kim jung chul Gothic Regular" panose="020B0503000000000000" pitchFamily="50" charset="-127"/>
+                <a:cs typeface="+mn-cs"/>
+              </a:rPr>
+              <a:t>, </a:t>
+            </a:r>
+            <a:r>
+              <a:rPr lang="ko-KR" altLang="en-US" sz="1200" kern="1200" dirty="0">
+                <a:solidFill>
+                  <a:schemeClr val="tx1"/>
+                </a:solidFill>
+                <a:effectLst/>
+                <a:latin typeface="Kim jung chul Gothic Regular" panose="020B0503000000000000" pitchFamily="50" charset="-127"/>
+                <a:ea typeface="Kim jung chul Gothic Regular" panose="020B0503000000000000" pitchFamily="50" charset="-127"/>
+                <a:cs typeface="+mn-cs"/>
+              </a:rPr>
+              <a:t>멀어질수록 가중치를 적게 주어 평균을 냅니다</a:t>
+            </a:r>
+            <a:r>
+              <a:rPr lang="en-US" altLang="ko-KR" sz="1200" kern="1200" dirty="0">
+                <a:solidFill>
+                  <a:schemeClr val="tx1"/>
+                </a:solidFill>
+                <a:effectLst/>
+                <a:latin typeface="Kim jung chul Gothic Regular" panose="020B0503000000000000" pitchFamily="50" charset="-127"/>
+                <a:ea typeface="Kim jung chul Gothic Regular" panose="020B0503000000000000" pitchFamily="50" charset="-127"/>
+                <a:cs typeface="+mn-cs"/>
+              </a:rPr>
+              <a:t>.</a:t>
+            </a:r>
+          </a:p>
+          <a:p>
+            <a:r>
+              <a:rPr lang="ko-KR" altLang="en-US" sz="1200" b="1" kern="1200" dirty="0">
+                <a:solidFill>
+                  <a:schemeClr val="tx1"/>
+                </a:solidFill>
+                <a:effectLst/>
+                <a:latin typeface="Kim jung chul Gothic Regular" panose="020B0503000000000000" pitchFamily="50" charset="-127"/>
+                <a:ea typeface="Kim jung chul Gothic Regular" panose="020B0503000000000000" pitchFamily="50" charset="-127"/>
+                <a:cs typeface="+mn-cs"/>
+              </a:rPr>
+              <a:t>커널 특징</a:t>
+            </a:r>
+            <a:r>
+              <a:rPr lang="en-US" altLang="ko-KR" sz="1200" b="1" kern="1200" dirty="0">
+                <a:solidFill>
+                  <a:schemeClr val="tx1"/>
+                </a:solidFill>
+                <a:effectLst/>
+                <a:latin typeface="Kim jung chul Gothic Regular" panose="020B0503000000000000" pitchFamily="50" charset="-127"/>
+                <a:ea typeface="Kim jung chul Gothic Regular" panose="020B0503000000000000" pitchFamily="50" charset="-127"/>
+                <a:cs typeface="+mn-cs"/>
+              </a:rPr>
+              <a:t>:</a:t>
+            </a:r>
+            <a:r>
+              <a:rPr lang="ko-KR" altLang="en-US" sz="1200" kern="1200" dirty="0">
+                <a:solidFill>
+                  <a:schemeClr val="tx1"/>
+                </a:solidFill>
+                <a:effectLst/>
+                <a:latin typeface="Kim jung chul Gothic Regular" panose="020B0503000000000000" pitchFamily="50" charset="-127"/>
+                <a:ea typeface="Kim jung chul Gothic Regular" panose="020B0503000000000000" pitchFamily="50" charset="-127"/>
+                <a:cs typeface="+mn-cs"/>
+              </a:rPr>
+              <a:t> 중앙값이 </a:t>
+            </a:r>
+            <a:r>
+              <a:rPr lang="en-US" altLang="ko-KR" sz="1200" kern="1200" dirty="0">
+                <a:solidFill>
+                  <a:schemeClr val="tx1"/>
+                </a:solidFill>
+                <a:effectLst/>
+                <a:latin typeface="Kim jung chul Gothic Regular" panose="020B0503000000000000" pitchFamily="50" charset="-127"/>
+                <a:ea typeface="Kim jung chul Gothic Regular" panose="020B0503000000000000" pitchFamily="50" charset="-127"/>
+                <a:cs typeface="+mn-cs"/>
+              </a:rPr>
+              <a:t>4</a:t>
+            </a:r>
+            <a:r>
+              <a:rPr lang="ko-KR" altLang="en-US" sz="1200" kern="1200" dirty="0">
+                <a:solidFill>
+                  <a:schemeClr val="tx1"/>
+                </a:solidFill>
+                <a:effectLst/>
+                <a:latin typeface="Kim jung chul Gothic Regular" panose="020B0503000000000000" pitchFamily="50" charset="-127"/>
+                <a:ea typeface="Kim jung chul Gothic Regular" panose="020B0503000000000000" pitchFamily="50" charset="-127"/>
+                <a:cs typeface="+mn-cs"/>
+              </a:rPr>
+              <a:t>로 가장 크고</a:t>
+            </a:r>
+            <a:r>
+              <a:rPr lang="en-US" altLang="ko-KR" sz="1200" kern="1200" dirty="0">
+                <a:solidFill>
+                  <a:schemeClr val="tx1"/>
+                </a:solidFill>
+                <a:effectLst/>
+                <a:latin typeface="Kim jung chul Gothic Regular" panose="020B0503000000000000" pitchFamily="50" charset="-127"/>
+                <a:ea typeface="Kim jung chul Gothic Regular" panose="020B0503000000000000" pitchFamily="50" charset="-127"/>
+                <a:cs typeface="+mn-cs"/>
+              </a:rPr>
+              <a:t>, </a:t>
+            </a:r>
+            <a:r>
+              <a:rPr lang="ko-KR" altLang="en-US" sz="1200" kern="1200" dirty="0">
+                <a:solidFill>
+                  <a:schemeClr val="tx1"/>
+                </a:solidFill>
+                <a:effectLst/>
+                <a:latin typeface="Kim jung chul Gothic Regular" panose="020B0503000000000000" pitchFamily="50" charset="-127"/>
+                <a:ea typeface="Kim jung chul Gothic Regular" panose="020B0503000000000000" pitchFamily="50" charset="-127"/>
+                <a:cs typeface="+mn-cs"/>
+              </a:rPr>
+              <a:t>주변으로 갈수록 </a:t>
+            </a:r>
+            <a:r>
+              <a:rPr lang="en-US" altLang="ko-KR" sz="1200" kern="1200" dirty="0">
+                <a:solidFill>
+                  <a:schemeClr val="tx1"/>
+                </a:solidFill>
+                <a:effectLst/>
+                <a:latin typeface="Kim jung chul Gothic Regular" panose="020B0503000000000000" pitchFamily="50" charset="-127"/>
+                <a:ea typeface="Kim jung chul Gothic Regular" panose="020B0503000000000000" pitchFamily="50" charset="-127"/>
+                <a:cs typeface="+mn-cs"/>
+              </a:rPr>
+              <a:t>2, 1</a:t>
+            </a:r>
+            <a:r>
+              <a:rPr lang="ko-KR" altLang="en-US" sz="1200" kern="1200" dirty="0">
+                <a:solidFill>
+                  <a:schemeClr val="tx1"/>
+                </a:solidFill>
+                <a:effectLst/>
+                <a:latin typeface="Kim jung chul Gothic Regular" panose="020B0503000000000000" pitchFamily="50" charset="-127"/>
+                <a:ea typeface="Kim jung chul Gothic Regular" panose="020B0503000000000000" pitchFamily="50" charset="-127"/>
+                <a:cs typeface="+mn-cs"/>
+              </a:rPr>
+              <a:t>로 작아집니다</a:t>
+            </a:r>
+            <a:r>
+              <a:rPr lang="en-US" altLang="ko-KR" sz="1200" kern="1200" dirty="0">
+                <a:solidFill>
+                  <a:schemeClr val="tx1"/>
+                </a:solidFill>
+                <a:effectLst/>
+                <a:latin typeface="Kim jung chul Gothic Regular" panose="020B0503000000000000" pitchFamily="50" charset="-127"/>
+                <a:ea typeface="Kim jung chul Gothic Regular" panose="020B0503000000000000" pitchFamily="50" charset="-127"/>
+                <a:cs typeface="+mn-cs"/>
+              </a:rPr>
+              <a:t>. (</a:t>
+            </a:r>
+            <a:r>
+              <a:rPr lang="ko-KR" altLang="en-US" sz="1200" kern="1200" dirty="0">
+                <a:solidFill>
+                  <a:schemeClr val="tx1"/>
+                </a:solidFill>
+                <a:effectLst/>
+                <a:latin typeface="Kim jung chul Gothic Regular" panose="020B0503000000000000" pitchFamily="50" charset="-127"/>
+                <a:ea typeface="Kim jung chul Gothic Regular" panose="020B0503000000000000" pitchFamily="50" charset="-127"/>
+                <a:cs typeface="+mn-cs"/>
+              </a:rPr>
+              <a:t>전체 합인 </a:t>
+            </a:r>
+            <a:r>
+              <a:rPr lang="en-US" altLang="ko-KR" sz="1200" kern="1200" dirty="0">
+                <a:solidFill>
+                  <a:schemeClr val="tx1"/>
+                </a:solidFill>
+                <a:effectLst/>
+                <a:latin typeface="Kim jung chul Gothic Regular" panose="020B0503000000000000" pitchFamily="50" charset="-127"/>
+                <a:ea typeface="Kim jung chul Gothic Regular" panose="020B0503000000000000" pitchFamily="50" charset="-127"/>
+                <a:cs typeface="+mn-cs"/>
+              </a:rPr>
+              <a:t>16</a:t>
+            </a:r>
+            <a:r>
+              <a:rPr lang="ko-KR" altLang="en-US" sz="1200" kern="1200" dirty="0">
+                <a:solidFill>
+                  <a:schemeClr val="tx1"/>
+                </a:solidFill>
+                <a:effectLst/>
+                <a:latin typeface="Kim jung chul Gothic Regular" panose="020B0503000000000000" pitchFamily="50" charset="-127"/>
+                <a:ea typeface="Kim jung chul Gothic Regular" panose="020B0503000000000000" pitchFamily="50" charset="-127"/>
+                <a:cs typeface="+mn-cs"/>
+              </a:rPr>
+              <a:t>으로 나누어 평균화</a:t>
+            </a:r>
+            <a:r>
+              <a:rPr lang="en-US" altLang="ko-KR" sz="1200" kern="1200" dirty="0">
+                <a:solidFill>
+                  <a:schemeClr val="tx1"/>
+                </a:solidFill>
+                <a:effectLst/>
+                <a:latin typeface="Kim jung chul Gothic Regular" panose="020B0503000000000000" pitchFamily="50" charset="-127"/>
+                <a:ea typeface="Kim jung chul Gothic Regular" panose="020B0503000000000000" pitchFamily="50" charset="-127"/>
+                <a:cs typeface="+mn-cs"/>
+              </a:rPr>
+              <a:t>)</a:t>
+            </a:r>
+          </a:p>
+          <a:p>
+            <a:r>
+              <a:rPr lang="ko-KR" altLang="en-US" sz="1200" b="1" kern="1200" dirty="0">
+                <a:solidFill>
+                  <a:schemeClr val="tx1"/>
+                </a:solidFill>
+                <a:effectLst/>
+                <a:latin typeface="Kim jung chul Gothic Regular" panose="020B0503000000000000" pitchFamily="50" charset="-127"/>
+                <a:ea typeface="Kim jung chul Gothic Regular" panose="020B0503000000000000" pitchFamily="50" charset="-127"/>
+                <a:cs typeface="+mn-cs"/>
+              </a:rPr>
+              <a:t>결과</a:t>
+            </a:r>
+            <a:r>
+              <a:rPr lang="en-US" altLang="ko-KR" sz="1200" b="1" kern="1200" dirty="0">
+                <a:solidFill>
+                  <a:schemeClr val="tx1"/>
+                </a:solidFill>
+                <a:effectLst/>
+                <a:latin typeface="Kim jung chul Gothic Regular" panose="020B0503000000000000" pitchFamily="50" charset="-127"/>
+                <a:ea typeface="Kim jung chul Gothic Regular" panose="020B0503000000000000" pitchFamily="50" charset="-127"/>
+                <a:cs typeface="+mn-cs"/>
+              </a:rPr>
+              <a:t>:</a:t>
+            </a:r>
+            <a:r>
+              <a:rPr lang="ko-KR" altLang="en-US" sz="1200" kern="1200" dirty="0">
+                <a:solidFill>
+                  <a:schemeClr val="tx1"/>
+                </a:solidFill>
+                <a:effectLst/>
+                <a:latin typeface="Kim jung chul Gothic Regular" panose="020B0503000000000000" pitchFamily="50" charset="-127"/>
+                <a:ea typeface="Kim jung chul Gothic Regular" panose="020B0503000000000000" pitchFamily="50" charset="-127"/>
+                <a:cs typeface="+mn-cs"/>
+              </a:rPr>
+              <a:t> 박스 </a:t>
+            </a:r>
+            <a:r>
+              <a:rPr lang="ko-KR" altLang="en-US" sz="1200" kern="1200" dirty="0" err="1">
+                <a:solidFill>
+                  <a:schemeClr val="tx1"/>
+                </a:solidFill>
+                <a:effectLst/>
+                <a:latin typeface="Kim jung chul Gothic Regular" panose="020B0503000000000000" pitchFamily="50" charset="-127"/>
+                <a:ea typeface="Kim jung chul Gothic Regular" panose="020B0503000000000000" pitchFamily="50" charset="-127"/>
+                <a:cs typeface="+mn-cs"/>
+              </a:rPr>
+              <a:t>블러보다</a:t>
+            </a:r>
+            <a:r>
+              <a:rPr lang="ko-KR" altLang="en-US" sz="1200" kern="1200" dirty="0">
+                <a:solidFill>
+                  <a:schemeClr val="tx1"/>
+                </a:solidFill>
+                <a:effectLst/>
+                <a:latin typeface="Kim jung chul Gothic Regular" panose="020B0503000000000000" pitchFamily="50" charset="-127"/>
+                <a:ea typeface="Kim jung chul Gothic Regular" panose="020B0503000000000000" pitchFamily="50" charset="-127"/>
+                <a:cs typeface="+mn-cs"/>
+              </a:rPr>
+              <a:t> 훨씬 </a:t>
+            </a:r>
+            <a:r>
+              <a:rPr lang="ko-KR" altLang="en-US" sz="1200" b="1" kern="1200" dirty="0">
+                <a:solidFill>
+                  <a:schemeClr val="tx1"/>
+                </a:solidFill>
+                <a:effectLst/>
+                <a:latin typeface="Kim jung chul Gothic Regular" panose="020B0503000000000000" pitchFamily="50" charset="-127"/>
+                <a:ea typeface="Kim jung chul Gothic Regular" panose="020B0503000000000000" pitchFamily="50" charset="-127"/>
+                <a:cs typeface="+mn-cs"/>
+              </a:rPr>
+              <a:t>자연스럽고 부드럽게</a:t>
+            </a:r>
+            <a:r>
+              <a:rPr lang="ko-KR" altLang="en-US" sz="1200" kern="1200" dirty="0">
+                <a:solidFill>
+                  <a:schemeClr val="tx1"/>
+                </a:solidFill>
+                <a:effectLst/>
+                <a:latin typeface="Kim jung chul Gothic Regular" panose="020B0503000000000000" pitchFamily="50" charset="-127"/>
+                <a:ea typeface="Kim jung chul Gothic Regular" panose="020B0503000000000000" pitchFamily="50" charset="-127"/>
+                <a:cs typeface="+mn-cs"/>
+              </a:rPr>
+              <a:t> 흐려집니다</a:t>
+            </a:r>
+            <a:r>
+              <a:rPr lang="en-US" altLang="ko-KR" sz="1200" kern="1200" dirty="0">
+                <a:solidFill>
+                  <a:schemeClr val="tx1"/>
+                </a:solidFill>
+                <a:effectLst/>
+                <a:latin typeface="Kim jung chul Gothic Regular" panose="020B0503000000000000" pitchFamily="50" charset="-127"/>
+                <a:ea typeface="Kim jung chul Gothic Regular" panose="020B0503000000000000" pitchFamily="50" charset="-127"/>
+                <a:cs typeface="+mn-cs"/>
+              </a:rPr>
+              <a:t>. </a:t>
+            </a:r>
+            <a:r>
+              <a:rPr lang="ko-KR" altLang="en-US" sz="1200" kern="1200" dirty="0">
+                <a:solidFill>
+                  <a:schemeClr val="tx1"/>
+                </a:solidFill>
+                <a:effectLst/>
+                <a:latin typeface="Kim jung chul Gothic Regular" panose="020B0503000000000000" pitchFamily="50" charset="-127"/>
+                <a:ea typeface="Kim jung chul Gothic Regular" panose="020B0503000000000000" pitchFamily="50" charset="-127"/>
+                <a:cs typeface="+mn-cs"/>
+              </a:rPr>
+              <a:t>실제 렌즈의 초점이 맞지 않았을 때 발생하는 흐림 현상과 가장 유사하여 이미지 노이즈 제거에 가장 많이 쓰입니다</a:t>
+            </a:r>
+            <a:r>
+              <a:rPr lang="en-US" altLang="ko-KR" sz="1200" kern="1200" dirty="0">
+                <a:solidFill>
+                  <a:schemeClr val="tx1"/>
+                </a:solidFill>
+                <a:effectLst/>
+                <a:latin typeface="Kim jung chul Gothic Regular" panose="020B0503000000000000" pitchFamily="50" charset="-127"/>
+                <a:ea typeface="Kim jung chul Gothic Regular" panose="020B0503000000000000" pitchFamily="50" charset="-127"/>
+                <a:cs typeface="+mn-cs"/>
+              </a:rPr>
+              <a:t>.</a:t>
+            </a:r>
+          </a:p>
+          <a:p>
+            <a:br>
+              <a:rPr lang="ko-KR" altLang="en-US" dirty="0"/>
+            </a:br>
+            <a:endParaRPr lang="ko-KR" altLang="en-US" dirty="0"/>
+          </a:p>
+          <a:p>
+            <a:r>
+              <a:rPr lang="ko-KR" altLang="en-US" sz="1200" b="1" kern="1200" dirty="0">
+                <a:solidFill>
+                  <a:schemeClr val="tx1"/>
+                </a:solidFill>
+                <a:effectLst/>
+                <a:latin typeface="Kim jung chul Gothic Regular" panose="020B0503000000000000" pitchFamily="50" charset="-127"/>
+                <a:ea typeface="Kim jung chul Gothic Regular" panose="020B0503000000000000" pitchFamily="50" charset="-127"/>
+                <a:cs typeface="+mn-cs"/>
+              </a:rPr>
+              <a:t>💡 요약하자면</a:t>
+            </a:r>
+          </a:p>
+          <a:p>
+            <a:r>
+              <a:rPr lang="ko-KR" altLang="en-US" sz="1200" kern="1200" dirty="0">
+                <a:solidFill>
+                  <a:schemeClr val="tx1"/>
+                </a:solidFill>
+                <a:effectLst/>
+                <a:latin typeface="Kim jung chul Gothic Regular" panose="020B0503000000000000" pitchFamily="50" charset="-127"/>
+                <a:ea typeface="Kim jung chul Gothic Regular" panose="020B0503000000000000" pitchFamily="50" charset="-127"/>
+                <a:cs typeface="+mn-cs"/>
+              </a:rPr>
+              <a:t>이 슬라이드는 **</a:t>
+            </a:r>
+            <a:r>
+              <a:rPr lang="en-US" altLang="ko-KR" sz="1200" kern="1200" dirty="0">
+                <a:solidFill>
+                  <a:schemeClr val="tx1"/>
+                </a:solidFill>
+                <a:effectLst/>
+                <a:latin typeface="Kim jung chul Gothic Regular" panose="020B0503000000000000" pitchFamily="50" charset="-127"/>
+                <a:ea typeface="Kim jung chul Gothic Regular" panose="020B0503000000000000" pitchFamily="50" charset="-127"/>
+                <a:cs typeface="+mn-cs"/>
+              </a:rPr>
+              <a:t>"</a:t>
+            </a:r>
+            <a:r>
+              <a:rPr lang="ko-KR" altLang="en-US" sz="1200" kern="1200" dirty="0">
+                <a:solidFill>
+                  <a:schemeClr val="tx1"/>
+                </a:solidFill>
+                <a:effectLst/>
+                <a:latin typeface="Kim jung chul Gothic Regular" panose="020B0503000000000000" pitchFamily="50" charset="-127"/>
+                <a:ea typeface="Kim jung chul Gothic Regular" panose="020B0503000000000000" pitchFamily="50" charset="-127"/>
+                <a:cs typeface="+mn-cs"/>
+              </a:rPr>
+              <a:t>이미지를 흐리게 만드는 것은 결국 주변 </a:t>
+            </a:r>
+            <a:r>
+              <a:rPr lang="ko-KR" altLang="en-US" sz="1200" kern="1200" dirty="0" err="1">
+                <a:solidFill>
+                  <a:schemeClr val="tx1"/>
+                </a:solidFill>
+                <a:effectLst/>
+                <a:latin typeface="Kim jung chul Gothic Regular" panose="020B0503000000000000" pitchFamily="50" charset="-127"/>
+                <a:ea typeface="Kim jung chul Gothic Regular" panose="020B0503000000000000" pitchFamily="50" charset="-127"/>
+                <a:cs typeface="+mn-cs"/>
+              </a:rPr>
+              <a:t>픽셀값들을</a:t>
+            </a:r>
+            <a:r>
+              <a:rPr lang="ko-KR" altLang="en-US" sz="1200" kern="1200" dirty="0">
+                <a:solidFill>
+                  <a:schemeClr val="tx1"/>
+                </a:solidFill>
+                <a:effectLst/>
+                <a:latin typeface="Kim jung chul Gothic Regular" panose="020B0503000000000000" pitchFamily="50" charset="-127"/>
+                <a:ea typeface="Kim jung chul Gothic Regular" panose="020B0503000000000000" pitchFamily="50" charset="-127"/>
+                <a:cs typeface="+mn-cs"/>
+              </a:rPr>
+              <a:t> 섞어서 평균을 내는 과정</a:t>
+            </a:r>
+            <a:r>
+              <a:rPr lang="en-US" altLang="ko-KR" sz="1200" kern="1200" dirty="0">
+                <a:solidFill>
+                  <a:schemeClr val="tx1"/>
+                </a:solidFill>
+                <a:effectLst/>
+                <a:latin typeface="Kim jung chul Gothic Regular" panose="020B0503000000000000" pitchFamily="50" charset="-127"/>
+                <a:ea typeface="Kim jung chul Gothic Regular" panose="020B0503000000000000" pitchFamily="50" charset="-127"/>
+                <a:cs typeface="+mn-cs"/>
+              </a:rPr>
+              <a:t>"**</a:t>
+            </a:r>
+            <a:r>
+              <a:rPr lang="ko-KR" altLang="en-US" sz="1200" kern="1200" dirty="0">
+                <a:solidFill>
+                  <a:schemeClr val="tx1"/>
+                </a:solidFill>
+                <a:effectLst/>
+                <a:latin typeface="Kim jung chul Gothic Regular" panose="020B0503000000000000" pitchFamily="50" charset="-127"/>
+                <a:ea typeface="Kim jung chul Gothic Regular" panose="020B0503000000000000" pitchFamily="50" charset="-127"/>
+                <a:cs typeface="+mn-cs"/>
+              </a:rPr>
+              <a:t>임을 보여줍니다</a:t>
+            </a:r>
+            <a:r>
+              <a:rPr lang="en-US" altLang="ko-KR" sz="1200" kern="1200" dirty="0">
+                <a:solidFill>
+                  <a:schemeClr val="tx1"/>
+                </a:solidFill>
+                <a:effectLst/>
+                <a:latin typeface="Kim jung chul Gothic Regular" panose="020B0503000000000000" pitchFamily="50" charset="-127"/>
+                <a:ea typeface="Kim jung chul Gothic Regular" panose="020B0503000000000000" pitchFamily="50" charset="-127"/>
+                <a:cs typeface="+mn-cs"/>
+              </a:rPr>
+              <a:t>.</a:t>
+            </a:r>
+          </a:p>
+          <a:p>
+            <a:endParaRPr lang="ko-KR" altLang="en-US" dirty="0"/>
+          </a:p>
+        </p:txBody>
+      </p:sp>
+      <p:sp>
+        <p:nvSpPr>
+          <p:cNvPr id="4" name="슬라이드 번호 개체 틀 3"/>
+          <p:cNvSpPr>
+            <a:spLocks noGrp="1"/>
+          </p:cNvSpPr>
+          <p:nvPr>
+            <p:ph type="sldNum" sz="quarter" idx="10"/>
+          </p:nvPr>
+        </p:nvSpPr>
+        <p:spPr/>
+        <p:txBody>
+          <a:bodyPr/>
+          <a:lstStyle/>
+          <a:p>
+            <a:fld id="{C09E5BFC-1559-42F1-8940-AB342D56BF02}" type="slidenum">
+              <a:rPr lang="ko-KR" altLang="en-US" smtClean="0"/>
+              <a:t>6</a:t>
+            </a:fld>
+            <a:endParaRPr lang="ko-KR" altLang="en-US"/>
+          </a:p>
+        </p:txBody>
+      </p:sp>
+    </p:spTree>
+    <p:extLst>
+      <p:ext uri="{BB962C8B-B14F-4D97-AF65-F5344CB8AC3E}">
+        <p14:creationId xmlns:p14="http://schemas.microsoft.com/office/powerpoint/2010/main" val="141265422"/>
+      </p:ext>
+    </p:extLst>
+  </p:cSld>
+  <p:clrMapOvr>
+    <a:masterClrMapping/>
+  </p:clrMapOvr>
+</p:notes>
+</file>
+
+<file path=ppt/notesSlides/notesSlide5.xml><?xml version="1.0" encoding="utf-8"?>
+<p:notes xmlns:a="http://schemas.openxmlformats.org/drawingml/2006/main" xmlns:r="http://schemas.openxmlformats.org/officeDocument/2006/relationships" xmlns:p="http://schemas.openxmlformats.org/presentationml/2006/main">
+  <p:cSld>
+    <p:spTree>
+      <p:nvGrpSpPr>
+        <p:cNvPr id="1" name=""/>
+        <p:cNvGrpSpPr/>
+        <p:nvPr/>
+      </p:nvGrpSpPr>
+      <p:grpSpPr>
+        <a:xfrm>
+          <a:off x="0" y="0"/>
+          <a:ext cx="0" cy="0"/>
+          <a:chOff x="0" y="0"/>
+          <a:chExt cx="0" cy="0"/>
+        </a:xfrm>
+      </p:grpSpPr>
+      <p:sp>
+        <p:nvSpPr>
+          <p:cNvPr id="2" name="슬라이드 이미지 개체 틀 1"/>
+          <p:cNvSpPr>
+            <a:spLocks noGrp="1" noRot="1" noChangeAspect="1"/>
+          </p:cNvSpPr>
+          <p:nvPr>
+            <p:ph type="sldImg"/>
+          </p:nvPr>
+        </p:nvSpPr>
+        <p:spPr/>
+      </p:sp>
+      <p:sp>
+        <p:nvSpPr>
+          <p:cNvPr id="3" name="슬라이드 노트 개체 틀 2"/>
+          <p:cNvSpPr>
+            <a:spLocks noGrp="1"/>
+          </p:cNvSpPr>
+          <p:nvPr>
+            <p:ph type="body" idx="1"/>
+          </p:nvPr>
+        </p:nvSpPr>
+        <p:spPr/>
+        <p:txBody>
+          <a:bodyPr/>
+          <a:lstStyle/>
+          <a:p>
+            <a:r>
               <a:rPr lang="ko-KR" altLang="en-US" b="1" dirty="0"/>
               <a:t>주황색 선 </a:t>
             </a:r>
@@ -2737,7 +3092,7 @@
             <a:fld id="{3E35EA20-6519-4513-9EDC-C89C5369BAEC}" type="slidenum">
               <a:rPr lang="ko-KR" altLang="en-US" smtClean="0"/>
               <a:pPr/>
-              <a:t>5</a:t>
+              <a:t>7</a:t>
             </a:fld>
             <a:endParaRPr lang="ko-KR" altLang="en-US" dirty="0"/>
           </a:p>
@@ -2756,7 +3111,7 @@
 </p:notes>
 </file>
 
-<file path=ppt/notesSlides/notesSlide5.xml><?xml version="1.0" encoding="utf-8"?>
+<file path=ppt/notesSlides/notesSlide6.xml><?xml version="1.0" encoding="utf-8"?>
 <p:notes xmlns:a="http://schemas.openxmlformats.org/drawingml/2006/main" xmlns:r="http://schemas.openxmlformats.org/officeDocument/2006/relationships" xmlns:p="http://schemas.openxmlformats.org/presentationml/2006/main">
   <p:cSld>
     <p:spTree>
@@ -2845,7 +3200,7 @@
           <a:p>
             <a:fld id="{A0085365-8376-4996-BDD6-F39608FADAF3}" type="slidenum">
               <a:rPr lang="ko-KR" altLang="en-US" smtClean="0"/>
-              <a:t>6</a:t>
+              <a:t>8</a:t>
             </a:fld>
             <a:endParaRPr lang="ko-KR" altLang="en-US"/>
           </a:p>
@@ -2855,229 +3210,6 @@
     <p:extLst>
       <p:ext uri="{BB962C8B-B14F-4D97-AF65-F5344CB8AC3E}">
         <p14:creationId xmlns:p14="http://schemas.microsoft.com/office/powerpoint/2010/main" val="1360701481"/>
-      </p:ext>
-    </p:extLst>
-  </p:cSld>
-  <p:clrMapOvr>
-    <a:masterClrMapping/>
-  </p:clrMapOvr>
-</p:notes>
-</file>
-
-<file path=ppt/notesSlides/notesSlide6.xml><?xml version="1.0" encoding="utf-8"?>
-<p:notes xmlns:a="http://schemas.openxmlformats.org/drawingml/2006/main" xmlns:r="http://schemas.openxmlformats.org/officeDocument/2006/relationships" xmlns:p="http://schemas.openxmlformats.org/presentationml/2006/main">
-  <p:cSld>
-    <p:spTree>
-      <p:nvGrpSpPr>
-        <p:cNvPr id="1" name=""/>
-        <p:cNvGrpSpPr/>
-        <p:nvPr/>
-      </p:nvGrpSpPr>
-      <p:grpSpPr>
-        <a:xfrm>
-          <a:off x="0" y="0"/>
-          <a:ext cx="0" cy="0"/>
-          <a:chOff x="0" y="0"/>
-          <a:chExt cx="0" cy="0"/>
-        </a:xfrm>
-      </p:grpSpPr>
-      <p:sp>
-        <p:nvSpPr>
-          <p:cNvPr id="2" name="슬라이드 이미지 개체 틀 1"/>
-          <p:cNvSpPr>
-            <a:spLocks noGrp="1" noRot="1" noChangeAspect="1"/>
-          </p:cNvSpPr>
-          <p:nvPr>
-            <p:ph type="sldImg"/>
-          </p:nvPr>
-        </p:nvSpPr>
-        <p:spPr/>
-      </p:sp>
-      <p:sp>
-        <p:nvSpPr>
-          <p:cNvPr id="3" name="슬라이드 노트 개체 틀 2"/>
-          <p:cNvSpPr>
-            <a:spLocks noGrp="1"/>
-          </p:cNvSpPr>
-          <p:nvPr>
-            <p:ph type="body" idx="1"/>
-          </p:nvPr>
-        </p:nvSpPr>
-        <p:spPr/>
-        <p:txBody>
-          <a:bodyPr/>
-          <a:lstStyle/>
-          <a:p>
-            <a:r>
-              <a:rPr lang="ko-KR" altLang="en-US" b="1" dirty="0" err="1"/>
-              <a:t>산점도</a:t>
-            </a:r>
-            <a:r>
-              <a:rPr lang="ko-KR" altLang="en-US" b="1" dirty="0"/>
-              <a:t> </a:t>
-            </a:r>
-            <a:r>
-              <a:rPr lang="en-US" altLang="ko-KR" b="1" dirty="0"/>
-              <a:t>(Irradiance vs Power):</a:t>
-            </a:r>
-            <a:r>
-              <a:rPr lang="ko-KR" altLang="en-US" dirty="0"/>
-              <a:t> 일사량과 발전량은 강한 양의 상관관계를 가져야 합니다</a:t>
-            </a:r>
-            <a:r>
-              <a:rPr lang="en-US" altLang="ko-KR" dirty="0"/>
-              <a:t>. </a:t>
-            </a:r>
-            <a:r>
-              <a:rPr lang="ko-KR" altLang="en-US" dirty="0"/>
-              <a:t>하지만 </a:t>
-            </a:r>
-            <a:r>
-              <a:rPr lang="ko-KR" altLang="en-US" b="1" dirty="0"/>
-              <a:t>빨간색 점</a:t>
-            </a:r>
-            <a:r>
-              <a:rPr lang="ko-KR" altLang="en-US" dirty="0"/>
-              <a:t>처럼 일사량은 높은데 발전량이 급락한 경우</a:t>
-            </a:r>
-            <a:r>
-              <a:rPr lang="en-US" altLang="ko-KR" dirty="0"/>
-              <a:t>(</a:t>
-            </a:r>
-            <a:r>
-              <a:rPr lang="ko-KR" altLang="en-US" dirty="0"/>
-              <a:t>인버터 고장 등</a:t>
-            </a:r>
-            <a:r>
-              <a:rPr lang="en-US" altLang="ko-KR" dirty="0"/>
-              <a:t>)</a:t>
-            </a:r>
-            <a:r>
-              <a:rPr lang="ko-KR" altLang="en-US" dirty="0"/>
-              <a:t>나</a:t>
-            </a:r>
-            <a:r>
-              <a:rPr lang="en-US" altLang="ko-KR" dirty="0"/>
-              <a:t>, </a:t>
-            </a:r>
-            <a:r>
-              <a:rPr lang="ko-KR" altLang="en-US" dirty="0"/>
-              <a:t>반대로 비정상적으로 높게 측정된 경우</a:t>
-            </a:r>
-            <a:r>
-              <a:rPr lang="en-US" altLang="ko-KR" dirty="0"/>
-              <a:t>(</a:t>
-            </a:r>
-            <a:r>
-              <a:rPr lang="ko-KR" altLang="en-US" dirty="0"/>
-              <a:t>센서 오류</a:t>
-            </a:r>
-            <a:r>
-              <a:rPr lang="en-US" altLang="ko-KR" dirty="0"/>
-              <a:t>)</a:t>
-            </a:r>
-            <a:r>
-              <a:rPr lang="ko-KR" altLang="en-US" dirty="0"/>
-              <a:t>를 이상치로 판단합니다</a:t>
-            </a:r>
-            <a:r>
-              <a:rPr lang="en-US" altLang="ko-KR" dirty="0"/>
-              <a:t>.</a:t>
-            </a:r>
-          </a:p>
-          <a:p>
-            <a:r>
-              <a:rPr lang="ko-KR" altLang="en-US" b="1" dirty="0"/>
-              <a:t>시계열 프로필 </a:t>
-            </a:r>
-            <a:r>
-              <a:rPr lang="en-US" altLang="ko-KR" b="1" dirty="0"/>
-              <a:t>(Daily Power Profile):</a:t>
-            </a:r>
-            <a:r>
-              <a:rPr lang="ko-KR" altLang="en-US" dirty="0"/>
-              <a:t> 하루 발전 흐름에서 갑자기 </a:t>
-            </a:r>
-            <a:r>
-              <a:rPr lang="en-US" altLang="ko-KR" dirty="0"/>
-              <a:t>0</a:t>
-            </a:r>
-            <a:r>
-              <a:rPr lang="ko-KR" altLang="en-US" dirty="0"/>
-              <a:t>에 가깝게 떨어지거나 위로 튀는 값은 기상 변화가 아닌 장치 오류일 가능성이 높습니다</a:t>
-            </a:r>
-            <a:r>
-              <a:rPr lang="en-US" altLang="ko-KR" dirty="0"/>
-              <a:t>.</a:t>
-            </a:r>
-          </a:p>
-          <a:p>
-            <a:r>
-              <a:rPr lang="ko-KR" altLang="en-US" b="1" dirty="0"/>
-              <a:t>박스 플롯 </a:t>
-            </a:r>
-            <a:r>
-              <a:rPr lang="en-US" altLang="ko-KR" b="1" dirty="0"/>
-              <a:t>(Box Plot):</a:t>
-            </a:r>
-            <a:r>
-              <a:rPr lang="ko-KR" altLang="en-US" dirty="0"/>
-              <a:t> 통계적으로 전체 데이터의 분포</a:t>
-            </a:r>
-            <a:r>
-              <a:rPr lang="en-US" altLang="ko-KR" dirty="0"/>
-              <a:t>(</a:t>
-            </a:r>
-            <a:r>
-              <a:rPr lang="ko-KR" altLang="en-US" dirty="0"/>
-              <a:t>사분위수</a:t>
-            </a:r>
-            <a:r>
-              <a:rPr lang="en-US" altLang="ko-KR" dirty="0"/>
-              <a:t>)</a:t>
-            </a:r>
-            <a:r>
-              <a:rPr lang="ko-KR" altLang="en-US" dirty="0"/>
-              <a:t>를 벗어나는 값들을 한눈에 보여줍니다</a:t>
-            </a:r>
-            <a:r>
-              <a:rPr lang="en-US" altLang="ko-KR" dirty="0"/>
-              <a:t>.</a:t>
-            </a:r>
-          </a:p>
-          <a:p>
-            <a:endParaRPr lang="ko-KR" altLang="en-US" dirty="0"/>
-          </a:p>
-        </p:txBody>
-      </p:sp>
-      <p:sp>
-        <p:nvSpPr>
-          <p:cNvPr id="4" name="슬라이드 번호 개체 틀 3"/>
-          <p:cNvSpPr>
-            <a:spLocks noGrp="1"/>
-          </p:cNvSpPr>
-          <p:nvPr>
-            <p:ph type="sldNum" sz="quarter" idx="5"/>
-          </p:nvPr>
-        </p:nvSpPr>
-        <p:spPr/>
-        <p:txBody>
-          <a:bodyPr/>
-          <a:lstStyle/>
-          <a:p>
-            <a:fld id="{3E35EA20-6519-4513-9EDC-C89C5369BAEC}" type="slidenum">
-              <a:rPr lang="ko-KR" altLang="en-US" smtClean="0"/>
-              <a:pPr/>
-              <a:t>9</a:t>
-            </a:fld>
-            <a:endParaRPr lang="ko-KR" altLang="en-US" dirty="0"/>
-          </a:p>
-        </p:txBody>
-      </p:sp>
-    </p:spTree>
-    <p:extLst>
-      <p:ext uri="{BB962C8B-B14F-4D97-AF65-F5344CB8AC3E}">
-        <p14:creationId xmlns:p14="http://schemas.microsoft.com/office/powerpoint/2010/main" val="2193020239"/>
       </p:ext>
     </p:extLst>
   </p:cSld>
@@ -3132,23 +3264,76 @@
           <a:lstStyle/>
           <a:p>
             <a:r>
-              <a:rPr lang="ko-KR" altLang="en-US" dirty="0"/>
-              <a:t>데이터가 대칭적인 분포를 가질 때는</a:t>
-            </a:r>
-            <a:br>
-              <a:rPr lang="ko-KR" altLang="en-US" dirty="0"/>
-            </a:br>
-            <a:r>
-              <a:rPr lang="ko-KR" altLang="en-US" dirty="0"/>
-              <a:t>평균이 </a:t>
-            </a:r>
-            <a:r>
-              <a:rPr lang="ko-KR" altLang="en-US" dirty="0" err="1"/>
-              <a:t>대표값</a:t>
-            </a:r>
-            <a:r>
-              <a:rPr lang="ko-KR" altLang="en-US" dirty="0"/>
-              <a:t> 역할을 할 수 있다</a:t>
+              <a:rPr lang="ko-KR" altLang="en-US" b="1" dirty="0" err="1"/>
+              <a:t>산점도</a:t>
+            </a:r>
+            <a:r>
+              <a:rPr lang="ko-KR" altLang="en-US" b="1" dirty="0"/>
+              <a:t> </a:t>
+            </a:r>
+            <a:r>
+              <a:rPr lang="en-US" altLang="ko-KR" b="1" dirty="0"/>
+              <a:t>(Irradiance vs Power):</a:t>
+            </a:r>
+            <a:r>
+              <a:rPr lang="ko-KR" altLang="en-US" dirty="0"/>
+              <a:t> 일사량과 발전량은 강한 양의 상관관계를 가져야 합니다</a:t>
+            </a:r>
+            <a:r>
+              <a:rPr lang="en-US" altLang="ko-KR" dirty="0"/>
+              <a:t>. </a:t>
+            </a:r>
+            <a:r>
+              <a:rPr lang="ko-KR" altLang="en-US" dirty="0"/>
+              <a:t>하지만 </a:t>
+            </a:r>
+            <a:r>
+              <a:rPr lang="ko-KR" altLang="en-US" b="1" dirty="0"/>
+              <a:t>빨간색 점</a:t>
+            </a:r>
+            <a:r>
+              <a:rPr lang="ko-KR" altLang="en-US" dirty="0"/>
+              <a:t>처럼 일사량은 높은데 발전량이 급락한 경우</a:t>
+            </a:r>
+            <a:r>
+              <a:rPr lang="en-US" altLang="ko-KR" dirty="0"/>
+              <a:t>(</a:t>
+            </a:r>
+            <a:r>
+              <a:rPr lang="ko-KR" altLang="en-US" dirty="0"/>
+              <a:t>인버터 고장 등</a:t>
+            </a:r>
+            <a:r>
+              <a:rPr lang="en-US" altLang="ko-KR" dirty="0"/>
+              <a:t>)</a:t>
+            </a:r>
+            <a:r>
+              <a:rPr lang="ko-KR" altLang="en-US" dirty="0"/>
+              <a:t>나</a:t>
+            </a:r>
+            <a:r>
+              <a:rPr lang="en-US" altLang="ko-KR" dirty="0"/>
+              <a:t>, </a:t>
+            </a:r>
+            <a:r>
+              <a:rPr lang="ko-KR" altLang="en-US" dirty="0"/>
+              <a:t>반대로 비정상적으로 높게 측정된 경우</a:t>
+            </a:r>
+            <a:r>
+              <a:rPr lang="en-US" altLang="ko-KR" dirty="0"/>
+              <a:t>(</a:t>
+            </a:r>
+            <a:r>
+              <a:rPr lang="ko-KR" altLang="en-US" dirty="0"/>
+              <a:t>센서 오류</a:t>
+            </a:r>
+            <a:r>
+              <a:rPr lang="en-US" altLang="ko-KR" dirty="0"/>
+              <a:t>)</a:t>
+            </a:r>
+            <a:r>
+              <a:rPr lang="ko-KR" altLang="en-US" dirty="0"/>
+              <a:t>를 이상치로 판단합니다</a:t>
             </a:r>
             <a:r>
               <a:rPr lang="en-US" altLang="ko-KR" dirty="0"/>
@@ -3157,15 +3342,58 @@
           </a:p>
           <a:p>
             <a:r>
-              <a:rPr lang="ko-KR" altLang="en-US" dirty="0"/>
-              <a:t>하지만 분포가 한쪽으로 치우치면</a:t>
-            </a:r>
-            <a:br>
-              <a:rPr lang="ko-KR" altLang="en-US" dirty="0"/>
-            </a:br>
-            <a:r>
-              <a:rPr lang="ko-KR" altLang="en-US" dirty="0"/>
-              <a:t>평균은 실제 데이터의 중심을 왜곡해서 보여줄 수 있다</a:t>
+              <a:rPr lang="ko-KR" altLang="en-US" b="1" dirty="0"/>
+              <a:t>시계열 프로필 </a:t>
+            </a:r>
+            <a:r>
+              <a:rPr lang="en-US" altLang="ko-KR" b="1" dirty="0"/>
+              <a:t>(Daily Power Profile):</a:t>
+            </a:r>
+            <a:r>
+              <a:rPr lang="ko-KR" altLang="en-US" dirty="0"/>
+              <a:t> 하루 발전 흐름에서 갑자기 </a:t>
+            </a:r>
+            <a:r>
+              <a:rPr lang="en-US" altLang="ko-KR" dirty="0"/>
+              <a:t>0</a:t>
+            </a:r>
+            <a:r>
+              <a:rPr lang="ko-KR" altLang="en-US" dirty="0"/>
+              <a:t>에 가깝게 떨어지거나 위로 튀는 값은 기상 변화가 아닌 장치 오류일 가능성이 높습니다</a:t>
+            </a:r>
+            <a:r>
+              <a:rPr lang="en-US" altLang="ko-KR" dirty="0"/>
+              <a:t>.</a:t>
+            </a:r>
+          </a:p>
+          <a:p>
+            <a:r>
+              <a:rPr lang="ko-KR" altLang="en-US" b="1" dirty="0"/>
+              <a:t>박스 플롯 </a:t>
+            </a:r>
+            <a:r>
+              <a:rPr lang="en-US" altLang="ko-KR" b="1" dirty="0"/>
+              <a:t>(Box Plot):</a:t>
+            </a:r>
+            <a:r>
+              <a:rPr lang="ko-KR" altLang="en-US" dirty="0"/>
+              <a:t> 통계적으로 전체 데이터의 분포</a:t>
+            </a:r>
+            <a:r>
+              <a:rPr lang="en-US" altLang="ko-KR" dirty="0"/>
+              <a:t>(</a:t>
+            </a:r>
+            <a:r>
+              <a:rPr lang="ko-KR" altLang="en-US" dirty="0"/>
+              <a:t>사분위수</a:t>
+            </a:r>
+            <a:r>
+              <a:rPr lang="en-US" altLang="ko-KR" dirty="0"/>
+              <a:t>)</a:t>
+            </a:r>
+            <a:r>
+              <a:rPr lang="ko-KR" altLang="en-US" dirty="0"/>
+              <a:t>를 벗어나는 값들을 한눈에 보여줍니다</a:t>
             </a:r>
             <a:r>
               <a:rPr lang="en-US" altLang="ko-KR" dirty="0"/>
@@ -3204,7 +3432,7 @@
     </p:spTree>
     <p:extLst>
       <p:ext uri="{BB962C8B-B14F-4D97-AF65-F5344CB8AC3E}">
-        <p14:creationId xmlns:p14="http://schemas.microsoft.com/office/powerpoint/2010/main" val="2984038642"/>
+        <p14:creationId xmlns:p14="http://schemas.microsoft.com/office/powerpoint/2010/main" val="2193020239"/>
       </p:ext>
     </p:extLst>
   </p:cSld>
@@ -3258,141 +3486,48 @@
           <a:bodyPr/>
           <a:lstStyle/>
           <a:p>
-            <a:pPr marL="0" marR="0" lvl="0" indent="0" algn="l" defTabSz="914400" rtl="0" eaLnBrk="1" fontAlgn="auto" latinLnBrk="1" hangingPunct="1">
-              <a:lnSpc>
-                <a:spcPct val="100000"/>
-              </a:lnSpc>
-              <a:spcBef>
-                <a:spcPts val="0"/>
-              </a:spcBef>
-              <a:spcAft>
-                <a:spcPts val="0"/>
-              </a:spcAft>
-              <a:buClrTx/>
-              <a:buSzTx/>
-              <a:buFontTx/>
-              <a:buNone/>
-              <a:tabLst/>
-              <a:defRPr/>
-            </a:pPr>
-            <a:r>
-              <a:rPr lang="en-US" altLang="ko-KR" sz="1200" b="1" i="0" kern="1200" dirty="0">
-                <a:solidFill>
-                  <a:schemeClr val="tx1"/>
-                </a:solidFill>
-                <a:effectLst/>
-                <a:latin typeface="Kim jung chul Gothic Regular" panose="020B0503000000000000" pitchFamily="50" charset="-127"/>
-                <a:ea typeface="Kim jung chul Gothic Regular" panose="020B0503000000000000" pitchFamily="50" charset="-127"/>
-                <a:cs typeface="+mn-cs"/>
-              </a:rPr>
-              <a:t>The Zero Inflated Poisson Regression Model</a:t>
-            </a:r>
-          </a:p>
-          <a:p>
-            <a:r>
-              <a:rPr lang="ko-KR" altLang="en-US" dirty="0"/>
-              <a:t> </a:t>
+            <a:r>
+              <a:rPr lang="ko-KR" altLang="en-US" dirty="0"/>
+              <a:t>데이터가 대칭적인 분포를 가질 때는</a:t>
+            </a:r>
+            <a:br>
+              <a:rPr lang="ko-KR" altLang="en-US" dirty="0"/>
+            </a:br>
+            <a:r>
+              <a:rPr lang="ko-KR" altLang="en-US" dirty="0"/>
+              <a:t>평균이 </a:t>
+            </a:r>
+            <a:r>
+              <a:rPr lang="ko-KR" altLang="en-US" dirty="0" err="1"/>
+              <a:t>대표값</a:t>
+            </a:r>
+            <a:r>
+              <a:rPr lang="ko-KR" altLang="en-US" dirty="0"/>
+              <a:t> 역할을 할 수 있다</a:t>
             </a:r>
             <a:r>
               <a:rPr lang="en-US" altLang="ko-KR" dirty="0"/>
-              <a:t>- </a:t>
-            </a:r>
-            <a:r>
-              <a:rPr lang="ko-KR" altLang="en-US" sz="1200" b="0" i="0" kern="1200" dirty="0">
-                <a:solidFill>
-                  <a:schemeClr val="tx1"/>
-                </a:solidFill>
-                <a:effectLst/>
-                <a:latin typeface="Kim jung chul Gothic Regular" panose="020B0503000000000000" pitchFamily="50" charset="-127"/>
-                <a:ea typeface="Kim jung chul Gothic Regular" panose="020B0503000000000000" pitchFamily="50" charset="-127"/>
-                <a:cs typeface="+mn-cs"/>
-              </a:rPr>
-              <a:t>대부분의 관측치가 </a:t>
-            </a:r>
-            <a:r>
-              <a:rPr lang="en-US" altLang="ko-KR" sz="1200" b="0" i="0" kern="1200" dirty="0">
-                <a:solidFill>
-                  <a:schemeClr val="tx1"/>
-                </a:solidFill>
-                <a:effectLst/>
-                <a:latin typeface="Kim jung chul Gothic Regular" panose="020B0503000000000000" pitchFamily="50" charset="-127"/>
-                <a:ea typeface="Kim jung chul Gothic Regular" panose="020B0503000000000000" pitchFamily="50" charset="-127"/>
-                <a:cs typeface="+mn-cs"/>
-              </a:rPr>
-              <a:t>0</a:t>
-            </a:r>
-            <a:r>
-              <a:rPr lang="ko-KR" altLang="en-US" sz="1200" b="0" i="0" kern="1200" dirty="0">
-                <a:solidFill>
-                  <a:schemeClr val="tx1"/>
-                </a:solidFill>
-                <a:effectLst/>
-                <a:latin typeface="Kim jung chul Gothic Regular" panose="020B0503000000000000" pitchFamily="50" charset="-127"/>
-                <a:ea typeface="Kim jung chul Gothic Regular" panose="020B0503000000000000" pitchFamily="50" charset="-127"/>
-                <a:cs typeface="+mn-cs"/>
-              </a:rPr>
-              <a:t>에 </a:t>
-            </a:r>
-            <a:r>
-              <a:rPr lang="ko-KR" altLang="en-US" sz="1200" b="0" i="0" kern="1200" dirty="0" err="1">
-                <a:solidFill>
-                  <a:schemeClr val="tx1"/>
-                </a:solidFill>
-                <a:effectLst/>
-                <a:latin typeface="Kim jung chul Gothic Regular" panose="020B0503000000000000" pitchFamily="50" charset="-127"/>
-                <a:ea typeface="Kim jung chul Gothic Regular" panose="020B0503000000000000" pitchFamily="50" charset="-127"/>
-                <a:cs typeface="+mn-cs"/>
-              </a:rPr>
-              <a:t>몰려있으면서</a:t>
-            </a:r>
-            <a:r>
-              <a:rPr lang="en-US" altLang="ko-KR" sz="1200" b="0" i="0" kern="1200" dirty="0">
-                <a:solidFill>
-                  <a:schemeClr val="tx1"/>
-                </a:solidFill>
-                <a:effectLst/>
-                <a:latin typeface="Kim jung chul Gothic Regular" panose="020B0503000000000000" pitchFamily="50" charset="-127"/>
-                <a:ea typeface="Kim jung chul Gothic Regular" panose="020B0503000000000000" pitchFamily="50" charset="-127"/>
-                <a:cs typeface="+mn-cs"/>
-              </a:rPr>
-              <a:t>, 0</a:t>
-            </a:r>
-            <a:r>
-              <a:rPr lang="ko-KR" altLang="en-US" sz="1200" b="0" i="0" kern="1200" dirty="0">
-                <a:solidFill>
-                  <a:schemeClr val="tx1"/>
-                </a:solidFill>
-                <a:effectLst/>
-                <a:latin typeface="Kim jung chul Gothic Regular" panose="020B0503000000000000" pitchFamily="50" charset="-127"/>
-                <a:ea typeface="Kim jung chul Gothic Regular" panose="020B0503000000000000" pitchFamily="50" charset="-127"/>
-                <a:cs typeface="+mn-cs"/>
-              </a:rPr>
-              <a:t>이 아닌 관측치들이 </a:t>
-            </a:r>
-            <a:r>
-              <a:rPr lang="ko-KR" altLang="en-US" sz="1200" b="0" i="0" kern="1200" dirty="0" err="1">
-                <a:solidFill>
-                  <a:schemeClr val="tx1"/>
-                </a:solidFill>
-                <a:effectLst/>
-                <a:latin typeface="Kim jung chul Gothic Regular" panose="020B0503000000000000" pitchFamily="50" charset="-127"/>
-                <a:ea typeface="Kim jung chul Gothic Regular" panose="020B0503000000000000" pitchFamily="50" charset="-127"/>
-                <a:cs typeface="+mn-cs"/>
-              </a:rPr>
-              <a:t>포아송</a:t>
-            </a:r>
-            <a:r>
-              <a:rPr lang="ko-KR" altLang="en-US" sz="1200" b="0" i="0" kern="1200" dirty="0">
-                <a:solidFill>
-                  <a:schemeClr val="tx1"/>
-                </a:solidFill>
-                <a:effectLst/>
-                <a:latin typeface="Kim jung chul Gothic Regular" panose="020B0503000000000000" pitchFamily="50" charset="-127"/>
-                <a:ea typeface="Kim jung chul Gothic Regular" panose="020B0503000000000000" pitchFamily="50" charset="-127"/>
-                <a:cs typeface="+mn-cs"/>
-              </a:rPr>
-              <a:t> 분포를 따르는 케이스</a:t>
-            </a:r>
+              <a:t>.</a:t>
+            </a:r>
+          </a:p>
+          <a:p>
+            <a:r>
+              <a:rPr lang="ko-KR" altLang="en-US" dirty="0"/>
+              <a:t>하지만 분포가 한쪽으로 치우치면</a:t>
+            </a:r>
+            <a:br>
+              <a:rPr lang="ko-KR" altLang="en-US" dirty="0"/>
+            </a:br>
+            <a:r>
+              <a:rPr lang="ko-KR" altLang="en-US" dirty="0"/>
+              <a:t>평균은 실제 데이터의 중심을 왜곡해서 보여줄 수 있다</a:t>
+            </a:r>
+            <a:r>
+              <a:rPr lang="en-US" altLang="ko-KR" dirty="0"/>
+              <a:t>.</a:t>
+            </a:r>
+          </a:p>
+          <a:p>
             <a:endParaRPr lang="ko-KR" altLang="en-US" dirty="0"/>
           </a:p>
         </p:txBody>
@@ -3424,7 +3559,7 @@
     </p:spTree>
     <p:extLst>
       <p:ext uri="{BB962C8B-B14F-4D97-AF65-F5344CB8AC3E}">
-        <p14:creationId xmlns:p14="http://schemas.microsoft.com/office/powerpoint/2010/main" val="4068343339"/>
+        <p14:creationId xmlns:p14="http://schemas.microsoft.com/office/powerpoint/2010/main" val="2984038642"/>
       </p:ext>
     </p:extLst>
   </p:cSld>
@@ -3478,92 +3613,141 @@
           <a:bodyPr/>
           <a:lstStyle/>
           <a:p>
-            <a:r>
-              <a:rPr lang="en-US" altLang="ko-KR" b="1" dirty="0"/>
-              <a:t>(1) </a:t>
-            </a:r>
-            <a:r>
-              <a:rPr lang="ko-KR" altLang="en-US" b="1" dirty="0"/>
-              <a:t>선형 관계</a:t>
-            </a:r>
-          </a:p>
-          <a:p>
-            <a:r>
-              <a:rPr lang="ko-KR" altLang="en-US" dirty="0"/>
-              <a:t>점들이 대각선 방향으로 분포</a:t>
-            </a:r>
-          </a:p>
-          <a:p>
-            <a:r>
-              <a:rPr lang="ko-KR" altLang="en-US" dirty="0"/>
-              <a:t>“관계가 </a:t>
-            </a:r>
-            <a:r>
-              <a:rPr lang="ko-KR" altLang="en-US" dirty="0" err="1"/>
-              <a:t>있다”를</a:t>
-            </a:r>
-            <a:r>
-              <a:rPr lang="ko-KR" altLang="en-US" dirty="0"/>
-              <a:t> 가장 직관적으로 보여줌</a:t>
-            </a:r>
-          </a:p>
-          <a:p>
-            <a:r>
-              <a:rPr lang="en-US" altLang="ko-KR" b="1" dirty="0"/>
-              <a:t>(2) </a:t>
-            </a:r>
-            <a:r>
-              <a:rPr lang="ko-KR" altLang="en-US" b="1" dirty="0"/>
-              <a:t>비선형 관계</a:t>
-            </a:r>
-          </a:p>
-          <a:p>
-            <a:r>
-              <a:rPr lang="ko-KR" altLang="en-US" dirty="0"/>
-              <a:t>곡선 형태</a:t>
+            <a:pPr marL="0" marR="0" lvl="0" indent="0" algn="l" defTabSz="914400" rtl="0" eaLnBrk="1" fontAlgn="auto" latinLnBrk="1" hangingPunct="1">
+              <a:lnSpc>
+                <a:spcPct val="100000"/>
+              </a:lnSpc>
+              <a:spcBef>
+                <a:spcPts val="0"/>
+              </a:spcBef>
+              <a:spcAft>
+                <a:spcPts val="0"/>
+              </a:spcAft>
+              <a:buClrTx/>
+              <a:buSzTx/>
+              <a:buFontTx/>
+              <a:buNone/>
+              <a:tabLst/>
+              <a:defRPr/>
+            </a:pPr>
+            <a:r>
+              <a:rPr lang="en-US" altLang="ko-KR" sz="1200" b="1" i="0" kern="1200" dirty="0">
+                <a:solidFill>
+                  <a:schemeClr val="tx1"/>
+                </a:solidFill>
+                <a:effectLst/>
+                <a:latin typeface="Kim jung chul Gothic Regular" panose="020B0503000000000000" pitchFamily="50" charset="-127"/>
+                <a:ea typeface="Kim jung chul Gothic Regular" panose="020B0503000000000000" pitchFamily="50" charset="-127"/>
+                <a:cs typeface="+mn-cs"/>
+              </a:rPr>
+              <a:t>The Zero Inflated Poisson Regression Model</a:t>
+            </a:r>
+          </a:p>
+          <a:p>
+            <a:r>
+              <a:rPr lang="ko-KR" altLang="en-US" dirty="0"/>
+              <a:t> </a:t>
             </a:r>
             <a:r>
               <a:rPr lang="en-US" altLang="ko-KR" dirty="0"/>
-              <a:t>, U</a:t>
-            </a:r>
-            <a:r>
-              <a:rPr lang="ko-KR" altLang="en-US" dirty="0"/>
-              <a:t>자 형태</a:t>
-            </a:r>
-          </a:p>
-          <a:p>
-            <a:r>
-              <a:rPr lang="ko-KR" altLang="en-US" b="1" dirty="0"/>
-              <a:t>상관계수 하나로 설명 안 되는 관계</a:t>
-            </a:r>
-            <a:r>
-              <a:rPr lang="ko-KR" altLang="en-US" dirty="0"/>
-              <a:t> 강조</a:t>
-            </a:r>
-          </a:p>
-          <a:p>
-            <a:r>
-              <a:rPr lang="en-US" altLang="ko-KR" b="1" dirty="0"/>
-              <a:t>(3) </a:t>
-            </a:r>
-            <a:r>
-              <a:rPr lang="ko-KR" altLang="en-US" b="1" dirty="0"/>
-              <a:t>관계 없음</a:t>
-            </a:r>
-          </a:p>
-          <a:p>
-            <a:r>
-              <a:rPr lang="ko-KR" altLang="en-US" dirty="0"/>
-              <a:t>점이 무작위로 퍼짐</a:t>
-            </a:r>
-          </a:p>
-          <a:p>
-            <a:r>
-              <a:rPr lang="ko-KR" altLang="en-US" dirty="0"/>
-              <a:t>“변수가 있다고 다 쓸모 있지는 않다” 메시지</a:t>
-            </a:r>
-          </a:p>
-          <a:p>
+              <a:t>- </a:t>
+            </a:r>
+            <a:r>
+              <a:rPr lang="ko-KR" altLang="en-US" sz="1200" b="0" i="0" kern="1200" dirty="0">
+                <a:solidFill>
+                  <a:schemeClr val="tx1"/>
+                </a:solidFill>
+                <a:effectLst/>
+                <a:latin typeface="Kim jung chul Gothic Regular" panose="020B0503000000000000" pitchFamily="50" charset="-127"/>
+                <a:ea typeface="Kim jung chul Gothic Regular" panose="020B0503000000000000" pitchFamily="50" charset="-127"/>
+                <a:cs typeface="+mn-cs"/>
+              </a:rPr>
+              <a:t>대부분의 관측치가 </a:t>
+            </a:r>
+            <a:r>
+              <a:rPr lang="en-US" altLang="ko-KR" sz="1200" b="0" i="0" kern="1200" dirty="0">
+                <a:solidFill>
+                  <a:schemeClr val="tx1"/>
+                </a:solidFill>
+                <a:effectLst/>
+                <a:latin typeface="Kim jung chul Gothic Regular" panose="020B0503000000000000" pitchFamily="50" charset="-127"/>
+                <a:ea typeface="Kim jung chul Gothic Regular" panose="020B0503000000000000" pitchFamily="50" charset="-127"/>
+                <a:cs typeface="+mn-cs"/>
+              </a:rPr>
+              <a:t>0</a:t>
+            </a:r>
+            <a:r>
+              <a:rPr lang="ko-KR" altLang="en-US" sz="1200" b="0" i="0" kern="1200" dirty="0">
+                <a:solidFill>
+                  <a:schemeClr val="tx1"/>
+                </a:solidFill>
+                <a:effectLst/>
+                <a:latin typeface="Kim jung chul Gothic Regular" panose="020B0503000000000000" pitchFamily="50" charset="-127"/>
+                <a:ea typeface="Kim jung chul Gothic Regular" panose="020B0503000000000000" pitchFamily="50" charset="-127"/>
+                <a:cs typeface="+mn-cs"/>
+              </a:rPr>
+              <a:t>에 </a:t>
+            </a:r>
+            <a:r>
+              <a:rPr lang="ko-KR" altLang="en-US" sz="1200" b="0" i="0" kern="1200" dirty="0" err="1">
+                <a:solidFill>
+                  <a:schemeClr val="tx1"/>
+                </a:solidFill>
+                <a:effectLst/>
+                <a:latin typeface="Kim jung chul Gothic Regular" panose="020B0503000000000000" pitchFamily="50" charset="-127"/>
+                <a:ea typeface="Kim jung chul Gothic Regular" panose="020B0503000000000000" pitchFamily="50" charset="-127"/>
+                <a:cs typeface="+mn-cs"/>
+              </a:rPr>
+              <a:t>몰려있으면서</a:t>
+            </a:r>
+            <a:r>
+              <a:rPr lang="en-US" altLang="ko-KR" sz="1200" b="0" i="0" kern="1200" dirty="0">
+                <a:solidFill>
+                  <a:schemeClr val="tx1"/>
+                </a:solidFill>
+                <a:effectLst/>
+                <a:latin typeface="Kim jung chul Gothic Regular" panose="020B0503000000000000" pitchFamily="50" charset="-127"/>
+                <a:ea typeface="Kim jung chul Gothic Regular" panose="020B0503000000000000" pitchFamily="50" charset="-127"/>
+                <a:cs typeface="+mn-cs"/>
+              </a:rPr>
+              <a:t>, 0</a:t>
+            </a:r>
+            <a:r>
+              <a:rPr lang="ko-KR" altLang="en-US" sz="1200" b="0" i="0" kern="1200" dirty="0">
+                <a:solidFill>
+                  <a:schemeClr val="tx1"/>
+                </a:solidFill>
+                <a:effectLst/>
+                <a:latin typeface="Kim jung chul Gothic Regular" panose="020B0503000000000000" pitchFamily="50" charset="-127"/>
+                <a:ea typeface="Kim jung chul Gothic Regular" panose="020B0503000000000000" pitchFamily="50" charset="-127"/>
+                <a:cs typeface="+mn-cs"/>
+              </a:rPr>
+              <a:t>이 아닌 관측치들이 </a:t>
+            </a:r>
+            <a:r>
+              <a:rPr lang="ko-KR" altLang="en-US" sz="1200" b="0" i="0" kern="1200" dirty="0" err="1">
+                <a:solidFill>
+                  <a:schemeClr val="tx1"/>
+                </a:solidFill>
+                <a:effectLst/>
+                <a:latin typeface="Kim jung chul Gothic Regular" panose="020B0503000000000000" pitchFamily="50" charset="-127"/>
+                <a:ea typeface="Kim jung chul Gothic Regular" panose="020B0503000000000000" pitchFamily="50" charset="-127"/>
+                <a:cs typeface="+mn-cs"/>
+              </a:rPr>
+              <a:t>포아송</a:t>
+            </a:r>
+            <a:r>
+              <a:rPr lang="ko-KR" altLang="en-US" sz="1200" b="0" i="0" kern="1200" dirty="0">
+                <a:solidFill>
+                  <a:schemeClr val="tx1"/>
+                </a:solidFill>
+                <a:effectLst/>
+                <a:latin typeface="Kim jung chul Gothic Regular" panose="020B0503000000000000" pitchFamily="50" charset="-127"/>
+                <a:ea typeface="Kim jung chul Gothic Regular" panose="020B0503000000000000" pitchFamily="50" charset="-127"/>
+                <a:cs typeface="+mn-cs"/>
+              </a:rPr>
+              <a:t> 분포를 따르는 케이스</a:t>
+            </a:r>
             <a:endParaRPr lang="ko-KR" altLang="en-US" dirty="0"/>
           </a:p>
         </p:txBody>
@@ -3586,7 +3770,7 @@
             <a:fld id="{3E35EA20-6519-4513-9EDC-C89C5369BAEC}" type="slidenum">
               <a:rPr lang="ko-KR" altLang="en-US" smtClean="0"/>
               <a:pPr/>
-              <a:t>16</a:t>
+              <a:t>15</a:t>
             </a:fld>
             <a:endParaRPr lang="ko-KR" altLang="en-US" dirty="0"/>
           </a:p>
@@ -3595,7 +3779,7 @@
     </p:spTree>
     <p:extLst>
       <p:ext uri="{BB962C8B-B14F-4D97-AF65-F5344CB8AC3E}">
-        <p14:creationId xmlns:p14="http://schemas.microsoft.com/office/powerpoint/2010/main" val="3163250832"/>
+        <p14:creationId xmlns:p14="http://schemas.microsoft.com/office/powerpoint/2010/main" val="4068343339"/>
       </p:ext>
     </p:extLst>
   </p:cSld>
@@ -3752,7 +3936,7 @@
           <a:p>
             <a:fld id="{442BEE3F-2E9A-4FD8-8B8A-8619F3E161C0}" type="datetime1">
               <a:rPr lang="ko-KR" altLang="en-US" smtClean="0"/>
-              <a:t>2026-01-15</a:t>
+              <a:t>2026-01-16</a:t>
             </a:fld>
             <a:endParaRPr lang="ko-KR" altLang="en-US"/>
           </a:p>
@@ -4039,7 +4223,7 @@
           <a:p>
             <a:fld id="{0F78D9C4-20C1-4B15-A116-16DC77AD9A1E}" type="datetime1">
               <a:rPr lang="ko-KR" altLang="en-US" smtClean="0"/>
-              <a:t>2026-01-15</a:t>
+              <a:t>2026-01-16</a:t>
             </a:fld>
             <a:endParaRPr lang="ko-KR" altLang="en-US"/>
           </a:p>
@@ -4214,7 +4398,7 @@
           <a:p>
             <a:fld id="{7F5E23C3-0E3D-4E4E-8486-D7FB4C073DC1}" type="datetime1">
               <a:rPr lang="ko-KR" altLang="en-US" smtClean="0"/>
-              <a:t>2026-01-15</a:t>
+              <a:t>2026-01-16</a:t>
             </a:fld>
             <a:endParaRPr lang="ko-KR" altLang="en-US"/>
           </a:p>
@@ -4370,7 +4554,7 @@
           <a:p>
             <a:fld id="{7F5E23C3-0E3D-4E4E-8486-D7FB4C073DC1}" type="datetime1">
               <a:rPr lang="ko-KR" altLang="en-US" smtClean="0"/>
-              <a:t>2026-01-15</a:t>
+              <a:t>2026-01-16</a:t>
             </a:fld>
             <a:endParaRPr lang="ko-KR" altLang="en-US"/>
           </a:p>
@@ -4699,7 +4883,7 @@
           <a:p>
             <a:fld id="{7F5E23C3-0E3D-4E4E-8486-D7FB4C073DC1}" type="datetime1">
               <a:rPr lang="ko-KR" altLang="en-US" smtClean="0"/>
-              <a:t>2026-01-15</a:t>
+              <a:t>2026-01-16</a:t>
             </a:fld>
             <a:endParaRPr lang="ko-KR" altLang="en-US"/>
           </a:p>
@@ -5598,6 +5782,554 @@
   <p:cSld>
     <p:spTree>
       <p:nvGrpSpPr>
+        <p:cNvPr id="1" name="">
+          <a:extLst>
+            <a:ext uri="{FF2B5EF4-FFF2-40B4-BE49-F238E27FC236}">
+              <a16:creationId xmlns:a16="http://schemas.microsoft.com/office/drawing/2014/main" id="{0E884210-0FCF-0519-0199-6DE16CB0CE6A}"/>
+            </a:ext>
+          </a:extLst>
+        </p:cNvPr>
+        <p:cNvGrpSpPr/>
+        <p:nvPr/>
+      </p:nvGrpSpPr>
+      <p:grpSpPr>
+        <a:xfrm>
+          <a:off x="0" y="0"/>
+          <a:ext cx="0" cy="0"/>
+          <a:chOff x="0" y="0"/>
+          <a:chExt cx="0" cy="0"/>
+        </a:xfrm>
+      </p:grpSpPr>
+      <p:sp>
+        <p:nvSpPr>
+          <p:cNvPr id="4" name="날짜 개체 틀 3">
+            <a:extLst>
+              <a:ext uri="{FF2B5EF4-FFF2-40B4-BE49-F238E27FC236}">
+                <a16:creationId xmlns:a16="http://schemas.microsoft.com/office/drawing/2014/main" id="{09220B9B-DFC5-B524-3769-282738713703}"/>
+              </a:ext>
+            </a:extLst>
+          </p:cNvPr>
+          <p:cNvSpPr>
+            <a:spLocks noGrp="1"/>
+          </p:cNvSpPr>
+          <p:nvPr>
+            <p:ph type="dt" sz="half" idx="10"/>
+          </p:nvPr>
+        </p:nvSpPr>
+        <p:spPr/>
+        <p:txBody>
+          <a:bodyPr/>
+          <a:lstStyle/>
+          <a:p>
+            <a:fld id="{0F78D9C4-20C1-4B15-A116-16DC77AD9A1E}" type="datetime1">
+              <a:rPr lang="ko-KR" altLang="en-US" smtClean="0"/>
+              <a:t>2026-01-16</a:t>
+            </a:fld>
+            <a:endParaRPr lang="ko-KR" altLang="en-US"/>
+          </a:p>
+        </p:txBody>
+      </p:sp>
+      <p:sp>
+        <p:nvSpPr>
+          <p:cNvPr id="5" name="슬라이드 번호 개체 틀 4">
+            <a:extLst>
+              <a:ext uri="{FF2B5EF4-FFF2-40B4-BE49-F238E27FC236}">
+                <a16:creationId xmlns:a16="http://schemas.microsoft.com/office/drawing/2014/main" id="{9F101E53-997C-C720-1947-13151A1087E1}"/>
+              </a:ext>
+            </a:extLst>
+          </p:cNvPr>
+          <p:cNvSpPr>
+            <a:spLocks noGrp="1"/>
+          </p:cNvSpPr>
+          <p:nvPr>
+            <p:ph type="sldNum" sz="quarter" idx="12"/>
+          </p:nvPr>
+        </p:nvSpPr>
+        <p:spPr/>
+        <p:txBody>
+          <a:bodyPr/>
+          <a:lstStyle/>
+          <a:p>
+            <a:fld id="{083A2CE0-18CD-4102-B738-4ACFF9E68BA4}" type="slidenum">
+              <a:rPr lang="ko-KR" altLang="en-US" smtClean="0"/>
+              <a:t>10</a:t>
+            </a:fld>
+            <a:endParaRPr lang="ko-KR" altLang="en-US"/>
+          </a:p>
+        </p:txBody>
+      </p:sp>
+      <p:sp>
+        <p:nvSpPr>
+          <p:cNvPr id="8" name="TextBox 7">
+            <a:extLst>
+              <a:ext uri="{FF2B5EF4-FFF2-40B4-BE49-F238E27FC236}">
+                <a16:creationId xmlns:a16="http://schemas.microsoft.com/office/drawing/2014/main" id="{021EC865-3F10-1A8E-16ED-07FE1B5F3054}"/>
+              </a:ext>
+            </a:extLst>
+          </p:cNvPr>
+          <p:cNvSpPr txBox="1"/>
+          <p:nvPr/>
+        </p:nvSpPr>
+        <p:spPr>
+          <a:xfrm>
+            <a:off x="200677" y="110919"/>
+            <a:ext cx="6444393" cy="830997"/>
+          </a:xfrm>
+          <a:prstGeom prst="rect">
+            <a:avLst/>
+          </a:prstGeom>
+          <a:noFill/>
+        </p:spPr>
+        <p:txBody>
+          <a:bodyPr wrap="none" rtlCol="0">
+            <a:spAutoFit/>
+          </a:bodyPr>
+          <a:lstStyle/>
+          <a:p>
+            <a:r>
+              <a:rPr lang="ko-KR" altLang="en-US" sz="4800" b="1" dirty="0">
+                <a:solidFill>
+                  <a:srgbClr val="2A2A2A"/>
+                </a:solidFill>
+                <a:latin typeface="+mj-ea"/>
+                <a:ea typeface="+mj-ea"/>
+                <a:cs typeface="Pretendard Black" panose="02000A03000000020004" pitchFamily="2" charset="-127"/>
+              </a:rPr>
+              <a:t>기본 이진화 </a:t>
+            </a:r>
+            <a:r>
+              <a:rPr lang="en-US" altLang="ko-KR" sz="4800" b="1" dirty="0">
+                <a:solidFill>
+                  <a:srgbClr val="2A2A2A"/>
+                </a:solidFill>
+                <a:latin typeface="+mj-ea"/>
+                <a:ea typeface="+mj-ea"/>
+                <a:cs typeface="Pretendard Black" panose="02000A03000000020004" pitchFamily="2" charset="-127"/>
+              </a:rPr>
+              <a:t>- threshold</a:t>
+            </a:r>
+            <a:endParaRPr lang="ko-KR" altLang="en-US" sz="4800" b="1" dirty="0">
+              <a:solidFill>
+                <a:srgbClr val="2A2A2A"/>
+              </a:solidFill>
+              <a:latin typeface="+mj-ea"/>
+              <a:ea typeface="+mj-ea"/>
+              <a:cs typeface="Pretendard Black" panose="02000A03000000020004" pitchFamily="2" charset="-127"/>
+            </a:endParaRPr>
+          </a:p>
+        </p:txBody>
+      </p:sp>
+      <p:sp>
+        <p:nvSpPr>
+          <p:cNvPr id="9" name="내용 개체 틀 2">
+            <a:extLst>
+              <a:ext uri="{FF2B5EF4-FFF2-40B4-BE49-F238E27FC236}">
+                <a16:creationId xmlns:a16="http://schemas.microsoft.com/office/drawing/2014/main" id="{0D41BE3B-4289-8B93-2AF2-10704289D27B}"/>
+              </a:ext>
+            </a:extLst>
+          </p:cNvPr>
+          <p:cNvSpPr>
+            <a:spLocks noGrp="1"/>
+          </p:cNvSpPr>
+          <p:nvPr>
+            <p:ph idx="1"/>
+          </p:nvPr>
+        </p:nvSpPr>
+        <p:spPr>
+          <a:xfrm>
+            <a:off x="200677" y="1034249"/>
+            <a:ext cx="11296650" cy="5061751"/>
+          </a:xfrm>
+        </p:spPr>
+        <p:txBody>
+          <a:bodyPr>
+            <a:noAutofit/>
+          </a:bodyPr>
+          <a:lstStyle/>
+          <a:p>
+            <a:pPr marL="0" indent="0">
+              <a:lnSpc>
+                <a:spcPct val="150000"/>
+              </a:lnSpc>
+              <a:buNone/>
+            </a:pPr>
+            <a:r>
+              <a:rPr lang="ko-KR" altLang="en-US" sz="2400" b="1" dirty="0">
+                <a:latin typeface="+mn-ea"/>
+              </a:rPr>
+              <a:t>💡 </a:t>
+            </a:r>
+            <a:r>
+              <a:rPr lang="en-US" altLang="ko-KR" sz="2400" b="1" dirty="0">
+                <a:latin typeface="+mn-ea"/>
+              </a:rPr>
+              <a:t>Threshold : </a:t>
+            </a:r>
+            <a:r>
+              <a:rPr lang="ko-KR" altLang="en-US" sz="2400" b="1" dirty="0" err="1">
+                <a:latin typeface="+mn-ea"/>
+              </a:rPr>
+              <a:t>임계값</a:t>
+            </a:r>
+            <a:r>
+              <a:rPr lang="en-US" altLang="ko-KR" sz="2400" b="1" dirty="0">
+                <a:latin typeface="+mn-ea"/>
+              </a:rPr>
+              <a:t>, </a:t>
+            </a:r>
+            <a:r>
+              <a:rPr lang="ko-KR" altLang="en-US" sz="2400" b="1" dirty="0" err="1">
+                <a:latin typeface="+mn-ea"/>
+              </a:rPr>
+              <a:t>문턱값</a:t>
+            </a:r>
+            <a:endParaRPr lang="en-US" altLang="ko-KR" sz="2400" b="1" dirty="0">
+              <a:latin typeface="+mn-ea"/>
+            </a:endParaRPr>
+          </a:p>
+          <a:p>
+            <a:pPr lvl="1">
+              <a:lnSpc>
+                <a:spcPct val="150000"/>
+              </a:lnSpc>
+              <a:buFont typeface="Wingdings" panose="05000000000000000000" pitchFamily="2" charset="2"/>
+              <a:buChar char="§"/>
+            </a:pPr>
+            <a:r>
+              <a:rPr lang="ko-KR" altLang="en-US" sz="2000" dirty="0"/>
+              <a:t>이진화는 </a:t>
+            </a:r>
+            <a:r>
+              <a:rPr lang="en-US" altLang="ko-KR" sz="2000" dirty="0"/>
+              <a:t>threshold(</a:t>
+            </a:r>
+            <a:r>
+              <a:rPr lang="ko-KR" altLang="en-US" sz="2000" dirty="0" err="1"/>
+              <a:t>임계값</a:t>
+            </a:r>
+            <a:r>
+              <a:rPr lang="en-US" altLang="ko-KR" sz="2000" dirty="0"/>
+              <a:t>)</a:t>
+            </a:r>
+            <a:r>
+              <a:rPr lang="ko-KR" altLang="en-US" sz="2000" dirty="0"/>
+              <a:t>을 기준으로 픽셀 값을 변환하는 과정</a:t>
+            </a:r>
+            <a:endParaRPr lang="en-US" altLang="ko-KR" sz="2000" dirty="0"/>
+          </a:p>
+          <a:p>
+            <a:pPr lvl="1">
+              <a:lnSpc>
+                <a:spcPct val="150000"/>
+              </a:lnSpc>
+              <a:buFont typeface="Wingdings" panose="05000000000000000000" pitchFamily="2" charset="2"/>
+              <a:buChar char="§"/>
+            </a:pPr>
+            <a:r>
+              <a:rPr lang="ko-KR" altLang="en-US" sz="2000" dirty="0">
+                <a:latin typeface="+mn-ea"/>
+              </a:rPr>
+              <a:t>밝기 값을 기준으로 픽셀 값을 변환</a:t>
+            </a:r>
+            <a:endParaRPr lang="en-US" altLang="ko-KR" sz="2000" dirty="0">
+              <a:latin typeface="+mn-ea"/>
+            </a:endParaRPr>
+          </a:p>
+          <a:p>
+            <a:pPr marL="0" indent="0">
+              <a:lnSpc>
+                <a:spcPct val="150000"/>
+              </a:lnSpc>
+              <a:buNone/>
+            </a:pPr>
+            <a:r>
+              <a:rPr lang="ko-KR" altLang="en-US" sz="2400" b="1" dirty="0">
+                <a:latin typeface="+mn-ea"/>
+              </a:rPr>
+              <a:t>💡</a:t>
+            </a:r>
+            <a:r>
+              <a:rPr lang="ko-KR" altLang="en-US" sz="2400" b="1" dirty="0" err="1"/>
+              <a:t>임계값의</a:t>
+            </a:r>
+            <a:r>
+              <a:rPr lang="ko-KR" altLang="en-US" sz="2400" b="1" dirty="0"/>
+              <a:t> 데이터 분석적 의미</a:t>
+            </a:r>
+            <a:endParaRPr lang="en-US" altLang="ko-KR" sz="2400" b="1" dirty="0"/>
+          </a:p>
+          <a:p>
+            <a:pPr lvl="1">
+              <a:lnSpc>
+                <a:spcPct val="150000"/>
+              </a:lnSpc>
+            </a:pPr>
+            <a:r>
+              <a:rPr lang="ko-KR" altLang="en-US" sz="2000" dirty="0"/>
+              <a:t>데이터 분석에서는 특정 </a:t>
+            </a:r>
+            <a:r>
+              <a:rPr lang="ko-KR" altLang="en-US" sz="2000" dirty="0" err="1"/>
+              <a:t>기준값</a:t>
+            </a:r>
+            <a:r>
+              <a:rPr lang="en-US" altLang="ko-KR" sz="2000" dirty="0"/>
+              <a:t>(threshold)</a:t>
+            </a:r>
+            <a:r>
+              <a:rPr lang="ko-KR" altLang="en-US" sz="2000" dirty="0"/>
+              <a:t>을 기준으로 데이터를 정상 </a:t>
+            </a:r>
+            <a:r>
+              <a:rPr lang="en-US" altLang="ko-KR" sz="2000" dirty="0"/>
+              <a:t>/ </a:t>
+            </a:r>
+            <a:r>
+              <a:rPr lang="ko-KR" altLang="en-US" sz="2000" dirty="0"/>
+              <a:t>비정상으로 구분</a:t>
+            </a:r>
+            <a:endParaRPr lang="en-US" altLang="ko-KR" sz="2000" dirty="0"/>
+          </a:p>
+          <a:p>
+            <a:pPr lvl="1">
+              <a:lnSpc>
+                <a:spcPct val="150000"/>
+              </a:lnSpc>
+            </a:pPr>
+            <a:r>
+              <a:rPr lang="ko-KR" altLang="en-US" sz="2000" dirty="0"/>
+              <a:t>재생에너지 데이터에서는 물리적으로 불가능한 발전량이나</a:t>
+            </a:r>
+            <a:r>
+              <a:rPr lang="en-US" altLang="ko-KR" sz="2000" dirty="0"/>
+              <a:t>, </a:t>
+            </a:r>
+            <a:r>
+              <a:rPr lang="ko-KR" altLang="en-US" sz="2000" dirty="0"/>
+              <a:t>비정상적인 급락 구간을 탐지하는데 활용</a:t>
+            </a:r>
+            <a:endParaRPr lang="en-US" altLang="ko-KR" sz="2000" dirty="0"/>
+          </a:p>
+        </p:txBody>
+      </p:sp>
+    </p:spTree>
+    <p:extLst>
+      <p:ext uri="{BB962C8B-B14F-4D97-AF65-F5344CB8AC3E}">
+        <p14:creationId xmlns:p14="http://schemas.microsoft.com/office/powerpoint/2010/main" val="3080129794"/>
+      </p:ext>
+    </p:extLst>
+  </p:cSld>
+  <p:clrMapOvr>
+    <a:masterClrMapping/>
+  </p:clrMapOvr>
+</p:sld>
+</file>
+
+<file path=ppt/slides/slide11.xml><?xml version="1.0" encoding="utf-8"?>
+<p:sld xmlns:a="http://schemas.openxmlformats.org/drawingml/2006/main" xmlns:r="http://schemas.openxmlformats.org/officeDocument/2006/relationships" xmlns:p="http://schemas.openxmlformats.org/presentationml/2006/main">
+  <p:cSld>
+    <p:spTree>
+      <p:nvGrpSpPr>
+        <p:cNvPr id="1" name="">
+          <a:extLst>
+            <a:ext uri="{FF2B5EF4-FFF2-40B4-BE49-F238E27FC236}">
+              <a16:creationId xmlns:a16="http://schemas.microsoft.com/office/drawing/2014/main" id="{97C8F1E0-B7D3-5221-B8DD-FDD3B1ED4862}"/>
+            </a:ext>
+          </a:extLst>
+        </p:cNvPr>
+        <p:cNvGrpSpPr/>
+        <p:nvPr/>
+      </p:nvGrpSpPr>
+      <p:grpSpPr>
+        <a:xfrm>
+          <a:off x="0" y="0"/>
+          <a:ext cx="0" cy="0"/>
+          <a:chOff x="0" y="0"/>
+          <a:chExt cx="0" cy="0"/>
+        </a:xfrm>
+      </p:grpSpPr>
+      <p:sp>
+        <p:nvSpPr>
+          <p:cNvPr id="8" name="TextBox 7">
+            <a:extLst>
+              <a:ext uri="{FF2B5EF4-FFF2-40B4-BE49-F238E27FC236}">
+                <a16:creationId xmlns:a16="http://schemas.microsoft.com/office/drawing/2014/main" id="{8B07DD60-9A4E-53BC-62D1-8023010479A5}"/>
+              </a:ext>
+            </a:extLst>
+          </p:cNvPr>
+          <p:cNvSpPr txBox="1"/>
+          <p:nvPr/>
+        </p:nvSpPr>
+        <p:spPr>
+          <a:xfrm>
+            <a:off x="251788" y="1"/>
+            <a:ext cx="10515600" cy="1145406"/>
+          </a:xfrm>
+          <a:prstGeom prst="rect">
+            <a:avLst/>
+          </a:prstGeom>
+        </p:spPr>
+        <p:txBody>
+          <a:bodyPr vert="horz" lIns="91440" tIns="45720" rIns="91440" bIns="45720" rtlCol="0" anchor="ctr">
+            <a:normAutofit/>
+          </a:bodyPr>
+          <a:lstStyle/>
+          <a:p>
+            <a:pPr>
+              <a:lnSpc>
+                <a:spcPct val="90000"/>
+              </a:lnSpc>
+              <a:spcBef>
+                <a:spcPct val="0"/>
+              </a:spcBef>
+              <a:spcAft>
+                <a:spcPts val="600"/>
+              </a:spcAft>
+            </a:pPr>
+            <a:r>
+              <a:rPr lang="ko-KR" altLang="en-US" sz="4800" b="1" kern="1200" dirty="0">
+                <a:latin typeface="Pretendard Black" panose="02000A03000000020004" pitchFamily="2" charset="-127"/>
+                <a:ea typeface="Pretendard Black" panose="02000A03000000020004" pitchFamily="2" charset="-127"/>
+                <a:cs typeface="Pretendard Black" panose="02000A03000000020004" pitchFamily="2" charset="-127"/>
+              </a:rPr>
+              <a:t>이상치 예시</a:t>
+            </a:r>
+          </a:p>
+        </p:txBody>
+      </p:sp>
+      <p:pic>
+        <p:nvPicPr>
+          <p:cNvPr id="6" name="그림 5" descr="텍스트, 라인, 도표, 그래프이(가) 표시된 사진&#10;&#10;AI 생성 콘텐츠는 정확하지 않을 수 있습니다.">
+            <a:extLst>
+              <a:ext uri="{FF2B5EF4-FFF2-40B4-BE49-F238E27FC236}">
+                <a16:creationId xmlns:a16="http://schemas.microsoft.com/office/drawing/2014/main" id="{D76F7489-54D4-8017-44A2-50F77CD8A7E7}"/>
+              </a:ext>
+            </a:extLst>
+          </p:cNvPr>
+          <p:cNvPicPr>
+            <a:picLocks noChangeAspect="1"/>
+          </p:cNvPicPr>
+          <p:nvPr/>
+        </p:nvPicPr>
+        <p:blipFill>
+          <a:blip r:embed="rId3">
+            <a:extLst>
+              <a:ext uri="{28A0092B-C50C-407E-A947-70E740481C1C}">
+                <a14:useLocalDpi xmlns:a14="http://schemas.microsoft.com/office/drawing/2010/main" val="0"/>
+              </a:ext>
+            </a:extLst>
+          </a:blip>
+          <a:stretch>
+            <a:fillRect/>
+          </a:stretch>
+        </p:blipFill>
+        <p:spPr>
+          <a:xfrm>
+            <a:off x="251787" y="1898736"/>
+            <a:ext cx="11701221" cy="3890656"/>
+          </a:xfrm>
+          <a:prstGeom prst="rect">
+            <a:avLst/>
+          </a:prstGeom>
+          <a:noFill/>
+        </p:spPr>
+      </p:pic>
+      <p:sp>
+        <p:nvSpPr>
+          <p:cNvPr id="4" name="날짜 개체 틀 3" hidden="1">
+            <a:extLst>
+              <a:ext uri="{FF2B5EF4-FFF2-40B4-BE49-F238E27FC236}">
+                <a16:creationId xmlns:a16="http://schemas.microsoft.com/office/drawing/2014/main" id="{84E4BCD8-0177-D30B-8FE1-BD63386BECFF}"/>
+              </a:ext>
+            </a:extLst>
+          </p:cNvPr>
+          <p:cNvSpPr>
+            <a:spLocks noGrp="1"/>
+          </p:cNvSpPr>
+          <p:nvPr>
+            <p:ph type="dt" sz="half" idx="10"/>
+          </p:nvPr>
+        </p:nvSpPr>
+        <p:spPr/>
+        <p:txBody>
+          <a:bodyPr/>
+          <a:lstStyle/>
+          <a:p>
+            <a:pPr>
+              <a:spcAft>
+                <a:spcPts val="600"/>
+              </a:spcAft>
+            </a:pPr>
+            <a:fld id="{0F78D9C4-20C1-4B15-A116-16DC77AD9A1E}" type="datetime1">
+              <a:rPr lang="ko-KR" altLang="en-US" smtClean="0"/>
+              <a:pPr>
+                <a:spcAft>
+                  <a:spcPts val="600"/>
+                </a:spcAft>
+              </a:pPr>
+              <a:t>2026-01-16</a:t>
+            </a:fld>
+            <a:endParaRPr lang="ko-KR" altLang="en-US"/>
+          </a:p>
+        </p:txBody>
+      </p:sp>
+      <p:sp>
+        <p:nvSpPr>
+          <p:cNvPr id="5" name="슬라이드 번호 개체 틀 4" hidden="1">
+            <a:extLst>
+              <a:ext uri="{FF2B5EF4-FFF2-40B4-BE49-F238E27FC236}">
+                <a16:creationId xmlns:a16="http://schemas.microsoft.com/office/drawing/2014/main" id="{AA92F40E-623D-ED53-C385-B85A3FAA4C6E}"/>
+              </a:ext>
+            </a:extLst>
+          </p:cNvPr>
+          <p:cNvSpPr>
+            <a:spLocks noGrp="1"/>
+          </p:cNvSpPr>
+          <p:nvPr>
+            <p:ph type="sldNum" sz="quarter" idx="12"/>
+          </p:nvPr>
+        </p:nvSpPr>
+        <p:spPr/>
+        <p:txBody>
+          <a:bodyPr/>
+          <a:lstStyle/>
+          <a:p>
+            <a:pPr>
+              <a:spcAft>
+                <a:spcPts val="600"/>
+              </a:spcAft>
+            </a:pPr>
+            <a:fld id="{083A2CE0-18CD-4102-B738-4ACFF9E68BA4}" type="slidenum">
+              <a:rPr lang="ko-KR" altLang="en-US" smtClean="0"/>
+              <a:pPr>
+                <a:spcAft>
+                  <a:spcPts val="600"/>
+                </a:spcAft>
+              </a:pPr>
+              <a:t>11</a:t>
+            </a:fld>
+            <a:endParaRPr lang="ko-KR" altLang="en-US"/>
+          </a:p>
+        </p:txBody>
+      </p:sp>
+    </p:spTree>
+    <p:extLst>
+      <p:ext uri="{BB962C8B-B14F-4D97-AF65-F5344CB8AC3E}">
+        <p14:creationId xmlns:p14="http://schemas.microsoft.com/office/powerpoint/2010/main" val="1870566624"/>
+      </p:ext>
+    </p:extLst>
+  </p:cSld>
+  <p:clrMapOvr>
+    <a:masterClrMapping/>
+  </p:clrMapOvr>
+</p:sld>
+</file>
+
+<file path=ppt/slides/slide12.xml><?xml version="1.0" encoding="utf-8"?>
+<p:sld xmlns:a="http://schemas.openxmlformats.org/drawingml/2006/main" xmlns:r="http://schemas.openxmlformats.org/officeDocument/2006/relationships" xmlns:p="http://schemas.openxmlformats.org/presentationml/2006/main">
+  <p:cSld>
+    <p:spTree>
+      <p:nvGrpSpPr>
         <p:cNvPr id="1" name=""/>
         <p:cNvGrpSpPr/>
         <p:nvPr/>
@@ -5651,7 +6383,7 @@
 </p:sld>
 </file>
 
-<file path=ppt/slides/slide11.xml><?xml version="1.0" encoding="utf-8"?>
+<file path=ppt/slides/slide13.xml><?xml version="1.0" encoding="utf-8"?>
 <p:sld xmlns:a="http://schemas.openxmlformats.org/drawingml/2006/main" xmlns:r="http://schemas.openxmlformats.org/officeDocument/2006/relationships" xmlns:p="http://schemas.openxmlformats.org/presentationml/2006/main">
   <p:cSld>
     <p:spTree>
@@ -5835,7 +6567,7 @@
 </p:sld>
 </file>
 
-<file path=ppt/slides/slide12.xml><?xml version="1.0" encoding="utf-8"?>
+<file path=ppt/slides/slide14.xml><?xml version="1.0" encoding="utf-8"?>
 <p:sld xmlns:a="http://schemas.openxmlformats.org/drawingml/2006/main" xmlns:r="http://schemas.openxmlformats.org/officeDocument/2006/relationships" xmlns:p="http://schemas.openxmlformats.org/presentationml/2006/main">
   <p:cSld>
     <p:spTree>
@@ -5967,7 +6699,7 @@
 </p:sld>
 </file>
 
-<file path=ppt/slides/slide13.xml><?xml version="1.0" encoding="utf-8"?>
+<file path=ppt/slides/slide15.xml><?xml version="1.0" encoding="utf-8"?>
 <p:sld xmlns:a="http://schemas.openxmlformats.org/drawingml/2006/main" xmlns:r="http://schemas.openxmlformats.org/officeDocument/2006/relationships" xmlns:p="http://schemas.openxmlformats.org/presentationml/2006/main">
   <p:cSld>
     <p:spTree>
@@ -6127,7 +6859,7 @@
 </p:sld>
 </file>
 
-<file path=ppt/slides/slide14.xml><?xml version="1.0" encoding="utf-8"?>
+<file path=ppt/slides/slide16.xml><?xml version="1.0" encoding="utf-8"?>
 <p:sld xmlns:a="http://schemas.openxmlformats.org/drawingml/2006/main" xmlns:r="http://schemas.openxmlformats.org/officeDocument/2006/relationships" xmlns:p="http://schemas.openxmlformats.org/presentationml/2006/main">
   <p:cSld>
     <p:spTree>
@@ -6271,7 +7003,7 @@
 </p:sld>
 </file>
 
-<file path=ppt/slides/slide15.xml><?xml version="1.0" encoding="utf-8"?>
+<file path=ppt/slides/slide17.xml><?xml version="1.0" encoding="utf-8"?>
 <p:sld xmlns:a="http://schemas.openxmlformats.org/drawingml/2006/main" xmlns:r="http://schemas.openxmlformats.org/officeDocument/2006/relationships" xmlns:p="http://schemas.openxmlformats.org/presentationml/2006/main">
   <p:cSld>
     <p:spTree>
@@ -6329,7 +7061,7 @@
 </p:sld>
 </file>
 
-<file path=ppt/slides/slide16.xml><?xml version="1.0" encoding="utf-8"?>
+<file path=ppt/slides/slide18.xml><?xml version="1.0" encoding="utf-8"?>
 <p:sld xmlns:a="http://schemas.openxmlformats.org/drawingml/2006/main" xmlns:r="http://schemas.openxmlformats.org/officeDocument/2006/relationships" xmlns:p="http://schemas.openxmlformats.org/presentationml/2006/main">
   <p:cSld>
     <p:spTree>
@@ -6485,7 +7217,7 @@
 </p:sld>
 </file>
 
-<file path=ppt/slides/slide17.xml><?xml version="1.0" encoding="utf-8"?>
+<file path=ppt/slides/slide19.xml><?xml version="1.0" encoding="utf-8"?>
 <p:sld xmlns:a="http://schemas.openxmlformats.org/drawingml/2006/main" xmlns:r="http://schemas.openxmlformats.org/officeDocument/2006/relationships" xmlns:p="http://schemas.openxmlformats.org/presentationml/2006/main">
   <p:cSld>
     <p:spTree>
@@ -6654,7 +7386,66 @@
 </p:sld>
 </file>
 
-<file path=ppt/slides/slide18.xml><?xml version="1.0" encoding="utf-8"?>
+<file path=ppt/slides/slide2.xml><?xml version="1.0" encoding="utf-8"?>
+<p:sld xmlns:a="http://schemas.openxmlformats.org/drawingml/2006/main" xmlns:r="http://schemas.openxmlformats.org/officeDocument/2006/relationships" xmlns:p="http://schemas.openxmlformats.org/presentationml/2006/main">
+  <p:cSld>
+    <p:spTree>
+      <p:nvGrpSpPr>
+        <p:cNvPr id="1" name=""/>
+        <p:cNvGrpSpPr/>
+        <p:nvPr/>
+      </p:nvGrpSpPr>
+      <p:grpSpPr>
+        <a:xfrm>
+          <a:off x="0" y="0"/>
+          <a:ext cx="0" cy="0"/>
+          <a:chOff x="0" y="0"/>
+          <a:chExt cx="0" cy="0"/>
+        </a:xfrm>
+      </p:grpSpPr>
+      <p:sp>
+        <p:nvSpPr>
+          <p:cNvPr id="2" name="제목 1">
+            <a:extLst>
+              <a:ext uri="{FF2B5EF4-FFF2-40B4-BE49-F238E27FC236}">
+                <a16:creationId xmlns:a16="http://schemas.microsoft.com/office/drawing/2014/main" id="{5214AFDD-E47C-7EA7-1E12-94BA9E217613}"/>
+              </a:ext>
+            </a:extLst>
+          </p:cNvPr>
+          <p:cNvSpPr>
+            <a:spLocks noGrp="1"/>
+          </p:cNvSpPr>
+          <p:nvPr>
+            <p:ph type="title"/>
+          </p:nvPr>
+        </p:nvSpPr>
+        <p:spPr/>
+        <p:txBody>
+          <a:bodyPr/>
+          <a:lstStyle/>
+          <a:p>
+            <a:r>
+              <a:rPr lang="en-US" altLang="ko-KR" dirty="0"/>
+              <a:t>EDA</a:t>
+            </a:r>
+            <a:endParaRPr lang="ko-KR" altLang="en-US" dirty="0"/>
+          </a:p>
+        </p:txBody>
+      </p:sp>
+    </p:spTree>
+    <p:extLst>
+      <p:ext uri="{BB962C8B-B14F-4D97-AF65-F5344CB8AC3E}">
+        <p14:creationId xmlns:p14="http://schemas.microsoft.com/office/powerpoint/2010/main" val="3201905419"/>
+      </p:ext>
+    </p:extLst>
+  </p:cSld>
+  <p:clrMapOvr>
+    <a:masterClrMapping/>
+  </p:clrMapOvr>
+</p:sld>
+</file>
+
+<file path=ppt/slides/slide20.xml><?xml version="1.0" encoding="utf-8"?>
 <p:sld xmlns:a="http://schemas.openxmlformats.org/drawingml/2006/main" xmlns:r="http://schemas.openxmlformats.org/officeDocument/2006/relationships" xmlns:p="http://schemas.openxmlformats.org/presentationml/2006/main">
   <p:cSld>
     <p:spTree>
@@ -6738,15 +7529,6 @@
           <a:solidFill>
             <a:srgbClr val="FFFFFF"/>
           </a:solidFill>
-          <a:extLst>
-            <a:ext uri="{909E8E84-426E-40DD-AFC4-6F175D3DCCD1}">
-              <a14:hiddenFill xmlns:a14="http://schemas.microsoft.com/office/drawing/2010/main">
-                <a:solidFill>
-                  <a:srgbClr val="FFFFFF"/>
-                </a:solidFill>
-              </a14:hiddenFill>
-            </a:ext>
-          </a:extLst>
         </p:spPr>
       </p:pic>
     </p:spTree>
@@ -6762,7 +7544,592 @@
 </p:sld>
 </file>
 
-<file path=ppt/slides/slide19.xml><?xml version="1.0" encoding="utf-8"?>
+<file path=ppt/slides/slide21.xml><?xml version="1.0" encoding="utf-8"?>
+<p:sld xmlns:a="http://schemas.openxmlformats.org/drawingml/2006/main" xmlns:r="http://schemas.openxmlformats.org/officeDocument/2006/relationships" xmlns:p="http://schemas.openxmlformats.org/presentationml/2006/main">
+  <p:cSld>
+    <p:spTree>
+      <p:nvGrpSpPr>
+        <p:cNvPr id="1" name=""/>
+        <p:cNvGrpSpPr/>
+        <p:nvPr/>
+      </p:nvGrpSpPr>
+      <p:grpSpPr>
+        <a:xfrm>
+          <a:off x="0" y="0"/>
+          <a:ext cx="0" cy="0"/>
+          <a:chOff x="0" y="0"/>
+          <a:chExt cx="0" cy="0"/>
+        </a:xfrm>
+      </p:grpSpPr>
+      <p:sp>
+        <p:nvSpPr>
+          <p:cNvPr id="2" name="제목 1">
+            <a:extLst>
+              <a:ext uri="{FF2B5EF4-FFF2-40B4-BE49-F238E27FC236}">
+                <a16:creationId xmlns:a16="http://schemas.microsoft.com/office/drawing/2014/main" id="{98F1390B-072B-A3DB-90FD-09D49252D393}"/>
+              </a:ext>
+            </a:extLst>
+          </p:cNvPr>
+          <p:cNvSpPr>
+            <a:spLocks noGrp="1"/>
+          </p:cNvSpPr>
+          <p:nvPr>
+            <p:ph type="title"/>
+          </p:nvPr>
+        </p:nvSpPr>
+        <p:spPr/>
+        <p:txBody>
+          <a:bodyPr/>
+          <a:lstStyle/>
+          <a:p>
+            <a:r>
+              <a:rPr lang="en-US" altLang="ko-KR" dirty="0"/>
+              <a:t>EDA </a:t>
+            </a:r>
+            <a:r>
+              <a:rPr lang="ko-KR" altLang="en-US" dirty="0"/>
+              <a:t>결과 요약 </a:t>
+            </a:r>
+            <a:r>
+              <a:rPr lang="en-US" altLang="ko-KR" dirty="0"/>
+              <a:t>&amp; </a:t>
+            </a:r>
+            <a:r>
+              <a:rPr lang="ko-KR" altLang="en-US" dirty="0"/>
+              <a:t>판단</a:t>
+            </a:r>
+          </a:p>
+        </p:txBody>
+      </p:sp>
+    </p:spTree>
+    <p:extLst>
+      <p:ext uri="{BB962C8B-B14F-4D97-AF65-F5344CB8AC3E}">
+        <p14:creationId xmlns:p14="http://schemas.microsoft.com/office/powerpoint/2010/main" val="4170000782"/>
+      </p:ext>
+    </p:extLst>
+  </p:cSld>
+  <p:clrMapOvr>
+    <a:masterClrMapping/>
+  </p:clrMapOvr>
+</p:sld>
+</file>
+
+<file path=ppt/slides/slide22.xml><?xml version="1.0" encoding="utf-8"?>
+<p:sld xmlns:a="http://schemas.openxmlformats.org/drawingml/2006/main" xmlns:r="http://schemas.openxmlformats.org/officeDocument/2006/relationships" xmlns:p="http://schemas.openxmlformats.org/presentationml/2006/main">
+  <p:cSld>
+    <p:spTree>
+      <p:nvGrpSpPr>
+        <p:cNvPr id="1" name=""/>
+        <p:cNvGrpSpPr/>
+        <p:nvPr/>
+      </p:nvGrpSpPr>
+      <p:grpSpPr>
+        <a:xfrm>
+          <a:off x="0" y="0"/>
+          <a:ext cx="0" cy="0"/>
+          <a:chOff x="0" y="0"/>
+          <a:chExt cx="0" cy="0"/>
+        </a:xfrm>
+      </p:grpSpPr>
+      <p:sp>
+        <p:nvSpPr>
+          <p:cNvPr id="2" name="제목 1">
+            <a:extLst>
+              <a:ext uri="{FF2B5EF4-FFF2-40B4-BE49-F238E27FC236}">
+                <a16:creationId xmlns:a16="http://schemas.microsoft.com/office/drawing/2014/main" id="{016FDFA2-AD98-96A1-399D-76D7EB4E0851}"/>
+              </a:ext>
+            </a:extLst>
+          </p:cNvPr>
+          <p:cNvSpPr>
+            <a:spLocks noGrp="1"/>
+          </p:cNvSpPr>
+          <p:nvPr>
+            <p:ph type="title"/>
+          </p:nvPr>
+        </p:nvSpPr>
+        <p:spPr/>
+        <p:txBody>
+          <a:bodyPr/>
+          <a:lstStyle/>
+          <a:p>
+            <a:r>
+              <a:rPr lang="en-US" altLang="ko-KR" dirty="0"/>
+              <a:t>EDA</a:t>
+            </a:r>
+            <a:r>
+              <a:rPr lang="ko-KR" altLang="en-US" dirty="0"/>
+              <a:t>를 통해 알게 된 사실들</a:t>
+            </a:r>
+          </a:p>
+        </p:txBody>
+      </p:sp>
+      <p:sp>
+        <p:nvSpPr>
+          <p:cNvPr id="3" name="내용 개체 틀 2">
+            <a:extLst>
+              <a:ext uri="{FF2B5EF4-FFF2-40B4-BE49-F238E27FC236}">
+                <a16:creationId xmlns:a16="http://schemas.microsoft.com/office/drawing/2014/main" id="{D29C8922-9641-3723-B6B2-31E1F5474BDE}"/>
+              </a:ext>
+            </a:extLst>
+          </p:cNvPr>
+          <p:cNvSpPr>
+            <a:spLocks noGrp="1"/>
+          </p:cNvSpPr>
+          <p:nvPr>
+            <p:ph idx="1"/>
+          </p:nvPr>
+        </p:nvSpPr>
+        <p:spPr/>
+        <p:txBody>
+          <a:bodyPr/>
+          <a:lstStyle/>
+          <a:p>
+            <a:r>
+              <a:rPr lang="ko-KR" altLang="en-US" dirty="0"/>
+              <a:t>데이터에는 단기 노이즈와 구조적 패턴이 공존</a:t>
+            </a:r>
+            <a:endParaRPr lang="en-US" altLang="ko-KR" dirty="0"/>
+          </a:p>
+          <a:p>
+            <a:r>
+              <a:rPr lang="ko-KR" altLang="en-US" dirty="0"/>
+              <a:t>이상치는 오류일 수도 있고</a:t>
+            </a:r>
+            <a:r>
+              <a:rPr lang="en-US" altLang="ko-KR" dirty="0"/>
+              <a:t>, </a:t>
+            </a:r>
+            <a:r>
+              <a:rPr lang="ko-KR" altLang="en-US" dirty="0"/>
+              <a:t>중요한 신호일 수도 있다</a:t>
+            </a:r>
+            <a:endParaRPr lang="en-US" altLang="ko-KR" dirty="0"/>
+          </a:p>
+          <a:p>
+            <a:r>
+              <a:rPr lang="ko-KR" altLang="en-US" dirty="0"/>
+              <a:t>데이터 분포는 균일하지 않으며</a:t>
+            </a:r>
+            <a:r>
+              <a:rPr lang="en-US" altLang="ko-KR" dirty="0"/>
+              <a:t>, </a:t>
+            </a:r>
+            <a:r>
+              <a:rPr lang="ko-KR" altLang="en-US" dirty="0"/>
+              <a:t>조건에 따라 성격이 달라진다</a:t>
+            </a:r>
+            <a:r>
+              <a:rPr lang="en-US" altLang="ko-KR" dirty="0"/>
+              <a:t>.</a:t>
+            </a:r>
+          </a:p>
+          <a:p>
+            <a:r>
+              <a:rPr lang="ko-KR" altLang="en-US" dirty="0"/>
+              <a:t>시간 정보는 분석에서 매우 중요한 역할을 한다</a:t>
+            </a:r>
+          </a:p>
+        </p:txBody>
+      </p:sp>
+    </p:spTree>
+    <p:extLst>
+      <p:ext uri="{BB962C8B-B14F-4D97-AF65-F5344CB8AC3E}">
+        <p14:creationId xmlns:p14="http://schemas.microsoft.com/office/powerpoint/2010/main" val="1169546370"/>
+      </p:ext>
+    </p:extLst>
+  </p:cSld>
+  <p:clrMapOvr>
+    <a:masterClrMapping/>
+  </p:clrMapOvr>
+</p:sld>
+</file>
+
+<file path=ppt/slides/slide23.xml><?xml version="1.0" encoding="utf-8"?>
+<p:sld xmlns:a="http://schemas.openxmlformats.org/drawingml/2006/main" xmlns:r="http://schemas.openxmlformats.org/officeDocument/2006/relationships" xmlns:p="http://schemas.openxmlformats.org/presentationml/2006/main">
+  <p:cSld>
+    <p:spTree>
+      <p:nvGrpSpPr>
+        <p:cNvPr id="1" name=""/>
+        <p:cNvGrpSpPr/>
+        <p:nvPr/>
+      </p:nvGrpSpPr>
+      <p:grpSpPr>
+        <a:xfrm>
+          <a:off x="0" y="0"/>
+          <a:ext cx="0" cy="0"/>
+          <a:chOff x="0" y="0"/>
+          <a:chExt cx="0" cy="0"/>
+        </a:xfrm>
+      </p:grpSpPr>
+      <p:sp>
+        <p:nvSpPr>
+          <p:cNvPr id="2" name="제목 1">
+            <a:extLst>
+              <a:ext uri="{FF2B5EF4-FFF2-40B4-BE49-F238E27FC236}">
+                <a16:creationId xmlns:a16="http://schemas.microsoft.com/office/drawing/2014/main" id="{E8794263-D171-2BBD-ECBC-95B081DBDF52}"/>
+              </a:ext>
+            </a:extLst>
+          </p:cNvPr>
+          <p:cNvSpPr>
+            <a:spLocks noGrp="1"/>
+          </p:cNvSpPr>
+          <p:nvPr>
+            <p:ph type="title"/>
+          </p:nvPr>
+        </p:nvSpPr>
+        <p:spPr/>
+        <p:txBody>
+          <a:bodyPr/>
+          <a:lstStyle/>
+          <a:p>
+            <a:r>
+              <a:rPr lang="en-US" altLang="ko-KR" dirty="0"/>
+              <a:t>EDA </a:t>
+            </a:r>
+            <a:r>
+              <a:rPr lang="ko-KR" altLang="en-US" dirty="0"/>
+              <a:t>결과가 주는 시사점</a:t>
+            </a:r>
+          </a:p>
+        </p:txBody>
+      </p:sp>
+      <p:sp>
+        <p:nvSpPr>
+          <p:cNvPr id="3" name="내용 개체 틀 2">
+            <a:extLst>
+              <a:ext uri="{FF2B5EF4-FFF2-40B4-BE49-F238E27FC236}">
+                <a16:creationId xmlns:a16="http://schemas.microsoft.com/office/drawing/2014/main" id="{E69DC83A-2B8F-7A7F-C081-F0C56DC96E00}"/>
+              </a:ext>
+            </a:extLst>
+          </p:cNvPr>
+          <p:cNvSpPr>
+            <a:spLocks noGrp="1"/>
+          </p:cNvSpPr>
+          <p:nvPr>
+            <p:ph idx="1"/>
+          </p:nvPr>
+        </p:nvSpPr>
+        <p:spPr/>
+        <p:txBody>
+          <a:bodyPr/>
+          <a:lstStyle/>
+          <a:p>
+            <a:r>
+              <a:rPr lang="ko-KR" altLang="en-US" dirty="0"/>
+              <a:t>단순한 평균 기반 모델은 데이터를 충분히 설명하기 어렵다</a:t>
+            </a:r>
+            <a:endParaRPr lang="en-US" altLang="ko-KR" dirty="0"/>
+          </a:p>
+          <a:p>
+            <a:r>
+              <a:rPr lang="ko-KR" altLang="en-US" dirty="0"/>
+              <a:t>시간 흐름을 고려하지 않으면 잘못된 결론에 도달할 수 있다</a:t>
+            </a:r>
+            <a:endParaRPr lang="en-US" altLang="ko-KR" dirty="0"/>
+          </a:p>
+          <a:p>
+            <a:r>
+              <a:rPr lang="ko-KR" altLang="en-US" dirty="0"/>
+              <a:t>모델링 이전에 데이터에 대한 이해가 선행되어야 한다</a:t>
+            </a:r>
+            <a:endParaRPr lang="en-US" altLang="ko-KR" dirty="0"/>
+          </a:p>
+          <a:p>
+            <a:endParaRPr lang="en-US" altLang="ko-KR" dirty="0"/>
+          </a:p>
+          <a:p>
+            <a:pPr marL="0" indent="0">
+              <a:buNone/>
+            </a:pPr>
+            <a:r>
+              <a:rPr lang="en-US" altLang="ko-KR" dirty="0"/>
+              <a:t>=</a:t>
+            </a:r>
+            <a:r>
+              <a:rPr lang="en-US" altLang="ko-KR" sz="3200" dirty="0"/>
+              <a:t>&gt; EDA</a:t>
+            </a:r>
+            <a:r>
+              <a:rPr lang="ko-KR" altLang="en-US" sz="3200" dirty="0"/>
+              <a:t>는 모델링의 방향을 결정하는 과정</a:t>
+            </a:r>
+            <a:endParaRPr lang="ko-KR" altLang="en-US" dirty="0"/>
+          </a:p>
+        </p:txBody>
+      </p:sp>
+    </p:spTree>
+    <p:extLst>
+      <p:ext uri="{BB962C8B-B14F-4D97-AF65-F5344CB8AC3E}">
+        <p14:creationId xmlns:p14="http://schemas.microsoft.com/office/powerpoint/2010/main" val="1723256404"/>
+      </p:ext>
+    </p:extLst>
+  </p:cSld>
+  <p:clrMapOvr>
+    <a:masterClrMapping/>
+  </p:clrMapOvr>
+</p:sld>
+</file>
+
+<file path=ppt/slides/slide24.xml><?xml version="1.0" encoding="utf-8"?>
+<p:sld xmlns:a="http://schemas.openxmlformats.org/drawingml/2006/main" xmlns:r="http://schemas.openxmlformats.org/officeDocument/2006/relationships" xmlns:p="http://schemas.openxmlformats.org/presentationml/2006/main">
+  <p:cSld>
+    <p:spTree>
+      <p:nvGrpSpPr>
+        <p:cNvPr id="1" name=""/>
+        <p:cNvGrpSpPr/>
+        <p:nvPr/>
+      </p:nvGrpSpPr>
+      <p:grpSpPr>
+        <a:xfrm>
+          <a:off x="0" y="0"/>
+          <a:ext cx="0" cy="0"/>
+          <a:chOff x="0" y="0"/>
+          <a:chExt cx="0" cy="0"/>
+        </a:xfrm>
+      </p:grpSpPr>
+      <p:sp>
+        <p:nvSpPr>
+          <p:cNvPr id="2" name="제목 1">
+            <a:extLst>
+              <a:ext uri="{FF2B5EF4-FFF2-40B4-BE49-F238E27FC236}">
+                <a16:creationId xmlns:a16="http://schemas.microsoft.com/office/drawing/2014/main" id="{B4DBC066-664B-B084-68E8-3D9096316DCB}"/>
+              </a:ext>
+            </a:extLst>
+          </p:cNvPr>
+          <p:cNvSpPr>
+            <a:spLocks noGrp="1"/>
+          </p:cNvSpPr>
+          <p:nvPr>
+            <p:ph type="title"/>
+          </p:nvPr>
+        </p:nvSpPr>
+        <p:spPr/>
+        <p:txBody>
+          <a:bodyPr/>
+          <a:lstStyle/>
+          <a:p>
+            <a:r>
+              <a:rPr lang="ko-KR" altLang="en-US" dirty="0"/>
+              <a:t>재생에너지와 시계열 분석</a:t>
+            </a:r>
+          </a:p>
+        </p:txBody>
+      </p:sp>
+    </p:spTree>
+    <p:extLst>
+      <p:ext uri="{BB962C8B-B14F-4D97-AF65-F5344CB8AC3E}">
+        <p14:creationId xmlns:p14="http://schemas.microsoft.com/office/powerpoint/2010/main" val="1249203898"/>
+      </p:ext>
+    </p:extLst>
+  </p:cSld>
+  <p:clrMapOvr>
+    <a:masterClrMapping/>
+  </p:clrMapOvr>
+</p:sld>
+</file>
+
+<file path=ppt/slides/slide25.xml><?xml version="1.0" encoding="utf-8"?>
+<p:sld xmlns:a="http://schemas.openxmlformats.org/drawingml/2006/main" xmlns:r="http://schemas.openxmlformats.org/officeDocument/2006/relationships" xmlns:p="http://schemas.openxmlformats.org/presentationml/2006/main">
+  <p:cSld>
+    <p:spTree>
+      <p:nvGrpSpPr>
+        <p:cNvPr id="1" name=""/>
+        <p:cNvGrpSpPr/>
+        <p:nvPr/>
+      </p:nvGrpSpPr>
+      <p:grpSpPr>
+        <a:xfrm>
+          <a:off x="0" y="0"/>
+          <a:ext cx="0" cy="0"/>
+          <a:chOff x="0" y="0"/>
+          <a:chExt cx="0" cy="0"/>
+        </a:xfrm>
+      </p:grpSpPr>
+      <p:sp>
+        <p:nvSpPr>
+          <p:cNvPr id="2" name="제목 1">
+            <a:extLst>
+              <a:ext uri="{FF2B5EF4-FFF2-40B4-BE49-F238E27FC236}">
+                <a16:creationId xmlns:a16="http://schemas.microsoft.com/office/drawing/2014/main" id="{104E8AFF-EF04-8D6E-873F-10932127B745}"/>
+              </a:ext>
+            </a:extLst>
+          </p:cNvPr>
+          <p:cNvSpPr>
+            <a:spLocks noGrp="1"/>
+          </p:cNvSpPr>
+          <p:nvPr>
+            <p:ph type="title"/>
+          </p:nvPr>
+        </p:nvSpPr>
+        <p:spPr/>
+        <p:txBody>
+          <a:bodyPr/>
+          <a:lstStyle/>
+          <a:p>
+            <a:r>
+              <a:rPr lang="ko-KR" altLang="en-US" dirty="0"/>
+              <a:t>왜 시계열 데이터인가</a:t>
+            </a:r>
+          </a:p>
+        </p:txBody>
+      </p:sp>
+      <p:sp>
+        <p:nvSpPr>
+          <p:cNvPr id="3" name="내용 개체 틀 2">
+            <a:extLst>
+              <a:ext uri="{FF2B5EF4-FFF2-40B4-BE49-F238E27FC236}">
+                <a16:creationId xmlns:a16="http://schemas.microsoft.com/office/drawing/2014/main" id="{607CFD22-7F31-2E89-1B1A-4762A6B22468}"/>
+              </a:ext>
+            </a:extLst>
+          </p:cNvPr>
+          <p:cNvSpPr>
+            <a:spLocks noGrp="1"/>
+          </p:cNvSpPr>
+          <p:nvPr>
+            <p:ph idx="1"/>
+          </p:nvPr>
+        </p:nvSpPr>
+        <p:spPr/>
+        <p:txBody>
+          <a:bodyPr/>
+          <a:lstStyle/>
+          <a:p>
+            <a:r>
+              <a:rPr lang="ko-KR" altLang="en-US" dirty="0"/>
+              <a:t>재생에너지 데이터는 관측된 순서 자체가 의미를 가짐</a:t>
+            </a:r>
+            <a:endParaRPr lang="en-US" altLang="ko-KR" dirty="0"/>
+          </a:p>
+          <a:p>
+            <a:r>
+              <a:rPr lang="ko-KR" altLang="en-US" dirty="0"/>
+              <a:t>과거의 값은 현재와 미래에 영향을 줌</a:t>
+            </a:r>
+            <a:endParaRPr lang="en-US" altLang="ko-KR" dirty="0"/>
+          </a:p>
+          <a:p>
+            <a:r>
+              <a:rPr lang="ko-KR" altLang="en-US" dirty="0"/>
+              <a:t>데이터를 무작위로 섞는 것은 정보의 구조를 파괴하는 행위</a:t>
+            </a:r>
+          </a:p>
+        </p:txBody>
+      </p:sp>
+    </p:spTree>
+    <p:extLst>
+      <p:ext uri="{BB962C8B-B14F-4D97-AF65-F5344CB8AC3E}">
+        <p14:creationId xmlns:p14="http://schemas.microsoft.com/office/powerpoint/2010/main" val="507116562"/>
+      </p:ext>
+    </p:extLst>
+  </p:cSld>
+  <p:clrMapOvr>
+    <a:masterClrMapping/>
+  </p:clrMapOvr>
+</p:sld>
+</file>
+
+<file path=ppt/slides/slide26.xml><?xml version="1.0" encoding="utf-8"?>
+<p:sld xmlns:a="http://schemas.openxmlformats.org/drawingml/2006/main" xmlns:r="http://schemas.openxmlformats.org/officeDocument/2006/relationships" xmlns:p="http://schemas.openxmlformats.org/presentationml/2006/main">
+  <p:cSld>
+    <p:spTree>
+      <p:nvGrpSpPr>
+        <p:cNvPr id="1" name=""/>
+        <p:cNvGrpSpPr/>
+        <p:nvPr/>
+      </p:nvGrpSpPr>
+      <p:grpSpPr>
+        <a:xfrm>
+          <a:off x="0" y="0"/>
+          <a:ext cx="0" cy="0"/>
+          <a:chOff x="0" y="0"/>
+          <a:chExt cx="0" cy="0"/>
+        </a:xfrm>
+      </p:grpSpPr>
+      <p:sp>
+        <p:nvSpPr>
+          <p:cNvPr id="2" name="제목 1">
+            <a:extLst>
+              <a:ext uri="{FF2B5EF4-FFF2-40B4-BE49-F238E27FC236}">
+                <a16:creationId xmlns:a16="http://schemas.microsoft.com/office/drawing/2014/main" id="{2F8C8149-CF0F-6251-7D4B-BD804CC22E2F}"/>
+              </a:ext>
+            </a:extLst>
+          </p:cNvPr>
+          <p:cNvSpPr>
+            <a:spLocks noGrp="1"/>
+          </p:cNvSpPr>
+          <p:nvPr>
+            <p:ph type="title"/>
+          </p:nvPr>
+        </p:nvSpPr>
+        <p:spPr/>
+        <p:txBody>
+          <a:bodyPr/>
+          <a:lstStyle/>
+          <a:p>
+            <a:r>
+              <a:rPr lang="ko-KR" altLang="en-US" dirty="0"/>
+              <a:t>시간을 무시하면 생기는 문제</a:t>
+            </a:r>
+          </a:p>
+        </p:txBody>
+      </p:sp>
+      <p:sp>
+        <p:nvSpPr>
+          <p:cNvPr id="3" name="내용 개체 틀 2">
+            <a:extLst>
+              <a:ext uri="{FF2B5EF4-FFF2-40B4-BE49-F238E27FC236}">
+                <a16:creationId xmlns:a16="http://schemas.microsoft.com/office/drawing/2014/main" id="{8A0D96D7-A82D-E3E3-7099-288E25562E5C}"/>
+              </a:ext>
+            </a:extLst>
+          </p:cNvPr>
+          <p:cNvSpPr>
+            <a:spLocks noGrp="1"/>
+          </p:cNvSpPr>
+          <p:nvPr>
+            <p:ph idx="1"/>
+          </p:nvPr>
+        </p:nvSpPr>
+        <p:spPr/>
+        <p:txBody>
+          <a:bodyPr/>
+          <a:lstStyle/>
+          <a:p>
+            <a:r>
+              <a:rPr lang="ko-KR" altLang="en-US" dirty="0"/>
+              <a:t>시계열 데이터를 일반적인 데이터처럼 무작위로 섞으면 정보의 구조가 붕괴된다</a:t>
+            </a:r>
+            <a:endParaRPr lang="en-US" altLang="ko-KR" dirty="0"/>
+          </a:p>
+          <a:p>
+            <a:r>
+              <a:rPr lang="ko-KR" altLang="en-US" dirty="0"/>
+              <a:t>미래 정보가 과거 학습에 섞이는 문제가 발생할 수 있다</a:t>
+            </a:r>
+            <a:endParaRPr lang="en-US" altLang="ko-KR" dirty="0"/>
+          </a:p>
+          <a:p>
+            <a:r>
+              <a:rPr lang="ko-KR" altLang="en-US"/>
+              <a:t>이 경우 모델 성능은 실제보다 과대평가된다</a:t>
+            </a:r>
+            <a:endParaRPr lang="ko-KR" altLang="en-US" dirty="0"/>
+          </a:p>
+        </p:txBody>
+      </p:sp>
+    </p:spTree>
+    <p:extLst>
+      <p:ext uri="{BB962C8B-B14F-4D97-AF65-F5344CB8AC3E}">
+        <p14:creationId xmlns:p14="http://schemas.microsoft.com/office/powerpoint/2010/main" val="2144709883"/>
+      </p:ext>
+    </p:extLst>
+  </p:cSld>
+  <p:clrMapOvr>
+    <a:masterClrMapping/>
+  </p:clrMapOvr>
+</p:sld>
+</file>
+
+<file path=ppt/slides/slide27.xml><?xml version="1.0" encoding="utf-8"?>
 <p:sld xmlns:a="http://schemas.openxmlformats.org/drawingml/2006/main" xmlns:r="http://schemas.openxmlformats.org/officeDocument/2006/relationships" xmlns:p="http://schemas.openxmlformats.org/presentationml/2006/main">
   <p:cSld>
     <p:spTree>
@@ -6858,7 +8225,137 @@
 </p:sld>
 </file>
 
-<file path=ppt/slides/slide2.xml><?xml version="1.0" encoding="utf-8"?>
+<file path=ppt/slides/slide3.xml><?xml version="1.0" encoding="utf-8"?>
+<p:sld xmlns:a="http://schemas.openxmlformats.org/drawingml/2006/main" xmlns:r="http://schemas.openxmlformats.org/officeDocument/2006/relationships" xmlns:p="http://schemas.openxmlformats.org/presentationml/2006/main">
+  <p:cSld>
+    <p:spTree>
+      <p:nvGrpSpPr>
+        <p:cNvPr id="1" name=""/>
+        <p:cNvGrpSpPr/>
+        <p:nvPr/>
+      </p:nvGrpSpPr>
+      <p:grpSpPr>
+        <a:xfrm>
+          <a:off x="0" y="0"/>
+          <a:ext cx="0" cy="0"/>
+          <a:chOff x="0" y="0"/>
+          <a:chExt cx="0" cy="0"/>
+        </a:xfrm>
+      </p:grpSpPr>
+      <p:sp>
+        <p:nvSpPr>
+          <p:cNvPr id="2" name="제목 1">
+            <a:extLst>
+              <a:ext uri="{FF2B5EF4-FFF2-40B4-BE49-F238E27FC236}">
+                <a16:creationId xmlns:a16="http://schemas.microsoft.com/office/drawing/2014/main" id="{F582A3DB-3614-1D3F-9F6A-539FE2659AEA}"/>
+              </a:ext>
+            </a:extLst>
+          </p:cNvPr>
+          <p:cNvSpPr>
+            <a:spLocks noGrp="1"/>
+          </p:cNvSpPr>
+          <p:nvPr>
+            <p:ph type="title"/>
+          </p:nvPr>
+        </p:nvSpPr>
+        <p:spPr/>
+        <p:txBody>
+          <a:bodyPr/>
+          <a:lstStyle/>
+          <a:p>
+            <a:r>
+              <a:rPr lang="en-US" altLang="ko-KR" dirty="0"/>
+              <a:t>EDA</a:t>
+            </a:r>
+            <a:endParaRPr lang="ko-KR" altLang="en-US" dirty="0"/>
+          </a:p>
+        </p:txBody>
+      </p:sp>
+      <p:sp>
+        <p:nvSpPr>
+          <p:cNvPr id="3" name="내용 개체 틀 2">
+            <a:extLst>
+              <a:ext uri="{FF2B5EF4-FFF2-40B4-BE49-F238E27FC236}">
+                <a16:creationId xmlns:a16="http://schemas.microsoft.com/office/drawing/2014/main" id="{5C057188-2639-6FE1-D000-922ED681218E}"/>
+              </a:ext>
+            </a:extLst>
+          </p:cNvPr>
+          <p:cNvSpPr>
+            <a:spLocks noGrp="1"/>
+          </p:cNvSpPr>
+          <p:nvPr>
+            <p:ph idx="1"/>
+          </p:nvPr>
+        </p:nvSpPr>
+        <p:spPr/>
+        <p:txBody>
+          <a:bodyPr/>
+          <a:lstStyle/>
+          <a:p>
+            <a:r>
+              <a:rPr lang="ko-KR" altLang="en-US" dirty="0"/>
+              <a:t>탐색적 데이터 분석</a:t>
+            </a:r>
+            <a:r>
+              <a:rPr lang="en-US" altLang="ko-KR" b="1" dirty="0"/>
+              <a:t> (Exploratory Data Analysis - EDA)</a:t>
+            </a:r>
+            <a:endParaRPr lang="en-US" altLang="ko-KR" dirty="0"/>
+          </a:p>
+          <a:p>
+            <a:r>
+              <a:rPr lang="ko-KR" altLang="en-US" b="1" dirty="0"/>
+              <a:t>의미</a:t>
+            </a:r>
+            <a:r>
+              <a:rPr lang="en-US" altLang="ko-KR" dirty="0"/>
+              <a:t>: </a:t>
+            </a:r>
+            <a:r>
+              <a:rPr lang="ko-KR" altLang="en-US" dirty="0"/>
+              <a:t>데이터 분석 초기 단계에서 요약 통계</a:t>
+            </a:r>
+            <a:r>
+              <a:rPr lang="en-US" altLang="ko-KR" dirty="0"/>
+              <a:t>, </a:t>
+            </a:r>
+            <a:r>
+              <a:rPr lang="ko-KR" altLang="en-US" dirty="0"/>
+              <a:t>시각화 등을 통해 데이터의 특징</a:t>
+            </a:r>
+            <a:r>
+              <a:rPr lang="en-US" altLang="ko-KR" dirty="0"/>
+              <a:t>, </a:t>
+            </a:r>
+            <a:r>
+              <a:rPr lang="ko-KR" altLang="en-US" dirty="0"/>
+              <a:t>분포</a:t>
+            </a:r>
+            <a:r>
+              <a:rPr lang="en-US" altLang="ko-KR" dirty="0"/>
+              <a:t>, </a:t>
+            </a:r>
+            <a:r>
+              <a:rPr lang="ko-KR" altLang="en-US" dirty="0"/>
+              <a:t>변수 간 관계를 파악하는 과정</a:t>
+            </a:r>
+          </a:p>
+        </p:txBody>
+      </p:sp>
+    </p:spTree>
+    <p:extLst>
+      <p:ext uri="{BB962C8B-B14F-4D97-AF65-F5344CB8AC3E}">
+        <p14:creationId xmlns:p14="http://schemas.microsoft.com/office/powerpoint/2010/main" val="4008511327"/>
+      </p:ext>
+    </p:extLst>
+  </p:cSld>
+  <p:clrMapOvr>
+    <a:masterClrMapping/>
+  </p:clrMapOvr>
+</p:sld>
+</file>
+
+<file path=ppt/slides/slide4.xml><?xml version="1.0" encoding="utf-8"?>
 <p:sld xmlns:a="http://schemas.openxmlformats.org/drawingml/2006/main" xmlns:r="http://schemas.openxmlformats.org/officeDocument/2006/relationships" xmlns:p="http://schemas.openxmlformats.org/presentationml/2006/main">
   <p:cSld>
     <p:spTree>
@@ -7010,7 +8507,7 @@
 </p:sld>
 </file>
 
-<file path=ppt/slides/slide3.xml><?xml version="1.0" encoding="utf-8"?>
+<file path=ppt/slides/slide5.xml><?xml version="1.0" encoding="utf-8"?>
 <p:sld xmlns:a="http://schemas.openxmlformats.org/drawingml/2006/main" xmlns:r="http://schemas.openxmlformats.org/officeDocument/2006/relationships" xmlns:p="http://schemas.openxmlformats.org/presentationml/2006/main">
   <p:cSld>
     <p:spTree>
@@ -7212,7 +8709,7 @@
 </p:sld>
 </file>
 
-<file path=ppt/slides/slide4.xml><?xml version="1.0" encoding="utf-8"?>
+<file path=ppt/slides/slide6.xml><?xml version="1.0" encoding="utf-8"?>
 <p:sld xmlns:a="http://schemas.openxmlformats.org/drawingml/2006/main" xmlns:r="http://schemas.openxmlformats.org/officeDocument/2006/relationships" xmlns:p="http://schemas.openxmlformats.org/presentationml/2006/main">
   <p:cSld>
     <p:spTree>
@@ -7258,7 +8755,7 @@
           <a:p>
             <a:fld id="{0F78D9C4-20C1-4B15-A116-16DC77AD9A1E}" type="datetime1">
               <a:rPr lang="ko-KR" altLang="en-US" smtClean="0"/>
-              <a:t>2026-01-15</a:t>
+              <a:t>2026-01-16</a:t>
             </a:fld>
             <a:endParaRPr lang="ko-KR" altLang="en-US"/>
           </a:p>
@@ -7287,7 +8784,7 @@
           <a:p>
             <a:fld id="{083A2CE0-18CD-4102-B738-4ACFF9E68BA4}" type="slidenum">
               <a:rPr lang="ko-KR" altLang="en-US" smtClean="0"/>
-              <a:t>4</a:t>
+              <a:t>6</a:t>
             </a:fld>
             <a:endParaRPr lang="ko-KR" altLang="en-US"/>
           </a:p>
@@ -10043,7 +11540,7 @@
 </p:sld>
 </file>
 
-<file path=ppt/slides/slide5.xml><?xml version="1.0" encoding="utf-8"?>
+<file path=ppt/slides/slide7.xml><?xml version="1.0" encoding="utf-8"?>
 <p:sld xmlns:a="http://schemas.openxmlformats.org/drawingml/2006/main" xmlns:r="http://schemas.openxmlformats.org/officeDocument/2006/relationships" xmlns:p="http://schemas.openxmlformats.org/presentationml/2006/main">
   <p:cSld>
     <p:spTree>
@@ -10141,7 +11638,7 @@
 </p:sld>
 </file>
 
-<file path=ppt/slides/slide6.xml><?xml version="1.0" encoding="utf-8"?>
+<file path=ppt/slides/slide8.xml><?xml version="1.0" encoding="utf-8"?>
 <p:sld xmlns:a="http://schemas.openxmlformats.org/drawingml/2006/main" xmlns:r="http://schemas.openxmlformats.org/officeDocument/2006/relationships" xmlns:p="http://schemas.openxmlformats.org/presentationml/2006/main">
   <p:cSld>
     <p:spTree>
@@ -10237,7 +11734,7 @@
 </p:sld>
 </file>
 
-<file path=ppt/slides/slide7.xml><?xml version="1.0" encoding="utf-8"?>
+<file path=ppt/slides/slide9.xml><?xml version="1.0" encoding="utf-8"?>
 <p:sld xmlns:a="http://schemas.openxmlformats.org/drawingml/2006/main" xmlns:r="http://schemas.openxmlformats.org/officeDocument/2006/relationships" xmlns:p="http://schemas.openxmlformats.org/presentationml/2006/main">
   <p:cSld>
     <p:spTree>
@@ -10442,7 +11939,7 @@
           <a:p>
             <a:fld id="{0F78D9C4-20C1-4B15-A116-16DC77AD9A1E}" type="datetime1">
               <a:rPr lang="ko-KR" altLang="en-US" smtClean="0"/>
-              <a:t>2026-01-15</a:t>
+              <a:t>2026-01-16</a:t>
             </a:fld>
             <a:endParaRPr lang="ko-KR" altLang="en-US"/>
           </a:p>
@@ -10471,7 +11968,7 @@
           <a:p>
             <a:fld id="{083A2CE0-18CD-4102-B738-4ACFF9E68BA4}" type="slidenum">
               <a:rPr lang="ko-KR" altLang="en-US" smtClean="0"/>
-              <a:t>7</a:t>
+              <a:t>9</a:t>
             </a:fld>
             <a:endParaRPr lang="ko-KR" altLang="en-US"/>
           </a:p>
@@ -10523,554 +12020,6 @@
     <p:extLst>
       <p:ext uri="{BB962C8B-B14F-4D97-AF65-F5344CB8AC3E}">
         <p14:creationId xmlns:p14="http://schemas.microsoft.com/office/powerpoint/2010/main" val="3697987627"/>
-      </p:ext>
-    </p:extLst>
-  </p:cSld>
-  <p:clrMapOvr>
-    <a:masterClrMapping/>
-  </p:clrMapOvr>
-</p:sld>
-</file>
-
-<file path=ppt/slides/slide8.xml><?xml version="1.0" encoding="utf-8"?>
-<p:sld xmlns:a="http://schemas.openxmlformats.org/drawingml/2006/main" xmlns:r="http://schemas.openxmlformats.org/officeDocument/2006/relationships" xmlns:p="http://schemas.openxmlformats.org/presentationml/2006/main">
-  <p:cSld>
-    <p:spTree>
-      <p:nvGrpSpPr>
-        <p:cNvPr id="1" name="">
-          <a:extLst>
-            <a:ext uri="{FF2B5EF4-FFF2-40B4-BE49-F238E27FC236}">
-              <a16:creationId xmlns:a16="http://schemas.microsoft.com/office/drawing/2014/main" id="{0E884210-0FCF-0519-0199-6DE16CB0CE6A}"/>
-            </a:ext>
-          </a:extLst>
-        </p:cNvPr>
-        <p:cNvGrpSpPr/>
-        <p:nvPr/>
-      </p:nvGrpSpPr>
-      <p:grpSpPr>
-        <a:xfrm>
-          <a:off x="0" y="0"/>
-          <a:ext cx="0" cy="0"/>
-          <a:chOff x="0" y="0"/>
-          <a:chExt cx="0" cy="0"/>
-        </a:xfrm>
-      </p:grpSpPr>
-      <p:sp>
-        <p:nvSpPr>
-          <p:cNvPr id="4" name="날짜 개체 틀 3">
-            <a:extLst>
-              <a:ext uri="{FF2B5EF4-FFF2-40B4-BE49-F238E27FC236}">
-                <a16:creationId xmlns:a16="http://schemas.microsoft.com/office/drawing/2014/main" id="{09220B9B-DFC5-B524-3769-282738713703}"/>
-              </a:ext>
-            </a:extLst>
-          </p:cNvPr>
-          <p:cNvSpPr>
-            <a:spLocks noGrp="1"/>
-          </p:cNvSpPr>
-          <p:nvPr>
-            <p:ph type="dt" sz="half" idx="10"/>
-          </p:nvPr>
-        </p:nvSpPr>
-        <p:spPr/>
-        <p:txBody>
-          <a:bodyPr/>
-          <a:lstStyle/>
-          <a:p>
-            <a:fld id="{0F78D9C4-20C1-4B15-A116-16DC77AD9A1E}" type="datetime1">
-              <a:rPr lang="ko-KR" altLang="en-US" smtClean="0"/>
-              <a:t>2026-01-15</a:t>
-            </a:fld>
-            <a:endParaRPr lang="ko-KR" altLang="en-US"/>
-          </a:p>
-        </p:txBody>
-      </p:sp>
-      <p:sp>
-        <p:nvSpPr>
-          <p:cNvPr id="5" name="슬라이드 번호 개체 틀 4">
-            <a:extLst>
-              <a:ext uri="{FF2B5EF4-FFF2-40B4-BE49-F238E27FC236}">
-                <a16:creationId xmlns:a16="http://schemas.microsoft.com/office/drawing/2014/main" id="{9F101E53-997C-C720-1947-13151A1087E1}"/>
-              </a:ext>
-            </a:extLst>
-          </p:cNvPr>
-          <p:cNvSpPr>
-            <a:spLocks noGrp="1"/>
-          </p:cNvSpPr>
-          <p:nvPr>
-            <p:ph type="sldNum" sz="quarter" idx="12"/>
-          </p:nvPr>
-        </p:nvSpPr>
-        <p:spPr/>
-        <p:txBody>
-          <a:bodyPr/>
-          <a:lstStyle/>
-          <a:p>
-            <a:fld id="{083A2CE0-18CD-4102-B738-4ACFF9E68BA4}" type="slidenum">
-              <a:rPr lang="ko-KR" altLang="en-US" smtClean="0"/>
-              <a:t>8</a:t>
-            </a:fld>
-            <a:endParaRPr lang="ko-KR" altLang="en-US"/>
-          </a:p>
-        </p:txBody>
-      </p:sp>
-      <p:sp>
-        <p:nvSpPr>
-          <p:cNvPr id="8" name="TextBox 7">
-            <a:extLst>
-              <a:ext uri="{FF2B5EF4-FFF2-40B4-BE49-F238E27FC236}">
-                <a16:creationId xmlns:a16="http://schemas.microsoft.com/office/drawing/2014/main" id="{021EC865-3F10-1A8E-16ED-07FE1B5F3054}"/>
-              </a:ext>
-            </a:extLst>
-          </p:cNvPr>
-          <p:cNvSpPr txBox="1"/>
-          <p:nvPr/>
-        </p:nvSpPr>
-        <p:spPr>
-          <a:xfrm>
-            <a:off x="200677" y="110919"/>
-            <a:ext cx="6444393" cy="830997"/>
-          </a:xfrm>
-          <a:prstGeom prst="rect">
-            <a:avLst/>
-          </a:prstGeom>
-          <a:noFill/>
-        </p:spPr>
-        <p:txBody>
-          <a:bodyPr wrap="none" rtlCol="0">
-            <a:spAutoFit/>
-          </a:bodyPr>
-          <a:lstStyle/>
-          <a:p>
-            <a:r>
-              <a:rPr lang="ko-KR" altLang="en-US" sz="4800" b="1" dirty="0">
-                <a:solidFill>
-                  <a:srgbClr val="2A2A2A"/>
-                </a:solidFill>
-                <a:latin typeface="+mj-ea"/>
-                <a:ea typeface="+mj-ea"/>
-                <a:cs typeface="Pretendard Black" panose="02000A03000000020004" pitchFamily="2" charset="-127"/>
-              </a:rPr>
-              <a:t>기본 이진화 </a:t>
-            </a:r>
-            <a:r>
-              <a:rPr lang="en-US" altLang="ko-KR" sz="4800" b="1" dirty="0">
-                <a:solidFill>
-                  <a:srgbClr val="2A2A2A"/>
-                </a:solidFill>
-                <a:latin typeface="+mj-ea"/>
-                <a:ea typeface="+mj-ea"/>
-                <a:cs typeface="Pretendard Black" panose="02000A03000000020004" pitchFamily="2" charset="-127"/>
-              </a:rPr>
-              <a:t>- threshold</a:t>
-            </a:r>
-            <a:endParaRPr lang="ko-KR" altLang="en-US" sz="4800" b="1" dirty="0">
-              <a:solidFill>
-                <a:srgbClr val="2A2A2A"/>
-              </a:solidFill>
-              <a:latin typeface="+mj-ea"/>
-              <a:ea typeface="+mj-ea"/>
-              <a:cs typeface="Pretendard Black" panose="02000A03000000020004" pitchFamily="2" charset="-127"/>
-            </a:endParaRPr>
-          </a:p>
-        </p:txBody>
-      </p:sp>
-      <p:sp>
-        <p:nvSpPr>
-          <p:cNvPr id="9" name="내용 개체 틀 2">
-            <a:extLst>
-              <a:ext uri="{FF2B5EF4-FFF2-40B4-BE49-F238E27FC236}">
-                <a16:creationId xmlns:a16="http://schemas.microsoft.com/office/drawing/2014/main" id="{0D41BE3B-4289-8B93-2AF2-10704289D27B}"/>
-              </a:ext>
-            </a:extLst>
-          </p:cNvPr>
-          <p:cNvSpPr>
-            <a:spLocks noGrp="1"/>
-          </p:cNvSpPr>
-          <p:nvPr>
-            <p:ph idx="1"/>
-          </p:nvPr>
-        </p:nvSpPr>
-        <p:spPr>
-          <a:xfrm>
-            <a:off x="200677" y="1034249"/>
-            <a:ext cx="11296650" cy="5061751"/>
-          </a:xfrm>
-        </p:spPr>
-        <p:txBody>
-          <a:bodyPr>
-            <a:noAutofit/>
-          </a:bodyPr>
-          <a:lstStyle/>
-          <a:p>
-            <a:pPr marL="0" indent="0">
-              <a:lnSpc>
-                <a:spcPct val="150000"/>
-              </a:lnSpc>
-              <a:buNone/>
-            </a:pPr>
-            <a:r>
-              <a:rPr lang="ko-KR" altLang="en-US" sz="2400" b="1" dirty="0">
-                <a:latin typeface="+mn-ea"/>
-              </a:rPr>
-              <a:t>💡 </a:t>
-            </a:r>
-            <a:r>
-              <a:rPr lang="en-US" altLang="ko-KR" sz="2400" b="1" dirty="0">
-                <a:latin typeface="+mn-ea"/>
-              </a:rPr>
-              <a:t>Threshold : </a:t>
-            </a:r>
-            <a:r>
-              <a:rPr lang="ko-KR" altLang="en-US" sz="2400" b="1" dirty="0" err="1">
-                <a:latin typeface="+mn-ea"/>
-              </a:rPr>
-              <a:t>임계값</a:t>
-            </a:r>
-            <a:r>
-              <a:rPr lang="en-US" altLang="ko-KR" sz="2400" b="1" dirty="0">
-                <a:latin typeface="+mn-ea"/>
-              </a:rPr>
-              <a:t>, </a:t>
-            </a:r>
-            <a:r>
-              <a:rPr lang="ko-KR" altLang="en-US" sz="2400" b="1" dirty="0" err="1">
-                <a:latin typeface="+mn-ea"/>
-              </a:rPr>
-              <a:t>문턱값</a:t>
-            </a:r>
-            <a:endParaRPr lang="en-US" altLang="ko-KR" sz="2400" b="1" dirty="0">
-              <a:latin typeface="+mn-ea"/>
-            </a:endParaRPr>
-          </a:p>
-          <a:p>
-            <a:pPr lvl="1">
-              <a:lnSpc>
-                <a:spcPct val="150000"/>
-              </a:lnSpc>
-              <a:buFont typeface="Wingdings" panose="05000000000000000000" pitchFamily="2" charset="2"/>
-              <a:buChar char="§"/>
-            </a:pPr>
-            <a:r>
-              <a:rPr lang="ko-KR" altLang="en-US" sz="2000" dirty="0"/>
-              <a:t>이진화는 </a:t>
-            </a:r>
-            <a:r>
-              <a:rPr lang="en-US" altLang="ko-KR" sz="2000" dirty="0"/>
-              <a:t>threshold(</a:t>
-            </a:r>
-            <a:r>
-              <a:rPr lang="ko-KR" altLang="en-US" sz="2000" dirty="0" err="1"/>
-              <a:t>임계값</a:t>
-            </a:r>
-            <a:r>
-              <a:rPr lang="en-US" altLang="ko-KR" sz="2000" dirty="0"/>
-              <a:t>)</a:t>
-            </a:r>
-            <a:r>
-              <a:rPr lang="ko-KR" altLang="en-US" sz="2000" dirty="0"/>
-              <a:t>을 기준으로 픽셀 값을 변환하는 과정</a:t>
-            </a:r>
-            <a:endParaRPr lang="en-US" altLang="ko-KR" sz="2000" dirty="0"/>
-          </a:p>
-          <a:p>
-            <a:pPr lvl="1">
-              <a:lnSpc>
-                <a:spcPct val="150000"/>
-              </a:lnSpc>
-              <a:buFont typeface="Wingdings" panose="05000000000000000000" pitchFamily="2" charset="2"/>
-              <a:buChar char="§"/>
-            </a:pPr>
-            <a:r>
-              <a:rPr lang="ko-KR" altLang="en-US" sz="2000" dirty="0">
-                <a:latin typeface="+mn-ea"/>
-              </a:rPr>
-              <a:t>밝기 값을 기준으로 픽셀 값을 변환</a:t>
-            </a:r>
-            <a:endParaRPr lang="en-US" altLang="ko-KR" sz="2000" dirty="0">
-              <a:latin typeface="+mn-ea"/>
-            </a:endParaRPr>
-          </a:p>
-          <a:p>
-            <a:pPr marL="0" indent="0">
-              <a:lnSpc>
-                <a:spcPct val="150000"/>
-              </a:lnSpc>
-              <a:buNone/>
-            </a:pPr>
-            <a:r>
-              <a:rPr lang="ko-KR" altLang="en-US" sz="2400" b="1" dirty="0">
-                <a:latin typeface="+mn-ea"/>
-              </a:rPr>
-              <a:t>💡</a:t>
-            </a:r>
-            <a:r>
-              <a:rPr lang="ko-KR" altLang="en-US" sz="2400" b="1" dirty="0" err="1"/>
-              <a:t>임계값의</a:t>
-            </a:r>
-            <a:r>
-              <a:rPr lang="ko-KR" altLang="en-US" sz="2400" b="1" dirty="0"/>
-              <a:t> 데이터 분석적 의미</a:t>
-            </a:r>
-            <a:endParaRPr lang="en-US" altLang="ko-KR" sz="2400" b="1" dirty="0"/>
-          </a:p>
-          <a:p>
-            <a:pPr lvl="1">
-              <a:lnSpc>
-                <a:spcPct val="150000"/>
-              </a:lnSpc>
-            </a:pPr>
-            <a:r>
-              <a:rPr lang="ko-KR" altLang="en-US" sz="2000" dirty="0"/>
-              <a:t>데이터 분석에서는 특정 </a:t>
-            </a:r>
-            <a:r>
-              <a:rPr lang="ko-KR" altLang="en-US" sz="2000" dirty="0" err="1"/>
-              <a:t>기준값</a:t>
-            </a:r>
-            <a:r>
-              <a:rPr lang="en-US" altLang="ko-KR" sz="2000" dirty="0"/>
-              <a:t>(threshold)</a:t>
-            </a:r>
-            <a:r>
-              <a:rPr lang="ko-KR" altLang="en-US" sz="2000" dirty="0"/>
-              <a:t>을 기준으로 데이터를 정상 </a:t>
-            </a:r>
-            <a:r>
-              <a:rPr lang="en-US" altLang="ko-KR" sz="2000" dirty="0"/>
-              <a:t>/ </a:t>
-            </a:r>
-            <a:r>
-              <a:rPr lang="ko-KR" altLang="en-US" sz="2000" dirty="0"/>
-              <a:t>비정상으로 구분</a:t>
-            </a:r>
-            <a:endParaRPr lang="en-US" altLang="ko-KR" sz="2000" dirty="0"/>
-          </a:p>
-          <a:p>
-            <a:pPr lvl="1">
-              <a:lnSpc>
-                <a:spcPct val="150000"/>
-              </a:lnSpc>
-            </a:pPr>
-            <a:r>
-              <a:rPr lang="ko-KR" altLang="en-US" sz="2000" dirty="0"/>
-              <a:t>재생에너지 데이터에서는 물리적으로 불가능한 발전량이나</a:t>
-            </a:r>
-            <a:r>
-              <a:rPr lang="en-US" altLang="ko-KR" sz="2000" dirty="0"/>
-              <a:t>, </a:t>
-            </a:r>
-            <a:r>
-              <a:rPr lang="ko-KR" altLang="en-US" sz="2000" dirty="0"/>
-              <a:t>비정상적인 급락 구간을 탐지하는데 활용</a:t>
-            </a:r>
-            <a:endParaRPr lang="en-US" altLang="ko-KR" sz="2000" dirty="0"/>
-          </a:p>
-        </p:txBody>
-      </p:sp>
-    </p:spTree>
-    <p:extLst>
-      <p:ext uri="{BB962C8B-B14F-4D97-AF65-F5344CB8AC3E}">
-        <p14:creationId xmlns:p14="http://schemas.microsoft.com/office/powerpoint/2010/main" val="3080129794"/>
-      </p:ext>
-    </p:extLst>
-  </p:cSld>
-  <p:clrMapOvr>
-    <a:masterClrMapping/>
-  </p:clrMapOvr>
-</p:sld>
-</file>
-
-<file path=ppt/slides/slide9.xml><?xml version="1.0" encoding="utf-8"?>
-<p:sld xmlns:a="http://schemas.openxmlformats.org/drawingml/2006/main" xmlns:r="http://schemas.openxmlformats.org/officeDocument/2006/relationships" xmlns:p="http://schemas.openxmlformats.org/presentationml/2006/main">
-  <p:cSld>
-    <p:spTree>
-      <p:nvGrpSpPr>
-        <p:cNvPr id="1" name="">
-          <a:extLst>
-            <a:ext uri="{FF2B5EF4-FFF2-40B4-BE49-F238E27FC236}">
-              <a16:creationId xmlns:a16="http://schemas.microsoft.com/office/drawing/2014/main" id="{97C8F1E0-B7D3-5221-B8DD-FDD3B1ED4862}"/>
-            </a:ext>
-          </a:extLst>
-        </p:cNvPr>
-        <p:cNvGrpSpPr/>
-        <p:nvPr/>
-      </p:nvGrpSpPr>
-      <p:grpSpPr>
-        <a:xfrm>
-          <a:off x="0" y="0"/>
-          <a:ext cx="0" cy="0"/>
-          <a:chOff x="0" y="0"/>
-          <a:chExt cx="0" cy="0"/>
-        </a:xfrm>
-      </p:grpSpPr>
-      <p:sp>
-        <p:nvSpPr>
-          <p:cNvPr id="8" name="TextBox 7">
-            <a:extLst>
-              <a:ext uri="{FF2B5EF4-FFF2-40B4-BE49-F238E27FC236}">
-                <a16:creationId xmlns:a16="http://schemas.microsoft.com/office/drawing/2014/main" id="{8B07DD60-9A4E-53BC-62D1-8023010479A5}"/>
-              </a:ext>
-            </a:extLst>
-          </p:cNvPr>
-          <p:cNvSpPr txBox="1"/>
-          <p:nvPr/>
-        </p:nvSpPr>
-        <p:spPr>
-          <a:xfrm>
-            <a:off x="251788" y="1"/>
-            <a:ext cx="10515600" cy="1145406"/>
-          </a:xfrm>
-          <a:prstGeom prst="rect">
-            <a:avLst/>
-          </a:prstGeom>
-        </p:spPr>
-        <p:txBody>
-          <a:bodyPr vert="horz" lIns="91440" tIns="45720" rIns="91440" bIns="45720" rtlCol="0" anchor="ctr">
-            <a:normAutofit/>
-          </a:bodyPr>
-          <a:lstStyle/>
-          <a:p>
-            <a:pPr>
-              <a:lnSpc>
-                <a:spcPct val="90000"/>
-              </a:lnSpc>
-              <a:spcBef>
-                <a:spcPct val="0"/>
-              </a:spcBef>
-              <a:spcAft>
-                <a:spcPts val="600"/>
-              </a:spcAft>
-            </a:pPr>
-            <a:r>
-              <a:rPr lang="ko-KR" altLang="en-US" sz="4800" b="1" kern="1200" dirty="0">
-                <a:latin typeface="Pretendard Black" panose="02000A03000000020004" pitchFamily="2" charset="-127"/>
-                <a:ea typeface="Pretendard Black" panose="02000A03000000020004" pitchFamily="2" charset="-127"/>
-                <a:cs typeface="Pretendard Black" panose="02000A03000000020004" pitchFamily="2" charset="-127"/>
-              </a:rPr>
-              <a:t>이상치 예시</a:t>
-            </a:r>
-          </a:p>
-        </p:txBody>
-      </p:sp>
-      <p:pic>
-        <p:nvPicPr>
-          <p:cNvPr id="6" name="그림 5" descr="텍스트, 라인, 도표, 그래프이(가) 표시된 사진&#10;&#10;AI 생성 콘텐츠는 정확하지 않을 수 있습니다.">
-            <a:extLst>
-              <a:ext uri="{FF2B5EF4-FFF2-40B4-BE49-F238E27FC236}">
-                <a16:creationId xmlns:a16="http://schemas.microsoft.com/office/drawing/2014/main" id="{D76F7489-54D4-8017-44A2-50F77CD8A7E7}"/>
-              </a:ext>
-            </a:extLst>
-          </p:cNvPr>
-          <p:cNvPicPr>
-            <a:picLocks noChangeAspect="1"/>
-          </p:cNvPicPr>
-          <p:nvPr/>
-        </p:nvPicPr>
-        <p:blipFill>
-          <a:blip r:embed="rId3">
-            <a:extLst>
-              <a:ext uri="{28A0092B-C50C-407E-A947-70E740481C1C}">
-                <a14:useLocalDpi xmlns:a14="http://schemas.microsoft.com/office/drawing/2010/main" val="0"/>
-              </a:ext>
-            </a:extLst>
-          </a:blip>
-          <a:stretch>
-            <a:fillRect/>
-          </a:stretch>
-        </p:blipFill>
-        <p:spPr>
-          <a:xfrm>
-            <a:off x="251787" y="1898736"/>
-            <a:ext cx="11701221" cy="3890656"/>
-          </a:xfrm>
-          <a:prstGeom prst="rect">
-            <a:avLst/>
-          </a:prstGeom>
-          <a:noFill/>
-        </p:spPr>
-      </p:pic>
-      <p:sp>
-        <p:nvSpPr>
-          <p:cNvPr id="4" name="날짜 개체 틀 3" hidden="1">
-            <a:extLst>
-              <a:ext uri="{FF2B5EF4-FFF2-40B4-BE49-F238E27FC236}">
-                <a16:creationId xmlns:a16="http://schemas.microsoft.com/office/drawing/2014/main" id="{84E4BCD8-0177-D30B-8FE1-BD63386BECFF}"/>
-              </a:ext>
-            </a:extLst>
-          </p:cNvPr>
-          <p:cNvSpPr>
-            <a:spLocks noGrp="1"/>
-          </p:cNvSpPr>
-          <p:nvPr>
-            <p:ph type="dt" sz="half" idx="10"/>
-          </p:nvPr>
-        </p:nvSpPr>
-        <p:spPr/>
-        <p:txBody>
-          <a:bodyPr/>
-          <a:lstStyle/>
-          <a:p>
-            <a:pPr>
-              <a:spcAft>
-                <a:spcPts val="600"/>
-              </a:spcAft>
-            </a:pPr>
-            <a:fld id="{0F78D9C4-20C1-4B15-A116-16DC77AD9A1E}" type="datetime1">
-              <a:rPr lang="ko-KR" altLang="en-US" smtClean="0"/>
-              <a:pPr>
-                <a:spcAft>
-                  <a:spcPts val="600"/>
-                </a:spcAft>
-              </a:pPr>
-              <a:t>2026-01-15</a:t>
-            </a:fld>
-            <a:endParaRPr lang="ko-KR" altLang="en-US"/>
-          </a:p>
-        </p:txBody>
-      </p:sp>
-      <p:sp>
-        <p:nvSpPr>
-          <p:cNvPr id="5" name="슬라이드 번호 개체 틀 4" hidden="1">
-            <a:extLst>
-              <a:ext uri="{FF2B5EF4-FFF2-40B4-BE49-F238E27FC236}">
-                <a16:creationId xmlns:a16="http://schemas.microsoft.com/office/drawing/2014/main" id="{AA92F40E-623D-ED53-C385-B85A3FAA4C6E}"/>
-              </a:ext>
-            </a:extLst>
-          </p:cNvPr>
-          <p:cNvSpPr>
-            <a:spLocks noGrp="1"/>
-          </p:cNvSpPr>
-          <p:nvPr>
-            <p:ph type="sldNum" sz="quarter" idx="12"/>
-          </p:nvPr>
-        </p:nvSpPr>
-        <p:spPr/>
-        <p:txBody>
-          <a:bodyPr/>
-          <a:lstStyle/>
-          <a:p>
-            <a:pPr>
-              <a:spcAft>
-                <a:spcPts val="600"/>
-              </a:spcAft>
-            </a:pPr>
-            <a:fld id="{083A2CE0-18CD-4102-B738-4ACFF9E68BA4}" type="slidenum">
-              <a:rPr lang="ko-KR" altLang="en-US" smtClean="0"/>
-              <a:pPr>
-                <a:spcAft>
-                  <a:spcPts val="600"/>
-                </a:spcAft>
-              </a:pPr>
-              <a:t>9</a:t>
-            </a:fld>
-            <a:endParaRPr lang="ko-KR" altLang="en-US"/>
-          </a:p>
-        </p:txBody>
-      </p:sp>
-    </p:spTree>
-    <p:extLst>
-      <p:ext uri="{BB962C8B-B14F-4D97-AF65-F5344CB8AC3E}">
-        <p14:creationId xmlns:p14="http://schemas.microsoft.com/office/powerpoint/2010/main" val="1870566624"/>
       </p:ext>
     </p:extLst>
   </p:cSld>

--- a/material/5_AI/04_데이터 전처리와 EDA 기초.pptx
+++ b/material/5_AI/04_데이터 전처리와 EDA 기초.pptx
@@ -16,24 +16,24 @@
     <p:sldId id="829" r:id="rId7"/>
     <p:sldId id="1022" r:id="rId8"/>
     <p:sldId id="797" r:id="rId9"/>
-    <p:sldId id="625" r:id="rId10"/>
-    <p:sldId id="798" r:id="rId11"/>
-    <p:sldId id="1006" r:id="rId12"/>
-    <p:sldId id="1023" r:id="rId13"/>
-    <p:sldId id="1024" r:id="rId14"/>
-    <p:sldId id="1025" r:id="rId15"/>
-    <p:sldId id="1026" r:id="rId16"/>
-    <p:sldId id="1028" r:id="rId17"/>
-    <p:sldId id="1030" r:id="rId18"/>
-    <p:sldId id="1029" r:id="rId19"/>
-    <p:sldId id="1031" r:id="rId20"/>
-    <p:sldId id="1032" r:id="rId21"/>
-    <p:sldId id="1033" r:id="rId22"/>
-    <p:sldId id="1034" r:id="rId23"/>
-    <p:sldId id="1037" r:id="rId24"/>
-    <p:sldId id="1038" r:id="rId25"/>
-    <p:sldId id="1039" r:id="rId26"/>
-    <p:sldId id="1040" r:id="rId27"/>
+    <p:sldId id="798" r:id="rId10"/>
+    <p:sldId id="1006" r:id="rId11"/>
+    <p:sldId id="1023" r:id="rId12"/>
+    <p:sldId id="1024" r:id="rId13"/>
+    <p:sldId id="1025" r:id="rId14"/>
+    <p:sldId id="1026" r:id="rId15"/>
+    <p:sldId id="1028" r:id="rId16"/>
+    <p:sldId id="1030" r:id="rId17"/>
+    <p:sldId id="1029" r:id="rId18"/>
+    <p:sldId id="1031" r:id="rId19"/>
+    <p:sldId id="1032" r:id="rId20"/>
+    <p:sldId id="1033" r:id="rId21"/>
+    <p:sldId id="1034" r:id="rId22"/>
+    <p:sldId id="1037" r:id="rId23"/>
+    <p:sldId id="1038" r:id="rId24"/>
+    <p:sldId id="1039" r:id="rId25"/>
+    <p:sldId id="1040" r:id="rId26"/>
+    <p:sldId id="1041" r:id="rId27"/>
     <p:sldId id="836" r:id="rId28"/>
   </p:sldIdLst>
   <p:sldSz cx="12192000" cy="6858000"/>
@@ -244,7 +244,7 @@
             <a:fld id="{A13A867C-D490-40C2-AB8D-A60FA70A9BF5}" type="datetimeFigureOut">
               <a:rPr lang="ko-KR" altLang="en-US" smtClean="0"/>
               <a:pPr/>
-              <a:t>2026-01-16</a:t>
+              <a:t>2026-01-19</a:t>
             </a:fld>
             <a:endParaRPr lang="ko-KR" altLang="en-US" dirty="0"/>
           </a:p>
@@ -771,7 +771,7 @@
             <a:fld id="{3E35EA20-6519-4513-9EDC-C89C5369BAEC}" type="slidenum">
               <a:rPr lang="ko-KR" altLang="en-US" smtClean="0"/>
               <a:pPr/>
-              <a:t>18</a:t>
+              <a:t>17</a:t>
             </a:fld>
             <a:endParaRPr lang="ko-KR" altLang="en-US" dirty="0"/>
           </a:p>
@@ -978,7 +978,7 @@
             <a:fld id="{3E35EA20-6519-4513-9EDC-C89C5369BAEC}" type="slidenum">
               <a:rPr lang="ko-KR" altLang="en-US" smtClean="0"/>
               <a:pPr/>
-              <a:t>19</a:t>
+              <a:t>18</a:t>
             </a:fld>
             <a:endParaRPr lang="ko-KR" altLang="en-US" dirty="0"/>
           </a:p>
@@ -1090,7 +1090,7 @@
             <a:fld id="{3E35EA20-6519-4513-9EDC-C89C5369BAEC}" type="slidenum">
               <a:rPr lang="ko-KR" altLang="en-US" smtClean="0"/>
               <a:pPr/>
-              <a:t>20</a:t>
+              <a:t>19</a:t>
             </a:fld>
             <a:endParaRPr lang="ko-KR" altLang="en-US" dirty="0"/>
           </a:p>
@@ -1178,7 +1178,7 @@
             <a:fld id="{3E35EA20-6519-4513-9EDC-C89C5369BAEC}" type="slidenum">
               <a:rPr lang="ko-KR" altLang="en-US" smtClean="0"/>
               <a:pPr/>
-              <a:t>24</a:t>
+              <a:t>23</a:t>
             </a:fld>
             <a:endParaRPr lang="ko-KR" altLang="en-US" dirty="0"/>
           </a:p>
@@ -1198,6 +1198,370 @@
 </file>
 
 <file path=ppt/notesSlides/notesSlide14.xml><?xml version="1.0" encoding="utf-8"?>
+<p:notes xmlns:a="http://schemas.openxmlformats.org/drawingml/2006/main" xmlns:r="http://schemas.openxmlformats.org/officeDocument/2006/relationships" xmlns:p="http://schemas.openxmlformats.org/presentationml/2006/main">
+  <p:cSld>
+    <p:spTree>
+      <p:nvGrpSpPr>
+        <p:cNvPr id="1" name=""/>
+        <p:cNvGrpSpPr/>
+        <p:nvPr/>
+      </p:nvGrpSpPr>
+      <p:grpSpPr>
+        <a:xfrm>
+          <a:off x="0" y="0"/>
+          <a:ext cx="0" cy="0"/>
+          <a:chOff x="0" y="0"/>
+          <a:chExt cx="0" cy="0"/>
+        </a:xfrm>
+      </p:grpSpPr>
+      <p:sp>
+        <p:nvSpPr>
+          <p:cNvPr id="2" name="슬라이드 이미지 개체 틀 1"/>
+          <p:cNvSpPr>
+            <a:spLocks noGrp="1" noRot="1" noChangeAspect="1"/>
+          </p:cNvSpPr>
+          <p:nvPr>
+            <p:ph type="sldImg"/>
+          </p:nvPr>
+        </p:nvSpPr>
+        <p:spPr/>
+      </p:sp>
+      <p:sp>
+        <p:nvSpPr>
+          <p:cNvPr id="3" name="슬라이드 노트 개체 틀 2"/>
+          <p:cNvSpPr>
+            <a:spLocks noGrp="1"/>
+          </p:cNvSpPr>
+          <p:nvPr>
+            <p:ph type="body" idx="1"/>
+          </p:nvPr>
+        </p:nvSpPr>
+        <p:spPr/>
+        <p:txBody>
+          <a:bodyPr/>
+          <a:lstStyle/>
+          <a:p>
+            <a:endParaRPr lang="ko-KR" altLang="en-US" dirty="0"/>
+          </a:p>
+        </p:txBody>
+      </p:sp>
+      <p:sp>
+        <p:nvSpPr>
+          <p:cNvPr id="4" name="슬라이드 번호 개체 틀 3"/>
+          <p:cNvSpPr>
+            <a:spLocks noGrp="1"/>
+          </p:cNvSpPr>
+          <p:nvPr>
+            <p:ph type="sldNum" sz="quarter" idx="5"/>
+          </p:nvPr>
+        </p:nvSpPr>
+        <p:spPr/>
+        <p:txBody>
+          <a:bodyPr/>
+          <a:lstStyle/>
+          <a:p>
+            <a:fld id="{3E35EA20-6519-4513-9EDC-C89C5369BAEC}" type="slidenum">
+              <a:rPr lang="ko-KR" altLang="en-US" smtClean="0"/>
+              <a:pPr/>
+              <a:t>24</a:t>
+            </a:fld>
+            <a:endParaRPr lang="ko-KR" altLang="en-US" dirty="0"/>
+          </a:p>
+        </p:txBody>
+      </p:sp>
+    </p:spTree>
+    <p:extLst>
+      <p:ext uri="{BB962C8B-B14F-4D97-AF65-F5344CB8AC3E}">
+        <p14:creationId xmlns:p14="http://schemas.microsoft.com/office/powerpoint/2010/main" val="3275055176"/>
+      </p:ext>
+    </p:extLst>
+  </p:cSld>
+  <p:clrMapOvr>
+    <a:masterClrMapping/>
+  </p:clrMapOvr>
+</p:notes>
+</file>
+
+<file path=ppt/notesSlides/notesSlide15.xml><?xml version="1.0" encoding="utf-8"?>
+<p:notes xmlns:a="http://schemas.openxmlformats.org/drawingml/2006/main" xmlns:r="http://schemas.openxmlformats.org/officeDocument/2006/relationships" xmlns:p="http://schemas.openxmlformats.org/presentationml/2006/main">
+  <p:cSld>
+    <p:spTree>
+      <p:nvGrpSpPr>
+        <p:cNvPr id="1" name=""/>
+        <p:cNvGrpSpPr/>
+        <p:nvPr/>
+      </p:nvGrpSpPr>
+      <p:grpSpPr>
+        <a:xfrm>
+          <a:off x="0" y="0"/>
+          <a:ext cx="0" cy="0"/>
+          <a:chOff x="0" y="0"/>
+          <a:chExt cx="0" cy="0"/>
+        </a:xfrm>
+      </p:grpSpPr>
+      <p:sp>
+        <p:nvSpPr>
+          <p:cNvPr id="2" name="슬라이드 이미지 개체 틀 1"/>
+          <p:cNvSpPr>
+            <a:spLocks noGrp="1" noRot="1" noChangeAspect="1"/>
+          </p:cNvSpPr>
+          <p:nvPr>
+            <p:ph type="sldImg"/>
+          </p:nvPr>
+        </p:nvSpPr>
+        <p:spPr/>
+      </p:sp>
+      <p:sp>
+        <p:nvSpPr>
+          <p:cNvPr id="3" name="슬라이드 노트 개체 틀 2"/>
+          <p:cNvSpPr>
+            <a:spLocks noGrp="1"/>
+          </p:cNvSpPr>
+          <p:nvPr>
+            <p:ph type="body" idx="1"/>
+          </p:nvPr>
+        </p:nvSpPr>
+        <p:spPr/>
+        <p:txBody>
+          <a:bodyPr/>
+          <a:lstStyle/>
+          <a:p>
+            <a:r>
+              <a:rPr lang="en-US" altLang="ko-KR" dirty="0"/>
+              <a:t>EDA</a:t>
+            </a:r>
+            <a:r>
+              <a:rPr lang="ko-KR" altLang="en-US" dirty="0"/>
+              <a:t>는 데이터의 구조와 특성을 이해하는 데 목적이 있다</a:t>
+            </a:r>
+            <a:r>
+              <a:rPr lang="en-US" altLang="ko-KR" dirty="0"/>
+              <a:t>.</a:t>
+            </a:r>
+            <a:br>
+              <a:rPr lang="en-US" altLang="ko-KR" dirty="0"/>
+            </a:br>
+            <a:r>
+              <a:rPr lang="ko-KR" altLang="en-US" dirty="0"/>
+              <a:t>이 데이터는 시간에 따라 변화하기 때문에</a:t>
+            </a:r>
+            <a:r>
+              <a:rPr lang="en-US" altLang="ko-KR" dirty="0"/>
+              <a:t>,</a:t>
+            </a:r>
+            <a:br>
+              <a:rPr lang="en-US" altLang="ko-KR" dirty="0"/>
+            </a:br>
+            <a:r>
+              <a:rPr lang="ko-KR" altLang="en-US" dirty="0"/>
+              <a:t>그 특성을 시간 흐름 위에서 다시 해석할 필요가 있다</a:t>
+            </a:r>
+            <a:r>
+              <a:rPr lang="en-US" altLang="ko-KR" dirty="0"/>
+              <a:t>.</a:t>
+            </a:r>
+            <a:endParaRPr lang="ko-KR" altLang="en-US" dirty="0"/>
+          </a:p>
+        </p:txBody>
+      </p:sp>
+      <p:sp>
+        <p:nvSpPr>
+          <p:cNvPr id="4" name="슬라이드 번호 개체 틀 3"/>
+          <p:cNvSpPr>
+            <a:spLocks noGrp="1"/>
+          </p:cNvSpPr>
+          <p:nvPr>
+            <p:ph type="sldNum" sz="quarter" idx="5"/>
+          </p:nvPr>
+        </p:nvSpPr>
+        <p:spPr/>
+        <p:txBody>
+          <a:bodyPr/>
+          <a:lstStyle/>
+          <a:p>
+            <a:fld id="{3E35EA20-6519-4513-9EDC-C89C5369BAEC}" type="slidenum">
+              <a:rPr lang="ko-KR" altLang="en-US" smtClean="0"/>
+              <a:pPr/>
+              <a:t>25</a:t>
+            </a:fld>
+            <a:endParaRPr lang="ko-KR" altLang="en-US" dirty="0"/>
+          </a:p>
+        </p:txBody>
+      </p:sp>
+    </p:spTree>
+    <p:extLst>
+      <p:ext uri="{BB962C8B-B14F-4D97-AF65-F5344CB8AC3E}">
+        <p14:creationId xmlns:p14="http://schemas.microsoft.com/office/powerpoint/2010/main" val="898426616"/>
+      </p:ext>
+    </p:extLst>
+  </p:cSld>
+  <p:clrMapOvr>
+    <a:masterClrMapping/>
+  </p:clrMapOvr>
+</p:notes>
+</file>
+
+<file path=ppt/notesSlides/notesSlide16.xml><?xml version="1.0" encoding="utf-8"?>
+<p:notes xmlns:a="http://schemas.openxmlformats.org/drawingml/2006/main" xmlns:r="http://schemas.openxmlformats.org/officeDocument/2006/relationships" xmlns:p="http://schemas.openxmlformats.org/presentationml/2006/main">
+  <p:cSld>
+    <p:spTree>
+      <p:nvGrpSpPr>
+        <p:cNvPr id="1" name=""/>
+        <p:cNvGrpSpPr/>
+        <p:nvPr/>
+      </p:nvGrpSpPr>
+      <p:grpSpPr>
+        <a:xfrm>
+          <a:off x="0" y="0"/>
+          <a:ext cx="0" cy="0"/>
+          <a:chOff x="0" y="0"/>
+          <a:chExt cx="0" cy="0"/>
+        </a:xfrm>
+      </p:grpSpPr>
+      <p:sp>
+        <p:nvSpPr>
+          <p:cNvPr id="2" name="슬라이드 이미지 개체 틀 1"/>
+          <p:cNvSpPr>
+            <a:spLocks noGrp="1" noRot="1" noChangeAspect="1"/>
+          </p:cNvSpPr>
+          <p:nvPr>
+            <p:ph type="sldImg"/>
+          </p:nvPr>
+        </p:nvSpPr>
+        <p:spPr/>
+      </p:sp>
+      <p:sp>
+        <p:nvSpPr>
+          <p:cNvPr id="3" name="슬라이드 노트 개체 틀 2"/>
+          <p:cNvSpPr>
+            <a:spLocks noGrp="1"/>
+          </p:cNvSpPr>
+          <p:nvPr>
+            <p:ph type="body" idx="1"/>
+          </p:nvPr>
+        </p:nvSpPr>
+        <p:spPr/>
+        <p:txBody>
+          <a:bodyPr/>
+          <a:lstStyle/>
+          <a:p>
+            <a:r>
+              <a:rPr lang="ko-KR" altLang="en-US" b="1" dirty="0"/>
+              <a:t>다음 단계에서 다룰 핵심 질문</a:t>
+            </a:r>
+          </a:p>
+          <a:p>
+            <a:r>
+              <a:rPr lang="ko-KR" altLang="en-US" b="1" dirty="0"/>
+              <a:t>본문 문구</a:t>
+            </a:r>
+          </a:p>
+          <a:p>
+            <a:r>
+              <a:rPr lang="ko-KR" altLang="en-US" dirty="0"/>
+              <a:t>과거 몇 시간의 정보가 필요할까</a:t>
+            </a:r>
+            <a:r>
+              <a:rPr lang="en-US" altLang="ko-KR" dirty="0"/>
+              <a:t>?</a:t>
+            </a:r>
+          </a:p>
+          <a:p>
+            <a:r>
+              <a:rPr lang="ko-KR" altLang="en-US" dirty="0"/>
+              <a:t>어느 시점부터 패턴이 바뀌었을까</a:t>
+            </a:r>
+            <a:r>
+              <a:rPr lang="en-US" altLang="ko-KR" dirty="0"/>
+              <a:t>?</a:t>
+            </a:r>
+          </a:p>
+          <a:p>
+            <a:r>
+              <a:rPr lang="ko-KR" altLang="en-US" dirty="0"/>
+              <a:t>계절성은 존재하는가</a:t>
+            </a:r>
+            <a:r>
+              <a:rPr lang="en-US" altLang="ko-KR" dirty="0"/>
+              <a:t>?</a:t>
+            </a:r>
+          </a:p>
+          <a:p>
+            <a:r>
+              <a:rPr lang="ko-KR" altLang="en-US" dirty="0"/>
+              <a:t>예측 결과를 어떻게 평가할 것인가</a:t>
+            </a:r>
+            <a:r>
+              <a:rPr lang="en-US" altLang="ko-KR" dirty="0"/>
+              <a:t>?</a:t>
+            </a:r>
+          </a:p>
+          <a:p>
+            <a:r>
+              <a:rPr lang="ko-KR" altLang="en-US" b="1" dirty="0"/>
+              <a:t>마무리 문장</a:t>
+            </a:r>
+          </a:p>
+          <a:p>
+            <a:r>
+              <a:rPr lang="ko-KR" altLang="en-US" dirty="0"/>
+              <a:t>이 질문들에 답하는 것이</a:t>
+            </a:r>
+            <a:br>
+              <a:rPr lang="ko-KR" altLang="en-US" dirty="0"/>
+            </a:br>
+            <a:r>
+              <a:rPr lang="ko-KR" altLang="en-US" dirty="0"/>
+              <a:t>시계열 분석의 목표다</a:t>
+            </a:r>
+            <a:r>
+              <a:rPr lang="en-US" altLang="ko-KR" dirty="0"/>
+              <a:t>.</a:t>
+            </a:r>
+          </a:p>
+          <a:p>
+            <a:endParaRPr lang="ko-KR" altLang="en-US" dirty="0"/>
+          </a:p>
+        </p:txBody>
+      </p:sp>
+      <p:sp>
+        <p:nvSpPr>
+          <p:cNvPr id="4" name="슬라이드 번호 개체 틀 3"/>
+          <p:cNvSpPr>
+            <a:spLocks noGrp="1"/>
+          </p:cNvSpPr>
+          <p:nvPr>
+            <p:ph type="sldNum" sz="quarter" idx="5"/>
+          </p:nvPr>
+        </p:nvSpPr>
+        <p:spPr/>
+        <p:txBody>
+          <a:bodyPr/>
+          <a:lstStyle/>
+          <a:p>
+            <a:fld id="{3E35EA20-6519-4513-9EDC-C89C5369BAEC}" type="slidenum">
+              <a:rPr lang="ko-KR" altLang="en-US" smtClean="0"/>
+              <a:pPr/>
+              <a:t>26</a:t>
+            </a:fld>
+            <a:endParaRPr lang="ko-KR" altLang="en-US" dirty="0"/>
+          </a:p>
+        </p:txBody>
+      </p:sp>
+    </p:spTree>
+    <p:extLst>
+      <p:ext uri="{BB962C8B-B14F-4D97-AF65-F5344CB8AC3E}">
+        <p14:creationId xmlns:p14="http://schemas.microsoft.com/office/powerpoint/2010/main" val="483492960"/>
+      </p:ext>
+    </p:extLst>
+  </p:cSld>
+  <p:clrMapOvr>
+    <a:masterClrMapping/>
+  </p:clrMapOvr>
+</p:notes>
+</file>
+
+<file path=ppt/notesSlides/notesSlide17.xml><?xml version="1.0" encoding="utf-8"?>
 <p:notes xmlns:a="http://schemas.openxmlformats.org/drawingml/2006/main" xmlns:r="http://schemas.openxmlformats.org/officeDocument/2006/relationships" xmlns:p="http://schemas.openxmlformats.org/presentationml/2006/main">
   <p:cSld>
     <p:spTree>
@@ -3423,7 +3787,7 @@
             <a:fld id="{3E35EA20-6519-4513-9EDC-C89C5369BAEC}" type="slidenum">
               <a:rPr lang="ko-KR" altLang="en-US" smtClean="0"/>
               <a:pPr/>
-              <a:t>11</a:t>
+              <a:t>10</a:t>
             </a:fld>
             <a:endParaRPr lang="ko-KR" altLang="en-US" dirty="0"/>
           </a:p>
@@ -3550,7 +3914,7 @@
             <a:fld id="{3E35EA20-6519-4513-9EDC-C89C5369BAEC}" type="slidenum">
               <a:rPr lang="ko-KR" altLang="en-US" smtClean="0"/>
               <a:pPr/>
-              <a:t>13</a:t>
+              <a:t>12</a:t>
             </a:fld>
             <a:endParaRPr lang="ko-KR" altLang="en-US" dirty="0"/>
           </a:p>
@@ -3770,7 +4134,7 @@
             <a:fld id="{3E35EA20-6519-4513-9EDC-C89C5369BAEC}" type="slidenum">
               <a:rPr lang="ko-KR" altLang="en-US" smtClean="0"/>
               <a:pPr/>
-              <a:t>15</a:t>
+              <a:t>14</a:t>
             </a:fld>
             <a:endParaRPr lang="ko-KR" altLang="en-US" dirty="0"/>
           </a:p>
@@ -3936,7 +4300,7 @@
           <a:p>
             <a:fld id="{442BEE3F-2E9A-4FD8-8B8A-8619F3E161C0}" type="datetime1">
               <a:rPr lang="ko-KR" altLang="en-US" smtClean="0"/>
-              <a:t>2026-01-16</a:t>
+              <a:t>2026-01-19</a:t>
             </a:fld>
             <a:endParaRPr lang="ko-KR" altLang="en-US"/>
           </a:p>
@@ -4223,7 +4587,7 @@
           <a:p>
             <a:fld id="{0F78D9C4-20C1-4B15-A116-16DC77AD9A1E}" type="datetime1">
               <a:rPr lang="ko-KR" altLang="en-US" smtClean="0"/>
-              <a:t>2026-01-16</a:t>
+              <a:t>2026-01-19</a:t>
             </a:fld>
             <a:endParaRPr lang="ko-KR" altLang="en-US"/>
           </a:p>
@@ -4398,7 +4762,7 @@
           <a:p>
             <a:fld id="{7F5E23C3-0E3D-4E4E-8486-D7FB4C073DC1}" type="datetime1">
               <a:rPr lang="ko-KR" altLang="en-US" smtClean="0"/>
-              <a:t>2026-01-16</a:t>
+              <a:t>2026-01-19</a:t>
             </a:fld>
             <a:endParaRPr lang="ko-KR" altLang="en-US"/>
           </a:p>
@@ -4554,7 +4918,7 @@
           <a:p>
             <a:fld id="{7F5E23C3-0E3D-4E4E-8486-D7FB4C073DC1}" type="datetime1">
               <a:rPr lang="ko-KR" altLang="en-US" smtClean="0"/>
-              <a:t>2026-01-16</a:t>
+              <a:t>2026-01-19</a:t>
             </a:fld>
             <a:endParaRPr lang="ko-KR" altLang="en-US"/>
           </a:p>
@@ -4883,7 +5247,7 @@
           <a:p>
             <a:fld id="{7F5E23C3-0E3D-4E4E-8486-D7FB4C073DC1}" type="datetime1">
               <a:rPr lang="ko-KR" altLang="en-US" smtClean="0"/>
-              <a:t>2026-01-16</a:t>
+              <a:t>2026-01-19</a:t>
             </a:fld>
             <a:endParaRPr lang="ko-KR" altLang="en-US"/>
           </a:p>
@@ -5785,354 +6149,6 @@
         <p:cNvPr id="1" name="">
           <a:extLst>
             <a:ext uri="{FF2B5EF4-FFF2-40B4-BE49-F238E27FC236}">
-              <a16:creationId xmlns:a16="http://schemas.microsoft.com/office/drawing/2014/main" id="{0E884210-0FCF-0519-0199-6DE16CB0CE6A}"/>
-            </a:ext>
-          </a:extLst>
-        </p:cNvPr>
-        <p:cNvGrpSpPr/>
-        <p:nvPr/>
-      </p:nvGrpSpPr>
-      <p:grpSpPr>
-        <a:xfrm>
-          <a:off x="0" y="0"/>
-          <a:ext cx="0" cy="0"/>
-          <a:chOff x="0" y="0"/>
-          <a:chExt cx="0" cy="0"/>
-        </a:xfrm>
-      </p:grpSpPr>
-      <p:sp>
-        <p:nvSpPr>
-          <p:cNvPr id="4" name="날짜 개체 틀 3">
-            <a:extLst>
-              <a:ext uri="{FF2B5EF4-FFF2-40B4-BE49-F238E27FC236}">
-                <a16:creationId xmlns:a16="http://schemas.microsoft.com/office/drawing/2014/main" id="{09220B9B-DFC5-B524-3769-282738713703}"/>
-              </a:ext>
-            </a:extLst>
-          </p:cNvPr>
-          <p:cNvSpPr>
-            <a:spLocks noGrp="1"/>
-          </p:cNvSpPr>
-          <p:nvPr>
-            <p:ph type="dt" sz="half" idx="10"/>
-          </p:nvPr>
-        </p:nvSpPr>
-        <p:spPr/>
-        <p:txBody>
-          <a:bodyPr/>
-          <a:lstStyle/>
-          <a:p>
-            <a:fld id="{0F78D9C4-20C1-4B15-A116-16DC77AD9A1E}" type="datetime1">
-              <a:rPr lang="ko-KR" altLang="en-US" smtClean="0"/>
-              <a:t>2026-01-16</a:t>
-            </a:fld>
-            <a:endParaRPr lang="ko-KR" altLang="en-US"/>
-          </a:p>
-        </p:txBody>
-      </p:sp>
-      <p:sp>
-        <p:nvSpPr>
-          <p:cNvPr id="5" name="슬라이드 번호 개체 틀 4">
-            <a:extLst>
-              <a:ext uri="{FF2B5EF4-FFF2-40B4-BE49-F238E27FC236}">
-                <a16:creationId xmlns:a16="http://schemas.microsoft.com/office/drawing/2014/main" id="{9F101E53-997C-C720-1947-13151A1087E1}"/>
-              </a:ext>
-            </a:extLst>
-          </p:cNvPr>
-          <p:cNvSpPr>
-            <a:spLocks noGrp="1"/>
-          </p:cNvSpPr>
-          <p:nvPr>
-            <p:ph type="sldNum" sz="quarter" idx="12"/>
-          </p:nvPr>
-        </p:nvSpPr>
-        <p:spPr/>
-        <p:txBody>
-          <a:bodyPr/>
-          <a:lstStyle/>
-          <a:p>
-            <a:fld id="{083A2CE0-18CD-4102-B738-4ACFF9E68BA4}" type="slidenum">
-              <a:rPr lang="ko-KR" altLang="en-US" smtClean="0"/>
-              <a:t>10</a:t>
-            </a:fld>
-            <a:endParaRPr lang="ko-KR" altLang="en-US"/>
-          </a:p>
-        </p:txBody>
-      </p:sp>
-      <p:sp>
-        <p:nvSpPr>
-          <p:cNvPr id="8" name="TextBox 7">
-            <a:extLst>
-              <a:ext uri="{FF2B5EF4-FFF2-40B4-BE49-F238E27FC236}">
-                <a16:creationId xmlns:a16="http://schemas.microsoft.com/office/drawing/2014/main" id="{021EC865-3F10-1A8E-16ED-07FE1B5F3054}"/>
-              </a:ext>
-            </a:extLst>
-          </p:cNvPr>
-          <p:cNvSpPr txBox="1"/>
-          <p:nvPr/>
-        </p:nvSpPr>
-        <p:spPr>
-          <a:xfrm>
-            <a:off x="200677" y="110919"/>
-            <a:ext cx="6444393" cy="830997"/>
-          </a:xfrm>
-          <a:prstGeom prst="rect">
-            <a:avLst/>
-          </a:prstGeom>
-          <a:noFill/>
-        </p:spPr>
-        <p:txBody>
-          <a:bodyPr wrap="none" rtlCol="0">
-            <a:spAutoFit/>
-          </a:bodyPr>
-          <a:lstStyle/>
-          <a:p>
-            <a:r>
-              <a:rPr lang="ko-KR" altLang="en-US" sz="4800" b="1" dirty="0">
-                <a:solidFill>
-                  <a:srgbClr val="2A2A2A"/>
-                </a:solidFill>
-                <a:latin typeface="+mj-ea"/>
-                <a:ea typeface="+mj-ea"/>
-                <a:cs typeface="Pretendard Black" panose="02000A03000000020004" pitchFamily="2" charset="-127"/>
-              </a:rPr>
-              <a:t>기본 이진화 </a:t>
-            </a:r>
-            <a:r>
-              <a:rPr lang="en-US" altLang="ko-KR" sz="4800" b="1" dirty="0">
-                <a:solidFill>
-                  <a:srgbClr val="2A2A2A"/>
-                </a:solidFill>
-                <a:latin typeface="+mj-ea"/>
-                <a:ea typeface="+mj-ea"/>
-                <a:cs typeface="Pretendard Black" panose="02000A03000000020004" pitchFamily="2" charset="-127"/>
-              </a:rPr>
-              <a:t>- threshold</a:t>
-            </a:r>
-            <a:endParaRPr lang="ko-KR" altLang="en-US" sz="4800" b="1" dirty="0">
-              <a:solidFill>
-                <a:srgbClr val="2A2A2A"/>
-              </a:solidFill>
-              <a:latin typeface="+mj-ea"/>
-              <a:ea typeface="+mj-ea"/>
-              <a:cs typeface="Pretendard Black" panose="02000A03000000020004" pitchFamily="2" charset="-127"/>
-            </a:endParaRPr>
-          </a:p>
-        </p:txBody>
-      </p:sp>
-      <p:sp>
-        <p:nvSpPr>
-          <p:cNvPr id="9" name="내용 개체 틀 2">
-            <a:extLst>
-              <a:ext uri="{FF2B5EF4-FFF2-40B4-BE49-F238E27FC236}">
-                <a16:creationId xmlns:a16="http://schemas.microsoft.com/office/drawing/2014/main" id="{0D41BE3B-4289-8B93-2AF2-10704289D27B}"/>
-              </a:ext>
-            </a:extLst>
-          </p:cNvPr>
-          <p:cNvSpPr>
-            <a:spLocks noGrp="1"/>
-          </p:cNvSpPr>
-          <p:nvPr>
-            <p:ph idx="1"/>
-          </p:nvPr>
-        </p:nvSpPr>
-        <p:spPr>
-          <a:xfrm>
-            <a:off x="200677" y="1034249"/>
-            <a:ext cx="11296650" cy="5061751"/>
-          </a:xfrm>
-        </p:spPr>
-        <p:txBody>
-          <a:bodyPr>
-            <a:noAutofit/>
-          </a:bodyPr>
-          <a:lstStyle/>
-          <a:p>
-            <a:pPr marL="0" indent="0">
-              <a:lnSpc>
-                <a:spcPct val="150000"/>
-              </a:lnSpc>
-              <a:buNone/>
-            </a:pPr>
-            <a:r>
-              <a:rPr lang="ko-KR" altLang="en-US" sz="2400" b="1" dirty="0">
-                <a:latin typeface="+mn-ea"/>
-              </a:rPr>
-              <a:t>💡 </a:t>
-            </a:r>
-            <a:r>
-              <a:rPr lang="en-US" altLang="ko-KR" sz="2400" b="1" dirty="0">
-                <a:latin typeface="+mn-ea"/>
-              </a:rPr>
-              <a:t>Threshold : </a:t>
-            </a:r>
-            <a:r>
-              <a:rPr lang="ko-KR" altLang="en-US" sz="2400" b="1" dirty="0" err="1">
-                <a:latin typeface="+mn-ea"/>
-              </a:rPr>
-              <a:t>임계값</a:t>
-            </a:r>
-            <a:r>
-              <a:rPr lang="en-US" altLang="ko-KR" sz="2400" b="1" dirty="0">
-                <a:latin typeface="+mn-ea"/>
-              </a:rPr>
-              <a:t>, </a:t>
-            </a:r>
-            <a:r>
-              <a:rPr lang="ko-KR" altLang="en-US" sz="2400" b="1" dirty="0" err="1">
-                <a:latin typeface="+mn-ea"/>
-              </a:rPr>
-              <a:t>문턱값</a:t>
-            </a:r>
-            <a:endParaRPr lang="en-US" altLang="ko-KR" sz="2400" b="1" dirty="0">
-              <a:latin typeface="+mn-ea"/>
-            </a:endParaRPr>
-          </a:p>
-          <a:p>
-            <a:pPr lvl="1">
-              <a:lnSpc>
-                <a:spcPct val="150000"/>
-              </a:lnSpc>
-              <a:buFont typeface="Wingdings" panose="05000000000000000000" pitchFamily="2" charset="2"/>
-              <a:buChar char="§"/>
-            </a:pPr>
-            <a:r>
-              <a:rPr lang="ko-KR" altLang="en-US" sz="2000" dirty="0"/>
-              <a:t>이진화는 </a:t>
-            </a:r>
-            <a:r>
-              <a:rPr lang="en-US" altLang="ko-KR" sz="2000" dirty="0"/>
-              <a:t>threshold(</a:t>
-            </a:r>
-            <a:r>
-              <a:rPr lang="ko-KR" altLang="en-US" sz="2000" dirty="0" err="1"/>
-              <a:t>임계값</a:t>
-            </a:r>
-            <a:r>
-              <a:rPr lang="en-US" altLang="ko-KR" sz="2000" dirty="0"/>
-              <a:t>)</a:t>
-            </a:r>
-            <a:r>
-              <a:rPr lang="ko-KR" altLang="en-US" sz="2000" dirty="0"/>
-              <a:t>을 기준으로 픽셀 값을 변환하는 과정</a:t>
-            </a:r>
-            <a:endParaRPr lang="en-US" altLang="ko-KR" sz="2000" dirty="0"/>
-          </a:p>
-          <a:p>
-            <a:pPr lvl="1">
-              <a:lnSpc>
-                <a:spcPct val="150000"/>
-              </a:lnSpc>
-              <a:buFont typeface="Wingdings" panose="05000000000000000000" pitchFamily="2" charset="2"/>
-              <a:buChar char="§"/>
-            </a:pPr>
-            <a:r>
-              <a:rPr lang="ko-KR" altLang="en-US" sz="2000" dirty="0">
-                <a:latin typeface="+mn-ea"/>
-              </a:rPr>
-              <a:t>밝기 값을 기준으로 픽셀 값을 변환</a:t>
-            </a:r>
-            <a:endParaRPr lang="en-US" altLang="ko-KR" sz="2000" dirty="0">
-              <a:latin typeface="+mn-ea"/>
-            </a:endParaRPr>
-          </a:p>
-          <a:p>
-            <a:pPr marL="0" indent="0">
-              <a:lnSpc>
-                <a:spcPct val="150000"/>
-              </a:lnSpc>
-              <a:buNone/>
-            </a:pPr>
-            <a:r>
-              <a:rPr lang="ko-KR" altLang="en-US" sz="2400" b="1" dirty="0">
-                <a:latin typeface="+mn-ea"/>
-              </a:rPr>
-              <a:t>💡</a:t>
-            </a:r>
-            <a:r>
-              <a:rPr lang="ko-KR" altLang="en-US" sz="2400" b="1" dirty="0" err="1"/>
-              <a:t>임계값의</a:t>
-            </a:r>
-            <a:r>
-              <a:rPr lang="ko-KR" altLang="en-US" sz="2400" b="1" dirty="0"/>
-              <a:t> 데이터 분석적 의미</a:t>
-            </a:r>
-            <a:endParaRPr lang="en-US" altLang="ko-KR" sz="2400" b="1" dirty="0"/>
-          </a:p>
-          <a:p>
-            <a:pPr lvl="1">
-              <a:lnSpc>
-                <a:spcPct val="150000"/>
-              </a:lnSpc>
-            </a:pPr>
-            <a:r>
-              <a:rPr lang="ko-KR" altLang="en-US" sz="2000" dirty="0"/>
-              <a:t>데이터 분석에서는 특정 </a:t>
-            </a:r>
-            <a:r>
-              <a:rPr lang="ko-KR" altLang="en-US" sz="2000" dirty="0" err="1"/>
-              <a:t>기준값</a:t>
-            </a:r>
-            <a:r>
-              <a:rPr lang="en-US" altLang="ko-KR" sz="2000" dirty="0"/>
-              <a:t>(threshold)</a:t>
-            </a:r>
-            <a:r>
-              <a:rPr lang="ko-KR" altLang="en-US" sz="2000" dirty="0"/>
-              <a:t>을 기준으로 데이터를 정상 </a:t>
-            </a:r>
-            <a:r>
-              <a:rPr lang="en-US" altLang="ko-KR" sz="2000" dirty="0"/>
-              <a:t>/ </a:t>
-            </a:r>
-            <a:r>
-              <a:rPr lang="ko-KR" altLang="en-US" sz="2000" dirty="0"/>
-              <a:t>비정상으로 구분</a:t>
-            </a:r>
-            <a:endParaRPr lang="en-US" altLang="ko-KR" sz="2000" dirty="0"/>
-          </a:p>
-          <a:p>
-            <a:pPr lvl="1">
-              <a:lnSpc>
-                <a:spcPct val="150000"/>
-              </a:lnSpc>
-            </a:pPr>
-            <a:r>
-              <a:rPr lang="ko-KR" altLang="en-US" sz="2000" dirty="0"/>
-              <a:t>재생에너지 데이터에서는 물리적으로 불가능한 발전량이나</a:t>
-            </a:r>
-            <a:r>
-              <a:rPr lang="en-US" altLang="ko-KR" sz="2000" dirty="0"/>
-              <a:t>, </a:t>
-            </a:r>
-            <a:r>
-              <a:rPr lang="ko-KR" altLang="en-US" sz="2000" dirty="0"/>
-              <a:t>비정상적인 급락 구간을 탐지하는데 활용</a:t>
-            </a:r>
-            <a:endParaRPr lang="en-US" altLang="ko-KR" sz="2000" dirty="0"/>
-          </a:p>
-        </p:txBody>
-      </p:sp>
-    </p:spTree>
-    <p:extLst>
-      <p:ext uri="{BB962C8B-B14F-4D97-AF65-F5344CB8AC3E}">
-        <p14:creationId xmlns:p14="http://schemas.microsoft.com/office/powerpoint/2010/main" val="3080129794"/>
-      </p:ext>
-    </p:extLst>
-  </p:cSld>
-  <p:clrMapOvr>
-    <a:masterClrMapping/>
-  </p:clrMapOvr>
-</p:sld>
-</file>
-
-<file path=ppt/slides/slide11.xml><?xml version="1.0" encoding="utf-8"?>
-<p:sld xmlns:a="http://schemas.openxmlformats.org/drawingml/2006/main" xmlns:r="http://schemas.openxmlformats.org/officeDocument/2006/relationships" xmlns:p="http://schemas.openxmlformats.org/presentationml/2006/main">
-  <p:cSld>
-    <p:spTree>
-      <p:nvGrpSpPr>
-        <p:cNvPr id="1" name="">
-          <a:extLst>
-            <a:ext uri="{FF2B5EF4-FFF2-40B4-BE49-F238E27FC236}">
               <a16:creationId xmlns:a16="http://schemas.microsoft.com/office/drawing/2014/main" id="{97C8F1E0-B7D3-5221-B8DD-FDD3B1ED4862}"/>
             </a:ext>
           </a:extLst>
@@ -6267,7 +6283,7 @@
                   <a:spcPts val="600"/>
                 </a:spcAft>
               </a:pPr>
-              <a:t>2026-01-16</a:t>
+              <a:t>2026-01-19</a:t>
             </a:fld>
             <a:endParaRPr lang="ko-KR" altLang="en-US"/>
           </a:p>
@@ -6306,7 +6322,7 @@
                   <a:spcPts val="600"/>
                 </a:spcAft>
               </a:pPr>
-              <a:t>11</a:t>
+              <a:t>10</a:t>
             </a:fld>
             <a:endParaRPr lang="ko-KR" altLang="en-US"/>
           </a:p>
@@ -6325,7 +6341,7 @@
 </p:sld>
 </file>
 
-<file path=ppt/slides/slide12.xml><?xml version="1.0" encoding="utf-8"?>
+<file path=ppt/slides/slide11.xml><?xml version="1.0" encoding="utf-8"?>
 <p:sld xmlns:a="http://schemas.openxmlformats.org/drawingml/2006/main" xmlns:r="http://schemas.openxmlformats.org/officeDocument/2006/relationships" xmlns:p="http://schemas.openxmlformats.org/presentationml/2006/main">
   <p:cSld>
     <p:spTree>
@@ -6383,7 +6399,7 @@
 </p:sld>
 </file>
 
-<file path=ppt/slides/slide13.xml><?xml version="1.0" encoding="utf-8"?>
+<file path=ppt/slides/slide12.xml><?xml version="1.0" encoding="utf-8"?>
 <p:sld xmlns:a="http://schemas.openxmlformats.org/drawingml/2006/main" xmlns:r="http://schemas.openxmlformats.org/officeDocument/2006/relationships" xmlns:p="http://schemas.openxmlformats.org/presentationml/2006/main">
   <p:cSld>
     <p:spTree>
@@ -6567,7 +6583,7 @@
 </p:sld>
 </file>
 
-<file path=ppt/slides/slide14.xml><?xml version="1.0" encoding="utf-8"?>
+<file path=ppt/slides/slide13.xml><?xml version="1.0" encoding="utf-8"?>
 <p:sld xmlns:a="http://schemas.openxmlformats.org/drawingml/2006/main" xmlns:r="http://schemas.openxmlformats.org/officeDocument/2006/relationships" xmlns:p="http://schemas.openxmlformats.org/presentationml/2006/main">
   <p:cSld>
     <p:spTree>
@@ -6699,7 +6715,7 @@
 </p:sld>
 </file>
 
-<file path=ppt/slides/slide15.xml><?xml version="1.0" encoding="utf-8"?>
+<file path=ppt/slides/slide14.xml><?xml version="1.0" encoding="utf-8"?>
 <p:sld xmlns:a="http://schemas.openxmlformats.org/drawingml/2006/main" xmlns:r="http://schemas.openxmlformats.org/officeDocument/2006/relationships" xmlns:p="http://schemas.openxmlformats.org/presentationml/2006/main">
   <p:cSld>
     <p:spTree>
@@ -6859,6 +6875,150 @@
 </p:sld>
 </file>
 
+<file path=ppt/slides/slide15.xml><?xml version="1.0" encoding="utf-8"?>
+<p:sld xmlns:a="http://schemas.openxmlformats.org/drawingml/2006/main" xmlns:r="http://schemas.openxmlformats.org/officeDocument/2006/relationships" xmlns:p="http://schemas.openxmlformats.org/presentationml/2006/main">
+  <p:cSld>
+    <p:spTree>
+      <p:nvGrpSpPr>
+        <p:cNvPr id="1" name=""/>
+        <p:cNvGrpSpPr/>
+        <p:nvPr/>
+      </p:nvGrpSpPr>
+      <p:grpSpPr>
+        <a:xfrm>
+          <a:off x="0" y="0"/>
+          <a:ext cx="0" cy="0"/>
+          <a:chOff x="0" y="0"/>
+          <a:chExt cx="0" cy="0"/>
+        </a:xfrm>
+      </p:grpSpPr>
+      <p:sp>
+        <p:nvSpPr>
+          <p:cNvPr id="2" name="제목 1">
+            <a:extLst>
+              <a:ext uri="{FF2B5EF4-FFF2-40B4-BE49-F238E27FC236}">
+                <a16:creationId xmlns:a16="http://schemas.microsoft.com/office/drawing/2014/main" id="{B77923BB-87FF-EE3F-D5CE-70B446F3992B}"/>
+              </a:ext>
+            </a:extLst>
+          </p:cNvPr>
+          <p:cNvSpPr>
+            <a:spLocks noGrp="1"/>
+          </p:cNvSpPr>
+          <p:nvPr>
+            <p:ph type="title"/>
+          </p:nvPr>
+        </p:nvSpPr>
+        <p:spPr/>
+        <p:txBody>
+          <a:bodyPr/>
+          <a:lstStyle/>
+          <a:p>
+            <a:r>
+              <a:rPr lang="ko-KR" altLang="en-US" dirty="0"/>
+              <a:t>조건에 따라 달라지는 데이터 분포</a:t>
+            </a:r>
+          </a:p>
+        </p:txBody>
+      </p:sp>
+      <p:sp>
+        <p:nvSpPr>
+          <p:cNvPr id="3" name="내용 개체 틀 2">
+            <a:extLst>
+              <a:ext uri="{FF2B5EF4-FFF2-40B4-BE49-F238E27FC236}">
+                <a16:creationId xmlns:a16="http://schemas.microsoft.com/office/drawing/2014/main" id="{5A5783D2-1AA1-1A9D-13EF-85449B7FDF8E}"/>
+              </a:ext>
+            </a:extLst>
+          </p:cNvPr>
+          <p:cNvSpPr>
+            <a:spLocks noGrp="1"/>
+          </p:cNvSpPr>
+          <p:nvPr>
+            <p:ph idx="1"/>
+          </p:nvPr>
+        </p:nvSpPr>
+        <p:spPr/>
+        <p:txBody>
+          <a:bodyPr/>
+          <a:lstStyle/>
+          <a:p>
+            <a:r>
+              <a:rPr lang="ko-KR" altLang="en-US" dirty="0"/>
+              <a:t>동일한 데이터라도 조건에 따라 전혀 다른 분포를 가질 수 있다</a:t>
+            </a:r>
+            <a:endParaRPr lang="en-US" altLang="ko-KR" dirty="0"/>
+          </a:p>
+          <a:p>
+            <a:r>
+              <a:rPr lang="ko-KR" altLang="en-US" dirty="0"/>
+              <a:t>재생에너지 데이터에서는 시간대</a:t>
+            </a:r>
+            <a:r>
+              <a:rPr lang="en-US" altLang="ko-KR" dirty="0"/>
+              <a:t>, </a:t>
+            </a:r>
+            <a:r>
+              <a:rPr lang="ko-KR" altLang="en-US" dirty="0"/>
+              <a:t>계절</a:t>
+            </a:r>
+            <a:r>
+              <a:rPr lang="en-US" altLang="ko-KR" dirty="0"/>
+              <a:t>, </a:t>
+            </a:r>
+            <a:r>
+              <a:rPr lang="ko-KR" altLang="en-US" dirty="0"/>
+              <a:t>기상 조건이 대표적 분리 기준</a:t>
+            </a:r>
+            <a:endParaRPr lang="en-US" altLang="ko-KR" dirty="0"/>
+          </a:p>
+          <a:p>
+            <a:r>
+              <a:rPr lang="ko-KR" altLang="en-US" dirty="0"/>
+              <a:t>시간대별 분포 비교 </a:t>
+            </a:r>
+            <a:endParaRPr lang="en-US" altLang="ko-KR" dirty="0"/>
+          </a:p>
+          <a:p>
+            <a:pPr lvl="1"/>
+            <a:r>
+              <a:rPr lang="en-US" altLang="ko-KR" dirty="0"/>
+              <a:t>ex) </a:t>
+            </a:r>
+            <a:r>
+              <a:rPr lang="ko-KR" altLang="en-US" dirty="0"/>
+              <a:t>주간</a:t>
+            </a:r>
+            <a:r>
+              <a:rPr lang="en-US" altLang="ko-KR" dirty="0"/>
+              <a:t>/</a:t>
+            </a:r>
+            <a:r>
+              <a:rPr lang="ko-KR" altLang="en-US" dirty="0"/>
+              <a:t>야간</a:t>
+            </a:r>
+            <a:endParaRPr lang="en-US" altLang="ko-KR" dirty="0"/>
+          </a:p>
+          <a:p>
+            <a:pPr lvl="1"/>
+            <a:r>
+              <a:rPr lang="ko-KR" altLang="en-US" dirty="0"/>
+              <a:t>시계열 분석이 필요한 근거 제공</a:t>
+            </a:r>
+          </a:p>
+        </p:txBody>
+      </p:sp>
+    </p:spTree>
+    <p:extLst>
+      <p:ext uri="{BB962C8B-B14F-4D97-AF65-F5344CB8AC3E}">
+        <p14:creationId xmlns:p14="http://schemas.microsoft.com/office/powerpoint/2010/main" val="2232302784"/>
+      </p:ext>
+    </p:extLst>
+  </p:cSld>
+  <p:clrMapOvr>
+    <a:masterClrMapping/>
+  </p:clrMapOvr>
+</p:sld>
+</file>
+
 <file path=ppt/slides/slide16.xml><?xml version="1.0" encoding="utf-8"?>
 <p:sld xmlns:a="http://schemas.openxmlformats.org/drawingml/2006/main" xmlns:r="http://schemas.openxmlformats.org/officeDocument/2006/relationships" xmlns:p="http://schemas.openxmlformats.org/presentationml/2006/main">
   <p:cSld>
@@ -6881,150 +7041,6 @@
           <p:cNvPr id="2" name="제목 1">
             <a:extLst>
               <a:ext uri="{FF2B5EF4-FFF2-40B4-BE49-F238E27FC236}">
-                <a16:creationId xmlns:a16="http://schemas.microsoft.com/office/drawing/2014/main" id="{B77923BB-87FF-EE3F-D5CE-70B446F3992B}"/>
-              </a:ext>
-            </a:extLst>
-          </p:cNvPr>
-          <p:cNvSpPr>
-            <a:spLocks noGrp="1"/>
-          </p:cNvSpPr>
-          <p:nvPr>
-            <p:ph type="title"/>
-          </p:nvPr>
-        </p:nvSpPr>
-        <p:spPr/>
-        <p:txBody>
-          <a:bodyPr/>
-          <a:lstStyle/>
-          <a:p>
-            <a:r>
-              <a:rPr lang="ko-KR" altLang="en-US" dirty="0"/>
-              <a:t>조건에 따라 달라지는 데이터 분포</a:t>
-            </a:r>
-          </a:p>
-        </p:txBody>
-      </p:sp>
-      <p:sp>
-        <p:nvSpPr>
-          <p:cNvPr id="3" name="내용 개체 틀 2">
-            <a:extLst>
-              <a:ext uri="{FF2B5EF4-FFF2-40B4-BE49-F238E27FC236}">
-                <a16:creationId xmlns:a16="http://schemas.microsoft.com/office/drawing/2014/main" id="{5A5783D2-1AA1-1A9D-13EF-85449B7FDF8E}"/>
-              </a:ext>
-            </a:extLst>
-          </p:cNvPr>
-          <p:cNvSpPr>
-            <a:spLocks noGrp="1"/>
-          </p:cNvSpPr>
-          <p:nvPr>
-            <p:ph idx="1"/>
-          </p:nvPr>
-        </p:nvSpPr>
-        <p:spPr/>
-        <p:txBody>
-          <a:bodyPr/>
-          <a:lstStyle/>
-          <a:p>
-            <a:r>
-              <a:rPr lang="ko-KR" altLang="en-US" dirty="0"/>
-              <a:t>동일한 데이터라도 조건에 따라 전혀 다른 분포를 가질 수 있다</a:t>
-            </a:r>
-            <a:endParaRPr lang="en-US" altLang="ko-KR" dirty="0"/>
-          </a:p>
-          <a:p>
-            <a:r>
-              <a:rPr lang="ko-KR" altLang="en-US" dirty="0"/>
-              <a:t>재생에너지 데이터에서는 시간대</a:t>
-            </a:r>
-            <a:r>
-              <a:rPr lang="en-US" altLang="ko-KR" dirty="0"/>
-              <a:t>, </a:t>
-            </a:r>
-            <a:r>
-              <a:rPr lang="ko-KR" altLang="en-US" dirty="0"/>
-              <a:t>계절</a:t>
-            </a:r>
-            <a:r>
-              <a:rPr lang="en-US" altLang="ko-KR" dirty="0"/>
-              <a:t>, </a:t>
-            </a:r>
-            <a:r>
-              <a:rPr lang="ko-KR" altLang="en-US" dirty="0"/>
-              <a:t>기상 조건이 대표적 분리 기준</a:t>
-            </a:r>
-            <a:endParaRPr lang="en-US" altLang="ko-KR" dirty="0"/>
-          </a:p>
-          <a:p>
-            <a:r>
-              <a:rPr lang="ko-KR" altLang="en-US" dirty="0"/>
-              <a:t>시간대별 분포 비교 </a:t>
-            </a:r>
-            <a:endParaRPr lang="en-US" altLang="ko-KR" dirty="0"/>
-          </a:p>
-          <a:p>
-            <a:pPr lvl="1"/>
-            <a:r>
-              <a:rPr lang="en-US" altLang="ko-KR" dirty="0"/>
-              <a:t>ex) </a:t>
-            </a:r>
-            <a:r>
-              <a:rPr lang="ko-KR" altLang="en-US" dirty="0"/>
-              <a:t>주간</a:t>
-            </a:r>
-            <a:r>
-              <a:rPr lang="en-US" altLang="ko-KR" dirty="0"/>
-              <a:t>/</a:t>
-            </a:r>
-            <a:r>
-              <a:rPr lang="ko-KR" altLang="en-US" dirty="0"/>
-              <a:t>야간</a:t>
-            </a:r>
-            <a:endParaRPr lang="en-US" altLang="ko-KR" dirty="0"/>
-          </a:p>
-          <a:p>
-            <a:pPr lvl="1"/>
-            <a:r>
-              <a:rPr lang="ko-KR" altLang="en-US" dirty="0"/>
-              <a:t>시계열 분석이 필요한 근거 제공</a:t>
-            </a:r>
-          </a:p>
-        </p:txBody>
-      </p:sp>
-    </p:spTree>
-    <p:extLst>
-      <p:ext uri="{BB962C8B-B14F-4D97-AF65-F5344CB8AC3E}">
-        <p14:creationId xmlns:p14="http://schemas.microsoft.com/office/powerpoint/2010/main" val="2232302784"/>
-      </p:ext>
-    </p:extLst>
-  </p:cSld>
-  <p:clrMapOvr>
-    <a:masterClrMapping/>
-  </p:clrMapOvr>
-</p:sld>
-</file>
-
-<file path=ppt/slides/slide17.xml><?xml version="1.0" encoding="utf-8"?>
-<p:sld xmlns:a="http://schemas.openxmlformats.org/drawingml/2006/main" xmlns:r="http://schemas.openxmlformats.org/officeDocument/2006/relationships" xmlns:p="http://schemas.openxmlformats.org/presentationml/2006/main">
-  <p:cSld>
-    <p:spTree>
-      <p:nvGrpSpPr>
-        <p:cNvPr id="1" name=""/>
-        <p:cNvGrpSpPr/>
-        <p:nvPr/>
-      </p:nvGrpSpPr>
-      <p:grpSpPr>
-        <a:xfrm>
-          <a:off x="0" y="0"/>
-          <a:ext cx="0" cy="0"/>
-          <a:chOff x="0" y="0"/>
-          <a:chExt cx="0" cy="0"/>
-        </a:xfrm>
-      </p:grpSpPr>
-      <p:sp>
-        <p:nvSpPr>
-          <p:cNvPr id="2" name="제목 1">
-            <a:extLst>
-              <a:ext uri="{FF2B5EF4-FFF2-40B4-BE49-F238E27FC236}">
                 <a16:creationId xmlns:a16="http://schemas.microsoft.com/office/drawing/2014/main" id="{274FC727-3DC9-D46B-2EBD-2B233ED88C51}"/>
               </a:ext>
             </a:extLst>
@@ -7061,7 +7077,7 @@
 </p:sld>
 </file>
 
-<file path=ppt/slides/slide18.xml><?xml version="1.0" encoding="utf-8"?>
+<file path=ppt/slides/slide17.xml><?xml version="1.0" encoding="utf-8"?>
 <p:sld xmlns:a="http://schemas.openxmlformats.org/drawingml/2006/main" xmlns:r="http://schemas.openxmlformats.org/officeDocument/2006/relationships" xmlns:p="http://schemas.openxmlformats.org/presentationml/2006/main">
   <p:cSld>
     <p:spTree>
@@ -7217,7 +7233,7 @@
 </p:sld>
 </file>
 
-<file path=ppt/slides/slide19.xml><?xml version="1.0" encoding="utf-8"?>
+<file path=ppt/slides/slide18.xml><?xml version="1.0" encoding="utf-8"?>
 <p:sld xmlns:a="http://schemas.openxmlformats.org/drawingml/2006/main" xmlns:r="http://schemas.openxmlformats.org/officeDocument/2006/relationships" xmlns:p="http://schemas.openxmlformats.org/presentationml/2006/main">
   <p:cSld>
     <p:spTree>
@@ -7386,66 +7402,7 @@
 </p:sld>
 </file>
 
-<file path=ppt/slides/slide2.xml><?xml version="1.0" encoding="utf-8"?>
-<p:sld xmlns:a="http://schemas.openxmlformats.org/drawingml/2006/main" xmlns:r="http://schemas.openxmlformats.org/officeDocument/2006/relationships" xmlns:p="http://schemas.openxmlformats.org/presentationml/2006/main">
-  <p:cSld>
-    <p:spTree>
-      <p:nvGrpSpPr>
-        <p:cNvPr id="1" name=""/>
-        <p:cNvGrpSpPr/>
-        <p:nvPr/>
-      </p:nvGrpSpPr>
-      <p:grpSpPr>
-        <a:xfrm>
-          <a:off x="0" y="0"/>
-          <a:ext cx="0" cy="0"/>
-          <a:chOff x="0" y="0"/>
-          <a:chExt cx="0" cy="0"/>
-        </a:xfrm>
-      </p:grpSpPr>
-      <p:sp>
-        <p:nvSpPr>
-          <p:cNvPr id="2" name="제목 1">
-            <a:extLst>
-              <a:ext uri="{FF2B5EF4-FFF2-40B4-BE49-F238E27FC236}">
-                <a16:creationId xmlns:a16="http://schemas.microsoft.com/office/drawing/2014/main" id="{5214AFDD-E47C-7EA7-1E12-94BA9E217613}"/>
-              </a:ext>
-            </a:extLst>
-          </p:cNvPr>
-          <p:cNvSpPr>
-            <a:spLocks noGrp="1"/>
-          </p:cNvSpPr>
-          <p:nvPr>
-            <p:ph type="title"/>
-          </p:nvPr>
-        </p:nvSpPr>
-        <p:spPr/>
-        <p:txBody>
-          <a:bodyPr/>
-          <a:lstStyle/>
-          <a:p>
-            <a:r>
-              <a:rPr lang="en-US" altLang="ko-KR" dirty="0"/>
-              <a:t>EDA</a:t>
-            </a:r>
-            <a:endParaRPr lang="ko-KR" altLang="en-US" dirty="0"/>
-          </a:p>
-        </p:txBody>
-      </p:sp>
-    </p:spTree>
-    <p:extLst>
-      <p:ext uri="{BB962C8B-B14F-4D97-AF65-F5344CB8AC3E}">
-        <p14:creationId xmlns:p14="http://schemas.microsoft.com/office/powerpoint/2010/main" val="3201905419"/>
-      </p:ext>
-    </p:extLst>
-  </p:cSld>
-  <p:clrMapOvr>
-    <a:masterClrMapping/>
-  </p:clrMapOvr>
-</p:sld>
-</file>
-
-<file path=ppt/slides/slide20.xml><?xml version="1.0" encoding="utf-8"?>
+<file path=ppt/slides/slide19.xml><?xml version="1.0" encoding="utf-8"?>
 <p:sld xmlns:a="http://schemas.openxmlformats.org/drawingml/2006/main" xmlns:r="http://schemas.openxmlformats.org/officeDocument/2006/relationships" xmlns:p="http://schemas.openxmlformats.org/presentationml/2006/main">
   <p:cSld>
     <p:spTree>
@@ -7544,6 +7501,135 @@
 </p:sld>
 </file>
 
+<file path=ppt/slides/slide2.xml><?xml version="1.0" encoding="utf-8"?>
+<p:sld xmlns:a="http://schemas.openxmlformats.org/drawingml/2006/main" xmlns:r="http://schemas.openxmlformats.org/officeDocument/2006/relationships" xmlns:p="http://schemas.openxmlformats.org/presentationml/2006/main">
+  <p:cSld>
+    <p:spTree>
+      <p:nvGrpSpPr>
+        <p:cNvPr id="1" name=""/>
+        <p:cNvGrpSpPr/>
+        <p:nvPr/>
+      </p:nvGrpSpPr>
+      <p:grpSpPr>
+        <a:xfrm>
+          <a:off x="0" y="0"/>
+          <a:ext cx="0" cy="0"/>
+          <a:chOff x="0" y="0"/>
+          <a:chExt cx="0" cy="0"/>
+        </a:xfrm>
+      </p:grpSpPr>
+      <p:sp>
+        <p:nvSpPr>
+          <p:cNvPr id="2" name="제목 1">
+            <a:extLst>
+              <a:ext uri="{FF2B5EF4-FFF2-40B4-BE49-F238E27FC236}">
+                <a16:creationId xmlns:a16="http://schemas.microsoft.com/office/drawing/2014/main" id="{5214AFDD-E47C-7EA7-1E12-94BA9E217613}"/>
+              </a:ext>
+            </a:extLst>
+          </p:cNvPr>
+          <p:cNvSpPr>
+            <a:spLocks noGrp="1"/>
+          </p:cNvSpPr>
+          <p:nvPr>
+            <p:ph type="title"/>
+          </p:nvPr>
+        </p:nvSpPr>
+        <p:spPr/>
+        <p:txBody>
+          <a:bodyPr/>
+          <a:lstStyle/>
+          <a:p>
+            <a:r>
+              <a:rPr lang="en-US" altLang="ko-KR" dirty="0"/>
+              <a:t>EDA</a:t>
+            </a:r>
+            <a:endParaRPr lang="ko-KR" altLang="en-US" dirty="0"/>
+          </a:p>
+        </p:txBody>
+      </p:sp>
+    </p:spTree>
+    <p:extLst>
+      <p:ext uri="{BB962C8B-B14F-4D97-AF65-F5344CB8AC3E}">
+        <p14:creationId xmlns:p14="http://schemas.microsoft.com/office/powerpoint/2010/main" val="3201905419"/>
+      </p:ext>
+    </p:extLst>
+  </p:cSld>
+  <p:clrMapOvr>
+    <a:masterClrMapping/>
+  </p:clrMapOvr>
+</p:sld>
+</file>
+
+<file path=ppt/slides/slide20.xml><?xml version="1.0" encoding="utf-8"?>
+<p:sld xmlns:a="http://schemas.openxmlformats.org/drawingml/2006/main" xmlns:r="http://schemas.openxmlformats.org/officeDocument/2006/relationships" xmlns:p="http://schemas.openxmlformats.org/presentationml/2006/main">
+  <p:cSld>
+    <p:spTree>
+      <p:nvGrpSpPr>
+        <p:cNvPr id="1" name=""/>
+        <p:cNvGrpSpPr/>
+        <p:nvPr/>
+      </p:nvGrpSpPr>
+      <p:grpSpPr>
+        <a:xfrm>
+          <a:off x="0" y="0"/>
+          <a:ext cx="0" cy="0"/>
+          <a:chOff x="0" y="0"/>
+          <a:chExt cx="0" cy="0"/>
+        </a:xfrm>
+      </p:grpSpPr>
+      <p:sp>
+        <p:nvSpPr>
+          <p:cNvPr id="2" name="제목 1">
+            <a:extLst>
+              <a:ext uri="{FF2B5EF4-FFF2-40B4-BE49-F238E27FC236}">
+                <a16:creationId xmlns:a16="http://schemas.microsoft.com/office/drawing/2014/main" id="{98F1390B-072B-A3DB-90FD-09D49252D393}"/>
+              </a:ext>
+            </a:extLst>
+          </p:cNvPr>
+          <p:cNvSpPr>
+            <a:spLocks noGrp="1"/>
+          </p:cNvSpPr>
+          <p:nvPr>
+            <p:ph type="title"/>
+          </p:nvPr>
+        </p:nvSpPr>
+        <p:spPr/>
+        <p:txBody>
+          <a:bodyPr/>
+          <a:lstStyle/>
+          <a:p>
+            <a:r>
+              <a:rPr lang="en-US" altLang="ko-KR" dirty="0"/>
+              <a:t>EDA </a:t>
+            </a:r>
+            <a:r>
+              <a:rPr lang="ko-KR" altLang="en-US" dirty="0"/>
+              <a:t>결과 요약 </a:t>
+            </a:r>
+            <a:r>
+              <a:rPr lang="en-US" altLang="ko-KR" dirty="0"/>
+              <a:t>&amp; </a:t>
+            </a:r>
+            <a:r>
+              <a:rPr lang="ko-KR" altLang="en-US" dirty="0"/>
+              <a:t>판단</a:t>
+            </a:r>
+          </a:p>
+        </p:txBody>
+      </p:sp>
+    </p:spTree>
+    <p:extLst>
+      <p:ext uri="{BB962C8B-B14F-4D97-AF65-F5344CB8AC3E}">
+        <p14:creationId xmlns:p14="http://schemas.microsoft.com/office/powerpoint/2010/main" val="4170000782"/>
+      </p:ext>
+    </p:extLst>
+  </p:cSld>
+  <p:clrMapOvr>
+    <a:masterClrMapping/>
+  </p:clrMapOvr>
+</p:sld>
+</file>
+
 <file path=ppt/slides/slide21.xml><?xml version="1.0" encoding="utf-8"?>
 <p:sld xmlns:a="http://schemas.openxmlformats.org/drawingml/2006/main" xmlns:r="http://schemas.openxmlformats.org/officeDocument/2006/relationships" xmlns:p="http://schemas.openxmlformats.org/presentationml/2006/main">
   <p:cSld>
@@ -7566,7 +7652,7 @@
           <p:cNvPr id="2" name="제목 1">
             <a:extLst>
               <a:ext uri="{FF2B5EF4-FFF2-40B4-BE49-F238E27FC236}">
-                <a16:creationId xmlns:a16="http://schemas.microsoft.com/office/drawing/2014/main" id="{98F1390B-072B-A3DB-90FD-09D49252D393}"/>
+                <a16:creationId xmlns:a16="http://schemas.microsoft.com/office/drawing/2014/main" id="{016FDFA2-AD98-96A1-399D-76D7EB4E0851}"/>
               </a:ext>
             </a:extLst>
           </p:cNvPr>
@@ -7584,19 +7670,79 @@
           <a:p>
             <a:r>
               <a:rPr lang="en-US" altLang="ko-KR" dirty="0"/>
-              <a:t>EDA </a:t>
-            </a:r>
-            <a:r>
-              <a:rPr lang="ko-KR" altLang="en-US" dirty="0"/>
-              <a:t>결과 요약 </a:t>
+              <a:t>EDA</a:t>
+            </a:r>
+            <a:r>
+              <a:rPr lang="ko-KR" altLang="en-US" dirty="0"/>
+              <a:t>를 통해 알게 된 사실들</a:t>
+            </a:r>
+          </a:p>
+        </p:txBody>
+      </p:sp>
+      <p:sp>
+        <p:nvSpPr>
+          <p:cNvPr id="3" name="내용 개체 틀 2">
+            <a:extLst>
+              <a:ext uri="{FF2B5EF4-FFF2-40B4-BE49-F238E27FC236}">
+                <a16:creationId xmlns:a16="http://schemas.microsoft.com/office/drawing/2014/main" id="{D29C8922-9641-3723-B6B2-31E1F5474BDE}"/>
+              </a:ext>
+            </a:extLst>
+          </p:cNvPr>
+          <p:cNvSpPr>
+            <a:spLocks noGrp="1"/>
+          </p:cNvSpPr>
+          <p:nvPr>
+            <p:ph idx="1"/>
+          </p:nvPr>
+        </p:nvSpPr>
+        <p:spPr/>
+        <p:txBody>
+          <a:bodyPr/>
+          <a:lstStyle/>
+          <a:p>
+            <a:r>
+              <a:rPr lang="ko-KR" altLang="en-US" dirty="0"/>
+              <a:t>데이터에는 단기 노이즈와 구조적 패턴이 공존</a:t>
+            </a:r>
+            <a:endParaRPr lang="en-US" altLang="ko-KR" dirty="0"/>
+          </a:p>
+          <a:p>
+            <a:r>
+              <a:rPr lang="ko-KR" altLang="en-US" dirty="0"/>
+              <a:t>이상치는 오류일 수도 있고</a:t>
             </a:r>
             <a:r>
               <a:rPr lang="en-US" altLang="ko-KR" dirty="0"/>
-              <a:t>&amp; </a:t>
-            </a:r>
-            <a:r>
-              <a:rPr lang="ko-KR" altLang="en-US" dirty="0"/>
-              <a:t>판단</a:t>
+              <a:t>, </a:t>
+            </a:r>
+            <a:r>
+              <a:rPr lang="ko-KR" altLang="en-US" dirty="0"/>
+              <a:t>중요한 신호일 수도 있다</a:t>
+            </a:r>
+            <a:endParaRPr lang="en-US" altLang="ko-KR" dirty="0"/>
+          </a:p>
+          <a:p>
+            <a:r>
+              <a:rPr lang="ko-KR" altLang="en-US" dirty="0"/>
+              <a:t>데이터 분포는 균일하지 않으며</a:t>
+            </a:r>
+            <a:r>
+              <a:rPr lang="en-US" altLang="ko-KR" dirty="0"/>
+              <a:t>, </a:t>
+            </a:r>
+            <a:r>
+              <a:rPr lang="ko-KR" altLang="en-US" dirty="0"/>
+              <a:t>조건에 따라 성격이 달라진다</a:t>
+            </a:r>
+            <a:r>
+              <a:rPr lang="en-US" altLang="ko-KR" dirty="0"/>
+              <a:t>.</a:t>
+            </a:r>
+          </a:p>
+          <a:p>
+            <a:r>
+              <a:rPr lang="ko-KR" altLang="en-US" dirty="0"/>
+              <a:t>시간 정보는 분석에서 매우 중요한 역할을 한다</a:t>
             </a:r>
           </a:p>
         </p:txBody>
@@ -7604,7 +7750,7 @@
     </p:spTree>
     <p:extLst>
       <p:ext uri="{BB962C8B-B14F-4D97-AF65-F5344CB8AC3E}">
-        <p14:creationId xmlns:p14="http://schemas.microsoft.com/office/powerpoint/2010/main" val="4170000782"/>
+        <p14:creationId xmlns:p14="http://schemas.microsoft.com/office/powerpoint/2010/main" val="1169546370"/>
       </p:ext>
     </p:extLst>
   </p:cSld>
@@ -7636,7 +7782,7 @@
           <p:cNvPr id="2" name="제목 1">
             <a:extLst>
               <a:ext uri="{FF2B5EF4-FFF2-40B4-BE49-F238E27FC236}">
-                <a16:creationId xmlns:a16="http://schemas.microsoft.com/office/drawing/2014/main" id="{016FDFA2-AD98-96A1-399D-76D7EB4E0851}"/>
+                <a16:creationId xmlns:a16="http://schemas.microsoft.com/office/drawing/2014/main" id="{E8794263-D171-2BBD-ECBC-95B081DBDF52}"/>
               </a:ext>
             </a:extLst>
           </p:cNvPr>
@@ -7654,11 +7800,11 @@
           <a:p>
             <a:r>
               <a:rPr lang="en-US" altLang="ko-KR" dirty="0"/>
-              <a:t>EDA</a:t>
-            </a:r>
-            <a:r>
-              <a:rPr lang="ko-KR" altLang="en-US" dirty="0"/>
-              <a:t>를 통해 알게 된 사실들</a:t>
+              <a:t>EDA </a:t>
+            </a:r>
+            <a:r>
+              <a:rPr lang="ko-KR" altLang="en-US" dirty="0"/>
+              <a:t>결과가 주는 시사점</a:t>
             </a:r>
           </a:p>
         </p:txBody>
@@ -7668,7 +7814,7 @@
           <p:cNvPr id="3" name="내용 개체 틀 2">
             <a:extLst>
               <a:ext uri="{FF2B5EF4-FFF2-40B4-BE49-F238E27FC236}">
-                <a16:creationId xmlns:a16="http://schemas.microsoft.com/office/drawing/2014/main" id="{D29C8922-9641-3723-B6B2-31E1F5474BDE}"/>
+                <a16:creationId xmlns:a16="http://schemas.microsoft.com/office/drawing/2014/main" id="{E69DC83A-2B8F-7A7F-C081-F0C56DC96E00}"/>
               </a:ext>
             </a:extLst>
           </p:cNvPr>
@@ -7686,55 +7832,51 @@
           <a:p>
             <a:r>
               <a:rPr lang="ko-KR" altLang="en-US" dirty="0"/>
-              <a:t>데이터에는 단기 노이즈와 구조적 패턴이 공존</a:t>
+              <a:t>단순한 평균 기반 모델은 데이터를 충분히 설명하기 어렵다</a:t>
             </a:r>
             <a:endParaRPr lang="en-US" altLang="ko-KR" dirty="0"/>
           </a:p>
           <a:p>
             <a:r>
               <a:rPr lang="ko-KR" altLang="en-US" dirty="0"/>
-              <a:t>이상치는 오류일 수도 있고</a:t>
-            </a:r>
+              <a:t>시간 흐름을 고려하지 않으면 잘못된 결론에 도달할 수 있다</a:t>
+            </a:r>
+            <a:endParaRPr lang="en-US" altLang="ko-KR" dirty="0"/>
+          </a:p>
+          <a:p>
+            <a:r>
+              <a:rPr lang="ko-KR" altLang="en-US" dirty="0"/>
+              <a:t>모델링 이전에 데이터에 대한 이해가 선행되어야 한다</a:t>
+            </a:r>
+            <a:endParaRPr lang="en-US" altLang="ko-KR" dirty="0"/>
+          </a:p>
+          <a:p>
+            <a:endParaRPr lang="en-US" altLang="ko-KR" dirty="0"/>
+          </a:p>
+          <a:p>
+            <a:pPr marL="0" indent="0">
+              <a:buNone/>
+            </a:pPr>
             <a:r>
               <a:rPr lang="en-US" altLang="ko-KR" dirty="0"/>
-              <a:t>, </a:t>
-            </a:r>
-            <a:r>
-              <a:rPr lang="ko-KR" altLang="en-US" dirty="0"/>
-              <a:t>중요한 신호일 수도 있다</a:t>
-            </a:r>
-            <a:endParaRPr lang="en-US" altLang="ko-KR" dirty="0"/>
-          </a:p>
-          <a:p>
-            <a:r>
-              <a:rPr lang="ko-KR" altLang="en-US" dirty="0"/>
-              <a:t>데이터 분포는 균일하지 않으며</a:t>
-            </a:r>
-            <a:r>
-              <a:rPr lang="en-US" altLang="ko-KR" dirty="0"/>
-              <a:t>, </a:t>
-            </a:r>
-            <a:r>
-              <a:rPr lang="ko-KR" altLang="en-US" dirty="0"/>
-              <a:t>조건에 따라 성격이 달라진다</a:t>
-            </a:r>
-            <a:r>
-              <a:rPr lang="en-US" altLang="ko-KR" dirty="0"/>
-              <a:t>.</a:t>
-            </a:r>
-          </a:p>
-          <a:p>
-            <a:r>
-              <a:rPr lang="ko-KR" altLang="en-US" dirty="0"/>
-              <a:t>시간 정보는 분석에서 매우 중요한 역할을 한다</a:t>
-            </a:r>
+              <a:t>=</a:t>
+            </a:r>
+            <a:r>
+              <a:rPr lang="en-US" altLang="ko-KR" sz="3200" dirty="0"/>
+              <a:t>&gt; EDA</a:t>
+            </a:r>
+            <a:r>
+              <a:rPr lang="ko-KR" altLang="en-US" sz="3200" dirty="0"/>
+              <a:t>는 모델링의 방향을 결정하는 과정</a:t>
+            </a:r>
+            <a:endParaRPr lang="ko-KR" altLang="en-US" dirty="0"/>
           </a:p>
         </p:txBody>
       </p:sp>
     </p:spTree>
     <p:extLst>
       <p:ext uri="{BB962C8B-B14F-4D97-AF65-F5344CB8AC3E}">
-        <p14:creationId xmlns:p14="http://schemas.microsoft.com/office/powerpoint/2010/main" val="1169546370"/>
+        <p14:creationId xmlns:p14="http://schemas.microsoft.com/office/powerpoint/2010/main" val="1723256404"/>
       </p:ext>
     </p:extLst>
   </p:cSld>
@@ -7766,7 +7908,7 @@
           <p:cNvPr id="2" name="제목 1">
             <a:extLst>
               <a:ext uri="{FF2B5EF4-FFF2-40B4-BE49-F238E27FC236}">
-                <a16:creationId xmlns:a16="http://schemas.microsoft.com/office/drawing/2014/main" id="{E8794263-D171-2BBD-ECBC-95B081DBDF52}"/>
+                <a16:creationId xmlns:a16="http://schemas.microsoft.com/office/drawing/2014/main" id="{B4DBC066-664B-B084-68E8-3D9096316DCB}"/>
               </a:ext>
             </a:extLst>
           </p:cNvPr>
@@ -7783,84 +7925,16 @@
           <a:lstStyle/>
           <a:p>
             <a:r>
-              <a:rPr lang="en-US" altLang="ko-KR" dirty="0"/>
-              <a:t>EDA </a:t>
-            </a:r>
-            <a:r>
-              <a:rPr lang="ko-KR" altLang="en-US" dirty="0"/>
-              <a:t>결과가 주는 시사점</a:t>
-            </a:r>
-          </a:p>
-        </p:txBody>
-      </p:sp>
-      <p:sp>
-        <p:nvSpPr>
-          <p:cNvPr id="3" name="내용 개체 틀 2">
-            <a:extLst>
-              <a:ext uri="{FF2B5EF4-FFF2-40B4-BE49-F238E27FC236}">
-                <a16:creationId xmlns:a16="http://schemas.microsoft.com/office/drawing/2014/main" id="{E69DC83A-2B8F-7A7F-C081-F0C56DC96E00}"/>
-              </a:ext>
-            </a:extLst>
-          </p:cNvPr>
-          <p:cNvSpPr>
-            <a:spLocks noGrp="1"/>
-          </p:cNvSpPr>
-          <p:nvPr>
-            <p:ph idx="1"/>
-          </p:nvPr>
-        </p:nvSpPr>
-        <p:spPr/>
-        <p:txBody>
-          <a:bodyPr/>
-          <a:lstStyle/>
-          <a:p>
-            <a:r>
-              <a:rPr lang="ko-KR" altLang="en-US" dirty="0"/>
-              <a:t>단순한 평균 기반 모델은 데이터를 충분히 설명하기 어렵다</a:t>
-            </a:r>
-            <a:endParaRPr lang="en-US" altLang="ko-KR" dirty="0"/>
-          </a:p>
-          <a:p>
-            <a:r>
-              <a:rPr lang="ko-KR" altLang="en-US" dirty="0"/>
-              <a:t>시간 흐름을 고려하지 않으면 잘못된 결론에 도달할 수 있다</a:t>
-            </a:r>
-            <a:endParaRPr lang="en-US" altLang="ko-KR" dirty="0"/>
-          </a:p>
-          <a:p>
-            <a:r>
-              <a:rPr lang="ko-KR" altLang="en-US" dirty="0"/>
-              <a:t>모델링 이전에 데이터에 대한 이해가 선행되어야 한다</a:t>
-            </a:r>
-            <a:endParaRPr lang="en-US" altLang="ko-KR" dirty="0"/>
-          </a:p>
-          <a:p>
-            <a:endParaRPr lang="en-US" altLang="ko-KR" dirty="0"/>
-          </a:p>
-          <a:p>
-            <a:pPr marL="0" indent="0">
-              <a:buNone/>
-            </a:pPr>
-            <a:r>
-              <a:rPr lang="en-US" altLang="ko-KR" dirty="0"/>
-              <a:t>=</a:t>
-            </a:r>
-            <a:r>
-              <a:rPr lang="en-US" altLang="ko-KR" sz="3200" dirty="0"/>
-              <a:t>&gt; EDA</a:t>
-            </a:r>
-            <a:r>
-              <a:rPr lang="ko-KR" altLang="en-US" sz="3200" dirty="0"/>
-              <a:t>는 모델링의 방향을 결정하는 과정</a:t>
-            </a:r>
-            <a:endParaRPr lang="ko-KR" altLang="en-US" dirty="0"/>
+              <a:rPr lang="ko-KR" altLang="en-US" dirty="0"/>
+              <a:t>재생에너지와 시계열 분석</a:t>
+            </a:r>
           </a:p>
         </p:txBody>
       </p:sp>
     </p:spTree>
     <p:extLst>
       <p:ext uri="{BB962C8B-B14F-4D97-AF65-F5344CB8AC3E}">
-        <p14:creationId xmlns:p14="http://schemas.microsoft.com/office/powerpoint/2010/main" val="1723256404"/>
+        <p14:creationId xmlns:p14="http://schemas.microsoft.com/office/powerpoint/2010/main" val="1249203898"/>
       </p:ext>
     </p:extLst>
   </p:cSld>
@@ -7892,7 +7966,7 @@
           <p:cNvPr id="2" name="제목 1">
             <a:extLst>
               <a:ext uri="{FF2B5EF4-FFF2-40B4-BE49-F238E27FC236}">
-                <a16:creationId xmlns:a16="http://schemas.microsoft.com/office/drawing/2014/main" id="{B4DBC066-664B-B084-68E8-3D9096316DCB}"/>
+                <a16:creationId xmlns:a16="http://schemas.microsoft.com/office/drawing/2014/main" id="{104E8AFF-EF04-8D6E-873F-10932127B745}"/>
               </a:ext>
             </a:extLst>
           </p:cNvPr>
@@ -7910,7 +7984,67 @@
           <a:p>
             <a:r>
               <a:rPr lang="ko-KR" altLang="en-US" dirty="0"/>
-              <a:t>재생에너지와 시계열 분석</a:t>
+              <a:t>왜 시계열 데이터인가</a:t>
+            </a:r>
+          </a:p>
+        </p:txBody>
+      </p:sp>
+      <p:sp>
+        <p:nvSpPr>
+          <p:cNvPr id="3" name="내용 개체 틀 2">
+            <a:extLst>
+              <a:ext uri="{FF2B5EF4-FFF2-40B4-BE49-F238E27FC236}">
+                <a16:creationId xmlns:a16="http://schemas.microsoft.com/office/drawing/2014/main" id="{607CFD22-7F31-2E89-1B1A-4762A6B22468}"/>
+              </a:ext>
+            </a:extLst>
+          </p:cNvPr>
+          <p:cNvSpPr>
+            <a:spLocks noGrp="1"/>
+          </p:cNvSpPr>
+          <p:nvPr>
+            <p:ph idx="1"/>
+          </p:nvPr>
+        </p:nvSpPr>
+        <p:spPr/>
+        <p:txBody>
+          <a:bodyPr/>
+          <a:lstStyle/>
+          <a:p>
+            <a:r>
+              <a:rPr lang="ko-KR" altLang="en-US" dirty="0"/>
+              <a:t>재생에너지 데이터는 관측된 순서 자체가 의미를 가짐</a:t>
+            </a:r>
+            <a:endParaRPr lang="en-US" altLang="ko-KR" dirty="0"/>
+          </a:p>
+          <a:p>
+            <a:r>
+              <a:rPr lang="ko-KR" altLang="en-US" dirty="0"/>
+              <a:t>현재의 발전량은 직전 시간의 상태와 강하게 연결됨</a:t>
+            </a:r>
+            <a:endParaRPr lang="en-US" altLang="ko-KR" dirty="0"/>
+          </a:p>
+          <a:p>
+            <a:r>
+              <a:rPr lang="ko-KR" altLang="en-US" dirty="0"/>
+              <a:t>동일한 값이라도 언제 발생했는지에 따라 해석이 달라진다</a:t>
+            </a:r>
+            <a:endParaRPr lang="en-US" altLang="ko-KR" dirty="0"/>
+          </a:p>
+          <a:p>
+            <a:pPr marL="0" indent="0">
+              <a:buNone/>
+            </a:pPr>
+            <a:r>
+              <a:rPr lang="en-US" altLang="ko-KR" dirty="0"/>
+              <a:t>=&gt;</a:t>
+            </a:r>
+            <a:r>
+              <a:rPr lang="ko-KR" altLang="en-US" dirty="0"/>
+              <a:t> 시계열 데이터에서 시간은 단순한 인덱스가 아니라 중요한 설명 변수</a:t>
+            </a:r>
+            <a:r>
+              <a:rPr lang="en-US" altLang="ko-KR" dirty="0"/>
+              <a:t>!</a:t>
             </a:r>
           </a:p>
         </p:txBody>
@@ -7918,7 +8052,7 @@
     </p:spTree>
     <p:extLst>
       <p:ext uri="{BB962C8B-B14F-4D97-AF65-F5344CB8AC3E}">
-        <p14:creationId xmlns:p14="http://schemas.microsoft.com/office/powerpoint/2010/main" val="1249203898"/>
+        <p14:creationId xmlns:p14="http://schemas.microsoft.com/office/powerpoint/2010/main" val="507116562"/>
       </p:ext>
     </p:extLst>
   </p:cSld>
@@ -7950,7 +8084,7 @@
           <p:cNvPr id="2" name="제목 1">
             <a:extLst>
               <a:ext uri="{FF2B5EF4-FFF2-40B4-BE49-F238E27FC236}">
-                <a16:creationId xmlns:a16="http://schemas.microsoft.com/office/drawing/2014/main" id="{104E8AFF-EF04-8D6E-873F-10932127B745}"/>
+                <a16:creationId xmlns:a16="http://schemas.microsoft.com/office/drawing/2014/main" id="{2F8C8149-CF0F-6251-7D4B-BD804CC22E2F}"/>
               </a:ext>
             </a:extLst>
           </p:cNvPr>
@@ -7968,7 +8102,7 @@
           <a:p>
             <a:r>
               <a:rPr lang="ko-KR" altLang="en-US" dirty="0"/>
-              <a:t>왜 시계열 데이터인가</a:t>
+              <a:t>시간을 무시하면 생기는 문제</a:t>
             </a:r>
           </a:p>
         </p:txBody>
@@ -7978,7 +8112,7 @@
           <p:cNvPr id="3" name="내용 개체 틀 2">
             <a:extLst>
               <a:ext uri="{FF2B5EF4-FFF2-40B4-BE49-F238E27FC236}">
-                <a16:creationId xmlns:a16="http://schemas.microsoft.com/office/drawing/2014/main" id="{607CFD22-7F31-2E89-1B1A-4762A6B22468}"/>
+                <a16:creationId xmlns:a16="http://schemas.microsoft.com/office/drawing/2014/main" id="{8A0D96D7-A82D-E3E3-7099-288E25562E5C}"/>
               </a:ext>
             </a:extLst>
           </p:cNvPr>
@@ -7996,29 +8130,30 @@
           <a:p>
             <a:r>
               <a:rPr lang="ko-KR" altLang="en-US" dirty="0"/>
-              <a:t>재생에너지 데이터는 관측된 순서 자체가 의미를 가짐</a:t>
+              <a:t>시계열 데이터를 일반적인 데이터처럼 무작위로 섞으면 정보의 구조가 붕괴된다</a:t>
             </a:r>
             <a:endParaRPr lang="en-US" altLang="ko-KR" dirty="0"/>
           </a:p>
           <a:p>
             <a:r>
               <a:rPr lang="ko-KR" altLang="en-US" dirty="0"/>
-              <a:t>과거의 값은 현재와 미래에 영향을 줌</a:t>
+              <a:t>미래 정보가 과거 학습에 섞이는 문제가 발생할 수 있다</a:t>
             </a:r>
             <a:endParaRPr lang="en-US" altLang="ko-KR" dirty="0"/>
           </a:p>
           <a:p>
             <a:r>
-              <a:rPr lang="ko-KR" altLang="en-US" dirty="0"/>
-              <a:t>데이터를 무작위로 섞는 것은 정보의 구조를 파괴하는 행위</a:t>
-            </a:r>
+              <a:rPr lang="ko-KR" altLang="en-US"/>
+              <a:t>이 경우 모델 성능은 실제보다 과대평가된다</a:t>
+            </a:r>
+            <a:endParaRPr lang="ko-KR" altLang="en-US" dirty="0"/>
           </a:p>
         </p:txBody>
       </p:sp>
     </p:spTree>
     <p:extLst>
       <p:ext uri="{BB962C8B-B14F-4D97-AF65-F5344CB8AC3E}">
-        <p14:creationId xmlns:p14="http://schemas.microsoft.com/office/powerpoint/2010/main" val="507116562"/>
+        <p14:creationId xmlns:p14="http://schemas.microsoft.com/office/powerpoint/2010/main" val="2144709883"/>
       </p:ext>
     </p:extLst>
   </p:cSld>
@@ -8050,7 +8185,7 @@
           <p:cNvPr id="2" name="제목 1">
             <a:extLst>
               <a:ext uri="{FF2B5EF4-FFF2-40B4-BE49-F238E27FC236}">
-                <a16:creationId xmlns:a16="http://schemas.microsoft.com/office/drawing/2014/main" id="{2F8C8149-CF0F-6251-7D4B-BD804CC22E2F}"/>
+                <a16:creationId xmlns:a16="http://schemas.microsoft.com/office/drawing/2014/main" id="{A5F3F6A0-819D-9EBC-36E0-8E5E4B1CD10B}"/>
               </a:ext>
             </a:extLst>
           </p:cNvPr>
@@ -8068,7 +8203,7 @@
           <a:p>
             <a:r>
               <a:rPr lang="ko-KR" altLang="en-US" dirty="0"/>
-              <a:t>시간을 무시하면 생기는 문제</a:t>
+              <a:t>시계열 분석</a:t>
             </a:r>
           </a:p>
         </p:txBody>
@@ -8078,7 +8213,7 @@
           <p:cNvPr id="3" name="내용 개체 틀 2">
             <a:extLst>
               <a:ext uri="{FF2B5EF4-FFF2-40B4-BE49-F238E27FC236}">
-                <a16:creationId xmlns:a16="http://schemas.microsoft.com/office/drawing/2014/main" id="{8A0D96D7-A82D-E3E3-7099-288E25562E5C}"/>
+                <a16:creationId xmlns:a16="http://schemas.microsoft.com/office/drawing/2014/main" id="{F0C304C6-C097-2825-2847-F1466E97C17B}"/>
               </a:ext>
             </a:extLst>
           </p:cNvPr>
@@ -8095,22 +8230,146 @@
           <a:lstStyle/>
           <a:p>
             <a:r>
-              <a:rPr lang="ko-KR" altLang="en-US" dirty="0"/>
-              <a:t>시계열 데이터를 일반적인 데이터처럼 무작위로 섞으면 정보의 구조가 붕괴된다</a:t>
+              <a:rPr lang="en-US" altLang="ko-KR" dirty="0"/>
+              <a:t>EDA</a:t>
+            </a:r>
+            <a:r>
+              <a:rPr lang="ko-KR" altLang="en-US" dirty="0"/>
+              <a:t>를 통해 데이터의 분포</a:t>
+            </a:r>
+            <a:r>
+              <a:rPr lang="en-US" altLang="ko-KR" dirty="0"/>
+              <a:t>, </a:t>
+            </a:r>
+            <a:r>
+              <a:rPr lang="ko-KR" altLang="en-US" dirty="0"/>
+              <a:t>이상치 </a:t>
+            </a:r>
+            <a:r>
+              <a:rPr lang="en-US" altLang="ko-KR" dirty="0"/>
+              <a:t>, </a:t>
+            </a:r>
+            <a:r>
+              <a:rPr lang="ko-KR" altLang="en-US" dirty="0"/>
+              <a:t>관계 등을 파악했다면</a:t>
+            </a:r>
+            <a:r>
+              <a:rPr lang="en-US" altLang="ko-KR" dirty="0"/>
+              <a:t>,</a:t>
+            </a:r>
+            <a:br>
+              <a:rPr lang="en-US" altLang="ko-KR" dirty="0"/>
+            </a:br>
+            <a:r>
+              <a:rPr lang="en-US" altLang="ko-KR" dirty="0"/>
+              <a:t>“</a:t>
+            </a:r>
+            <a:r>
+              <a:rPr lang="ko-KR" altLang="en-US" dirty="0"/>
+              <a:t>왜 이런 패턴이 나타났는가</a:t>
+            </a:r>
+            <a:r>
+              <a:rPr lang="en-US" altLang="ko-KR" dirty="0"/>
+              <a:t>?” -&gt;”</a:t>
+            </a:r>
+            <a:r>
+              <a:rPr lang="ko-KR" altLang="en-US" dirty="0"/>
+              <a:t>앞으로 어떻게 될 것인가</a:t>
+            </a:r>
+            <a:r>
+              <a:rPr lang="en-US" altLang="ko-KR" dirty="0"/>
+              <a:t>?” </a:t>
+            </a:r>
+            <a:r>
+              <a:rPr lang="ko-KR" altLang="en-US" dirty="0"/>
+              <a:t>로 질문 변경</a:t>
             </a:r>
             <a:endParaRPr lang="en-US" altLang="ko-KR" dirty="0"/>
           </a:p>
           <a:p>
             <a:r>
               <a:rPr lang="ko-KR" altLang="en-US" dirty="0"/>
-              <a:t>미래 정보가 과거 학습에 섞이는 문제가 발생할 수 있다</a:t>
+              <a:t>시계열 분석은 예측을 위해서도 필요</a:t>
             </a:r>
             <a:endParaRPr lang="en-US" altLang="ko-KR" dirty="0"/>
           </a:p>
           <a:p>
             <a:r>
-              <a:rPr lang="ko-KR" altLang="en-US"/>
-              <a:t>이 경우 모델 성능은 실제보다 과대평가된다</a:t>
+              <a:rPr lang="ko-KR" altLang="en-US" dirty="0"/>
+              <a:t>추가 분석 지표 </a:t>
+            </a:r>
+            <a:r>
+              <a:rPr lang="en-US" altLang="ko-KR" dirty="0"/>
+              <a:t>(</a:t>
+            </a:r>
+            <a:r>
+              <a:rPr lang="ko-KR" altLang="en-US" dirty="0"/>
+              <a:t>이후 진도</a:t>
+            </a:r>
+            <a:r>
+              <a:rPr lang="en-US" altLang="ko-KR"/>
+              <a:t>)</a:t>
+            </a:r>
+            <a:endParaRPr lang="en-US" altLang="ko-KR" dirty="0"/>
+          </a:p>
+          <a:p>
+            <a:pPr lvl="1"/>
+            <a:r>
+              <a:rPr lang="ko-KR" altLang="en-US" dirty="0"/>
+              <a:t>과거 값의 영향 </a:t>
+            </a:r>
+            <a:r>
+              <a:rPr lang="en-US" altLang="ko-KR" dirty="0"/>
+              <a:t>(Lag)</a:t>
+            </a:r>
+          </a:p>
+          <a:p>
+            <a:pPr lvl="1"/>
+            <a:r>
+              <a:rPr lang="ko-KR" altLang="en-US" dirty="0"/>
+              <a:t>일정 구간의 평균과 변화 </a:t>
+            </a:r>
+            <a:r>
+              <a:rPr lang="en-US" altLang="ko-KR" dirty="0"/>
+              <a:t>(Rolling)</a:t>
+            </a:r>
+          </a:p>
+          <a:p>
+            <a:pPr lvl="1"/>
+            <a:r>
+              <a:rPr lang="ko-KR" altLang="en-US" dirty="0"/>
+              <a:t>반복되는 패턴 </a:t>
+            </a:r>
+            <a:r>
+              <a:rPr lang="en-US" altLang="ko-KR" dirty="0"/>
+              <a:t>(</a:t>
+            </a:r>
+            <a:r>
+              <a:rPr lang="ko-KR" altLang="en-US" dirty="0"/>
+              <a:t>주기성</a:t>
+            </a:r>
+            <a:r>
+              <a:rPr lang="en-US" altLang="ko-KR" dirty="0"/>
+              <a:t>)</a:t>
+            </a:r>
+          </a:p>
+          <a:p>
+            <a:pPr lvl="1"/>
+            <a:r>
+              <a:rPr lang="ko-KR" altLang="en-US" dirty="0"/>
+              <a:t>장기적인 변화 흐름 </a:t>
+            </a:r>
+            <a:r>
+              <a:rPr lang="en-US" altLang="ko-KR" dirty="0"/>
+              <a:t>(</a:t>
+            </a:r>
+            <a:r>
+              <a:rPr lang="ko-KR" altLang="en-US" dirty="0"/>
+              <a:t>추세</a:t>
+            </a:r>
+            <a:r>
+              <a:rPr lang="en-US" altLang="ko-KR" dirty="0"/>
+              <a:t>)</a:t>
             </a:r>
             <a:endParaRPr lang="ko-KR" altLang="en-US" dirty="0"/>
           </a:p>
@@ -8119,7 +8378,7 @@
     </p:spTree>
     <p:extLst>
       <p:ext uri="{BB962C8B-B14F-4D97-AF65-F5344CB8AC3E}">
-        <p14:creationId xmlns:p14="http://schemas.microsoft.com/office/powerpoint/2010/main" val="2144709883"/>
+        <p14:creationId xmlns:p14="http://schemas.microsoft.com/office/powerpoint/2010/main" val="49888182"/>
       </p:ext>
     </p:extLst>
   </p:cSld>
@@ -8755,7 +9014,7 @@
           <a:p>
             <a:fld id="{0F78D9C4-20C1-4B15-A116-16DC77AD9A1E}" type="datetime1">
               <a:rPr lang="ko-KR" altLang="en-US" smtClean="0"/>
-              <a:t>2026-01-16</a:t>
+              <a:t>2026-01-19</a:t>
             </a:fld>
             <a:endParaRPr lang="ko-KR" altLang="en-US"/>
           </a:p>
@@ -11739,7 +11998,13 @@
   <p:cSld>
     <p:spTree>
       <p:nvGrpSpPr>
-        <p:cNvPr id="1" name=""/>
+        <p:cNvPr id="1" name="">
+          <a:extLst>
+            <a:ext uri="{FF2B5EF4-FFF2-40B4-BE49-F238E27FC236}">
+              <a16:creationId xmlns:a16="http://schemas.microsoft.com/office/drawing/2014/main" id="{0E884210-0FCF-0519-0199-6DE16CB0CE6A}"/>
+            </a:ext>
+          </a:extLst>
+        </p:cNvPr>
         <p:cNvGrpSpPr/>
         <p:nvPr/>
       </p:nvGrpSpPr>
@@ -11753,175 +12018,10 @@
       </p:grpSpPr>
       <p:sp>
         <p:nvSpPr>
-          <p:cNvPr id="3" name="내용 개체 틀 2">
-            <a:extLst>
-              <a:ext uri="{FF2B5EF4-FFF2-40B4-BE49-F238E27FC236}">
-                <a16:creationId xmlns:a16="http://schemas.microsoft.com/office/drawing/2014/main" id="{31C931B4-5069-4FA2-8002-208CA004C73C}"/>
-              </a:ext>
-            </a:extLst>
-          </p:cNvPr>
-          <p:cNvSpPr>
-            <a:spLocks noGrp="1"/>
-          </p:cNvSpPr>
-          <p:nvPr>
-            <p:ph idx="1"/>
-          </p:nvPr>
-        </p:nvSpPr>
-        <p:spPr>
-          <a:xfrm>
-            <a:off x="200677" y="1034249"/>
-            <a:ext cx="11525250" cy="1754218"/>
-          </a:xfrm>
-        </p:spPr>
-        <p:txBody>
-          <a:bodyPr>
-            <a:normAutofit/>
-          </a:bodyPr>
-          <a:lstStyle/>
-          <a:p>
-            <a:pPr marL="0" indent="0">
-              <a:lnSpc>
-                <a:spcPct val="150000"/>
-              </a:lnSpc>
-              <a:buNone/>
-            </a:pPr>
-            <a:r>
-              <a:rPr lang="ko-KR" altLang="en-US" sz="2400" b="1" dirty="0">
-                <a:latin typeface="+mn-ea"/>
-              </a:rPr>
-              <a:t>💡 이진화</a:t>
-            </a:r>
-            <a:r>
-              <a:rPr lang="en-US" altLang="ko-KR" sz="2400" b="1" dirty="0">
-                <a:latin typeface="+mn-ea"/>
-              </a:rPr>
-              <a:t>(Binarization)</a:t>
-            </a:r>
-          </a:p>
-          <a:p>
-            <a:pPr lvl="1">
-              <a:lnSpc>
-                <a:spcPct val="150000"/>
-              </a:lnSpc>
-            </a:pPr>
-            <a:r>
-              <a:rPr lang="ko-KR" altLang="en-US" sz="2000" dirty="0">
-                <a:latin typeface="+mn-ea"/>
-              </a:rPr>
-              <a:t>정의 </a:t>
-            </a:r>
-            <a:r>
-              <a:rPr lang="en-US" altLang="ko-KR" sz="2000" dirty="0">
-                <a:latin typeface="+mn-ea"/>
-              </a:rPr>
-              <a:t>: </a:t>
-            </a:r>
-            <a:r>
-              <a:rPr lang="ko-KR" altLang="en-US" sz="2000" dirty="0">
-                <a:latin typeface="+mn-ea"/>
-              </a:rPr>
-              <a:t>특정 값을 기준으로 </a:t>
-            </a:r>
-            <a:r>
-              <a:rPr lang="ko-KR" altLang="en-US" sz="2000" dirty="0"/>
-              <a:t>픽셀 값을 </a:t>
-            </a:r>
-            <a:r>
-              <a:rPr lang="en-US" altLang="ko-KR" sz="2000" dirty="0"/>
-              <a:t>0(</a:t>
-            </a:r>
-            <a:r>
-              <a:rPr lang="ko-KR" altLang="en-US" sz="2000" dirty="0"/>
-              <a:t>검정</a:t>
-            </a:r>
-            <a:r>
-              <a:rPr lang="en-US" altLang="ko-KR" sz="2000" dirty="0"/>
-              <a:t>) </a:t>
-            </a:r>
-            <a:r>
-              <a:rPr lang="ko-KR" altLang="en-US" sz="2000" dirty="0"/>
-              <a:t>또는 </a:t>
-            </a:r>
-            <a:r>
-              <a:rPr lang="en-US" altLang="ko-KR" sz="2000" dirty="0"/>
-              <a:t>255(</a:t>
-            </a:r>
-            <a:r>
-              <a:rPr lang="ko-KR" altLang="en-US" sz="2000" dirty="0"/>
-              <a:t>흰색</a:t>
-            </a:r>
-            <a:r>
-              <a:rPr lang="en-US" altLang="ko-KR" sz="2000" dirty="0"/>
-              <a:t>)</a:t>
-            </a:r>
-            <a:r>
-              <a:rPr lang="ko-KR" altLang="en-US" sz="2000" dirty="0"/>
-              <a:t>로 나누는 것</a:t>
-            </a:r>
-            <a:endParaRPr lang="en-US" altLang="ko-KR" sz="2000" dirty="0">
-              <a:latin typeface="+mn-ea"/>
-            </a:endParaRPr>
-          </a:p>
-          <a:p>
-            <a:pPr lvl="1">
-              <a:lnSpc>
-                <a:spcPct val="150000"/>
-              </a:lnSpc>
-            </a:pPr>
-            <a:r>
-              <a:rPr lang="ko-KR" altLang="en-US" sz="2000" dirty="0">
-                <a:latin typeface="+mn-ea"/>
-              </a:rPr>
-              <a:t>목적 </a:t>
-            </a:r>
-            <a:r>
-              <a:rPr lang="en-US" altLang="ko-KR" sz="2000" dirty="0">
-                <a:latin typeface="+mn-ea"/>
-              </a:rPr>
-              <a:t>: </a:t>
-            </a:r>
-            <a:r>
-              <a:rPr lang="ko-KR" altLang="en-US" sz="2000" dirty="0">
-                <a:latin typeface="+mn-ea"/>
-              </a:rPr>
-              <a:t>이미지에서 </a:t>
-            </a:r>
-            <a:r>
-              <a:rPr lang="ko-KR" altLang="en-US" sz="2000" b="1" dirty="0">
-                <a:latin typeface="+mn-ea"/>
-              </a:rPr>
-              <a:t>특정 관심 영역을 분리</a:t>
-            </a:r>
-            <a:r>
-              <a:rPr lang="ko-KR" altLang="en-US" sz="2000" dirty="0">
-                <a:latin typeface="+mn-ea"/>
-              </a:rPr>
-              <a:t>하거나 </a:t>
-            </a:r>
-            <a:r>
-              <a:rPr lang="ko-KR" altLang="en-US" sz="2000" b="1" dirty="0">
-                <a:latin typeface="+mn-ea"/>
-              </a:rPr>
-              <a:t>분석을 간소화</a:t>
-            </a:r>
-            <a:r>
-              <a:rPr lang="ko-KR" altLang="en-US" sz="2000" dirty="0">
-                <a:latin typeface="+mn-ea"/>
-              </a:rPr>
-              <a:t>하기 위해 사용</a:t>
-            </a:r>
-            <a:endParaRPr lang="en-US" altLang="ko-KR" sz="2000" dirty="0">
-              <a:latin typeface="+mn-ea"/>
-            </a:endParaRPr>
-          </a:p>
-        </p:txBody>
-      </p:sp>
-      <p:sp>
-        <p:nvSpPr>
           <p:cNvPr id="4" name="날짜 개체 틀 3">
             <a:extLst>
               <a:ext uri="{FF2B5EF4-FFF2-40B4-BE49-F238E27FC236}">
-                <a16:creationId xmlns:a16="http://schemas.microsoft.com/office/drawing/2014/main" id="{405AF72C-B533-4FF9-A130-F648316E13FF}"/>
+                <a16:creationId xmlns:a16="http://schemas.microsoft.com/office/drawing/2014/main" id="{09220B9B-DFC5-B524-3769-282738713703}"/>
               </a:ext>
             </a:extLst>
           </p:cNvPr>
@@ -11939,7 +12039,7 @@
           <a:p>
             <a:fld id="{0F78D9C4-20C1-4B15-A116-16DC77AD9A1E}" type="datetime1">
               <a:rPr lang="ko-KR" altLang="en-US" smtClean="0"/>
-              <a:t>2026-01-16</a:t>
+              <a:t>2026-01-19</a:t>
             </a:fld>
             <a:endParaRPr lang="ko-KR" altLang="en-US"/>
           </a:p>
@@ -11950,7 +12050,7 @@
           <p:cNvPr id="5" name="슬라이드 번호 개체 틀 4">
             <a:extLst>
               <a:ext uri="{FF2B5EF4-FFF2-40B4-BE49-F238E27FC236}">
-                <a16:creationId xmlns:a16="http://schemas.microsoft.com/office/drawing/2014/main" id="{2390D65E-6BBD-40AD-9C36-8D87CA26A213}"/>
+                <a16:creationId xmlns:a16="http://schemas.microsoft.com/office/drawing/2014/main" id="{9F101E53-997C-C720-1947-13151A1087E1}"/>
               </a:ext>
             </a:extLst>
           </p:cNvPr>
@@ -11979,7 +12079,7 @@
           <p:cNvPr id="8" name="TextBox 7">
             <a:extLst>
               <a:ext uri="{FF2B5EF4-FFF2-40B4-BE49-F238E27FC236}">
-                <a16:creationId xmlns:a16="http://schemas.microsoft.com/office/drawing/2014/main" id="{4B35239C-430C-8C2D-AAD0-88BC7F559CB6}"/>
+                <a16:creationId xmlns:a16="http://schemas.microsoft.com/office/drawing/2014/main" id="{021EC865-3F10-1A8E-16ED-07FE1B5F3054}"/>
               </a:ext>
             </a:extLst>
           </p:cNvPr>
@@ -11989,7 +12089,7 @@
         <p:spPr>
           <a:xfrm>
             <a:off x="200677" y="110919"/>
-            <a:ext cx="1781257" cy="830997"/>
+            <a:ext cx="4314001" cy="830997"/>
           </a:xfrm>
           <a:prstGeom prst="rect">
             <a:avLst/>
@@ -12011,15 +12111,118 @@
                 <a:ea typeface="+mj-ea"/>
                 <a:cs typeface="Pretendard Black" panose="02000A03000000020004" pitchFamily="2" charset="-127"/>
               </a:rPr>
-              <a:t>이진화</a:t>
-            </a:r>
+              <a:t>이상치 기준 설정</a:t>
+            </a:r>
+          </a:p>
+        </p:txBody>
+      </p:sp>
+      <p:sp>
+        <p:nvSpPr>
+          <p:cNvPr id="9" name="내용 개체 틀 2">
+            <a:extLst>
+              <a:ext uri="{FF2B5EF4-FFF2-40B4-BE49-F238E27FC236}">
+                <a16:creationId xmlns:a16="http://schemas.microsoft.com/office/drawing/2014/main" id="{0D41BE3B-4289-8B93-2AF2-10704289D27B}"/>
+              </a:ext>
+            </a:extLst>
+          </p:cNvPr>
+          <p:cNvSpPr>
+            <a:spLocks noGrp="1"/>
+          </p:cNvSpPr>
+          <p:nvPr>
+            <p:ph idx="1"/>
+          </p:nvPr>
+        </p:nvSpPr>
+        <p:spPr>
+          <a:xfrm>
+            <a:off x="200677" y="1034249"/>
+            <a:ext cx="11296650" cy="5061751"/>
+          </a:xfrm>
+        </p:spPr>
+        <p:txBody>
+          <a:bodyPr>
+            <a:noAutofit/>
+          </a:bodyPr>
+          <a:lstStyle/>
+          <a:p>
+            <a:pPr marL="0" indent="0">
+              <a:lnSpc>
+                <a:spcPct val="150000"/>
+              </a:lnSpc>
+              <a:buNone/>
+            </a:pPr>
+            <a:r>
+              <a:rPr lang="ko-KR" altLang="en-US" sz="2400" b="1" dirty="0">
+                <a:latin typeface="+mn-ea"/>
+              </a:rPr>
+              <a:t>💡</a:t>
+            </a:r>
+            <a:r>
+              <a:rPr lang="en-US" altLang="ko-KR" sz="2400" b="1" dirty="0"/>
+              <a:t>Threshold</a:t>
+            </a:r>
+          </a:p>
+          <a:p>
+            <a:pPr lvl="1">
+              <a:lnSpc>
+                <a:spcPct val="150000"/>
+              </a:lnSpc>
+            </a:pPr>
+            <a:r>
+              <a:rPr lang="ko-KR" altLang="en-US" sz="2000" dirty="0"/>
+              <a:t>데이터 분석에서는 특정 </a:t>
+            </a:r>
+            <a:r>
+              <a:rPr lang="ko-KR" altLang="en-US" sz="2000" b="1" dirty="0" err="1"/>
+              <a:t>기준값</a:t>
+            </a:r>
+            <a:r>
+              <a:rPr lang="en-US" altLang="ko-KR" sz="2000" b="1" dirty="0"/>
+              <a:t>(threshold)</a:t>
+            </a:r>
+            <a:r>
+              <a:rPr lang="ko-KR" altLang="en-US" sz="2000" dirty="0"/>
+              <a:t>을 기준으로 데이터를 </a:t>
+            </a:r>
+            <a:r>
+              <a:rPr lang="ko-KR" altLang="en-US" sz="2000" b="1" dirty="0"/>
+              <a:t>정상 </a:t>
+            </a:r>
+            <a:r>
+              <a:rPr lang="en-US" altLang="ko-KR" sz="2000" b="1" dirty="0"/>
+              <a:t>/ </a:t>
+            </a:r>
+            <a:r>
+              <a:rPr lang="ko-KR" altLang="en-US" sz="2000" b="1" dirty="0"/>
+              <a:t>비정상으로 구분</a:t>
+            </a:r>
+            <a:endParaRPr lang="en-US" altLang="ko-KR" sz="2000" b="1" dirty="0"/>
+          </a:p>
+          <a:p>
+            <a:pPr lvl="1">
+              <a:lnSpc>
+                <a:spcPct val="150000"/>
+              </a:lnSpc>
+            </a:pPr>
+            <a:r>
+              <a:rPr lang="ko-KR" altLang="en-US" sz="2000" dirty="0"/>
+              <a:t>재생에너지 데이터에서는 물리적으로 불가능한 발전량이나</a:t>
+            </a:r>
+            <a:r>
+              <a:rPr lang="en-US" altLang="ko-KR" sz="2000" dirty="0"/>
+              <a:t>, </a:t>
+            </a:r>
+            <a:r>
+              <a:rPr lang="ko-KR" altLang="en-US" sz="2000" dirty="0"/>
+              <a:t>비정상적인 급락 구간을 탐지하는데 활용</a:t>
+            </a:r>
+            <a:endParaRPr lang="en-US" altLang="ko-KR" sz="2000" dirty="0"/>
           </a:p>
         </p:txBody>
       </p:sp>
     </p:spTree>
     <p:extLst>
       <p:ext uri="{BB962C8B-B14F-4D97-AF65-F5344CB8AC3E}">
-        <p14:creationId xmlns:p14="http://schemas.microsoft.com/office/powerpoint/2010/main" val="3697987627"/>
+        <p14:creationId xmlns:p14="http://schemas.microsoft.com/office/powerpoint/2010/main" val="3080129794"/>
       </p:ext>
     </p:extLst>
   </p:cSld>
